--- a/test_speed/汇报ppt_刘淩峰.pptx
+++ b/test_speed/汇报ppt_刘淩峰.pptx
@@ -8,7 +8,7 @@
     <p:notesMasterId r:id="rId4"/>
   </p:notesMasterIdLst>
   <p:handoutMasterIdLst>
-    <p:handoutMasterId r:id="rId32"/>
+    <p:handoutMasterId r:id="rId33"/>
   </p:handoutMasterIdLst>
   <p:sldIdLst>
     <p:sldId id="261" r:id="rId3"/>
@@ -20,30 +20,31 @@
     <p:sldId id="448" r:id="rId10"/>
     <p:sldId id="441" r:id="rId11"/>
     <p:sldId id="455" r:id="rId12"/>
-    <p:sldId id="444" r:id="rId13"/>
-    <p:sldId id="445" r:id="rId14"/>
-    <p:sldId id="440" r:id="rId15"/>
-    <p:sldId id="442" r:id="rId16"/>
-    <p:sldId id="446" r:id="rId17"/>
-    <p:sldId id="447" r:id="rId18"/>
-    <p:sldId id="449" r:id="rId19"/>
-    <p:sldId id="454" r:id="rId20"/>
-    <p:sldId id="434" r:id="rId21"/>
-    <p:sldId id="431" r:id="rId22"/>
-    <p:sldId id="426" r:id="rId23"/>
-    <p:sldId id="432" r:id="rId24"/>
-    <p:sldId id="427" r:id="rId25"/>
-    <p:sldId id="433" r:id="rId26"/>
-    <p:sldId id="435" r:id="rId27"/>
-    <p:sldId id="450" r:id="rId28"/>
-    <p:sldId id="451" r:id="rId29"/>
-    <p:sldId id="452" r:id="rId30"/>
-    <p:sldId id="371" r:id="rId31"/>
+    <p:sldId id="456" r:id="rId13"/>
+    <p:sldId id="444" r:id="rId14"/>
+    <p:sldId id="445" r:id="rId15"/>
+    <p:sldId id="440" r:id="rId16"/>
+    <p:sldId id="442" r:id="rId17"/>
+    <p:sldId id="446" r:id="rId18"/>
+    <p:sldId id="447" r:id="rId19"/>
+    <p:sldId id="449" r:id="rId20"/>
+    <p:sldId id="454" r:id="rId21"/>
+    <p:sldId id="434" r:id="rId22"/>
+    <p:sldId id="431" r:id="rId23"/>
+    <p:sldId id="426" r:id="rId24"/>
+    <p:sldId id="432" r:id="rId25"/>
+    <p:sldId id="427" r:id="rId26"/>
+    <p:sldId id="433" r:id="rId27"/>
+    <p:sldId id="435" r:id="rId28"/>
+    <p:sldId id="450" r:id="rId29"/>
+    <p:sldId id="451" r:id="rId30"/>
+    <p:sldId id="452" r:id="rId31"/>
+    <p:sldId id="371" r:id="rId32"/>
   </p:sldIdLst>
   <p:sldSz cx="12192000" cy="6858000"/>
   <p:notesSz cx="6858000" cy="9144000"/>
   <p:custDataLst>
-    <p:tags r:id="rId37"/>
+    <p:tags r:id="rId38"/>
   </p:custDataLst>
   <p:defaultTextStyle>
     <a:defPPr>
@@ -1524,6 +1525,130 @@
 </file>
 
 <file path=ppt/notesSlides/notesSlide16.xml><?xml version="1.0" encoding="utf-8"?>
+<p:notes xmlns:a="http://schemas.openxmlformats.org/drawingml/2006/main" xmlns:r="http://schemas.openxmlformats.org/officeDocument/2006/relationships" xmlns:p="http://schemas.openxmlformats.org/presentationml/2006/main">
+  <p:cSld>
+    <p:spTree>
+      <p:nvGrpSpPr>
+        <p:cNvPr id="1" name=""/>
+        <p:cNvGrpSpPr/>
+        <p:nvPr/>
+      </p:nvGrpSpPr>
+      <p:grpSpPr>
+        <a:xfrm>
+          <a:off x="0" y="0"/>
+          <a:ext cx="0" cy="0"/>
+          <a:chOff x="0" y="0"/>
+          <a:chExt cx="0" cy="0"/>
+        </a:xfrm>
+      </p:grpSpPr>
+      <p:sp>
+        <p:nvSpPr>
+          <p:cNvPr id="2" name="幻灯片图像占位符 1"/>
+          <p:cNvSpPr>
+            <a:spLocks noGrp="1" noRot="1" noChangeAspect="1"/>
+          </p:cNvSpPr>
+          <p:nvPr>
+            <p:ph type="sldImg"/>
+          </p:nvPr>
+        </p:nvSpPr>
+        <p:spPr/>
+      </p:sp>
+      <p:sp>
+        <p:nvSpPr>
+          <p:cNvPr id="3" name="备注占位符 2"/>
+          <p:cNvSpPr>
+            <a:spLocks noGrp="1"/>
+          </p:cNvSpPr>
+          <p:nvPr>
+            <p:ph type="body" idx="1"/>
+          </p:nvPr>
+        </p:nvSpPr>
+        <p:spPr/>
+        <p:txBody>
+          <a:bodyPr/>
+          <a:lstStyle/>
+          <a:p>
+            <a:endParaRPr lang="zh-CN" altLang="en-US" dirty="0"/>
+          </a:p>
+        </p:txBody>
+      </p:sp>
+      <p:sp>
+        <p:nvSpPr>
+          <p:cNvPr id="4" name="灯片编号占位符 3"/>
+          <p:cNvSpPr>
+            <a:spLocks noGrp="1"/>
+          </p:cNvSpPr>
+          <p:nvPr>
+            <p:ph type="sldNum" sz="quarter" idx="5"/>
+          </p:nvPr>
+        </p:nvSpPr>
+        <p:spPr/>
+        <p:txBody>
+          <a:bodyPr/>
+          <a:lstStyle/>
+          <a:p>
+            <a:fld id="{8D024F85-CB1C-7445-9B98-7B8479DF2CF8}" type="slidenum">
+              <a:rPr kumimoji="1" lang="zh-CN" altLang="en-US" smtClean="0"/>
+            </a:fld>
+            <a:endParaRPr kumimoji="1" lang="zh-CN" altLang="en-US"/>
+          </a:p>
+        </p:txBody>
+      </p:sp>
+      <p:sp>
+        <p:nvSpPr>
+          <p:cNvPr id="5" name="页脚占位符 4"/>
+          <p:cNvSpPr>
+            <a:spLocks noGrp="1"/>
+          </p:cNvSpPr>
+          <p:nvPr>
+            <p:ph type="ftr" sz="quarter" idx="10"/>
+          </p:nvPr>
+        </p:nvSpPr>
+        <p:spPr/>
+        <p:txBody>
+          <a:bodyPr/>
+          <a:lstStyle/>
+          <a:p>
+            <a:r>
+              <a:rPr kumimoji="1" lang="zh-CN" altLang="en-US"/>
+              <a:t>网易内部资料，请勿外传</a:t>
+            </a:r>
+            <a:endParaRPr kumimoji="1" lang="zh-CN" altLang="en-US" dirty="0"/>
+          </a:p>
+        </p:txBody>
+      </p:sp>
+      <p:sp>
+        <p:nvSpPr>
+          <p:cNvPr id="6" name="页眉占位符 5"/>
+          <p:cNvSpPr>
+            <a:spLocks noGrp="1"/>
+          </p:cNvSpPr>
+          <p:nvPr>
+            <p:ph type="hdr" sz="quarter" idx="11"/>
+          </p:nvPr>
+        </p:nvSpPr>
+        <p:spPr/>
+        <p:txBody>
+          <a:bodyPr/>
+          <a:lstStyle/>
+          <a:p>
+            <a:r>
+              <a:rPr kumimoji="1" lang="zh-CN" altLang="en-US"/>
+              <a:t>网易内部资料，请勿外传</a:t>
+            </a:r>
+            <a:endParaRPr kumimoji="1" lang="zh-CN" altLang="en-US" dirty="0"/>
+          </a:p>
+        </p:txBody>
+      </p:sp>
+    </p:spTree>
+  </p:cSld>
+  <p:clrMapOvr>
+    <a:masterClrMapping/>
+  </p:clrMapOvr>
+</p:notes>
+</file>
+
+<file path=ppt/notesSlides/notesSlide17.xml><?xml version="1.0" encoding="utf-8"?>
 <p:notes xmlns:a="http://schemas.openxmlformats.org/drawingml/2006/main" xmlns:r="http://schemas.openxmlformats.org/officeDocument/2006/relationships" xmlns:p="http://schemas.openxmlformats.org/presentationml/2006/main">
   <p:cSld>
     <p:spTree>
@@ -5172,22 +5297,9 @@
                 <a:latin typeface="微软雅黑" panose="020B0503020204020204" pitchFamily="34" charset="-122"/>
                 <a:ea typeface="微软雅黑" panose="020B0503020204020204" pitchFamily="34" charset="-122"/>
               </a:rPr>
-              <a:t> - </a:t>
-            </a:r>
-            <a:r>
-              <a:rPr kumimoji="1" lang="zh-CN" altLang="en-US" sz="3000" b="1" dirty="0">
-                <a:solidFill>
-                  <a:schemeClr val="tx1">
-                    <a:lumMod val="75000"/>
-                    <a:lumOff val="25000"/>
-                  </a:schemeClr>
-                </a:solidFill>
-                <a:latin typeface="微软雅黑" panose="020B0503020204020204" pitchFamily="34" charset="-122"/>
-                <a:ea typeface="微软雅黑" panose="020B0503020204020204" pitchFamily="34" charset="-122"/>
-              </a:rPr>
-              <a:t>构建文件</a:t>
-            </a:r>
-            <a:endParaRPr kumimoji="1" lang="zh-CN" altLang="en-US" sz="3000" b="1" dirty="0">
+              <a:t> - hash</a:t>
+            </a:r>
+            <a:endParaRPr kumimoji="1" lang="en-US" altLang="zh-CN" sz="3000" b="1" dirty="0">
               <a:solidFill>
                 <a:schemeClr val="tx1">
                   <a:lumMod val="75000"/>
@@ -5245,7 +5357,7 @@
         <p:spPr>
           <a:xfrm>
             <a:off x="780415" y="1256030"/>
-            <a:ext cx="9326245" cy="3788410"/>
+            <a:ext cx="3921760" cy="3500120"/>
           </a:xfrm>
           <a:prstGeom prst="rect">
             <a:avLst/>
@@ -5270,32 +5382,88 @@
               </a:spcAft>
             </a:pPr>
             <a:r>
-              <a:rPr kumimoji="1" lang="zh-CN" altLang="en-US" dirty="0">
-                <a:latin typeface="微软雅黑" panose="020B0503020204020204" pitchFamily="34" charset="-122"/>
-                <a:ea typeface="微软雅黑" panose="020B0503020204020204" pitchFamily="34" charset="-122"/>
-              </a:rPr>
-              <a:t>在构建文件时，会用到如下图的全局结构</a:t>
-            </a:r>
-            <a:r>
-              <a:rPr kumimoji="1" lang="en-US" altLang="zh-CN" dirty="0">
-                <a:latin typeface="微软雅黑" panose="020B0503020204020204" pitchFamily="34" charset="-122"/>
-                <a:ea typeface="微软雅黑" panose="020B0503020204020204" pitchFamily="34" charset="-122"/>
-              </a:rPr>
-              <a:t>bData</a:t>
-            </a:r>
-            <a:r>
-              <a:rPr kumimoji="1" lang="zh-CN" altLang="en-US" dirty="0">
-                <a:latin typeface="微软雅黑" panose="020B0503020204020204" pitchFamily="34" charset="-122"/>
-                <a:ea typeface="微软雅黑" panose="020B0503020204020204" pitchFamily="34" charset="-122"/>
-              </a:rPr>
-              <a:t>，用于记录前述</a:t>
-            </a:r>
-            <a:r>
-              <a:rPr kumimoji="1" lang="zh-CN" altLang="en-US" dirty="0">
-                <a:latin typeface="微软雅黑" panose="020B0503020204020204" pitchFamily="34" charset="-122"/>
-                <a:ea typeface="微软雅黑" panose="020B0503020204020204" pitchFamily="34" charset="-122"/>
-              </a:rPr>
-              <a:t>信息。</a:t>
+              <a:rPr kumimoji="1" lang="en-US" altLang="zh-CN" dirty="0">
+                <a:latin typeface="微软雅黑" panose="020B0503020204020204" pitchFamily="34" charset="-122"/>
+                <a:ea typeface="微软雅黑" panose="020B0503020204020204" pitchFamily="34" charset="-122"/>
+              </a:rPr>
+              <a:t>10~13</a:t>
+            </a:r>
+            <a:r>
+              <a:rPr kumimoji="1" lang="zh-CN" altLang="en-US" dirty="0">
+                <a:latin typeface="微软雅黑" panose="020B0503020204020204" pitchFamily="34" charset="-122"/>
+                <a:ea typeface="微软雅黑" panose="020B0503020204020204" pitchFamily="34" charset="-122"/>
+              </a:rPr>
+              <a:t>为节点</a:t>
+            </a:r>
+            <a:r>
+              <a:rPr kumimoji="1" lang="en-US" altLang="zh-CN" dirty="0">
+                <a:latin typeface="微软雅黑" panose="020B0503020204020204" pitchFamily="34" charset="-122"/>
+                <a:ea typeface="微软雅黑" panose="020B0503020204020204" pitchFamily="34" charset="-122"/>
+              </a:rPr>
+              <a:t>1</a:t>
+            </a:r>
+            <a:r>
+              <a:rPr kumimoji="1" lang="zh-CN" altLang="en-US" dirty="0">
+                <a:latin typeface="微软雅黑" panose="020B0503020204020204" pitchFamily="34" charset="-122"/>
+                <a:ea typeface="微软雅黑" panose="020B0503020204020204" pitchFamily="34" charset="-122"/>
+              </a:rPr>
+              <a:t>的</a:t>
+            </a:r>
+            <a:r>
+              <a:rPr kumimoji="1" lang="en-US" altLang="zh-CN" dirty="0">
+                <a:latin typeface="微软雅黑" panose="020B0503020204020204" pitchFamily="34" charset="-122"/>
+                <a:ea typeface="微软雅黑" panose="020B0503020204020204" pitchFamily="34" charset="-122"/>
+              </a:rPr>
+              <a:t>hash</a:t>
+            </a:r>
+            <a:r>
+              <a:rPr kumimoji="1" lang="zh-CN" altLang="en-US" dirty="0">
+                <a:latin typeface="微软雅黑" panose="020B0503020204020204" pitchFamily="34" charset="-122"/>
+                <a:ea typeface="微软雅黑" panose="020B0503020204020204" pitchFamily="34" charset="-122"/>
+              </a:rPr>
+              <a:t>桶，</a:t>
+            </a:r>
+            <a:r>
+              <a:rPr kumimoji="1" lang="en-US" altLang="zh-CN" dirty="0">
+                <a:latin typeface="微软雅黑" panose="020B0503020204020204" pitchFamily="34" charset="-122"/>
+                <a:ea typeface="微软雅黑" panose="020B0503020204020204" pitchFamily="34" charset="-122"/>
+              </a:rPr>
+              <a:t>14~15</a:t>
+            </a:r>
+            <a:r>
+              <a:rPr kumimoji="1" lang="zh-CN" altLang="en-US" dirty="0">
+                <a:latin typeface="微软雅黑" panose="020B0503020204020204" pitchFamily="34" charset="-122"/>
+                <a:ea typeface="微软雅黑" panose="020B0503020204020204" pitchFamily="34" charset="-122"/>
+              </a:rPr>
+              <a:t>为节点</a:t>
+            </a:r>
+            <a:r>
+              <a:rPr kumimoji="1" lang="en-US" altLang="zh-CN" dirty="0">
+                <a:latin typeface="微软雅黑" panose="020B0503020204020204" pitchFamily="34" charset="-122"/>
+                <a:ea typeface="微软雅黑" panose="020B0503020204020204" pitchFamily="34" charset="-122"/>
+              </a:rPr>
+              <a:t>2</a:t>
+            </a:r>
+            <a:r>
+              <a:rPr kumimoji="1" lang="zh-CN" altLang="en-US" dirty="0">
+                <a:latin typeface="微软雅黑" panose="020B0503020204020204" pitchFamily="34" charset="-122"/>
+                <a:ea typeface="微软雅黑" panose="020B0503020204020204" pitchFamily="34" charset="-122"/>
+              </a:rPr>
+              <a:t>的</a:t>
+            </a:r>
+            <a:r>
+              <a:rPr kumimoji="1" lang="en-US" altLang="zh-CN" dirty="0">
+                <a:latin typeface="微软雅黑" panose="020B0503020204020204" pitchFamily="34" charset="-122"/>
+                <a:ea typeface="微软雅黑" panose="020B0503020204020204" pitchFamily="34" charset="-122"/>
+              </a:rPr>
+              <a:t>hash</a:t>
+            </a:r>
+            <a:r>
+              <a:rPr kumimoji="1" lang="zh-CN" altLang="en-US" dirty="0">
+                <a:latin typeface="微软雅黑" panose="020B0503020204020204" pitchFamily="34" charset="-122"/>
+                <a:ea typeface="微软雅黑" panose="020B0503020204020204" pitchFamily="34" charset="-122"/>
+              </a:rPr>
+              <a:t>桶。</a:t>
             </a:r>
             <a:endParaRPr kumimoji="1" lang="zh-CN" altLang="en-US" dirty="0">
               <a:latin typeface="微软雅黑" panose="020B0503020204020204" pitchFamily="34" charset="-122"/>
@@ -5339,6 +5507,634 @@
       </p:pic>
       <p:pic>
         <p:nvPicPr>
+          <p:cNvPr id="19" name="图片 18"/>
+          <p:cNvPicPr>
+            <a:picLocks noChangeAspect="1"/>
+          </p:cNvPicPr>
+          <p:nvPr/>
+        </p:nvPicPr>
+        <p:blipFill>
+          <a:blip r:embed="rId3"/>
+          <a:stretch>
+            <a:fillRect/>
+          </a:stretch>
+        </p:blipFill>
+        <p:spPr>
+          <a:xfrm>
+            <a:off x="4627245" y="1315085"/>
+            <a:ext cx="6985635" cy="4516120"/>
+          </a:xfrm>
+          <a:prstGeom prst="rect">
+            <a:avLst/>
+          </a:prstGeom>
+        </p:spPr>
+      </p:pic>
+      <p:sp>
+        <p:nvSpPr>
+          <p:cNvPr id="20" name="文本框 19"/>
+          <p:cNvSpPr txBox="1"/>
+          <p:nvPr/>
+        </p:nvSpPr>
+        <p:spPr>
+          <a:xfrm>
+            <a:off x="5765800" y="1256030"/>
+            <a:ext cx="537210" cy="615315"/>
+          </a:xfrm>
+          <a:prstGeom prst="rect">
+            <a:avLst/>
+          </a:prstGeom>
+          <a:noFill/>
+        </p:spPr>
+        <p:txBody>
+          <a:bodyPr wrap="square" rtlCol="0">
+            <a:noAutofit/>
+          </a:bodyPr>
+          <a:p>
+            <a:pPr>
+              <a:lnSpc>
+                <a:spcPct val="150000"/>
+              </a:lnSpc>
+              <a:spcBef>
+                <a:spcPts val="600"/>
+              </a:spcBef>
+              <a:spcAft>
+                <a:spcPts val="600"/>
+              </a:spcAft>
+            </a:pPr>
+            <a:r>
+              <a:rPr kumimoji="1" lang="en-US" dirty="0">
+                <a:latin typeface="微软雅黑" panose="020B0503020204020204" pitchFamily="34" charset="-122"/>
+                <a:ea typeface="微软雅黑" panose="020B0503020204020204" pitchFamily="34" charset="-122"/>
+              </a:rPr>
+              <a:t>10</a:t>
+            </a:r>
+            <a:endParaRPr kumimoji="1" lang="en-US" dirty="0">
+              <a:latin typeface="微软雅黑" panose="020B0503020204020204" pitchFamily="34" charset="-122"/>
+              <a:ea typeface="微软雅黑" panose="020B0503020204020204" pitchFamily="34" charset="-122"/>
+            </a:endParaRPr>
+          </a:p>
+        </p:txBody>
+      </p:sp>
+      <p:sp>
+        <p:nvSpPr>
+          <p:cNvPr id="21" name="文本框 20"/>
+          <p:cNvSpPr txBox="1"/>
+          <p:nvPr/>
+        </p:nvSpPr>
+        <p:spPr>
+          <a:xfrm>
+            <a:off x="8707120" y="1256030"/>
+            <a:ext cx="537210" cy="615315"/>
+          </a:xfrm>
+          <a:prstGeom prst="rect">
+            <a:avLst/>
+          </a:prstGeom>
+          <a:noFill/>
+        </p:spPr>
+        <p:txBody>
+          <a:bodyPr wrap="square" rtlCol="0">
+            <a:noAutofit/>
+          </a:bodyPr>
+          <a:p>
+            <a:pPr>
+              <a:lnSpc>
+                <a:spcPct val="150000"/>
+              </a:lnSpc>
+              <a:spcBef>
+                <a:spcPts val="600"/>
+              </a:spcBef>
+              <a:spcAft>
+                <a:spcPts val="600"/>
+              </a:spcAft>
+            </a:pPr>
+            <a:r>
+              <a:rPr kumimoji="1" lang="en-US" dirty="0">
+                <a:latin typeface="微软雅黑" panose="020B0503020204020204" pitchFamily="34" charset="-122"/>
+                <a:ea typeface="微软雅黑" panose="020B0503020204020204" pitchFamily="34" charset="-122"/>
+              </a:rPr>
+              <a:t>14</a:t>
+            </a:r>
+            <a:endParaRPr kumimoji="1" lang="en-US" dirty="0">
+              <a:latin typeface="微软雅黑" panose="020B0503020204020204" pitchFamily="34" charset="-122"/>
+              <a:ea typeface="微软雅黑" panose="020B0503020204020204" pitchFamily="34" charset="-122"/>
+            </a:endParaRPr>
+          </a:p>
+        </p:txBody>
+      </p:sp>
+      <p:sp>
+        <p:nvSpPr>
+          <p:cNvPr id="22" name="文本框 21"/>
+          <p:cNvSpPr txBox="1"/>
+          <p:nvPr/>
+        </p:nvSpPr>
+        <p:spPr>
+          <a:xfrm>
+            <a:off x="6096000" y="2898775"/>
+            <a:ext cx="537210" cy="615315"/>
+          </a:xfrm>
+          <a:prstGeom prst="rect">
+            <a:avLst/>
+          </a:prstGeom>
+          <a:noFill/>
+        </p:spPr>
+        <p:txBody>
+          <a:bodyPr wrap="square" rtlCol="0">
+            <a:noAutofit/>
+          </a:bodyPr>
+          <a:p>
+            <a:pPr>
+              <a:lnSpc>
+                <a:spcPct val="150000"/>
+              </a:lnSpc>
+              <a:spcBef>
+                <a:spcPts val="600"/>
+              </a:spcBef>
+              <a:spcAft>
+                <a:spcPts val="600"/>
+              </a:spcAft>
+            </a:pPr>
+            <a:r>
+              <a:rPr kumimoji="1" lang="en-US" dirty="0">
+                <a:latin typeface="微软雅黑" panose="020B0503020204020204" pitchFamily="34" charset="-122"/>
+                <a:ea typeface="微软雅黑" panose="020B0503020204020204" pitchFamily="34" charset="-122"/>
+              </a:rPr>
+              <a:t>0</a:t>
+            </a:r>
+            <a:endParaRPr kumimoji="1" lang="en-US" dirty="0">
+              <a:latin typeface="微软雅黑" panose="020B0503020204020204" pitchFamily="34" charset="-122"/>
+              <a:ea typeface="微软雅黑" panose="020B0503020204020204" pitchFamily="34" charset="-122"/>
+            </a:endParaRPr>
+          </a:p>
+        </p:txBody>
+      </p:sp>
+      <p:sp>
+        <p:nvSpPr>
+          <p:cNvPr id="23" name="文本框 22"/>
+          <p:cNvSpPr txBox="1"/>
+          <p:nvPr/>
+        </p:nvSpPr>
+        <p:spPr>
+          <a:xfrm>
+            <a:off x="9037320" y="2898775"/>
+            <a:ext cx="537210" cy="615315"/>
+          </a:xfrm>
+          <a:prstGeom prst="rect">
+            <a:avLst/>
+          </a:prstGeom>
+          <a:noFill/>
+        </p:spPr>
+        <p:txBody>
+          <a:bodyPr wrap="square" rtlCol="0">
+            <a:noAutofit/>
+          </a:bodyPr>
+          <a:p>
+            <a:pPr>
+              <a:lnSpc>
+                <a:spcPct val="150000"/>
+              </a:lnSpc>
+              <a:spcBef>
+                <a:spcPts val="600"/>
+              </a:spcBef>
+              <a:spcAft>
+                <a:spcPts val="600"/>
+              </a:spcAft>
+            </a:pPr>
+            <a:r>
+              <a:rPr kumimoji="1" lang="en-US" dirty="0">
+                <a:latin typeface="微软雅黑" panose="020B0503020204020204" pitchFamily="34" charset="-122"/>
+                <a:ea typeface="微软雅黑" panose="020B0503020204020204" pitchFamily="34" charset="-122"/>
+              </a:rPr>
+              <a:t>0</a:t>
+            </a:r>
+            <a:endParaRPr kumimoji="1" lang="en-US" dirty="0">
+              <a:latin typeface="微软雅黑" panose="020B0503020204020204" pitchFamily="34" charset="-122"/>
+              <a:ea typeface="微软雅黑" panose="020B0503020204020204" pitchFamily="34" charset="-122"/>
+            </a:endParaRPr>
+          </a:p>
+        </p:txBody>
+      </p:sp>
+      <p:sp>
+        <p:nvSpPr>
+          <p:cNvPr id="24" name="文本框 23"/>
+          <p:cNvSpPr txBox="1"/>
+          <p:nvPr/>
+        </p:nvSpPr>
+        <p:spPr>
+          <a:xfrm>
+            <a:off x="6842760" y="2898775"/>
+            <a:ext cx="537210" cy="615315"/>
+          </a:xfrm>
+          <a:prstGeom prst="rect">
+            <a:avLst/>
+          </a:prstGeom>
+          <a:noFill/>
+        </p:spPr>
+        <p:txBody>
+          <a:bodyPr wrap="square" rtlCol="0">
+            <a:noAutofit/>
+          </a:bodyPr>
+          <a:p>
+            <a:pPr>
+              <a:lnSpc>
+                <a:spcPct val="150000"/>
+              </a:lnSpc>
+              <a:spcBef>
+                <a:spcPts val="600"/>
+              </a:spcBef>
+              <a:spcAft>
+                <a:spcPts val="600"/>
+              </a:spcAft>
+            </a:pPr>
+            <a:r>
+              <a:rPr kumimoji="1" lang="en-US" dirty="0">
+                <a:latin typeface="微软雅黑" panose="020B0503020204020204" pitchFamily="34" charset="-122"/>
+                <a:ea typeface="微软雅黑" panose="020B0503020204020204" pitchFamily="34" charset="-122"/>
+              </a:rPr>
+              <a:t>1</a:t>
+            </a:r>
+            <a:endParaRPr kumimoji="1" lang="en-US" dirty="0">
+              <a:latin typeface="微软雅黑" panose="020B0503020204020204" pitchFamily="34" charset="-122"/>
+              <a:ea typeface="微软雅黑" panose="020B0503020204020204" pitchFamily="34" charset="-122"/>
+            </a:endParaRPr>
+          </a:p>
+        </p:txBody>
+      </p:sp>
+      <p:sp>
+        <p:nvSpPr>
+          <p:cNvPr id="25" name="文本框 24"/>
+          <p:cNvSpPr txBox="1"/>
+          <p:nvPr/>
+        </p:nvSpPr>
+        <p:spPr>
+          <a:xfrm>
+            <a:off x="7566660" y="2898775"/>
+            <a:ext cx="537210" cy="615315"/>
+          </a:xfrm>
+          <a:prstGeom prst="rect">
+            <a:avLst/>
+          </a:prstGeom>
+          <a:noFill/>
+        </p:spPr>
+        <p:txBody>
+          <a:bodyPr wrap="square" rtlCol="0">
+            <a:noAutofit/>
+          </a:bodyPr>
+          <a:p>
+            <a:pPr>
+              <a:lnSpc>
+                <a:spcPct val="150000"/>
+              </a:lnSpc>
+              <a:spcBef>
+                <a:spcPts val="600"/>
+              </a:spcBef>
+              <a:spcAft>
+                <a:spcPts val="600"/>
+              </a:spcAft>
+            </a:pPr>
+            <a:r>
+              <a:rPr kumimoji="1" lang="en-US" dirty="0">
+                <a:latin typeface="微软雅黑" panose="020B0503020204020204" pitchFamily="34" charset="-122"/>
+                <a:ea typeface="微软雅黑" panose="020B0503020204020204" pitchFamily="34" charset="-122"/>
+              </a:rPr>
+              <a:t>2</a:t>
+            </a:r>
+            <a:endParaRPr kumimoji="1" lang="en-US" dirty="0">
+              <a:latin typeface="微软雅黑" panose="020B0503020204020204" pitchFamily="34" charset="-122"/>
+              <a:ea typeface="微软雅黑" panose="020B0503020204020204" pitchFamily="34" charset="-122"/>
+            </a:endParaRPr>
+          </a:p>
+        </p:txBody>
+      </p:sp>
+      <p:sp>
+        <p:nvSpPr>
+          <p:cNvPr id="26" name="文本框 25"/>
+          <p:cNvSpPr txBox="1"/>
+          <p:nvPr/>
+        </p:nvSpPr>
+        <p:spPr>
+          <a:xfrm>
+            <a:off x="8301990" y="2898775"/>
+            <a:ext cx="537210" cy="615315"/>
+          </a:xfrm>
+          <a:prstGeom prst="rect">
+            <a:avLst/>
+          </a:prstGeom>
+          <a:noFill/>
+        </p:spPr>
+        <p:txBody>
+          <a:bodyPr wrap="square" rtlCol="0">
+            <a:noAutofit/>
+          </a:bodyPr>
+          <a:p>
+            <a:pPr>
+              <a:lnSpc>
+                <a:spcPct val="150000"/>
+              </a:lnSpc>
+              <a:spcBef>
+                <a:spcPts val="600"/>
+              </a:spcBef>
+              <a:spcAft>
+                <a:spcPts val="600"/>
+              </a:spcAft>
+            </a:pPr>
+            <a:r>
+              <a:rPr kumimoji="1" lang="en-US" dirty="0">
+                <a:latin typeface="微软雅黑" panose="020B0503020204020204" pitchFamily="34" charset="-122"/>
+                <a:ea typeface="微软雅黑" panose="020B0503020204020204" pitchFamily="34" charset="-122"/>
+              </a:rPr>
+              <a:t>3</a:t>
+            </a:r>
+            <a:endParaRPr kumimoji="1" lang="en-US" dirty="0">
+              <a:latin typeface="微软雅黑" panose="020B0503020204020204" pitchFamily="34" charset="-122"/>
+              <a:ea typeface="微软雅黑" panose="020B0503020204020204" pitchFamily="34" charset="-122"/>
+            </a:endParaRPr>
+          </a:p>
+        </p:txBody>
+      </p:sp>
+      <p:sp>
+        <p:nvSpPr>
+          <p:cNvPr id="27" name="文本框 26"/>
+          <p:cNvSpPr txBox="1"/>
+          <p:nvPr/>
+        </p:nvSpPr>
+        <p:spPr>
+          <a:xfrm>
+            <a:off x="9761220" y="2898775"/>
+            <a:ext cx="537210" cy="615315"/>
+          </a:xfrm>
+          <a:prstGeom prst="rect">
+            <a:avLst/>
+          </a:prstGeom>
+          <a:noFill/>
+        </p:spPr>
+        <p:txBody>
+          <a:bodyPr wrap="square" rtlCol="0">
+            <a:noAutofit/>
+          </a:bodyPr>
+          <a:p>
+            <a:pPr>
+              <a:lnSpc>
+                <a:spcPct val="150000"/>
+              </a:lnSpc>
+              <a:spcBef>
+                <a:spcPts val="600"/>
+              </a:spcBef>
+              <a:spcAft>
+                <a:spcPts val="600"/>
+              </a:spcAft>
+            </a:pPr>
+            <a:r>
+              <a:rPr kumimoji="1" lang="en-US" dirty="0">
+                <a:latin typeface="微软雅黑" panose="020B0503020204020204" pitchFamily="34" charset="-122"/>
+                <a:ea typeface="微软雅黑" panose="020B0503020204020204" pitchFamily="34" charset="-122"/>
+              </a:rPr>
+              <a:t>1</a:t>
+            </a:r>
+            <a:endParaRPr kumimoji="1" lang="en-US" dirty="0">
+              <a:latin typeface="微软雅黑" panose="020B0503020204020204" pitchFamily="34" charset="-122"/>
+              <a:ea typeface="微软雅黑" panose="020B0503020204020204" pitchFamily="34" charset="-122"/>
+            </a:endParaRPr>
+          </a:p>
+        </p:txBody>
+      </p:sp>
+    </p:spTree>
+  </p:cSld>
+  <p:clrMapOvr>
+    <a:masterClrMapping/>
+  </p:clrMapOvr>
+</p:sld>
+</file>
+
+<file path=ppt/slides/slide11.xml><?xml version="1.0" encoding="utf-8"?>
+<p:sld xmlns:a="http://schemas.openxmlformats.org/drawingml/2006/main" xmlns:r="http://schemas.openxmlformats.org/officeDocument/2006/relationships" xmlns:p="http://schemas.openxmlformats.org/presentationml/2006/main">
+  <p:cSld>
+    <p:spTree>
+      <p:nvGrpSpPr>
+        <p:cNvPr id="1" name=""/>
+        <p:cNvGrpSpPr/>
+        <p:nvPr/>
+      </p:nvGrpSpPr>
+      <p:grpSpPr>
+        <a:xfrm>
+          <a:off x="0" y="0"/>
+          <a:ext cx="0" cy="0"/>
+          <a:chOff x="0" y="0"/>
+          <a:chExt cx="0" cy="0"/>
+        </a:xfrm>
+      </p:grpSpPr>
+      <p:sp>
+        <p:nvSpPr>
+          <p:cNvPr id="8" name="文本框 7"/>
+          <p:cNvSpPr txBox="1"/>
+          <p:nvPr/>
+        </p:nvSpPr>
+        <p:spPr>
+          <a:xfrm>
+            <a:off x="416520" y="394263"/>
+            <a:ext cx="4419600" cy="553085"/>
+          </a:xfrm>
+          <a:prstGeom prst="rect">
+            <a:avLst/>
+          </a:prstGeom>
+          <a:noFill/>
+        </p:spPr>
+        <p:txBody>
+          <a:bodyPr wrap="square" rtlCol="0">
+            <a:spAutoFit/>
+          </a:bodyPr>
+          <a:lstStyle/>
+          <a:p>
+            <a:r>
+              <a:rPr kumimoji="1" lang="zh-CN" altLang="en-US" sz="3000" b="1" dirty="0">
+                <a:solidFill>
+                  <a:schemeClr val="tx1">
+                    <a:lumMod val="75000"/>
+                    <a:lumOff val="25000"/>
+                  </a:schemeClr>
+                </a:solidFill>
+                <a:latin typeface="微软雅黑" panose="020B0503020204020204" pitchFamily="34" charset="-122"/>
+                <a:ea typeface="微软雅黑" panose="020B0503020204020204" pitchFamily="34" charset="-122"/>
+              </a:rPr>
+              <a:t>设计思路</a:t>
+            </a:r>
+            <a:r>
+              <a:rPr kumimoji="1" lang="en-US" altLang="zh-CN" sz="3000" b="1" dirty="0">
+                <a:solidFill>
+                  <a:schemeClr val="tx1">
+                    <a:lumMod val="75000"/>
+                    <a:lumOff val="25000"/>
+                  </a:schemeClr>
+                </a:solidFill>
+                <a:latin typeface="微软雅黑" panose="020B0503020204020204" pitchFamily="34" charset="-122"/>
+                <a:ea typeface="微软雅黑" panose="020B0503020204020204" pitchFamily="34" charset="-122"/>
+              </a:rPr>
+              <a:t> - </a:t>
+            </a:r>
+            <a:r>
+              <a:rPr kumimoji="1" lang="zh-CN" altLang="en-US" sz="3000" b="1" dirty="0">
+                <a:solidFill>
+                  <a:schemeClr val="tx1">
+                    <a:lumMod val="75000"/>
+                    <a:lumOff val="25000"/>
+                  </a:schemeClr>
+                </a:solidFill>
+                <a:latin typeface="微软雅黑" panose="020B0503020204020204" pitchFamily="34" charset="-122"/>
+                <a:ea typeface="微软雅黑" panose="020B0503020204020204" pitchFamily="34" charset="-122"/>
+              </a:rPr>
+              <a:t>构建文件</a:t>
+            </a:r>
+            <a:endParaRPr kumimoji="1" lang="zh-CN" altLang="en-US" sz="3000" b="1" dirty="0">
+              <a:solidFill>
+                <a:schemeClr val="tx1">
+                  <a:lumMod val="75000"/>
+                  <a:lumOff val="25000"/>
+                </a:schemeClr>
+              </a:solidFill>
+              <a:latin typeface="微软雅黑" panose="020B0503020204020204" pitchFamily="34" charset="-122"/>
+              <a:ea typeface="微软雅黑" panose="020B0503020204020204" pitchFamily="34" charset="-122"/>
+            </a:endParaRPr>
+          </a:p>
+        </p:txBody>
+      </p:sp>
+      <p:cxnSp>
+        <p:nvCxnSpPr>
+          <p:cNvPr id="12" name="直线连接符 5"/>
+          <p:cNvCxnSpPr/>
+          <p:nvPr/>
+        </p:nvCxnSpPr>
+        <p:spPr>
+          <a:xfrm>
+            <a:off x="514179" y="1101951"/>
+            <a:ext cx="532800" cy="0"/>
+          </a:xfrm>
+          <a:prstGeom prst="line">
+            <a:avLst/>
+          </a:prstGeom>
+          <a:ln w="25400">
+            <a:solidFill>
+              <a:srgbClr val="A50A0D"/>
+            </a:solidFill>
+            <a:round/>
+          </a:ln>
+        </p:spPr>
+        <p:style>
+          <a:lnRef idx="1">
+            <a:schemeClr val="accent1"/>
+          </a:lnRef>
+          <a:fillRef idx="0">
+            <a:schemeClr val="accent1"/>
+          </a:fillRef>
+          <a:effectRef idx="0">
+            <a:schemeClr val="accent1"/>
+          </a:effectRef>
+          <a:fontRef idx="minor">
+            <a:schemeClr val="tx1"/>
+          </a:fontRef>
+        </p:style>
+      </p:cxnSp>
+      <p:sp>
+        <p:nvSpPr>
+          <p:cNvPr id="10" name="文本框 9"/>
+          <p:cNvSpPr txBox="1"/>
+          <p:nvPr/>
+        </p:nvSpPr>
+        <p:spPr>
+          <a:xfrm>
+            <a:off x="780415" y="1256030"/>
+            <a:ext cx="9326245" cy="3788410"/>
+          </a:xfrm>
+          <a:prstGeom prst="rect">
+            <a:avLst/>
+          </a:prstGeom>
+          <a:noFill/>
+        </p:spPr>
+        <p:txBody>
+          <a:bodyPr wrap="square" rtlCol="0">
+            <a:noAutofit/>
+          </a:bodyPr>
+          <a:lstStyle/>
+          <a:p>
+            <a:pPr>
+              <a:lnSpc>
+                <a:spcPct val="150000"/>
+              </a:lnSpc>
+              <a:spcBef>
+                <a:spcPts val="600"/>
+              </a:spcBef>
+              <a:spcAft>
+                <a:spcPts val="600"/>
+              </a:spcAft>
+            </a:pPr>
+            <a:r>
+              <a:rPr kumimoji="1" lang="zh-CN" altLang="en-US" dirty="0">
+                <a:latin typeface="微软雅黑" panose="020B0503020204020204" pitchFamily="34" charset="-122"/>
+                <a:ea typeface="微软雅黑" panose="020B0503020204020204" pitchFamily="34" charset="-122"/>
+              </a:rPr>
+              <a:t>在构建文件时，会用到如下图的全局结构</a:t>
+            </a:r>
+            <a:r>
+              <a:rPr kumimoji="1" lang="en-US" altLang="zh-CN" dirty="0">
+                <a:latin typeface="微软雅黑" panose="020B0503020204020204" pitchFamily="34" charset="-122"/>
+                <a:ea typeface="微软雅黑" panose="020B0503020204020204" pitchFamily="34" charset="-122"/>
+              </a:rPr>
+              <a:t>bData</a:t>
+            </a:r>
+            <a:r>
+              <a:rPr kumimoji="1" lang="zh-CN" altLang="en-US" dirty="0">
+                <a:latin typeface="微软雅黑" panose="020B0503020204020204" pitchFamily="34" charset="-122"/>
+                <a:ea typeface="微软雅黑" panose="020B0503020204020204" pitchFamily="34" charset="-122"/>
+              </a:rPr>
+              <a:t>，用于记录前述</a:t>
+            </a:r>
+            <a:r>
+              <a:rPr kumimoji="1" lang="zh-CN" altLang="en-US" dirty="0">
+                <a:latin typeface="微软雅黑" panose="020B0503020204020204" pitchFamily="34" charset="-122"/>
+                <a:ea typeface="微软雅黑" panose="020B0503020204020204" pitchFamily="34" charset="-122"/>
+              </a:rPr>
+              <a:t>信息。</a:t>
+            </a:r>
+            <a:endParaRPr kumimoji="1" lang="zh-CN" altLang="en-US" dirty="0">
+              <a:latin typeface="微软雅黑" panose="020B0503020204020204" pitchFamily="34" charset="-122"/>
+              <a:ea typeface="微软雅黑" panose="020B0503020204020204" pitchFamily="34" charset="-122"/>
+            </a:endParaRPr>
+          </a:p>
+        </p:txBody>
+      </p:sp>
+      <p:pic>
+        <p:nvPicPr>
+          <p:cNvPr id="5" name="图形 4"/>
+          <p:cNvPicPr>
+            <a:picLocks noChangeAspect="1"/>
+          </p:cNvPicPr>
+          <p:nvPr/>
+        </p:nvPicPr>
+        <p:blipFill>
+          <a:blip r:embed="rId1" cstate="print">
+            <a:extLst>
+              <a:ext uri="{28A0092B-C50C-407E-A947-70E740481C1C}">
+                <a14:useLocalDpi xmlns:a14="http://schemas.microsoft.com/office/drawing/2010/main" val="0"/>
+              </a:ext>
+              <a:ext uri="{96DAC541-7B7A-43D3-8B79-37D633B846F1}">
+                <asvg:svgBlip xmlns:asvg="http://schemas.microsoft.com/office/drawing/2016/SVG/main" r:embed="rId2"/>
+              </a:ext>
+            </a:extLst>
+          </a:blip>
+          <a:stretch>
+            <a:fillRect/>
+          </a:stretch>
+        </p:blipFill>
+        <p:spPr>
+          <a:xfrm>
+            <a:off x="10939463" y="6430128"/>
+            <a:ext cx="763381" cy="139201"/>
+          </a:xfrm>
+          <a:prstGeom prst="rect">
+            <a:avLst/>
+          </a:prstGeom>
+        </p:spPr>
+      </p:pic>
+      <p:pic>
+        <p:nvPicPr>
           <p:cNvPr id="2" name="图片 1"/>
           <p:cNvPicPr>
             <a:picLocks noChangeAspect="1"/>
@@ -5369,7 +6165,7 @@
 </p:sld>
 </file>
 
-<file path=ppt/slides/slide11.xml><?xml version="1.0" encoding="utf-8"?>
+<file path=ppt/slides/slide12.xml><?xml version="1.0" encoding="utf-8"?>
 <p:sld xmlns:a="http://schemas.openxmlformats.org/drawingml/2006/main" xmlns:r="http://schemas.openxmlformats.org/officeDocument/2006/relationships" xmlns:p="http://schemas.openxmlformats.org/presentationml/2006/main">
   <p:cSld>
     <p:spTree>
@@ -5545,7 +6341,7 @@
         </p:blipFill>
         <p:spPr>
           <a:xfrm>
-            <a:off x="780415" y="1843405"/>
+            <a:off x="780415" y="2404110"/>
             <a:ext cx="5067300" cy="4038600"/>
           </a:xfrm>
           <a:prstGeom prst="rect">
@@ -5569,7 +6365,7 @@
         </p:blipFill>
         <p:spPr>
           <a:xfrm>
-            <a:off x="6299835" y="1843405"/>
+            <a:off x="6299835" y="2379980"/>
             <a:ext cx="4229100" cy="3124200"/>
           </a:xfrm>
           <a:prstGeom prst="rect">
@@ -5645,151 +6441,16 @@
           </a:p>
         </p:txBody>
       </p:sp>
-    </p:spTree>
-  </p:cSld>
-  <p:clrMapOvr>
-    <a:masterClrMapping/>
-  </p:clrMapOvr>
-</p:sld>
-</file>
-
-<file path=ppt/slides/slide12.xml><?xml version="1.0" encoding="utf-8"?>
-<p:sld xmlns:a="http://schemas.openxmlformats.org/drawingml/2006/main" xmlns:r="http://schemas.openxmlformats.org/officeDocument/2006/relationships" xmlns:p="http://schemas.openxmlformats.org/presentationml/2006/main">
-  <p:cSld>
-    <p:spTree>
-      <p:nvGrpSpPr>
-        <p:cNvPr id="1" name=""/>
-        <p:cNvGrpSpPr/>
-        <p:nvPr/>
-      </p:nvGrpSpPr>
-      <p:grpSpPr>
-        <a:xfrm>
-          <a:off x="0" y="0"/>
-          <a:ext cx="0" cy="0"/>
-          <a:chOff x="0" y="0"/>
-          <a:chExt cx="0" cy="0"/>
-        </a:xfrm>
-      </p:grpSpPr>
-      <p:sp>
-        <p:nvSpPr>
-          <p:cNvPr id="8" name="文本框 7"/>
+      <p:sp>
+        <p:nvSpPr>
+          <p:cNvPr id="4" name="文本框 3"/>
           <p:cNvSpPr txBox="1"/>
           <p:nvPr/>
         </p:nvSpPr>
         <p:spPr>
           <a:xfrm>
-            <a:off x="416520" y="394263"/>
-            <a:ext cx="4419600" cy="553085"/>
-          </a:xfrm>
-          <a:prstGeom prst="rect">
-            <a:avLst/>
-          </a:prstGeom>
-          <a:noFill/>
-        </p:spPr>
-        <p:txBody>
-          <a:bodyPr wrap="square" rtlCol="0">
-            <a:spAutoFit/>
-          </a:bodyPr>
-          <a:lstStyle/>
-          <a:p>
-            <a:r>
-              <a:rPr kumimoji="1" lang="zh-CN" altLang="en-US" sz="3000" b="1" dirty="0">
-                <a:solidFill>
-                  <a:schemeClr val="tx1">
-                    <a:lumMod val="75000"/>
-                    <a:lumOff val="25000"/>
-                  </a:schemeClr>
-                </a:solidFill>
-                <a:latin typeface="微软雅黑" panose="020B0503020204020204" pitchFamily="34" charset="-122"/>
-                <a:ea typeface="微软雅黑" panose="020B0503020204020204" pitchFamily="34" charset="-122"/>
-              </a:rPr>
-              <a:t>设计思路</a:t>
-            </a:r>
-            <a:r>
-              <a:rPr kumimoji="1" lang="en-US" altLang="zh-CN" sz="3000" b="1" dirty="0">
-                <a:solidFill>
-                  <a:schemeClr val="tx1">
-                    <a:lumMod val="75000"/>
-                    <a:lumOff val="25000"/>
-                  </a:schemeClr>
-                </a:solidFill>
-                <a:latin typeface="微软雅黑" panose="020B0503020204020204" pitchFamily="34" charset="-122"/>
-                <a:ea typeface="微软雅黑" panose="020B0503020204020204" pitchFamily="34" charset="-122"/>
-              </a:rPr>
-              <a:t> - </a:t>
-            </a:r>
-            <a:r>
-              <a:rPr kumimoji="1" lang="zh-CN" altLang="en-US" sz="3000" b="1" dirty="0">
-                <a:solidFill>
-                  <a:schemeClr val="tx1">
-                    <a:lumMod val="75000"/>
-                    <a:lumOff val="25000"/>
-                  </a:schemeClr>
-                </a:solidFill>
-                <a:latin typeface="微软雅黑" panose="020B0503020204020204" pitchFamily="34" charset="-122"/>
-                <a:ea typeface="微软雅黑" panose="020B0503020204020204" pitchFamily="34" charset="-122"/>
-              </a:rPr>
-              <a:t>存储到文件</a:t>
-            </a:r>
-            <a:endParaRPr kumimoji="1" lang="zh-CN" altLang="en-US" sz="3000" b="1" dirty="0">
-              <a:solidFill>
-                <a:schemeClr val="tx1">
-                  <a:lumMod val="75000"/>
-                  <a:lumOff val="25000"/>
-                </a:schemeClr>
-              </a:solidFill>
-              <a:latin typeface="微软雅黑" panose="020B0503020204020204" pitchFamily="34" charset="-122"/>
-              <a:ea typeface="微软雅黑" panose="020B0503020204020204" pitchFamily="34" charset="-122"/>
-            </a:endParaRPr>
-          </a:p>
-        </p:txBody>
-      </p:sp>
-      <p:cxnSp>
-        <p:nvCxnSpPr>
-          <p:cNvPr id="12" name="直线连接符 5"/>
-          <p:cNvCxnSpPr/>
-          <p:nvPr/>
-        </p:nvCxnSpPr>
-        <p:spPr>
-          <a:xfrm>
-            <a:off x="514179" y="1101951"/>
-            <a:ext cx="532800" cy="0"/>
-          </a:xfrm>
-          <a:prstGeom prst="line">
-            <a:avLst/>
-          </a:prstGeom>
-          <a:ln w="25400">
-            <a:solidFill>
-              <a:srgbClr val="A50A0D"/>
-            </a:solidFill>
-            <a:round/>
-          </a:ln>
-        </p:spPr>
-        <p:style>
-          <a:lnRef idx="1">
-            <a:schemeClr val="accent1"/>
-          </a:lnRef>
-          <a:fillRef idx="0">
-            <a:schemeClr val="accent1"/>
-          </a:fillRef>
-          <a:effectRef idx="0">
-            <a:schemeClr val="accent1"/>
-          </a:effectRef>
-          <a:fontRef idx="minor">
-            <a:schemeClr val="tx1"/>
-          </a:fontRef>
-        </p:style>
-      </p:cxnSp>
-      <p:sp>
-        <p:nvSpPr>
-          <p:cNvPr id="10" name="文本框 9"/>
-          <p:cNvSpPr txBox="1"/>
-          <p:nvPr/>
-        </p:nvSpPr>
-        <p:spPr>
-          <a:xfrm>
-            <a:off x="780415" y="1256030"/>
-            <a:ext cx="10336530" cy="2662555"/>
+            <a:off x="603250" y="1573530"/>
+            <a:ext cx="10867390" cy="1383030"/>
           </a:xfrm>
           <a:prstGeom prst="rect">
             <a:avLst/>
@@ -5800,7 +6461,6 @@
           <a:bodyPr wrap="square" rtlCol="0">
             <a:noAutofit/>
           </a:bodyPr>
-          <a:lstStyle/>
           <a:p>
             <a:pPr>
               <a:lnSpc>
@@ -5818,7 +6478,14 @@
                 <a:latin typeface="微软雅黑" panose="020B0503020204020204" pitchFamily="34" charset="-122"/>
                 <a:ea typeface="微软雅黑" panose="020B0503020204020204" pitchFamily="34" charset="-122"/>
               </a:rPr>
-              <a:t>在构建好树形结构之后，把全局结构的指针指向的数据按如下顺序复制到连续的内存中，并写入文件：</a:t>
+              <a:t>共享内存中只能存储偏移量，因为在不同进程中的地址空间不同，直接复制指针是</a:t>
+            </a:r>
+            <a:r>
+              <a:rPr kumimoji="1" lang="zh-CN" altLang="en-US" dirty="0">
+                <a:latin typeface="微软雅黑" panose="020B0503020204020204" pitchFamily="34" charset="-122"/>
+                <a:ea typeface="微软雅黑" panose="020B0503020204020204" pitchFamily="34" charset="-122"/>
+              </a:rPr>
+              <a:t>无意义的。</a:t>
             </a:r>
             <a:endParaRPr kumimoji="1" lang="zh-CN" altLang="en-US" dirty="0">
               <a:latin typeface="微软雅黑" panose="020B0503020204020204" pitchFamily="34" charset="-122"/>
@@ -5827,63 +6494,6 @@
           </a:p>
         </p:txBody>
       </p:sp>
-      <p:pic>
-        <p:nvPicPr>
-          <p:cNvPr id="5" name="图形 4"/>
-          <p:cNvPicPr>
-            <a:picLocks noChangeAspect="1"/>
-          </p:cNvPicPr>
-          <p:nvPr/>
-        </p:nvPicPr>
-        <p:blipFill>
-          <a:blip r:embed="rId1" cstate="print">
-            <a:extLst>
-              <a:ext uri="{28A0092B-C50C-407E-A947-70E740481C1C}">
-                <a14:useLocalDpi xmlns:a14="http://schemas.microsoft.com/office/drawing/2010/main" val="0"/>
-              </a:ext>
-              <a:ext uri="{96DAC541-7B7A-43D3-8B79-37D633B846F1}">
-                <asvg:svgBlip xmlns:asvg="http://schemas.microsoft.com/office/drawing/2016/SVG/main" r:embed="rId2"/>
-              </a:ext>
-            </a:extLst>
-          </a:blip>
-          <a:stretch>
-            <a:fillRect/>
-          </a:stretch>
-        </p:blipFill>
-        <p:spPr>
-          <a:xfrm>
-            <a:off x="10939463" y="6430128"/>
-            <a:ext cx="763381" cy="139201"/>
-          </a:xfrm>
-          <a:prstGeom prst="rect">
-            <a:avLst/>
-          </a:prstGeom>
-        </p:spPr>
-      </p:pic>
-      <p:pic>
-        <p:nvPicPr>
-          <p:cNvPr id="4" name="图片 3"/>
-          <p:cNvPicPr>
-            <a:picLocks noChangeAspect="1"/>
-          </p:cNvPicPr>
-          <p:nvPr/>
-        </p:nvPicPr>
-        <p:blipFill>
-          <a:blip r:embed="rId3"/>
-          <a:stretch>
-            <a:fillRect/>
-          </a:stretch>
-        </p:blipFill>
-        <p:spPr>
-          <a:xfrm>
-            <a:off x="795655" y="1913255"/>
-            <a:ext cx="10144125" cy="2337435"/>
-          </a:xfrm>
-          <a:prstGeom prst="rect">
-            <a:avLst/>
-          </a:prstGeom>
-        </p:spPr>
-      </p:pic>
     </p:spTree>
   </p:cSld>
   <p:clrMapOvr>
@@ -5968,7 +6578,7 @@
                 <a:latin typeface="微软雅黑" panose="020B0503020204020204" pitchFamily="34" charset="-122"/>
                 <a:ea typeface="微软雅黑" panose="020B0503020204020204" pitchFamily="34" charset="-122"/>
               </a:rPr>
-              <a:t>读取文件</a:t>
+              <a:t>存储到文件</a:t>
             </a:r>
             <a:endParaRPr kumimoji="1" lang="zh-CN" altLang="en-US" sz="3000" b="1" dirty="0">
               <a:solidFill>
@@ -6028,7 +6638,7 @@
         <p:spPr>
           <a:xfrm>
             <a:off x="780415" y="1256030"/>
-            <a:ext cx="10923270" cy="3202940"/>
+            <a:ext cx="10336530" cy="2662555"/>
           </a:xfrm>
           <a:prstGeom prst="rect">
             <a:avLst/>
@@ -6057,7 +6667,38 @@
                 <a:latin typeface="微软雅黑" panose="020B0503020204020204" pitchFamily="34" charset="-122"/>
                 <a:ea typeface="微软雅黑" panose="020B0503020204020204" pitchFamily="34" charset="-122"/>
               </a:rPr>
-              <a:t>读取时，先从文件起始位置读取</a:t>
+              <a:t>在构建好树形结构之后，把全局结构的指针指向的数据按如下顺序复制到连续的内存中，并写入文件。</a:t>
+            </a:r>
+            <a:endParaRPr kumimoji="1" lang="zh-CN" altLang="en-US" dirty="0">
+              <a:latin typeface="微软雅黑" panose="020B0503020204020204" pitchFamily="34" charset="-122"/>
+              <a:ea typeface="微软雅黑" panose="020B0503020204020204" pitchFamily="34" charset="-122"/>
+            </a:endParaRPr>
+          </a:p>
+          <a:p>
+            <a:pPr>
+              <a:lnSpc>
+                <a:spcPct val="150000"/>
+              </a:lnSpc>
+              <a:spcBef>
+                <a:spcPts val="600"/>
+              </a:spcBef>
+              <a:spcAft>
+                <a:spcPts val="600"/>
+              </a:spcAft>
+            </a:pPr>
+            <a:r>
+              <a:rPr kumimoji="1" lang="zh-CN" altLang="en-US" dirty="0">
+                <a:latin typeface="微软雅黑" panose="020B0503020204020204" pitchFamily="34" charset="-122"/>
+                <a:ea typeface="微软雅黑" panose="020B0503020204020204" pitchFamily="34" charset="-122"/>
+              </a:rPr>
+              <a:t>在这一步</a:t>
+            </a:r>
+            <a:r>
+              <a:rPr kumimoji="1" lang="zh-CN" altLang="en-US" dirty="0">
+                <a:latin typeface="微软雅黑" panose="020B0503020204020204" pitchFamily="34" charset="-122"/>
+                <a:ea typeface="微软雅黑" panose="020B0503020204020204" pitchFamily="34" charset="-122"/>
+              </a:rPr>
+              <a:t>完成对</a:t>
             </a:r>
             <a:r>
               <a:rPr kumimoji="1" lang="en-US" altLang="zh-CN" dirty="0">
@@ -6071,77 +6712,14 @@
                 <a:latin typeface="微软雅黑" panose="020B0503020204020204" pitchFamily="34" charset="-122"/>
                 <a:ea typeface="微软雅黑" panose="020B0503020204020204" pitchFamily="34" charset="-122"/>
               </a:rPr>
-              <a:t>结构体，然后把</a:t>
-            </a:r>
-            <a:r>
-              <a:rPr kumimoji="1" lang="en-US" altLang="zh-CN" dirty="0">
-                <a:latin typeface="微软雅黑" panose="020B0503020204020204" pitchFamily="34" charset="-122"/>
-                <a:ea typeface="微软雅黑" panose="020B0503020204020204" pitchFamily="34" charset="-122"/>
-              </a:rPr>
-              <a:t>config</a:t>
-            </a:r>
-            <a:r>
-              <a:rPr kumimoji="1" lang="zh-CN" altLang="en-US" dirty="0">
-                <a:latin typeface="微软雅黑" panose="020B0503020204020204" pitchFamily="34" charset="-122"/>
-                <a:ea typeface="微软雅黑" panose="020B0503020204020204" pitchFamily="34" charset="-122"/>
-              </a:rPr>
-              <a:t>对象中的偏移量重新计算为指针</a:t>
-            </a:r>
-            <a:r>
-              <a:rPr kumimoji="1" lang="en-US" altLang="zh-CN" dirty="0">
-                <a:latin typeface="微软雅黑" panose="020B0503020204020204" pitchFamily="34" charset="-122"/>
-                <a:ea typeface="微软雅黑" panose="020B0503020204020204" pitchFamily="34" charset="-122"/>
-              </a:rPr>
-              <a:t>(</a:t>
-            </a:r>
-            <a:r>
-              <a:rPr kumimoji="1" lang="zh-CN" altLang="en-US" dirty="0">
-                <a:latin typeface="微软雅黑" panose="020B0503020204020204" pitchFamily="34" charset="-122"/>
-                <a:ea typeface="微软雅黑" panose="020B0503020204020204" pitchFamily="34" charset="-122"/>
-              </a:rPr>
-              <a:t>即还原出</a:t>
-            </a:r>
-            <a:r>
-              <a:rPr kumimoji="1" lang="en-US" altLang="zh-CN" dirty="0">
-                <a:latin typeface="微软雅黑" panose="020B0503020204020204" pitchFamily="34" charset="-122"/>
-                <a:ea typeface="微软雅黑" panose="020B0503020204020204" pitchFamily="34" charset="-122"/>
-              </a:rPr>
-              <a:t>bData)</a:t>
-            </a:r>
-            <a:r>
-              <a:rPr kumimoji="1" lang="zh-CN" altLang="en-US" dirty="0">
-                <a:latin typeface="微软雅黑" panose="020B0503020204020204" pitchFamily="34" charset="-122"/>
-                <a:ea typeface="微软雅黑" panose="020B0503020204020204" pitchFamily="34" charset="-122"/>
-              </a:rPr>
-              <a:t>，并记录</a:t>
-            </a:r>
-            <a:r>
-              <a:rPr kumimoji="1" lang="en-US" altLang="zh-CN" dirty="0">
-                <a:latin typeface="微软雅黑" panose="020B0503020204020204" pitchFamily="34" charset="-122"/>
-                <a:ea typeface="微软雅黑" panose="020B0503020204020204" pitchFamily="34" charset="-122"/>
-              </a:rPr>
-              <a:t>path</a:t>
-            </a:r>
-            <a:r>
-              <a:rPr kumimoji="1" lang="zh-CN" altLang="en-US" dirty="0">
-                <a:latin typeface="微软雅黑" panose="020B0503020204020204" pitchFamily="34" charset="-122"/>
-                <a:ea typeface="微软雅黑" panose="020B0503020204020204" pitchFamily="34" charset="-122"/>
-              </a:rPr>
-              <a:t>，文件描述符等一些额外的信息，存储到</a:t>
-            </a:r>
-            <a:r>
-              <a:rPr kumimoji="1" lang="en-US" altLang="zh-CN" dirty="0">
-                <a:latin typeface="微软雅黑" panose="020B0503020204020204" pitchFamily="34" charset="-122"/>
-                <a:ea typeface="微软雅黑" panose="020B0503020204020204" pitchFamily="34" charset="-122"/>
-              </a:rPr>
-              <a:t>accessor</a:t>
-            </a:r>
-            <a:r>
-              <a:rPr kumimoji="1" lang="zh-CN" altLang="en-US" dirty="0">
-                <a:latin typeface="微软雅黑" panose="020B0503020204020204" pitchFamily="34" charset="-122"/>
-                <a:ea typeface="微软雅黑" panose="020B0503020204020204" pitchFamily="34" charset="-122"/>
-              </a:rPr>
-              <a:t>结构体中</a:t>
+              <a:t>中各个偏移量的</a:t>
+            </a:r>
+            <a:r>
+              <a:rPr kumimoji="1" lang="zh-CN" altLang="en-US" dirty="0">
+                <a:latin typeface="微软雅黑" panose="020B0503020204020204" pitchFamily="34" charset="-122"/>
+                <a:ea typeface="微软雅黑" panose="020B0503020204020204" pitchFamily="34" charset="-122"/>
+              </a:rPr>
+              <a:t>计算。</a:t>
             </a:r>
             <a:endParaRPr kumimoji="1" lang="zh-CN" altLang="en-US" dirty="0">
               <a:latin typeface="微软雅黑" panose="020B0503020204020204" pitchFamily="34" charset="-122"/>
@@ -6185,7 +6763,7 @@
       </p:pic>
       <p:pic>
         <p:nvPicPr>
-          <p:cNvPr id="2" name="图片 1"/>
+          <p:cNvPr id="4" name="图片 3"/>
           <p:cNvPicPr>
             <a:picLocks noChangeAspect="1"/>
           </p:cNvPicPr>
@@ -6199,8 +6777,8 @@
         </p:blipFill>
         <p:spPr>
           <a:xfrm>
-            <a:off x="514350" y="2206625"/>
-            <a:ext cx="6477000" cy="4362450"/>
+            <a:off x="795655" y="2729230"/>
+            <a:ext cx="10144125" cy="2337435"/>
           </a:xfrm>
           <a:prstGeom prst="rect">
             <a:avLst/>
@@ -6351,7 +6929,7 @@
         <p:spPr>
           <a:xfrm>
             <a:off x="780415" y="1256030"/>
-            <a:ext cx="10404475" cy="5125085"/>
+            <a:ext cx="10923270" cy="3202940"/>
           </a:xfrm>
           <a:prstGeom prst="rect">
             <a:avLst/>
@@ -6380,7 +6958,84 @@
                 <a:latin typeface="微软雅黑" panose="020B0503020204020204" pitchFamily="34" charset="-122"/>
                 <a:ea typeface="微软雅黑" panose="020B0503020204020204" pitchFamily="34" charset="-122"/>
               </a:rPr>
-              <a:t>每当创建一个</a:t>
+              <a:t>读取时，先从文件起始位置读取</a:t>
+            </a:r>
+            <a:r>
+              <a:rPr kumimoji="1" lang="en-US" altLang="zh-CN" dirty="0">
+                <a:latin typeface="微软雅黑" panose="020B0503020204020204" pitchFamily="34" charset="-122"/>
+                <a:ea typeface="微软雅黑" panose="020B0503020204020204" pitchFamily="34" charset="-122"/>
+              </a:rPr>
+              <a:t>config</a:t>
+            </a:r>
+            <a:r>
+              <a:rPr kumimoji="1" lang="zh-CN" altLang="en-US" dirty="0">
+                <a:latin typeface="微软雅黑" panose="020B0503020204020204" pitchFamily="34" charset="-122"/>
+                <a:ea typeface="微软雅黑" panose="020B0503020204020204" pitchFamily="34" charset="-122"/>
+              </a:rPr>
+              <a:t>结构体，然后把</a:t>
+            </a:r>
+            <a:r>
+              <a:rPr kumimoji="1" lang="en-US" altLang="zh-CN" dirty="0">
+                <a:latin typeface="微软雅黑" panose="020B0503020204020204" pitchFamily="34" charset="-122"/>
+                <a:ea typeface="微软雅黑" panose="020B0503020204020204" pitchFamily="34" charset="-122"/>
+              </a:rPr>
+              <a:t>config</a:t>
+            </a:r>
+            <a:r>
+              <a:rPr kumimoji="1" lang="zh-CN" altLang="en-US" dirty="0">
+                <a:latin typeface="微软雅黑" panose="020B0503020204020204" pitchFamily="34" charset="-122"/>
+                <a:ea typeface="微软雅黑" panose="020B0503020204020204" pitchFamily="34" charset="-122"/>
+              </a:rPr>
+              <a:t>对象中的偏移量重新计算为指针</a:t>
+            </a:r>
+            <a:r>
+              <a:rPr kumimoji="1" lang="en-US" altLang="zh-CN" dirty="0">
+                <a:latin typeface="微软雅黑" panose="020B0503020204020204" pitchFamily="34" charset="-122"/>
+                <a:ea typeface="微软雅黑" panose="020B0503020204020204" pitchFamily="34" charset="-122"/>
+              </a:rPr>
+              <a:t>(</a:t>
+            </a:r>
+            <a:r>
+              <a:rPr kumimoji="1" lang="zh-CN" altLang="en-US" dirty="0">
+                <a:latin typeface="微软雅黑" panose="020B0503020204020204" pitchFamily="34" charset="-122"/>
+                <a:ea typeface="微软雅黑" panose="020B0503020204020204" pitchFamily="34" charset="-122"/>
+              </a:rPr>
+              <a:t>即还原出</a:t>
+            </a:r>
+            <a:r>
+              <a:rPr kumimoji="1" lang="en-US" altLang="zh-CN" dirty="0">
+                <a:latin typeface="微软雅黑" panose="020B0503020204020204" pitchFamily="34" charset="-122"/>
+                <a:ea typeface="微软雅黑" panose="020B0503020204020204" pitchFamily="34" charset="-122"/>
+              </a:rPr>
+              <a:t>bData)</a:t>
+            </a:r>
+            <a:r>
+              <a:rPr kumimoji="1" lang="zh-CN" altLang="en-US" dirty="0">
+                <a:latin typeface="微软雅黑" panose="020B0503020204020204" pitchFamily="34" charset="-122"/>
+                <a:ea typeface="微软雅黑" panose="020B0503020204020204" pitchFamily="34" charset="-122"/>
+              </a:rPr>
+              <a:t>，并记录</a:t>
+            </a:r>
+            <a:r>
+              <a:rPr kumimoji="1" lang="en-US" altLang="zh-CN" dirty="0">
+                <a:latin typeface="微软雅黑" panose="020B0503020204020204" pitchFamily="34" charset="-122"/>
+                <a:ea typeface="微软雅黑" panose="020B0503020204020204" pitchFamily="34" charset="-122"/>
+              </a:rPr>
+              <a:t>path</a:t>
+            </a:r>
+            <a:r>
+              <a:rPr kumimoji="1" lang="zh-CN" altLang="en-US" dirty="0">
+                <a:latin typeface="微软雅黑" panose="020B0503020204020204" pitchFamily="34" charset="-122"/>
+                <a:ea typeface="微软雅黑" panose="020B0503020204020204" pitchFamily="34" charset="-122"/>
+              </a:rPr>
+              <a:t>，</a:t>
+            </a:r>
+            <a:r>
+              <a:rPr kumimoji="1" lang="zh-CN" altLang="en-US" dirty="0">
+                <a:latin typeface="微软雅黑" panose="020B0503020204020204" pitchFamily="34" charset="-122"/>
+                <a:ea typeface="微软雅黑" panose="020B0503020204020204" pitchFamily="34" charset="-122"/>
+              </a:rPr>
+              <a:t>文件大小，文件描述符等一些额外的信息，存储到</a:t>
             </a:r>
             <a:r>
               <a:rPr kumimoji="1" lang="en-US" altLang="zh-CN" dirty="0">
@@ -6394,281 +7049,7 @@
                 <a:latin typeface="微软雅黑" panose="020B0503020204020204" pitchFamily="34" charset="-122"/>
                 <a:ea typeface="微软雅黑" panose="020B0503020204020204" pitchFamily="34" charset="-122"/>
               </a:rPr>
-              <a:t>时，会插入到</a:t>
-            </a:r>
-            <a:r>
-              <a:rPr kumimoji="1" lang="en-US" altLang="zh-CN" dirty="0">
-                <a:latin typeface="微软雅黑" panose="020B0503020204020204" pitchFamily="34" charset="-122"/>
-                <a:ea typeface="微软雅黑" panose="020B0503020204020204" pitchFamily="34" charset="-122"/>
-              </a:rPr>
-              <a:t>global_state</a:t>
-            </a:r>
-            <a:r>
-              <a:rPr kumimoji="1" lang="zh-CN" altLang="en-US" dirty="0">
-                <a:latin typeface="微软雅黑" panose="020B0503020204020204" pitchFamily="34" charset="-122"/>
-                <a:ea typeface="微软雅黑" panose="020B0503020204020204" pitchFamily="34" charset="-122"/>
-              </a:rPr>
-              <a:t>中的</a:t>
-            </a:r>
-            <a:r>
-              <a:rPr kumimoji="1" lang="en-US" altLang="zh-CN" dirty="0">
-                <a:latin typeface="微软雅黑" panose="020B0503020204020204" pitchFamily="34" charset="-122"/>
-                <a:ea typeface="微软雅黑" panose="020B0503020204020204" pitchFamily="34" charset="-122"/>
-              </a:rPr>
-              <a:t>accessor* acslist</a:t>
-            </a:r>
-            <a:r>
-              <a:rPr kumimoji="1" lang="zh-CN" altLang="en-US" dirty="0">
-                <a:latin typeface="微软雅黑" panose="020B0503020204020204" pitchFamily="34" charset="-122"/>
-                <a:ea typeface="微软雅黑" panose="020B0503020204020204" pitchFamily="34" charset="-122"/>
-              </a:rPr>
-              <a:t>，表示当前进程连接到的所有共享内存。</a:t>
-            </a:r>
-            <a:endParaRPr kumimoji="1" lang="zh-CN" altLang="en-US" dirty="0">
-              <a:latin typeface="微软雅黑" panose="020B0503020204020204" pitchFamily="34" charset="-122"/>
-              <a:ea typeface="微软雅黑" panose="020B0503020204020204" pitchFamily="34" charset="-122"/>
-            </a:endParaRPr>
-          </a:p>
-          <a:p>
-            <a:pPr>
-              <a:lnSpc>
-                <a:spcPct val="150000"/>
-              </a:lnSpc>
-              <a:spcBef>
-                <a:spcPts val="600"/>
-              </a:spcBef>
-              <a:spcAft>
-                <a:spcPts val="600"/>
-              </a:spcAft>
-            </a:pPr>
-            <a:endParaRPr kumimoji="1" lang="en-US" altLang="zh-CN" dirty="0">
-              <a:latin typeface="微软雅黑" panose="020B0503020204020204" pitchFamily="34" charset="-122"/>
-              <a:ea typeface="微软雅黑" panose="020B0503020204020204" pitchFamily="34" charset="-122"/>
-            </a:endParaRPr>
-          </a:p>
-          <a:p>
-            <a:pPr>
-              <a:lnSpc>
-                <a:spcPct val="150000"/>
-              </a:lnSpc>
-              <a:spcBef>
-                <a:spcPts val="600"/>
-              </a:spcBef>
-              <a:spcAft>
-                <a:spcPts val="600"/>
-              </a:spcAft>
-            </a:pPr>
-            <a:r>
-              <a:rPr kumimoji="1" lang="zh-CN" altLang="en-US" dirty="0">
-                <a:latin typeface="微软雅黑" panose="020B0503020204020204" pitchFamily="34" charset="-122"/>
-                <a:ea typeface="微软雅黑" panose="020B0503020204020204" pitchFamily="34" charset="-122"/>
-              </a:rPr>
-              <a:t>每当试图生成一个新的短字符串时，除了在已有的</a:t>
-            </a:r>
-            <a:r>
-              <a:rPr kumimoji="1" lang="en-US" altLang="zh-CN" dirty="0">
-                <a:latin typeface="微软雅黑" panose="020B0503020204020204" pitchFamily="34" charset="-122"/>
-                <a:ea typeface="微软雅黑" panose="020B0503020204020204" pitchFamily="34" charset="-122"/>
-              </a:rPr>
-              <a:t>stringtable</a:t>
-            </a:r>
-            <a:r>
-              <a:rPr kumimoji="1" lang="zh-CN" altLang="en-US" dirty="0">
-                <a:latin typeface="微软雅黑" panose="020B0503020204020204" pitchFamily="34" charset="-122"/>
-                <a:ea typeface="微软雅黑" panose="020B0503020204020204" pitchFamily="34" charset="-122"/>
-              </a:rPr>
-              <a:t>检查之外，还需要遍历</a:t>
-            </a:r>
-            <a:r>
-              <a:rPr kumimoji="1" lang="en-US" altLang="zh-CN" dirty="0">
-                <a:latin typeface="微软雅黑" panose="020B0503020204020204" pitchFamily="34" charset="-122"/>
-                <a:ea typeface="微软雅黑" panose="020B0503020204020204" pitchFamily="34" charset="-122"/>
-              </a:rPr>
-              <a:t>acslist</a:t>
-            </a:r>
-            <a:r>
-              <a:rPr kumimoji="1" lang="zh-CN" altLang="en-US" dirty="0">
-                <a:latin typeface="微软雅黑" panose="020B0503020204020204" pitchFamily="34" charset="-122"/>
-                <a:ea typeface="微软雅黑" panose="020B0503020204020204" pitchFamily="34" charset="-122"/>
-              </a:rPr>
-              <a:t>，检查是否有内容相同的</a:t>
-            </a:r>
-            <a:r>
-              <a:rPr kumimoji="1" lang="en-US" altLang="zh-CN" dirty="0">
-                <a:latin typeface="微软雅黑" panose="020B0503020204020204" pitchFamily="34" charset="-122"/>
-                <a:ea typeface="微软雅黑" panose="020B0503020204020204" pitchFamily="34" charset="-122"/>
-              </a:rPr>
-              <a:t>TString</a:t>
-            </a:r>
-            <a:r>
-              <a:rPr kumimoji="1" lang="zh-CN" altLang="en-US" dirty="0">
-                <a:latin typeface="微软雅黑" panose="020B0503020204020204" pitchFamily="34" charset="-122"/>
-                <a:ea typeface="微软雅黑" panose="020B0503020204020204" pitchFamily="34" charset="-122"/>
-              </a:rPr>
-              <a:t>对象。这样保证了</a:t>
-            </a:r>
-            <a:r>
-              <a:rPr kumimoji="1" lang="en-US" altLang="zh-CN" dirty="0">
-                <a:latin typeface="微软雅黑" panose="020B0503020204020204" pitchFamily="34" charset="-122"/>
-                <a:ea typeface="微软雅黑" panose="020B0503020204020204" pitchFamily="34" charset="-122"/>
-              </a:rPr>
-              <a:t>lua</a:t>
-            </a:r>
-            <a:r>
-              <a:rPr kumimoji="1" lang="zh-CN" altLang="en-US" dirty="0">
-                <a:latin typeface="微软雅黑" panose="020B0503020204020204" pitchFamily="34" charset="-122"/>
-                <a:ea typeface="微软雅黑" panose="020B0503020204020204" pitchFamily="34" charset="-122"/>
-              </a:rPr>
-              <a:t>原有的，直接靠地址判断短字符串相等的机制仍然能够正常工作。</a:t>
-            </a:r>
-            <a:endParaRPr kumimoji="1" lang="zh-CN" altLang="en-US" dirty="0">
-              <a:latin typeface="微软雅黑" panose="020B0503020204020204" pitchFamily="34" charset="-122"/>
-              <a:ea typeface="微软雅黑" panose="020B0503020204020204" pitchFamily="34" charset="-122"/>
-            </a:endParaRPr>
-          </a:p>
-          <a:p>
-            <a:pPr>
-              <a:lnSpc>
-                <a:spcPct val="150000"/>
-              </a:lnSpc>
-              <a:spcBef>
-                <a:spcPts val="600"/>
-              </a:spcBef>
-              <a:spcAft>
-                <a:spcPts val="600"/>
-              </a:spcAft>
-            </a:pPr>
-            <a:r>
-              <a:rPr kumimoji="1" lang="zh-CN" altLang="en-US" dirty="0">
-                <a:latin typeface="微软雅黑" panose="020B0503020204020204" pitchFamily="34" charset="-122"/>
-                <a:ea typeface="微软雅黑" panose="020B0503020204020204" pitchFamily="34" charset="-122"/>
-              </a:rPr>
-              <a:t>检查一个</a:t>
-            </a:r>
-            <a:r>
-              <a:rPr kumimoji="1" lang="en-US" altLang="zh-CN" dirty="0">
-                <a:latin typeface="微软雅黑" panose="020B0503020204020204" pitchFamily="34" charset="-122"/>
-                <a:ea typeface="微软雅黑" panose="020B0503020204020204" pitchFamily="34" charset="-122"/>
-              </a:rPr>
-              <a:t>string</a:t>
-            </a:r>
-            <a:r>
-              <a:rPr kumimoji="1" lang="zh-CN" altLang="en-US" dirty="0">
-                <a:latin typeface="微软雅黑" panose="020B0503020204020204" pitchFamily="34" charset="-122"/>
-                <a:ea typeface="微软雅黑" panose="020B0503020204020204" pitchFamily="34" charset="-122"/>
-              </a:rPr>
-              <a:t>是否在指定</a:t>
-            </a:r>
-            <a:r>
-              <a:rPr kumimoji="1" lang="en-US" altLang="zh-CN" dirty="0">
-                <a:latin typeface="微软雅黑" panose="020B0503020204020204" pitchFamily="34" charset="-122"/>
-                <a:ea typeface="微软雅黑" panose="020B0503020204020204" pitchFamily="34" charset="-122"/>
-              </a:rPr>
-              <a:t>accessor</a:t>
-            </a:r>
-            <a:r>
-              <a:rPr kumimoji="1" lang="zh-CN" altLang="en-US" dirty="0">
-                <a:latin typeface="微软雅黑" panose="020B0503020204020204" pitchFamily="34" charset="-122"/>
-                <a:ea typeface="微软雅黑" panose="020B0503020204020204" pitchFamily="34" charset="-122"/>
-              </a:rPr>
-              <a:t>中是</a:t>
-            </a:r>
-            <a:r>
-              <a:rPr kumimoji="1" lang="en-US" altLang="zh-CN" dirty="0">
-                <a:latin typeface="微软雅黑" panose="020B0503020204020204" pitchFamily="34" charset="-122"/>
-                <a:ea typeface="微软雅黑" panose="020B0503020204020204" pitchFamily="34" charset="-122"/>
-              </a:rPr>
-              <a:t>O(1)</a:t>
-            </a:r>
-            <a:r>
-              <a:rPr kumimoji="1" lang="zh-CN" altLang="en-US" dirty="0">
-                <a:latin typeface="微软雅黑" panose="020B0503020204020204" pitchFamily="34" charset="-122"/>
-                <a:ea typeface="微软雅黑" panose="020B0503020204020204" pitchFamily="34" charset="-122"/>
-              </a:rPr>
-              <a:t>的。对于需要加载多个配置文件的情况，数量很大时可以通过后述工具转化为</a:t>
-            </a:r>
-            <a:r>
-              <a:rPr kumimoji="1" lang="zh-CN" altLang="en-US" dirty="0">
-                <a:latin typeface="微软雅黑" panose="020B0503020204020204" pitchFamily="34" charset="-122"/>
-                <a:ea typeface="微软雅黑" panose="020B0503020204020204" pitchFamily="34" charset="-122"/>
-              </a:rPr>
-              <a:t>单个文件。</a:t>
-            </a:r>
-            <a:endParaRPr kumimoji="1" lang="zh-CN" altLang="en-US" dirty="0">
-              <a:latin typeface="微软雅黑" panose="020B0503020204020204" pitchFamily="34" charset="-122"/>
-              <a:ea typeface="微软雅黑" panose="020B0503020204020204" pitchFamily="34" charset="-122"/>
-            </a:endParaRPr>
-          </a:p>
-          <a:p>
-            <a:pPr>
-              <a:lnSpc>
-                <a:spcPct val="150000"/>
-              </a:lnSpc>
-              <a:spcBef>
-                <a:spcPts val="600"/>
-              </a:spcBef>
-              <a:spcAft>
-                <a:spcPts val="600"/>
-              </a:spcAft>
-            </a:pPr>
-            <a:endParaRPr kumimoji="1" lang="en-US" altLang="zh-CN" dirty="0">
-              <a:latin typeface="微软雅黑" panose="020B0503020204020204" pitchFamily="34" charset="-122"/>
-              <a:ea typeface="微软雅黑" panose="020B0503020204020204" pitchFamily="34" charset="-122"/>
-            </a:endParaRPr>
-          </a:p>
-          <a:p>
-            <a:pPr>
-              <a:lnSpc>
-                <a:spcPct val="150000"/>
-              </a:lnSpc>
-              <a:spcBef>
-                <a:spcPts val="600"/>
-              </a:spcBef>
-              <a:spcAft>
-                <a:spcPts val="600"/>
-              </a:spcAft>
-            </a:pPr>
-            <a:r>
-              <a:rPr kumimoji="1" lang="en-US" altLang="zh-CN" dirty="0">
-                <a:latin typeface="微软雅黑" panose="020B0503020204020204" pitchFamily="34" charset="-122"/>
-                <a:ea typeface="微软雅黑" panose="020B0503020204020204" pitchFamily="34" charset="-122"/>
-              </a:rPr>
-              <a:t>accessor</a:t>
-            </a:r>
-            <a:r>
-              <a:rPr kumimoji="1" lang="zh-CN" altLang="en-US" dirty="0">
-                <a:latin typeface="微软雅黑" panose="020B0503020204020204" pitchFamily="34" charset="-122"/>
-                <a:ea typeface="微软雅黑" panose="020B0503020204020204" pitchFamily="34" charset="-122"/>
-              </a:rPr>
-              <a:t>对象不在</a:t>
-            </a:r>
-            <a:r>
-              <a:rPr kumimoji="1" lang="en-US" altLang="zh-CN" dirty="0">
-                <a:latin typeface="微软雅黑" panose="020B0503020204020204" pitchFamily="34" charset="-122"/>
-                <a:ea typeface="微软雅黑" panose="020B0503020204020204" pitchFamily="34" charset="-122"/>
-              </a:rPr>
-              <a:t>allgc</a:t>
-            </a:r>
-            <a:r>
-              <a:rPr kumimoji="1" lang="zh-CN" altLang="en-US" dirty="0">
-                <a:latin typeface="微软雅黑" panose="020B0503020204020204" pitchFamily="34" charset="-122"/>
-                <a:ea typeface="微软雅黑" panose="020B0503020204020204" pitchFamily="34" charset="-122"/>
-              </a:rPr>
-              <a:t>链表上，在调用</a:t>
-            </a:r>
-            <a:r>
-              <a:rPr kumimoji="1" lang="en-US" altLang="zh-CN" dirty="0">
-                <a:latin typeface="微软雅黑" panose="020B0503020204020204" pitchFamily="34" charset="-122"/>
-                <a:ea typeface="微软雅黑" panose="020B0503020204020204" pitchFamily="34" charset="-122"/>
-              </a:rPr>
-              <a:t>lua_close</a:t>
-            </a:r>
-            <a:r>
-              <a:rPr kumimoji="1" lang="zh-CN" altLang="en-US" dirty="0">
-                <a:latin typeface="微软雅黑" panose="020B0503020204020204" pitchFamily="34" charset="-122"/>
-                <a:ea typeface="微软雅黑" panose="020B0503020204020204" pitchFamily="34" charset="-122"/>
-              </a:rPr>
-              <a:t>时才被释放。</a:t>
+              <a:t>结构体中</a:t>
             </a:r>
             <a:endParaRPr kumimoji="1" lang="zh-CN" altLang="en-US" dirty="0">
               <a:latin typeface="微软雅黑" panose="020B0503020204020204" pitchFamily="34" charset="-122"/>
@@ -6704,6 +7085,30 @@
           <a:xfrm>
             <a:off x="10939463" y="6430128"/>
             <a:ext cx="763381" cy="139201"/>
+          </a:xfrm>
+          <a:prstGeom prst="rect">
+            <a:avLst/>
+          </a:prstGeom>
+        </p:spPr>
+      </p:pic>
+      <p:pic>
+        <p:nvPicPr>
+          <p:cNvPr id="2" name="图片 1"/>
+          <p:cNvPicPr>
+            <a:picLocks noChangeAspect="1"/>
+          </p:cNvPicPr>
+          <p:nvPr/>
+        </p:nvPicPr>
+        <p:blipFill>
+          <a:blip r:embed="rId3"/>
+          <a:stretch>
+            <a:fillRect/>
+          </a:stretch>
+        </p:blipFill>
+        <p:spPr>
+          <a:xfrm>
+            <a:off x="514350" y="2206625"/>
+            <a:ext cx="6477000" cy="4362450"/>
           </a:xfrm>
           <a:prstGeom prst="rect">
             <a:avLst/>
@@ -6794,7 +7199,7 @@
                 <a:latin typeface="微软雅黑" panose="020B0503020204020204" pitchFamily="34" charset="-122"/>
                 <a:ea typeface="微软雅黑" panose="020B0503020204020204" pitchFamily="34" charset="-122"/>
               </a:rPr>
-              <a:t>访问数据</a:t>
+              <a:t>读取文件</a:t>
             </a:r>
             <a:endParaRPr kumimoji="1" lang="zh-CN" altLang="en-US" sz="3000" b="1" dirty="0">
               <a:solidFill>
@@ -6854,7 +7259,7 @@
         <p:spPr>
           <a:xfrm>
             <a:off x="780415" y="1256030"/>
-            <a:ext cx="10404475" cy="5005705"/>
+            <a:ext cx="10404475" cy="5125085"/>
           </a:xfrm>
           <a:prstGeom prst="rect">
             <a:avLst/>
@@ -6879,72 +7284,11 @@
               </a:spcAft>
             </a:pPr>
             <a:r>
-              <a:rPr kumimoji="1" lang="en-US" altLang="zh-CN" dirty="0">
-                <a:latin typeface="微软雅黑" panose="020B0503020204020204" pitchFamily="34" charset="-122"/>
-                <a:ea typeface="微软雅黑" panose="020B0503020204020204" pitchFamily="34" charset="-122"/>
-              </a:rPr>
-              <a:t>sharedata</a:t>
-            </a:r>
-            <a:r>
-              <a:rPr kumimoji="1" lang="zh-CN" altLang="en-US" dirty="0">
-                <a:latin typeface="微软雅黑" panose="020B0503020204020204" pitchFamily="34" charset="-122"/>
-                <a:ea typeface="微软雅黑" panose="020B0503020204020204" pitchFamily="34" charset="-122"/>
-                <a:sym typeface="+mn-ea"/>
-              </a:rPr>
-              <a:t>是</a:t>
-            </a:r>
-            <a:r>
-              <a:rPr kumimoji="1" lang="en-US" altLang="zh-CN" dirty="0">
-                <a:latin typeface="微软雅黑" panose="020B0503020204020204" pitchFamily="34" charset="-122"/>
-                <a:ea typeface="微软雅黑" panose="020B0503020204020204" pitchFamily="34" charset="-122"/>
-                <a:sym typeface="+mn-ea"/>
-              </a:rPr>
-              <a:t>push</a:t>
-            </a:r>
-            <a:r>
-              <a:rPr kumimoji="1" lang="zh-CN" altLang="en-US" dirty="0">
-                <a:latin typeface="微软雅黑" panose="020B0503020204020204" pitchFamily="34" charset="-122"/>
-                <a:ea typeface="微软雅黑" panose="020B0503020204020204" pitchFamily="34" charset="-122"/>
-                <a:sym typeface="+mn-ea"/>
-              </a:rPr>
-              <a:t>到</a:t>
-            </a:r>
-            <a:r>
-              <a:rPr kumimoji="1" lang="en-US" altLang="zh-CN" dirty="0">
-                <a:latin typeface="微软雅黑" panose="020B0503020204020204" pitchFamily="34" charset="-122"/>
-                <a:ea typeface="微软雅黑" panose="020B0503020204020204" pitchFamily="34" charset="-122"/>
-                <a:sym typeface="+mn-ea"/>
-              </a:rPr>
-              <a:t>Lua</a:t>
-            </a:r>
-            <a:r>
-              <a:rPr kumimoji="1" lang="zh-CN" altLang="en-US" dirty="0">
-                <a:latin typeface="微软雅黑" panose="020B0503020204020204" pitchFamily="34" charset="-122"/>
-                <a:ea typeface="微软雅黑" panose="020B0503020204020204" pitchFamily="34" charset="-122"/>
-                <a:sym typeface="+mn-ea"/>
-              </a:rPr>
-              <a:t>栈上，并用于访问数据的结构</a:t>
-            </a:r>
-            <a:r>
-              <a:rPr kumimoji="1" lang="zh-CN" altLang="en-US" dirty="0">
-                <a:latin typeface="微软雅黑" panose="020B0503020204020204" pitchFamily="34" charset="-122"/>
-                <a:ea typeface="微软雅黑" panose="020B0503020204020204" pitchFamily="34" charset="-122"/>
-              </a:rPr>
-              <a:t>，每个</a:t>
-            </a:r>
-            <a:r>
-              <a:rPr kumimoji="1" lang="en-US" altLang="zh-CN" dirty="0">
-                <a:latin typeface="微软雅黑" panose="020B0503020204020204" pitchFamily="34" charset="-122"/>
-                <a:ea typeface="微软雅黑" panose="020B0503020204020204" pitchFamily="34" charset="-122"/>
-              </a:rPr>
-              <a:t>sharedata</a:t>
-            </a:r>
-            <a:r>
-              <a:rPr kumimoji="1" lang="zh-CN" altLang="en-US" dirty="0">
-                <a:latin typeface="微软雅黑" panose="020B0503020204020204" pitchFamily="34" charset="-122"/>
-                <a:ea typeface="微软雅黑" panose="020B0503020204020204" pitchFamily="34" charset="-122"/>
-              </a:rPr>
-              <a:t>记录一个</a:t>
+              <a:rPr kumimoji="1" lang="zh-CN" altLang="en-US" dirty="0">
+                <a:latin typeface="微软雅黑" panose="020B0503020204020204" pitchFamily="34" charset="-122"/>
+                <a:ea typeface="微软雅黑" panose="020B0503020204020204" pitchFamily="34" charset="-122"/>
+              </a:rPr>
+              <a:t>每当创建一个</a:t>
             </a:r>
             <a:r>
               <a:rPr kumimoji="1" lang="en-US" altLang="zh-CN" dirty="0">
@@ -6958,21 +7302,35 @@
                 <a:latin typeface="微软雅黑" panose="020B0503020204020204" pitchFamily="34" charset="-122"/>
                 <a:ea typeface="微软雅黑" panose="020B0503020204020204" pitchFamily="34" charset="-122"/>
               </a:rPr>
-              <a:t>指针、一个</a:t>
-            </a:r>
-            <a:r>
-              <a:rPr kumimoji="1" lang="en-US" altLang="zh-CN" dirty="0">
-                <a:latin typeface="微软雅黑" panose="020B0503020204020204" pitchFamily="34" charset="-122"/>
-                <a:ea typeface="微软雅黑" panose="020B0503020204020204" pitchFamily="34" charset="-122"/>
-              </a:rPr>
-              <a:t>pos</a:t>
-            </a:r>
-            <a:r>
-              <a:rPr kumimoji="1" lang="zh-CN" altLang="en-US" dirty="0">
-                <a:latin typeface="微软雅黑" panose="020B0503020204020204" pitchFamily="34" charset="-122"/>
-                <a:ea typeface="微软雅黑" panose="020B0503020204020204" pitchFamily="34" charset="-122"/>
-              </a:rPr>
-              <a:t>。</a:t>
+              <a:t>时，会插入到</a:t>
+            </a:r>
+            <a:r>
+              <a:rPr kumimoji="1" lang="en-US" altLang="zh-CN" dirty="0">
+                <a:latin typeface="微软雅黑" panose="020B0503020204020204" pitchFamily="34" charset="-122"/>
+                <a:ea typeface="微软雅黑" panose="020B0503020204020204" pitchFamily="34" charset="-122"/>
+              </a:rPr>
+              <a:t>global_state</a:t>
+            </a:r>
+            <a:r>
+              <a:rPr kumimoji="1" lang="zh-CN" altLang="en-US" dirty="0">
+                <a:latin typeface="微软雅黑" panose="020B0503020204020204" pitchFamily="34" charset="-122"/>
+                <a:ea typeface="微软雅黑" panose="020B0503020204020204" pitchFamily="34" charset="-122"/>
+              </a:rPr>
+              <a:t>中的</a:t>
+            </a:r>
+            <a:r>
+              <a:rPr kumimoji="1" lang="en-US" altLang="zh-CN" dirty="0">
+                <a:latin typeface="微软雅黑" panose="020B0503020204020204" pitchFamily="34" charset="-122"/>
+                <a:ea typeface="微软雅黑" panose="020B0503020204020204" pitchFamily="34" charset="-122"/>
+              </a:rPr>
+              <a:t>accessor* acslist</a:t>
+            </a:r>
+            <a:r>
+              <a:rPr kumimoji="1" lang="zh-CN" altLang="en-US" dirty="0">
+                <a:latin typeface="微软雅黑" panose="020B0503020204020204" pitchFamily="34" charset="-122"/>
+                <a:ea typeface="微软雅黑" panose="020B0503020204020204" pitchFamily="34" charset="-122"/>
+              </a:rPr>
+              <a:t>，表示当前进程连接到的所有共享内存。</a:t>
             </a:r>
             <a:endParaRPr kumimoji="1" lang="zh-CN" altLang="en-US" dirty="0">
               <a:latin typeface="微软雅黑" panose="020B0503020204020204" pitchFamily="34" charset="-122"/>
@@ -6991,79 +7349,7 @@
                 <a:spcPts val="600"/>
               </a:spcAft>
             </a:pPr>
-            <a:r>
-              <a:rPr kumimoji="1" lang="zh-CN" altLang="en-US" dirty="0">
-                <a:latin typeface="微软雅黑" panose="020B0503020204020204" pitchFamily="34" charset="-122"/>
-                <a:ea typeface="微软雅黑" panose="020B0503020204020204" pitchFamily="34" charset="-122"/>
-                <a:sym typeface="+mn-ea"/>
-              </a:rPr>
-              <a:t>通过</a:t>
-            </a:r>
-            <a:r>
-              <a:rPr kumimoji="1" lang="en-US" altLang="zh-CN" dirty="0">
-                <a:latin typeface="微软雅黑" panose="020B0503020204020204" pitchFamily="34" charset="-122"/>
-                <a:ea typeface="微软雅黑" panose="020B0503020204020204" pitchFamily="34" charset="-122"/>
-                <a:sym typeface="+mn-ea"/>
-              </a:rPr>
-              <a:t>accessor</a:t>
-            </a:r>
-            <a:r>
-              <a:rPr kumimoji="1" lang="zh-CN" altLang="en-US" dirty="0">
-                <a:latin typeface="微软雅黑" panose="020B0503020204020204" pitchFamily="34" charset="-122"/>
-                <a:ea typeface="微软雅黑" panose="020B0503020204020204" pitchFamily="34" charset="-122"/>
-                <a:sym typeface="+mn-ea"/>
-              </a:rPr>
-              <a:t>指针</a:t>
-            </a:r>
-            <a:r>
-              <a:rPr kumimoji="1" lang="en-US" altLang="zh-CN" dirty="0">
-                <a:latin typeface="微软雅黑" panose="020B0503020204020204" pitchFamily="34" charset="-122"/>
-                <a:ea typeface="微软雅黑" panose="020B0503020204020204" pitchFamily="34" charset="-122"/>
-                <a:sym typeface="+mn-ea"/>
-              </a:rPr>
-              <a:t>+</a:t>
-            </a:r>
-            <a:r>
-              <a:rPr kumimoji="1" lang="zh-CN" altLang="en-US" dirty="0">
-                <a:latin typeface="微软雅黑" panose="020B0503020204020204" pitchFamily="34" charset="-122"/>
-                <a:ea typeface="微软雅黑" panose="020B0503020204020204" pitchFamily="34" charset="-122"/>
-                <a:sym typeface="+mn-ea"/>
-              </a:rPr>
-              <a:t>当前节点编号</a:t>
-            </a:r>
-            <a:r>
-              <a:rPr kumimoji="1" lang="en-US" altLang="zh-CN" dirty="0">
-                <a:latin typeface="微软雅黑" panose="020B0503020204020204" pitchFamily="34" charset="-122"/>
-                <a:ea typeface="微软雅黑" panose="020B0503020204020204" pitchFamily="34" charset="-122"/>
-                <a:sym typeface="+mn-ea"/>
-              </a:rPr>
-              <a:t>pos</a:t>
-            </a:r>
-            <a:r>
-              <a:rPr kumimoji="1" lang="zh-CN" altLang="en-US" dirty="0">
-                <a:latin typeface="微软雅黑" panose="020B0503020204020204" pitchFamily="34" charset="-122"/>
-                <a:ea typeface="微软雅黑" panose="020B0503020204020204" pitchFamily="34" charset="-122"/>
-                <a:sym typeface="+mn-ea"/>
-              </a:rPr>
-              <a:t>，能够在树形结构上移动到新的</a:t>
-            </a:r>
-            <a:r>
-              <a:rPr kumimoji="1" lang="en-US" altLang="zh-CN" dirty="0">
-                <a:latin typeface="微软雅黑" panose="020B0503020204020204" pitchFamily="34" charset="-122"/>
-                <a:ea typeface="微软雅黑" panose="020B0503020204020204" pitchFamily="34" charset="-122"/>
-                <a:sym typeface="+mn-ea"/>
-              </a:rPr>
-              <a:t>pos</a:t>
-            </a:r>
-            <a:r>
-              <a:rPr kumimoji="1" lang="zh-CN" altLang="en-US" dirty="0">
-                <a:latin typeface="微软雅黑" panose="020B0503020204020204" pitchFamily="34" charset="-122"/>
-                <a:ea typeface="微软雅黑" panose="020B0503020204020204" pitchFamily="34" charset="-122"/>
-                <a:sym typeface="+mn-ea"/>
-              </a:rPr>
-              <a:t>，并查询相关数据。</a:t>
-            </a:r>
-            <a:endParaRPr kumimoji="1" lang="zh-CN" altLang="en-US" dirty="0">
+            <a:endParaRPr kumimoji="1" lang="en-US" altLang="zh-CN" dirty="0">
               <a:latin typeface="微软雅黑" panose="020B0503020204020204" pitchFamily="34" charset="-122"/>
               <a:ea typeface="微软雅黑" panose="020B0503020204020204" pitchFamily="34" charset="-122"/>
             </a:endParaRPr>
@@ -7085,49 +7371,212 @@
                 <a:latin typeface="微软雅黑" panose="020B0503020204020204" pitchFamily="34" charset="-122"/>
                 <a:ea typeface="微软雅黑" panose="020B0503020204020204" pitchFamily="34" charset="-122"/>
               </a:rPr>
-              <a:t>当从</a:t>
-            </a:r>
-            <a:r>
-              <a:rPr kumimoji="1" lang="en-US" altLang="zh-CN" dirty="0">
-                <a:latin typeface="微软雅黑" panose="020B0503020204020204" pitchFamily="34" charset="-122"/>
-                <a:ea typeface="微软雅黑" panose="020B0503020204020204" pitchFamily="34" charset="-122"/>
-              </a:rPr>
-              <a:t>sharedata</a:t>
-            </a:r>
-            <a:r>
-              <a:rPr kumimoji="1" lang="zh-CN" altLang="en-US" dirty="0">
-                <a:latin typeface="微软雅黑" panose="020B0503020204020204" pitchFamily="34" charset="-122"/>
-                <a:ea typeface="微软雅黑" panose="020B0503020204020204" pitchFamily="34" charset="-122"/>
-              </a:rPr>
-              <a:t>上</a:t>
-            </a:r>
-            <a:r>
-              <a:rPr kumimoji="1" lang="en-US" altLang="zh-CN" dirty="0">
-                <a:latin typeface="微软雅黑" panose="020B0503020204020204" pitchFamily="34" charset="-122"/>
-                <a:ea typeface="微软雅黑" panose="020B0503020204020204" pitchFamily="34" charset="-122"/>
-              </a:rPr>
-              <a:t>index</a:t>
-            </a:r>
-            <a:r>
-              <a:rPr kumimoji="1" lang="zh-CN" altLang="en-US" dirty="0">
-                <a:latin typeface="微软雅黑" panose="020B0503020204020204" pitchFamily="34" charset="-122"/>
-                <a:ea typeface="微软雅黑" panose="020B0503020204020204" pitchFamily="34" charset="-122"/>
-              </a:rPr>
-              <a:t>到一个非叶子节点时，会返回该节点对应的</a:t>
-            </a:r>
-            <a:r>
-              <a:rPr kumimoji="1" lang="en-US" altLang="zh-CN" dirty="0">
-                <a:latin typeface="微软雅黑" panose="020B0503020204020204" pitchFamily="34" charset="-122"/>
-                <a:ea typeface="微软雅黑" panose="020B0503020204020204" pitchFamily="34" charset="-122"/>
-              </a:rPr>
-              <a:t>sharedata</a:t>
-            </a:r>
-            <a:r>
-              <a:rPr kumimoji="1" lang="zh-CN" altLang="en-US" dirty="0">
-                <a:latin typeface="微软雅黑" panose="020B0503020204020204" pitchFamily="34" charset="-122"/>
-                <a:ea typeface="微软雅黑" panose="020B0503020204020204" pitchFamily="34" charset="-122"/>
-              </a:rPr>
-              <a:t>。否则返回对应的值。</a:t>
+              <a:t>每当试图生成一个新的短字符串时，除了在已有的</a:t>
+            </a:r>
+            <a:r>
+              <a:rPr kumimoji="1" lang="en-US" altLang="zh-CN" dirty="0">
+                <a:latin typeface="微软雅黑" panose="020B0503020204020204" pitchFamily="34" charset="-122"/>
+                <a:ea typeface="微软雅黑" panose="020B0503020204020204" pitchFamily="34" charset="-122"/>
+              </a:rPr>
+              <a:t>stringtable</a:t>
+            </a:r>
+            <a:r>
+              <a:rPr kumimoji="1" lang="zh-CN" altLang="en-US" dirty="0">
+                <a:latin typeface="微软雅黑" panose="020B0503020204020204" pitchFamily="34" charset="-122"/>
+                <a:ea typeface="微软雅黑" panose="020B0503020204020204" pitchFamily="34" charset="-122"/>
+              </a:rPr>
+              <a:t>检查之外，还需要遍历</a:t>
+            </a:r>
+            <a:r>
+              <a:rPr kumimoji="1" lang="en-US" altLang="zh-CN" dirty="0">
+                <a:latin typeface="微软雅黑" panose="020B0503020204020204" pitchFamily="34" charset="-122"/>
+                <a:ea typeface="微软雅黑" panose="020B0503020204020204" pitchFamily="34" charset="-122"/>
+              </a:rPr>
+              <a:t>acslist</a:t>
+            </a:r>
+            <a:r>
+              <a:rPr kumimoji="1" lang="zh-CN" altLang="en-US" dirty="0">
+                <a:latin typeface="微软雅黑" panose="020B0503020204020204" pitchFamily="34" charset="-122"/>
+                <a:ea typeface="微软雅黑" panose="020B0503020204020204" pitchFamily="34" charset="-122"/>
+              </a:rPr>
+              <a:t>，检查是否有内容相同的</a:t>
+            </a:r>
+            <a:r>
+              <a:rPr kumimoji="1" lang="en-US" altLang="zh-CN" dirty="0">
+                <a:latin typeface="微软雅黑" panose="020B0503020204020204" pitchFamily="34" charset="-122"/>
+                <a:ea typeface="微软雅黑" panose="020B0503020204020204" pitchFamily="34" charset="-122"/>
+              </a:rPr>
+              <a:t>TString</a:t>
+            </a:r>
+            <a:r>
+              <a:rPr kumimoji="1" lang="zh-CN" altLang="en-US" dirty="0">
+                <a:latin typeface="微软雅黑" panose="020B0503020204020204" pitchFamily="34" charset="-122"/>
+                <a:ea typeface="微软雅黑" panose="020B0503020204020204" pitchFamily="34" charset="-122"/>
+              </a:rPr>
+              <a:t>对象。这样保证了</a:t>
+            </a:r>
+            <a:r>
+              <a:rPr kumimoji="1" lang="en-US" altLang="zh-CN" dirty="0">
+                <a:latin typeface="微软雅黑" panose="020B0503020204020204" pitchFamily="34" charset="-122"/>
+                <a:ea typeface="微软雅黑" panose="020B0503020204020204" pitchFamily="34" charset="-122"/>
+              </a:rPr>
+              <a:t>lua</a:t>
+            </a:r>
+            <a:r>
+              <a:rPr kumimoji="1" lang="zh-CN" altLang="en-US" dirty="0">
+                <a:latin typeface="微软雅黑" panose="020B0503020204020204" pitchFamily="34" charset="-122"/>
+                <a:ea typeface="微软雅黑" panose="020B0503020204020204" pitchFamily="34" charset="-122"/>
+              </a:rPr>
+              <a:t>原有的，直接靠地址判断短字符串相等的机制仍然能够正常工作。</a:t>
+            </a:r>
+            <a:endParaRPr kumimoji="1" lang="zh-CN" altLang="en-US" dirty="0">
+              <a:latin typeface="微软雅黑" panose="020B0503020204020204" pitchFamily="34" charset="-122"/>
+              <a:ea typeface="微软雅黑" panose="020B0503020204020204" pitchFamily="34" charset="-122"/>
+            </a:endParaRPr>
+          </a:p>
+          <a:p>
+            <a:pPr>
+              <a:lnSpc>
+                <a:spcPct val="150000"/>
+              </a:lnSpc>
+              <a:spcBef>
+                <a:spcPts val="600"/>
+              </a:spcBef>
+              <a:spcAft>
+                <a:spcPts val="600"/>
+              </a:spcAft>
+            </a:pPr>
+            <a:r>
+              <a:rPr kumimoji="1" lang="zh-CN" altLang="en-US" dirty="0">
+                <a:latin typeface="微软雅黑" panose="020B0503020204020204" pitchFamily="34" charset="-122"/>
+                <a:ea typeface="微软雅黑" panose="020B0503020204020204" pitchFamily="34" charset="-122"/>
+              </a:rPr>
+              <a:t>检查一个</a:t>
+            </a:r>
+            <a:r>
+              <a:rPr kumimoji="1" lang="en-US" altLang="zh-CN" dirty="0">
+                <a:latin typeface="微软雅黑" panose="020B0503020204020204" pitchFamily="34" charset="-122"/>
+                <a:ea typeface="微软雅黑" panose="020B0503020204020204" pitchFamily="34" charset="-122"/>
+              </a:rPr>
+              <a:t>string</a:t>
+            </a:r>
+            <a:r>
+              <a:rPr kumimoji="1" lang="zh-CN" altLang="en-US" dirty="0">
+                <a:latin typeface="微软雅黑" panose="020B0503020204020204" pitchFamily="34" charset="-122"/>
+                <a:ea typeface="微软雅黑" panose="020B0503020204020204" pitchFamily="34" charset="-122"/>
+              </a:rPr>
+              <a:t>是否在指定</a:t>
+            </a:r>
+            <a:r>
+              <a:rPr kumimoji="1" lang="en-US" altLang="zh-CN" dirty="0">
+                <a:latin typeface="微软雅黑" panose="020B0503020204020204" pitchFamily="34" charset="-122"/>
+                <a:ea typeface="微软雅黑" panose="020B0503020204020204" pitchFamily="34" charset="-122"/>
+              </a:rPr>
+              <a:t>accessor</a:t>
+            </a:r>
+            <a:r>
+              <a:rPr kumimoji="1" lang="zh-CN" altLang="en-US" dirty="0">
+                <a:latin typeface="微软雅黑" panose="020B0503020204020204" pitchFamily="34" charset="-122"/>
+                <a:ea typeface="微软雅黑" panose="020B0503020204020204" pitchFamily="34" charset="-122"/>
+              </a:rPr>
+              <a:t>中是</a:t>
+            </a:r>
+            <a:r>
+              <a:rPr kumimoji="1" lang="en-US" altLang="zh-CN" dirty="0">
+                <a:latin typeface="微软雅黑" panose="020B0503020204020204" pitchFamily="34" charset="-122"/>
+                <a:ea typeface="微软雅黑" panose="020B0503020204020204" pitchFamily="34" charset="-122"/>
+              </a:rPr>
+              <a:t>O(1)</a:t>
+            </a:r>
+            <a:r>
+              <a:rPr kumimoji="1" lang="zh-CN" altLang="en-US" dirty="0">
+                <a:latin typeface="微软雅黑" panose="020B0503020204020204" pitchFamily="34" charset="-122"/>
+                <a:ea typeface="微软雅黑" panose="020B0503020204020204" pitchFamily="34" charset="-122"/>
+              </a:rPr>
+              <a:t>的。对于需要加载多个配置文件的情况，数量很大时可以通过后述工具转化为</a:t>
+            </a:r>
+            <a:r>
+              <a:rPr kumimoji="1" lang="zh-CN" altLang="en-US" dirty="0">
+                <a:latin typeface="微软雅黑" panose="020B0503020204020204" pitchFamily="34" charset="-122"/>
+                <a:ea typeface="微软雅黑" panose="020B0503020204020204" pitchFamily="34" charset="-122"/>
+              </a:rPr>
+              <a:t>单个文件。</a:t>
+            </a:r>
+            <a:endParaRPr kumimoji="1" lang="zh-CN" altLang="en-US" dirty="0">
+              <a:latin typeface="微软雅黑" panose="020B0503020204020204" pitchFamily="34" charset="-122"/>
+              <a:ea typeface="微软雅黑" panose="020B0503020204020204" pitchFamily="34" charset="-122"/>
+            </a:endParaRPr>
+          </a:p>
+          <a:p>
+            <a:pPr>
+              <a:lnSpc>
+                <a:spcPct val="150000"/>
+              </a:lnSpc>
+              <a:spcBef>
+                <a:spcPts val="600"/>
+              </a:spcBef>
+              <a:spcAft>
+                <a:spcPts val="600"/>
+              </a:spcAft>
+            </a:pPr>
+            <a:endParaRPr kumimoji="1" lang="en-US" altLang="zh-CN" dirty="0">
+              <a:latin typeface="微软雅黑" panose="020B0503020204020204" pitchFamily="34" charset="-122"/>
+              <a:ea typeface="微软雅黑" panose="020B0503020204020204" pitchFamily="34" charset="-122"/>
+            </a:endParaRPr>
+          </a:p>
+          <a:p>
+            <a:pPr>
+              <a:lnSpc>
+                <a:spcPct val="150000"/>
+              </a:lnSpc>
+              <a:spcBef>
+                <a:spcPts val="600"/>
+              </a:spcBef>
+              <a:spcAft>
+                <a:spcPts val="600"/>
+              </a:spcAft>
+            </a:pPr>
+            <a:r>
+              <a:rPr kumimoji="1" lang="en-US" altLang="zh-CN" dirty="0">
+                <a:latin typeface="微软雅黑" panose="020B0503020204020204" pitchFamily="34" charset="-122"/>
+                <a:ea typeface="微软雅黑" panose="020B0503020204020204" pitchFamily="34" charset="-122"/>
+              </a:rPr>
+              <a:t>accessor</a:t>
+            </a:r>
+            <a:r>
+              <a:rPr kumimoji="1" lang="zh-CN" altLang="en-US" dirty="0">
+                <a:latin typeface="微软雅黑" panose="020B0503020204020204" pitchFamily="34" charset="-122"/>
+                <a:ea typeface="微软雅黑" panose="020B0503020204020204" pitchFamily="34" charset="-122"/>
+              </a:rPr>
+              <a:t>对象不在</a:t>
+            </a:r>
+            <a:r>
+              <a:rPr kumimoji="1" lang="en-US" altLang="zh-CN" dirty="0">
+                <a:latin typeface="微软雅黑" panose="020B0503020204020204" pitchFamily="34" charset="-122"/>
+                <a:ea typeface="微软雅黑" panose="020B0503020204020204" pitchFamily="34" charset="-122"/>
+              </a:rPr>
+              <a:t>allgc</a:t>
+            </a:r>
+            <a:r>
+              <a:rPr kumimoji="1" lang="zh-CN" altLang="en-US" dirty="0">
+                <a:latin typeface="微软雅黑" panose="020B0503020204020204" pitchFamily="34" charset="-122"/>
+                <a:ea typeface="微软雅黑" panose="020B0503020204020204" pitchFamily="34" charset="-122"/>
+              </a:rPr>
+              <a:t>链表上，在调用</a:t>
+            </a:r>
+            <a:r>
+              <a:rPr kumimoji="1" lang="en-US" altLang="zh-CN" dirty="0">
+                <a:latin typeface="微软雅黑" panose="020B0503020204020204" pitchFamily="34" charset="-122"/>
+                <a:ea typeface="微软雅黑" panose="020B0503020204020204" pitchFamily="34" charset="-122"/>
+              </a:rPr>
+              <a:t>lua_close</a:t>
+            </a:r>
+            <a:r>
+              <a:rPr kumimoji="1" lang="zh-CN" altLang="en-US" dirty="0">
+                <a:latin typeface="微软雅黑" panose="020B0503020204020204" pitchFamily="34" charset="-122"/>
+                <a:ea typeface="微软雅黑" panose="020B0503020204020204" pitchFamily="34" charset="-122"/>
+              </a:rPr>
+              <a:t>时才被释放。</a:t>
             </a:r>
             <a:endParaRPr kumimoji="1" lang="zh-CN" altLang="en-US" dirty="0">
               <a:latin typeface="微软雅黑" panose="020B0503020204020204" pitchFamily="34" charset="-122"/>
@@ -7253,7 +7702,7 @@
                 <a:latin typeface="微软雅黑" panose="020B0503020204020204" pitchFamily="34" charset="-122"/>
                 <a:ea typeface="微软雅黑" panose="020B0503020204020204" pitchFamily="34" charset="-122"/>
               </a:rPr>
-              <a:t>其他</a:t>
+              <a:t>访问数据</a:t>
             </a:r>
             <a:endParaRPr kumimoji="1" lang="zh-CN" altLang="en-US" sz="3000" b="1" dirty="0">
               <a:solidFill>
@@ -7313,7 +7762,7 @@
         <p:spPr>
           <a:xfrm>
             <a:off x="780415" y="1256030"/>
-            <a:ext cx="10404475" cy="4037965"/>
+            <a:ext cx="10404475" cy="5005705"/>
           </a:xfrm>
           <a:prstGeom prst="rect">
             <a:avLst/>
@@ -7338,30 +7787,41 @@
               </a:spcAft>
             </a:pPr>
             <a:r>
-              <a:rPr kumimoji="1" lang="zh-CN" altLang="en-US" dirty="0">
-                <a:latin typeface="微软雅黑" panose="020B0503020204020204" pitchFamily="34" charset="-122"/>
-                <a:ea typeface="微软雅黑" panose="020B0503020204020204" pitchFamily="34" charset="-122"/>
-              </a:rPr>
-              <a:t>在项目过程中，曾经使用的是</a:t>
-            </a:r>
-            <a:r>
-              <a:rPr kumimoji="1" lang="en-US" altLang="zh-CN" dirty="0">
-                <a:latin typeface="微软雅黑" panose="020B0503020204020204" pitchFamily="34" charset="-122"/>
-                <a:ea typeface="微软雅黑" panose="020B0503020204020204" pitchFamily="34" charset="-122"/>
-              </a:rPr>
-              <a:t>userdata</a:t>
-            </a:r>
-            <a:r>
-              <a:rPr kumimoji="1" lang="zh-CN" altLang="en-US" dirty="0">
-                <a:latin typeface="微软雅黑" panose="020B0503020204020204" pitchFamily="34" charset="-122"/>
-                <a:ea typeface="微软雅黑" panose="020B0503020204020204" pitchFamily="34" charset="-122"/>
-              </a:rPr>
-              <a:t>，不修改</a:t>
-            </a:r>
-            <a:r>
-              <a:rPr kumimoji="1" lang="en-US" altLang="zh-CN" dirty="0">
-                <a:latin typeface="微软雅黑" panose="020B0503020204020204" pitchFamily="34" charset="-122"/>
-                <a:ea typeface="微软雅黑" panose="020B0503020204020204" pitchFamily="34" charset="-122"/>
+              <a:rPr kumimoji="1" lang="en-US" altLang="zh-CN" dirty="0">
+                <a:latin typeface="微软雅黑" panose="020B0503020204020204" pitchFamily="34" charset="-122"/>
+                <a:ea typeface="微软雅黑" panose="020B0503020204020204" pitchFamily="34" charset="-122"/>
+              </a:rPr>
+              <a:t>sharedata</a:t>
+            </a:r>
+            <a:r>
+              <a:rPr kumimoji="1" lang="zh-CN" altLang="en-US" dirty="0">
+                <a:latin typeface="微软雅黑" panose="020B0503020204020204" pitchFamily="34" charset="-122"/>
+                <a:ea typeface="微软雅黑" panose="020B0503020204020204" pitchFamily="34" charset="-122"/>
+                <a:sym typeface="+mn-ea"/>
+              </a:rPr>
+              <a:t>是</a:t>
+            </a:r>
+            <a:r>
+              <a:rPr kumimoji="1" lang="en-US" altLang="zh-CN" dirty="0">
+                <a:latin typeface="微软雅黑" panose="020B0503020204020204" pitchFamily="34" charset="-122"/>
+                <a:ea typeface="微软雅黑" panose="020B0503020204020204" pitchFamily="34" charset="-122"/>
+                <a:sym typeface="+mn-ea"/>
+              </a:rPr>
+              <a:t>push</a:t>
+            </a:r>
+            <a:r>
+              <a:rPr kumimoji="1" lang="zh-CN" altLang="en-US" dirty="0">
+                <a:latin typeface="微软雅黑" panose="020B0503020204020204" pitchFamily="34" charset="-122"/>
+                <a:ea typeface="微软雅黑" panose="020B0503020204020204" pitchFamily="34" charset="-122"/>
+                <a:sym typeface="+mn-ea"/>
+              </a:rPr>
+              <a:t>到</a:t>
+            </a:r>
+            <a:r>
+              <a:rPr kumimoji="1" lang="en-US" altLang="zh-CN" dirty="0">
+                <a:latin typeface="微软雅黑" panose="020B0503020204020204" pitchFamily="34" charset="-122"/>
+                <a:ea typeface="微软雅黑" panose="020B0503020204020204" pitchFamily="34" charset="-122"/>
+                <a:sym typeface="+mn-ea"/>
               </a:rPr>
               <a:t>Lua</a:t>
             </a:r>
@@ -7369,64 +7829,58 @@
               <a:rPr kumimoji="1" lang="zh-CN" altLang="en-US" dirty="0">
                 <a:latin typeface="微软雅黑" panose="020B0503020204020204" pitchFamily="34" charset="-122"/>
                 <a:ea typeface="微软雅黑" panose="020B0503020204020204" pitchFamily="34" charset="-122"/>
-              </a:rPr>
-              <a:t>源码的方式。实现相对容易，但实际读取数据时，</a:t>
-            </a:r>
-            <a:r>
-              <a:rPr kumimoji="1" lang="en-US" altLang="zh-CN" dirty="0">
-                <a:latin typeface="微软雅黑" panose="020B0503020204020204" pitchFamily="34" charset="-122"/>
-                <a:ea typeface="微软雅黑" panose="020B0503020204020204" pitchFamily="34" charset="-122"/>
-              </a:rPr>
-              <a:t>TString</a:t>
-            </a:r>
-            <a:r>
-              <a:rPr kumimoji="1" lang="zh-CN" altLang="en-US" dirty="0">
-                <a:latin typeface="微软雅黑" panose="020B0503020204020204" pitchFamily="34" charset="-122"/>
-                <a:ea typeface="微软雅黑" panose="020B0503020204020204" pitchFamily="34" charset="-122"/>
-              </a:rPr>
-              <a:t>还是需要复制一份到</a:t>
-            </a:r>
-            <a:r>
-              <a:rPr kumimoji="1" lang="en-US" altLang="zh-CN" dirty="0">
-                <a:latin typeface="微软雅黑" panose="020B0503020204020204" pitchFamily="34" charset="-122"/>
-                <a:ea typeface="微软雅黑" panose="020B0503020204020204" pitchFamily="34" charset="-122"/>
-              </a:rPr>
-              <a:t>stringtable</a:t>
-            </a:r>
-            <a:r>
-              <a:rPr kumimoji="1" lang="zh-CN" altLang="en-US" dirty="0">
-                <a:latin typeface="微软雅黑" panose="020B0503020204020204" pitchFamily="34" charset="-122"/>
-                <a:ea typeface="微软雅黑" panose="020B0503020204020204" pitchFamily="34" charset="-122"/>
-              </a:rPr>
-              <a:t>中。在循环遍历时，由于临时对象被</a:t>
-            </a:r>
-            <a:r>
-              <a:rPr kumimoji="1" lang="en-US" altLang="zh-CN" dirty="0">
-                <a:latin typeface="微软雅黑" panose="020B0503020204020204" pitchFamily="34" charset="-122"/>
-                <a:ea typeface="微软雅黑" panose="020B0503020204020204" pitchFamily="34" charset="-122"/>
-              </a:rPr>
-              <a:t>gc</a:t>
-            </a:r>
-            <a:r>
-              <a:rPr kumimoji="1" lang="zh-CN" altLang="en-US" dirty="0">
-                <a:latin typeface="微软雅黑" panose="020B0503020204020204" pitchFamily="34" charset="-122"/>
-                <a:ea typeface="微软雅黑" panose="020B0503020204020204" pitchFamily="34" charset="-122"/>
-              </a:rPr>
-              <a:t>，没有在内存占用上</a:t>
-            </a:r>
-            <a:r>
-              <a:rPr kumimoji="1" lang="zh-CN" altLang="en-US" dirty="0">
-                <a:latin typeface="微软雅黑" panose="020B0503020204020204" pitchFamily="34" charset="-122"/>
-                <a:ea typeface="微软雅黑" panose="020B0503020204020204" pitchFamily="34" charset="-122"/>
-              </a:rPr>
-              <a:t>体现出来，但需要存储时就需要额外的</a:t>
-            </a:r>
-            <a:r>
-              <a:rPr kumimoji="1" lang="zh-CN" altLang="en-US" dirty="0">
-                <a:latin typeface="微软雅黑" panose="020B0503020204020204" pitchFamily="34" charset="-122"/>
-                <a:ea typeface="微软雅黑" panose="020B0503020204020204" pitchFamily="34" charset="-122"/>
-              </a:rPr>
-              <a:t>空间。</a:t>
+                <a:sym typeface="+mn-ea"/>
+              </a:rPr>
+              <a:t>栈上，并用于访问数据的结构</a:t>
+            </a:r>
+            <a:r>
+              <a:rPr kumimoji="1" lang="zh-CN" altLang="en-US" dirty="0">
+                <a:latin typeface="微软雅黑" panose="020B0503020204020204" pitchFamily="34" charset="-122"/>
+                <a:ea typeface="微软雅黑" panose="020B0503020204020204" pitchFamily="34" charset="-122"/>
+              </a:rPr>
+              <a:t>，每个</a:t>
+            </a:r>
+            <a:r>
+              <a:rPr kumimoji="1" lang="en-US" altLang="zh-CN" dirty="0">
+                <a:latin typeface="微软雅黑" panose="020B0503020204020204" pitchFamily="34" charset="-122"/>
+                <a:ea typeface="微软雅黑" panose="020B0503020204020204" pitchFamily="34" charset="-122"/>
+              </a:rPr>
+              <a:t>sharedata</a:t>
+            </a:r>
+            <a:r>
+              <a:rPr kumimoji="1" lang="zh-CN" altLang="en-US" dirty="0">
+                <a:latin typeface="微软雅黑" panose="020B0503020204020204" pitchFamily="34" charset="-122"/>
+                <a:ea typeface="微软雅黑" panose="020B0503020204020204" pitchFamily="34" charset="-122"/>
+              </a:rPr>
+              <a:t>记录一个</a:t>
+            </a:r>
+            <a:r>
+              <a:rPr kumimoji="1" lang="en-US" altLang="zh-CN" dirty="0">
+                <a:latin typeface="微软雅黑" panose="020B0503020204020204" pitchFamily="34" charset="-122"/>
+                <a:ea typeface="微软雅黑" panose="020B0503020204020204" pitchFamily="34" charset="-122"/>
+              </a:rPr>
+              <a:t>accessor</a:t>
+            </a:r>
+            <a:r>
+              <a:rPr kumimoji="1" lang="zh-CN" altLang="en-US" dirty="0">
+                <a:latin typeface="微软雅黑" panose="020B0503020204020204" pitchFamily="34" charset="-122"/>
+                <a:ea typeface="微软雅黑" panose="020B0503020204020204" pitchFamily="34" charset="-122"/>
+              </a:rPr>
+              <a:t>指针、一个</a:t>
+            </a:r>
+            <a:r>
+              <a:rPr kumimoji="1" lang="en-US" altLang="zh-CN" dirty="0">
+                <a:latin typeface="微软雅黑" panose="020B0503020204020204" pitchFamily="34" charset="-122"/>
+                <a:ea typeface="微软雅黑" panose="020B0503020204020204" pitchFamily="34" charset="-122"/>
+              </a:rPr>
+              <a:t>pos</a:t>
+            </a:r>
+            <a:r>
+              <a:rPr kumimoji="1" lang="zh-CN" altLang="en-US" dirty="0">
+                <a:latin typeface="微软雅黑" panose="020B0503020204020204" pitchFamily="34" charset="-122"/>
+                <a:ea typeface="微软雅黑" panose="020B0503020204020204" pitchFamily="34" charset="-122"/>
+              </a:rPr>
+              <a:t>。</a:t>
             </a:r>
             <a:endParaRPr kumimoji="1" lang="zh-CN" altLang="en-US" dirty="0">
               <a:latin typeface="微软雅黑" panose="020B0503020204020204" pitchFamily="34" charset="-122"/>
@@ -7449,57 +7903,73 @@
               <a:rPr kumimoji="1" lang="zh-CN" altLang="en-US" dirty="0">
                 <a:latin typeface="微软雅黑" panose="020B0503020204020204" pitchFamily="34" charset="-122"/>
                 <a:ea typeface="微软雅黑" panose="020B0503020204020204" pitchFamily="34" charset="-122"/>
-              </a:rPr>
-              <a:t>于是，之后通过修改</a:t>
-            </a:r>
-            <a:r>
-              <a:rPr kumimoji="1" lang="en-US" altLang="zh-CN" dirty="0">
-                <a:latin typeface="微软雅黑" panose="020B0503020204020204" pitchFamily="34" charset="-122"/>
-                <a:ea typeface="微软雅黑" panose="020B0503020204020204" pitchFamily="34" charset="-122"/>
-              </a:rPr>
-              <a:t>Lua</a:t>
-            </a:r>
-            <a:r>
-              <a:rPr kumimoji="1" lang="zh-CN" altLang="en-US" dirty="0">
-                <a:latin typeface="微软雅黑" panose="020B0503020204020204" pitchFamily="34" charset="-122"/>
-                <a:ea typeface="微软雅黑" panose="020B0503020204020204" pitchFamily="34" charset="-122"/>
-              </a:rPr>
-              <a:t>源码，</a:t>
-            </a:r>
-            <a:r>
-              <a:rPr kumimoji="1" lang="zh-CN" altLang="en-US" dirty="0">
-                <a:latin typeface="微软雅黑" panose="020B0503020204020204" pitchFamily="34" charset="-122"/>
-                <a:ea typeface="微软雅黑" panose="020B0503020204020204" pitchFamily="34" charset="-122"/>
-              </a:rPr>
-              <a:t>改为文件中直接存储</a:t>
-            </a:r>
-            <a:r>
-              <a:rPr kumimoji="1" lang="en-US" altLang="zh-CN" dirty="0">
-                <a:latin typeface="微软雅黑" panose="020B0503020204020204" pitchFamily="34" charset="-122"/>
-                <a:ea typeface="微软雅黑" panose="020B0503020204020204" pitchFamily="34" charset="-122"/>
-              </a:rPr>
-              <a:t>TString</a:t>
-            </a:r>
-            <a:r>
-              <a:rPr kumimoji="1" lang="zh-CN" altLang="en-US" dirty="0">
-                <a:latin typeface="微软雅黑" panose="020B0503020204020204" pitchFamily="34" charset="-122"/>
-                <a:ea typeface="微软雅黑" panose="020B0503020204020204" pitchFamily="34" charset="-122"/>
-              </a:rPr>
-              <a:t>对象给</a:t>
-            </a:r>
-            <a:r>
-              <a:rPr kumimoji="1" lang="en-US" altLang="zh-CN" dirty="0">
-                <a:latin typeface="微软雅黑" panose="020B0503020204020204" pitchFamily="34" charset="-122"/>
-                <a:ea typeface="微软雅黑" panose="020B0503020204020204" pitchFamily="34" charset="-122"/>
-              </a:rPr>
-              <a:t>Lua</a:t>
-            </a:r>
-            <a:r>
-              <a:rPr kumimoji="1" lang="zh-CN" altLang="en-US" dirty="0">
-                <a:latin typeface="微软雅黑" panose="020B0503020204020204" pitchFamily="34" charset="-122"/>
-                <a:ea typeface="微软雅黑" panose="020B0503020204020204" pitchFamily="34" charset="-122"/>
-              </a:rPr>
-              <a:t>使用。</a:t>
+                <a:sym typeface="+mn-ea"/>
+              </a:rPr>
+              <a:t>通过</a:t>
+            </a:r>
+            <a:r>
+              <a:rPr kumimoji="1" lang="en-US" altLang="zh-CN" dirty="0">
+                <a:latin typeface="微软雅黑" panose="020B0503020204020204" pitchFamily="34" charset="-122"/>
+                <a:ea typeface="微软雅黑" panose="020B0503020204020204" pitchFamily="34" charset="-122"/>
+                <a:sym typeface="+mn-ea"/>
+              </a:rPr>
+              <a:t>accessor</a:t>
+            </a:r>
+            <a:r>
+              <a:rPr kumimoji="1" lang="zh-CN" altLang="en-US" dirty="0">
+                <a:latin typeface="微软雅黑" panose="020B0503020204020204" pitchFamily="34" charset="-122"/>
+                <a:ea typeface="微软雅黑" panose="020B0503020204020204" pitchFamily="34" charset="-122"/>
+                <a:sym typeface="+mn-ea"/>
+              </a:rPr>
+              <a:t>指针</a:t>
+            </a:r>
+            <a:r>
+              <a:rPr kumimoji="1" lang="en-US" altLang="zh-CN" dirty="0">
+                <a:latin typeface="微软雅黑" panose="020B0503020204020204" pitchFamily="34" charset="-122"/>
+                <a:ea typeface="微软雅黑" panose="020B0503020204020204" pitchFamily="34" charset="-122"/>
+                <a:sym typeface="+mn-ea"/>
+              </a:rPr>
+              <a:t>+</a:t>
+            </a:r>
+            <a:r>
+              <a:rPr kumimoji="1" lang="zh-CN" altLang="en-US" dirty="0">
+                <a:latin typeface="微软雅黑" panose="020B0503020204020204" pitchFamily="34" charset="-122"/>
+                <a:ea typeface="微软雅黑" panose="020B0503020204020204" pitchFamily="34" charset="-122"/>
+                <a:sym typeface="+mn-ea"/>
+              </a:rPr>
+              <a:t>当前节点编号</a:t>
+            </a:r>
+            <a:r>
+              <a:rPr kumimoji="1" lang="en-US" altLang="zh-CN" dirty="0">
+                <a:latin typeface="微软雅黑" panose="020B0503020204020204" pitchFamily="34" charset="-122"/>
+                <a:ea typeface="微软雅黑" panose="020B0503020204020204" pitchFamily="34" charset="-122"/>
+                <a:sym typeface="+mn-ea"/>
+              </a:rPr>
+              <a:t>pos</a:t>
+            </a:r>
+            <a:r>
+              <a:rPr kumimoji="1" lang="zh-CN" altLang="en-US" dirty="0">
+                <a:latin typeface="微软雅黑" panose="020B0503020204020204" pitchFamily="34" charset="-122"/>
+                <a:ea typeface="微软雅黑" panose="020B0503020204020204" pitchFamily="34" charset="-122"/>
+                <a:sym typeface="+mn-ea"/>
+              </a:rPr>
+              <a:t>，能够在树形结构上移动到新的</a:t>
+            </a:r>
+            <a:r>
+              <a:rPr kumimoji="1" lang="en-US" altLang="zh-CN" dirty="0">
+                <a:latin typeface="微软雅黑" panose="020B0503020204020204" pitchFamily="34" charset="-122"/>
+                <a:ea typeface="微软雅黑" panose="020B0503020204020204" pitchFamily="34" charset="-122"/>
+                <a:sym typeface="+mn-ea"/>
+              </a:rPr>
+              <a:t>pos</a:t>
+            </a:r>
+            <a:r>
+              <a:rPr kumimoji="1" lang="zh-CN" altLang="en-US" dirty="0">
+                <a:latin typeface="微软雅黑" panose="020B0503020204020204" pitchFamily="34" charset="-122"/>
+                <a:ea typeface="微软雅黑" panose="020B0503020204020204" pitchFamily="34" charset="-122"/>
+                <a:sym typeface="+mn-ea"/>
+              </a:rPr>
+              <a:t>，并查询相关数据。</a:t>
             </a:r>
             <a:endParaRPr kumimoji="1" lang="zh-CN" altLang="en-US" dirty="0">
               <a:latin typeface="微软雅黑" panose="020B0503020204020204" pitchFamily="34" charset="-122"/>
@@ -7518,6 +7988,55 @@
                 <a:spcPts val="600"/>
               </a:spcAft>
             </a:pPr>
+            <a:r>
+              <a:rPr kumimoji="1" lang="zh-CN" altLang="en-US" dirty="0">
+                <a:latin typeface="微软雅黑" panose="020B0503020204020204" pitchFamily="34" charset="-122"/>
+                <a:ea typeface="微软雅黑" panose="020B0503020204020204" pitchFamily="34" charset="-122"/>
+              </a:rPr>
+              <a:t>当从</a:t>
+            </a:r>
+            <a:r>
+              <a:rPr kumimoji="1" lang="en-US" altLang="zh-CN" dirty="0">
+                <a:latin typeface="微软雅黑" panose="020B0503020204020204" pitchFamily="34" charset="-122"/>
+                <a:ea typeface="微软雅黑" panose="020B0503020204020204" pitchFamily="34" charset="-122"/>
+              </a:rPr>
+              <a:t>sharedata</a:t>
+            </a:r>
+            <a:r>
+              <a:rPr kumimoji="1" lang="zh-CN" altLang="en-US" dirty="0">
+                <a:latin typeface="微软雅黑" panose="020B0503020204020204" pitchFamily="34" charset="-122"/>
+                <a:ea typeface="微软雅黑" panose="020B0503020204020204" pitchFamily="34" charset="-122"/>
+              </a:rPr>
+              <a:t>上</a:t>
+            </a:r>
+            <a:r>
+              <a:rPr kumimoji="1" lang="en-US" altLang="zh-CN" dirty="0">
+                <a:latin typeface="微软雅黑" panose="020B0503020204020204" pitchFamily="34" charset="-122"/>
+                <a:ea typeface="微软雅黑" panose="020B0503020204020204" pitchFamily="34" charset="-122"/>
+              </a:rPr>
+              <a:t>index</a:t>
+            </a:r>
+            <a:r>
+              <a:rPr kumimoji="1" lang="zh-CN" altLang="en-US" dirty="0">
+                <a:latin typeface="微软雅黑" panose="020B0503020204020204" pitchFamily="34" charset="-122"/>
+                <a:ea typeface="微软雅黑" panose="020B0503020204020204" pitchFamily="34" charset="-122"/>
+              </a:rPr>
+              <a:t>到一个非叶子节点时，会返回该节点对应的</a:t>
+            </a:r>
+            <a:r>
+              <a:rPr kumimoji="1" lang="en-US" altLang="zh-CN" dirty="0">
+                <a:latin typeface="微软雅黑" panose="020B0503020204020204" pitchFamily="34" charset="-122"/>
+                <a:ea typeface="微软雅黑" panose="020B0503020204020204" pitchFamily="34" charset="-122"/>
+              </a:rPr>
+              <a:t>sharedata</a:t>
+            </a:r>
+            <a:r>
+              <a:rPr kumimoji="1" lang="zh-CN" altLang="en-US" dirty="0">
+                <a:latin typeface="微软雅黑" panose="020B0503020204020204" pitchFamily="34" charset="-122"/>
+                <a:ea typeface="微软雅黑" panose="020B0503020204020204" pitchFamily="34" charset="-122"/>
+              </a:rPr>
+              <a:t>。否则返回对应的值。</a:t>
+            </a:r>
             <a:endParaRPr kumimoji="1" lang="zh-CN" altLang="en-US" dirty="0">
               <a:latin typeface="微软雅黑" panose="020B0503020204020204" pitchFamily="34" charset="-122"/>
               <a:ea typeface="微软雅黑" panose="020B0503020204020204" pitchFamily="34" charset="-122"/>
@@ -7534,7 +8053,16 @@
           <p:nvPr/>
         </p:nvPicPr>
         <p:blipFill>
-          <a:blip/>
+          <a:blip r:embed="rId1" cstate="print">
+            <a:extLst>
+              <a:ext uri="{28A0092B-C50C-407E-A947-70E740481C1C}">
+                <a14:useLocalDpi xmlns:a14="http://schemas.microsoft.com/office/drawing/2010/main" val="0"/>
+              </a:ext>
+              <a:ext uri="{96DAC541-7B7A-43D3-8B79-37D633B846F1}">
+                <asvg:svgBlip xmlns:asvg="http://schemas.microsoft.com/office/drawing/2016/SVG/main" r:embed="rId2"/>
+              </a:ext>
+            </a:extLst>
+          </a:blip>
           <a:stretch>
             <a:fillRect/>
           </a:stretch>
@@ -7543,6 +8071,30 @@
           <a:xfrm>
             <a:off x="10939463" y="6430128"/>
             <a:ext cx="763381" cy="139201"/>
+          </a:xfrm>
+          <a:prstGeom prst="rect">
+            <a:avLst/>
+          </a:prstGeom>
+        </p:spPr>
+      </p:pic>
+      <p:pic>
+        <p:nvPicPr>
+          <p:cNvPr id="2" name="图片 1"/>
+          <p:cNvPicPr>
+            <a:picLocks noChangeAspect="1"/>
+          </p:cNvPicPr>
+          <p:nvPr/>
+        </p:nvPicPr>
+        <p:blipFill>
+          <a:blip r:embed="rId3"/>
+          <a:stretch>
+            <a:fillRect/>
+          </a:stretch>
+        </p:blipFill>
+        <p:spPr>
+          <a:xfrm>
+            <a:off x="780415" y="3665220"/>
+            <a:ext cx="4059555" cy="2038350"/>
           </a:xfrm>
           <a:prstGeom prst="rect">
             <a:avLst/>
@@ -7693,7 +8245,7 @@
         <p:spPr>
           <a:xfrm>
             <a:off x="780415" y="1256030"/>
-            <a:ext cx="10404475" cy="932180"/>
+            <a:ext cx="10404475" cy="4037965"/>
           </a:xfrm>
           <a:prstGeom prst="rect">
             <a:avLst/>
@@ -7722,63 +8274,105 @@
                 <a:latin typeface="微软雅黑" panose="020B0503020204020204" pitchFamily="34" charset="-122"/>
                 <a:ea typeface="微软雅黑" panose="020B0503020204020204" pitchFamily="34" charset="-122"/>
               </a:rPr>
-              <a:t>另外，还实现了一个用于把目录下所有指定格式的</a:t>
-            </a:r>
-            <a:r>
-              <a:rPr kumimoji="1" lang="en-US" altLang="zh-CN" dirty="0">
-                <a:latin typeface="微软雅黑" panose="020B0503020204020204" pitchFamily="34" charset="-122"/>
-                <a:ea typeface="微软雅黑" panose="020B0503020204020204" pitchFamily="34" charset="-122"/>
-              </a:rPr>
-              <a:t>lua</a:t>
-            </a:r>
-            <a:r>
-              <a:rPr kumimoji="1" lang="zh-CN" altLang="en-US" dirty="0">
-                <a:latin typeface="微软雅黑" panose="020B0503020204020204" pitchFamily="34" charset="-122"/>
-                <a:ea typeface="微软雅黑" panose="020B0503020204020204" pitchFamily="34" charset="-122"/>
-              </a:rPr>
-              <a:t>文件中的</a:t>
-            </a:r>
-            <a:r>
-              <a:rPr kumimoji="1" lang="en-US" altLang="zh-CN" dirty="0">
-                <a:latin typeface="微软雅黑" panose="020B0503020204020204" pitchFamily="34" charset="-122"/>
-                <a:ea typeface="微软雅黑" panose="020B0503020204020204" pitchFamily="34" charset="-122"/>
-              </a:rPr>
-              <a:t>table</a:t>
-            </a:r>
-            <a:r>
-              <a:rPr kumimoji="1" lang="zh-CN" altLang="en-US" dirty="0">
-                <a:latin typeface="微软雅黑" panose="020B0503020204020204" pitchFamily="34" charset="-122"/>
-                <a:ea typeface="微软雅黑" panose="020B0503020204020204" pitchFamily="34" charset="-122"/>
-              </a:rPr>
-              <a:t>数据合并到转为一个以路径为</a:t>
-            </a:r>
-            <a:r>
-              <a:rPr kumimoji="1" lang="en-US" altLang="zh-CN" dirty="0">
-                <a:latin typeface="微软雅黑" panose="020B0503020204020204" pitchFamily="34" charset="-122"/>
-                <a:ea typeface="微软雅黑" panose="020B0503020204020204" pitchFamily="34" charset="-122"/>
-              </a:rPr>
-              <a:t>key</a:t>
-            </a:r>
-            <a:r>
-              <a:rPr kumimoji="1" lang="zh-CN" altLang="en-US" dirty="0">
-                <a:latin typeface="微软雅黑" panose="020B0503020204020204" pitchFamily="34" charset="-122"/>
-                <a:ea typeface="微软雅黑" panose="020B0503020204020204" pitchFamily="34" charset="-122"/>
-              </a:rPr>
-              <a:t>的</a:t>
-            </a:r>
-            <a:r>
-              <a:rPr kumimoji="1" lang="en-US" altLang="zh-CN" dirty="0">
-                <a:latin typeface="微软雅黑" panose="020B0503020204020204" pitchFamily="34" charset="-122"/>
-                <a:ea typeface="微软雅黑" panose="020B0503020204020204" pitchFamily="34" charset="-122"/>
-              </a:rPr>
-              <a:t>table</a:t>
-            </a:r>
-            <a:r>
-              <a:rPr kumimoji="1" lang="zh-CN" altLang="en-US" dirty="0">
-                <a:latin typeface="微软雅黑" panose="020B0503020204020204" pitchFamily="34" charset="-122"/>
-                <a:ea typeface="微软雅黑" panose="020B0503020204020204" pitchFamily="34" charset="-122"/>
-              </a:rPr>
-              <a:t>的工具。</a:t>
+              <a:t>在项目过程中，曾经使用的是</a:t>
+            </a:r>
+            <a:r>
+              <a:rPr kumimoji="1" lang="en-US" altLang="zh-CN" dirty="0">
+                <a:latin typeface="微软雅黑" panose="020B0503020204020204" pitchFamily="34" charset="-122"/>
+                <a:ea typeface="微软雅黑" panose="020B0503020204020204" pitchFamily="34" charset="-122"/>
+              </a:rPr>
+              <a:t>userdata</a:t>
+            </a:r>
+            <a:r>
+              <a:rPr kumimoji="1" lang="zh-CN" altLang="en-US" dirty="0">
+                <a:latin typeface="微软雅黑" panose="020B0503020204020204" pitchFamily="34" charset="-122"/>
+                <a:ea typeface="微软雅黑" panose="020B0503020204020204" pitchFamily="34" charset="-122"/>
+              </a:rPr>
+              <a:t>，不修改</a:t>
+            </a:r>
+            <a:r>
+              <a:rPr kumimoji="1" lang="en-US" altLang="zh-CN" dirty="0">
+                <a:latin typeface="微软雅黑" panose="020B0503020204020204" pitchFamily="34" charset="-122"/>
+                <a:ea typeface="微软雅黑" panose="020B0503020204020204" pitchFamily="34" charset="-122"/>
+              </a:rPr>
+              <a:t>Lua</a:t>
+            </a:r>
+            <a:r>
+              <a:rPr kumimoji="1" lang="zh-CN" altLang="en-US" dirty="0">
+                <a:latin typeface="微软雅黑" panose="020B0503020204020204" pitchFamily="34" charset="-122"/>
+                <a:ea typeface="微软雅黑" panose="020B0503020204020204" pitchFamily="34" charset="-122"/>
+              </a:rPr>
+              <a:t>源码的方式。实现相对容易，但实际读取数据时，</a:t>
+            </a:r>
+            <a:r>
+              <a:rPr kumimoji="1" lang="en-US" altLang="zh-CN" dirty="0">
+                <a:latin typeface="微软雅黑" panose="020B0503020204020204" pitchFamily="34" charset="-122"/>
+                <a:ea typeface="微软雅黑" panose="020B0503020204020204" pitchFamily="34" charset="-122"/>
+              </a:rPr>
+              <a:t>TString</a:t>
+            </a:r>
+            <a:r>
+              <a:rPr kumimoji="1" lang="zh-CN" altLang="en-US" dirty="0">
+                <a:latin typeface="微软雅黑" panose="020B0503020204020204" pitchFamily="34" charset="-122"/>
+                <a:ea typeface="微软雅黑" panose="020B0503020204020204" pitchFamily="34" charset="-122"/>
+              </a:rPr>
+              <a:t>还是需要复制一份到</a:t>
+            </a:r>
+            <a:r>
+              <a:rPr kumimoji="1" lang="en-US" altLang="zh-CN" dirty="0">
+                <a:latin typeface="微软雅黑" panose="020B0503020204020204" pitchFamily="34" charset="-122"/>
+                <a:ea typeface="微软雅黑" panose="020B0503020204020204" pitchFamily="34" charset="-122"/>
+              </a:rPr>
+              <a:t>stringtable</a:t>
+            </a:r>
+            <a:r>
+              <a:rPr kumimoji="1" lang="zh-CN" altLang="en-US" dirty="0">
+                <a:latin typeface="微软雅黑" panose="020B0503020204020204" pitchFamily="34" charset="-122"/>
+                <a:ea typeface="微软雅黑" panose="020B0503020204020204" pitchFamily="34" charset="-122"/>
+              </a:rPr>
+              <a:t>中。在循环遍历时，由于这些</a:t>
+            </a:r>
+            <a:r>
+              <a:rPr kumimoji="1" lang="en-US" altLang="zh-CN" dirty="0">
+                <a:latin typeface="微软雅黑" panose="020B0503020204020204" pitchFamily="34" charset="-122"/>
+                <a:ea typeface="微软雅黑" panose="020B0503020204020204" pitchFamily="34" charset="-122"/>
+              </a:rPr>
+              <a:t>string</a:t>
+            </a:r>
+            <a:r>
+              <a:rPr kumimoji="1" lang="zh-CN" altLang="en-US" dirty="0">
+                <a:latin typeface="微软雅黑" panose="020B0503020204020204" pitchFamily="34" charset="-122"/>
+                <a:ea typeface="微软雅黑" panose="020B0503020204020204" pitchFamily="34" charset="-122"/>
+              </a:rPr>
+              <a:t>很快被</a:t>
+            </a:r>
+            <a:r>
+              <a:rPr kumimoji="1" lang="en-US" altLang="zh-CN" dirty="0">
+                <a:latin typeface="微软雅黑" panose="020B0503020204020204" pitchFamily="34" charset="-122"/>
+                <a:ea typeface="微软雅黑" panose="020B0503020204020204" pitchFamily="34" charset="-122"/>
+              </a:rPr>
+              <a:t>gc</a:t>
+            </a:r>
+            <a:r>
+              <a:rPr kumimoji="1" lang="zh-CN" altLang="en-US" dirty="0">
+                <a:latin typeface="微软雅黑" panose="020B0503020204020204" pitchFamily="34" charset="-122"/>
+                <a:ea typeface="微软雅黑" panose="020B0503020204020204" pitchFamily="34" charset="-122"/>
+              </a:rPr>
+              <a:t>，没有在内存占用上</a:t>
+            </a:r>
+            <a:r>
+              <a:rPr kumimoji="1" lang="zh-CN" altLang="en-US" dirty="0">
+                <a:latin typeface="微软雅黑" panose="020B0503020204020204" pitchFamily="34" charset="-122"/>
+                <a:ea typeface="微软雅黑" panose="020B0503020204020204" pitchFamily="34" charset="-122"/>
+              </a:rPr>
+              <a:t>体现出来，但需要存储时就需要额外的</a:t>
+            </a:r>
+            <a:r>
+              <a:rPr kumimoji="1" lang="zh-CN" altLang="en-US" dirty="0">
+                <a:latin typeface="微软雅黑" panose="020B0503020204020204" pitchFamily="34" charset="-122"/>
+                <a:ea typeface="微软雅黑" panose="020B0503020204020204" pitchFamily="34" charset="-122"/>
+              </a:rPr>
+              <a:t>空间。</a:t>
             </a:r>
             <a:endParaRPr kumimoji="1" lang="zh-CN" altLang="en-US" dirty="0">
               <a:latin typeface="微软雅黑" panose="020B0503020204020204" pitchFamily="34" charset="-122"/>
@@ -7797,6 +8391,62 @@
                 <a:spcPts val="600"/>
               </a:spcAft>
             </a:pPr>
+            <a:r>
+              <a:rPr kumimoji="1" lang="zh-CN" altLang="en-US" dirty="0">
+                <a:latin typeface="微软雅黑" panose="020B0503020204020204" pitchFamily="34" charset="-122"/>
+                <a:ea typeface="微软雅黑" panose="020B0503020204020204" pitchFamily="34" charset="-122"/>
+              </a:rPr>
+              <a:t>于是，之后通过修改</a:t>
+            </a:r>
+            <a:r>
+              <a:rPr kumimoji="1" lang="en-US" altLang="zh-CN" dirty="0">
+                <a:latin typeface="微软雅黑" panose="020B0503020204020204" pitchFamily="34" charset="-122"/>
+                <a:ea typeface="微软雅黑" panose="020B0503020204020204" pitchFamily="34" charset="-122"/>
+              </a:rPr>
+              <a:t>Lua</a:t>
+            </a:r>
+            <a:r>
+              <a:rPr kumimoji="1" lang="zh-CN" altLang="en-US" dirty="0">
+                <a:latin typeface="微软雅黑" panose="020B0503020204020204" pitchFamily="34" charset="-122"/>
+                <a:ea typeface="微软雅黑" panose="020B0503020204020204" pitchFamily="34" charset="-122"/>
+              </a:rPr>
+              <a:t>源码，</a:t>
+            </a:r>
+            <a:r>
+              <a:rPr kumimoji="1" lang="zh-CN" altLang="en-US" dirty="0">
+                <a:latin typeface="微软雅黑" panose="020B0503020204020204" pitchFamily="34" charset="-122"/>
+                <a:ea typeface="微软雅黑" panose="020B0503020204020204" pitchFamily="34" charset="-122"/>
+              </a:rPr>
+              <a:t>改为文件中直接存储</a:t>
+            </a:r>
+            <a:r>
+              <a:rPr kumimoji="1" lang="en-US" altLang="zh-CN" dirty="0">
+                <a:latin typeface="微软雅黑" panose="020B0503020204020204" pitchFamily="34" charset="-122"/>
+                <a:ea typeface="微软雅黑" panose="020B0503020204020204" pitchFamily="34" charset="-122"/>
+              </a:rPr>
+              <a:t>TString</a:t>
+            </a:r>
+            <a:r>
+              <a:rPr kumimoji="1" lang="zh-CN" altLang="en-US" dirty="0">
+                <a:latin typeface="微软雅黑" panose="020B0503020204020204" pitchFamily="34" charset="-122"/>
+                <a:ea typeface="微软雅黑" panose="020B0503020204020204" pitchFamily="34" charset="-122"/>
+              </a:rPr>
+              <a:t>对象给</a:t>
+            </a:r>
+            <a:r>
+              <a:rPr kumimoji="1" lang="en-US" altLang="zh-CN" dirty="0">
+                <a:latin typeface="微软雅黑" panose="020B0503020204020204" pitchFamily="34" charset="-122"/>
+                <a:ea typeface="微软雅黑" panose="020B0503020204020204" pitchFamily="34" charset="-122"/>
+              </a:rPr>
+              <a:t>Lua</a:t>
+            </a:r>
+            <a:r>
+              <a:rPr kumimoji="1" lang="zh-CN" altLang="en-US" dirty="0">
+                <a:latin typeface="微软雅黑" panose="020B0503020204020204" pitchFamily="34" charset="-122"/>
+                <a:ea typeface="微软雅黑" panose="020B0503020204020204" pitchFamily="34" charset="-122"/>
+              </a:rPr>
+              <a:t>使用。</a:t>
+            </a:r>
             <a:endParaRPr kumimoji="1" lang="zh-CN" altLang="en-US" dirty="0">
               <a:latin typeface="微软雅黑" panose="020B0503020204020204" pitchFamily="34" charset="-122"/>
               <a:ea typeface="微软雅黑" panose="020B0503020204020204" pitchFamily="34" charset="-122"/>
@@ -7845,108 +8495,6 @@
           </a:prstGeom>
         </p:spPr>
       </p:pic>
-      <p:pic>
-        <p:nvPicPr>
-          <p:cNvPr id="3" name="图片 2"/>
-          <p:cNvPicPr>
-            <a:picLocks noChangeAspect="1"/>
-          </p:cNvPicPr>
-          <p:nvPr/>
-        </p:nvPicPr>
-        <p:blipFill>
-          <a:blip r:embed="rId1"/>
-          <a:stretch>
-            <a:fillRect/>
-          </a:stretch>
-        </p:blipFill>
-        <p:spPr>
-          <a:xfrm>
-            <a:off x="780415" y="2355215"/>
-            <a:ext cx="5815330" cy="3093720"/>
-          </a:xfrm>
-          <a:prstGeom prst="rect">
-            <a:avLst/>
-          </a:prstGeom>
-        </p:spPr>
-      </p:pic>
-      <p:sp>
-        <p:nvSpPr>
-          <p:cNvPr id="4" name="文本框 3"/>
-          <p:cNvSpPr txBox="1"/>
-          <p:nvPr/>
-        </p:nvSpPr>
-        <p:spPr>
-          <a:xfrm>
-            <a:off x="780415" y="5488940"/>
-            <a:ext cx="10404475" cy="932180"/>
-          </a:xfrm>
-          <a:prstGeom prst="rect">
-            <a:avLst/>
-          </a:prstGeom>
-          <a:noFill/>
-        </p:spPr>
-        <p:txBody>
-          <a:bodyPr wrap="square" rtlCol="0">
-            <a:noAutofit/>
-          </a:bodyPr>
-          <a:lstStyle/>
-          <a:p>
-            <a:pPr>
-              <a:lnSpc>
-                <a:spcPct val="150000"/>
-              </a:lnSpc>
-              <a:spcBef>
-                <a:spcPts val="600"/>
-              </a:spcBef>
-              <a:spcAft>
-                <a:spcPts val="600"/>
-              </a:spcAft>
-            </a:pPr>
-            <a:r>
-              <a:rPr kumimoji="1" lang="zh-CN" altLang="en-US" dirty="0">
-                <a:latin typeface="微软雅黑" panose="020B0503020204020204" pitchFamily="34" charset="-122"/>
-                <a:ea typeface="微软雅黑" panose="020B0503020204020204" pitchFamily="34" charset="-122"/>
-              </a:rPr>
-              <a:t>然后调用前文所述</a:t>
-            </a:r>
-            <a:r>
-              <a:rPr kumimoji="1" lang="en-US" altLang="zh-CN" dirty="0">
-                <a:latin typeface="微软雅黑" panose="020B0503020204020204" pitchFamily="34" charset="-122"/>
-                <a:ea typeface="微软雅黑" panose="020B0503020204020204" pitchFamily="34" charset="-122"/>
-              </a:rPr>
-              <a:t>build</a:t>
-            </a:r>
-            <a:r>
-              <a:rPr kumimoji="1" lang="zh-CN" altLang="en-US" dirty="0">
-                <a:latin typeface="微软雅黑" panose="020B0503020204020204" pitchFamily="34" charset="-122"/>
-                <a:ea typeface="微软雅黑" panose="020B0503020204020204" pitchFamily="34" charset="-122"/>
-              </a:rPr>
-              <a:t>方法即可转为文件。</a:t>
-            </a:r>
-            <a:endParaRPr kumimoji="1" lang="zh-CN" altLang="en-US" dirty="0">
-              <a:latin typeface="微软雅黑" panose="020B0503020204020204" pitchFamily="34" charset="-122"/>
-              <a:ea typeface="微软雅黑" panose="020B0503020204020204" pitchFamily="34" charset="-122"/>
-            </a:endParaRPr>
-          </a:p>
-          <a:p>
-            <a:pPr>
-              <a:lnSpc>
-                <a:spcPct val="150000"/>
-              </a:lnSpc>
-              <a:spcBef>
-                <a:spcPts val="600"/>
-              </a:spcBef>
-              <a:spcAft>
-                <a:spcPts val="600"/>
-              </a:spcAft>
-            </a:pPr>
-            <a:endParaRPr kumimoji="1" lang="zh-CN" altLang="en-US" dirty="0">
-              <a:latin typeface="微软雅黑" panose="020B0503020204020204" pitchFamily="34" charset="-122"/>
-              <a:ea typeface="微软雅黑" panose="020B0503020204020204" pitchFamily="34" charset="-122"/>
-            </a:endParaRPr>
-          </a:p>
-        </p:txBody>
-      </p:sp>
     </p:spTree>
   </p:cSld>
   <p:clrMapOvr>
@@ -7974,77 +8522,261 @@
       </p:grpSpPr>
       <p:sp>
         <p:nvSpPr>
-          <p:cNvPr id="3" name="标题 5"/>
+          <p:cNvPr id="8" name="文本框 7"/>
           <p:cNvSpPr txBox="1"/>
           <p:nvPr/>
         </p:nvSpPr>
         <p:spPr>
           <a:xfrm>
-            <a:off x="1524000" y="2284527"/>
-            <a:ext cx="9144000" cy="1551797"/>
-          </a:xfrm>
-          <a:prstGeom prst="rect">
-            <a:avLst/>
-          </a:prstGeom>
-        </p:spPr>
-        <p:txBody>
-          <a:bodyPr vert="horz" lIns="91440" tIns="45720" rIns="91440" bIns="45720" rtlCol="0" anchor="ctr">
-            <a:normAutofit/>
+            <a:off x="416520" y="394263"/>
+            <a:ext cx="4419600" cy="553085"/>
+          </a:xfrm>
+          <a:prstGeom prst="rect">
+            <a:avLst/>
+          </a:prstGeom>
+          <a:noFill/>
+        </p:spPr>
+        <p:txBody>
+          <a:bodyPr wrap="square" rtlCol="0">
+            <a:spAutoFit/>
           </a:bodyPr>
-          <a:lstStyle>
-            <a:lvl1pPr algn="l" defTabSz="914400" rtl="0" eaLnBrk="1" latinLnBrk="0" hangingPunct="1">
-              <a:lnSpc>
-                <a:spcPct val="90000"/>
-              </a:lnSpc>
-              <a:spcBef>
-                <a:spcPct val="0"/>
-              </a:spcBef>
-              <a:buNone/>
-              <a:defRPr sz="4400" kern="1200">
+          <a:lstStyle/>
+          <a:p>
+            <a:r>
+              <a:rPr kumimoji="1" lang="zh-CN" altLang="en-US" sz="3000" b="1" dirty="0">
                 <a:solidFill>
-                  <a:schemeClr val="tx1"/>
+                  <a:schemeClr val="tx1">
+                    <a:lumMod val="75000"/>
+                    <a:lumOff val="25000"/>
+                  </a:schemeClr>
                 </a:solidFill>
-                <a:latin typeface="+mj-lt"/>
-                <a:ea typeface="+mj-ea"/>
-                <a:cs typeface="+mj-cs"/>
-              </a:defRPr>
-            </a:lvl1pPr>
-          </a:lstStyle>
-          <a:p>
-            <a:pPr algn="ctr"/>
-            <a:r>
-              <a:rPr lang="zh-CN" altLang="en-US" b="1" dirty="0">
-                <a:latin typeface="微软雅黑" panose="020B0503020204020204" pitchFamily="34" charset="-122"/>
-                <a:ea typeface="微软雅黑" panose="020B0503020204020204" pitchFamily="34" charset="-122"/>
-              </a:rPr>
-              <a:t>三、性能测试</a:t>
-            </a:r>
-            <a:endParaRPr lang="zh-CN" altLang="en-US" b="1" dirty="0">
+                <a:latin typeface="微软雅黑" panose="020B0503020204020204" pitchFamily="34" charset="-122"/>
+                <a:ea typeface="微软雅黑" panose="020B0503020204020204" pitchFamily="34" charset="-122"/>
+              </a:rPr>
+              <a:t>设计思路</a:t>
+            </a:r>
+            <a:r>
+              <a:rPr kumimoji="1" lang="en-US" altLang="zh-CN" sz="3000" b="1" dirty="0">
+                <a:solidFill>
+                  <a:schemeClr val="tx1">
+                    <a:lumMod val="75000"/>
+                    <a:lumOff val="25000"/>
+                  </a:schemeClr>
+                </a:solidFill>
+                <a:latin typeface="微软雅黑" panose="020B0503020204020204" pitchFamily="34" charset="-122"/>
+                <a:ea typeface="微软雅黑" panose="020B0503020204020204" pitchFamily="34" charset="-122"/>
+              </a:rPr>
+              <a:t> - </a:t>
+            </a:r>
+            <a:r>
+              <a:rPr kumimoji="1" lang="zh-CN" altLang="en-US" sz="3000" b="1" dirty="0">
+                <a:solidFill>
+                  <a:schemeClr val="tx1">
+                    <a:lumMod val="75000"/>
+                    <a:lumOff val="25000"/>
+                  </a:schemeClr>
+                </a:solidFill>
+                <a:latin typeface="微软雅黑" panose="020B0503020204020204" pitchFamily="34" charset="-122"/>
+                <a:ea typeface="微软雅黑" panose="020B0503020204020204" pitchFamily="34" charset="-122"/>
+              </a:rPr>
+              <a:t>其他</a:t>
+            </a:r>
+            <a:endParaRPr kumimoji="1" lang="zh-CN" altLang="en-US" sz="3000" b="1" dirty="0">
+              <a:solidFill>
+                <a:schemeClr val="tx1">
+                  <a:lumMod val="75000"/>
+                  <a:lumOff val="25000"/>
+                </a:schemeClr>
+              </a:solidFill>
               <a:latin typeface="微软雅黑" panose="020B0503020204020204" pitchFamily="34" charset="-122"/>
               <a:ea typeface="微软雅黑" panose="020B0503020204020204" pitchFamily="34" charset="-122"/>
             </a:endParaRPr>
           </a:p>
         </p:txBody>
       </p:sp>
+      <p:cxnSp>
+        <p:nvCxnSpPr>
+          <p:cNvPr id="12" name="直线连接符 5"/>
+          <p:cNvCxnSpPr/>
+          <p:nvPr/>
+        </p:nvCxnSpPr>
+        <p:spPr>
+          <a:xfrm>
+            <a:off x="514179" y="1101951"/>
+            <a:ext cx="532800" cy="0"/>
+          </a:xfrm>
+          <a:prstGeom prst="line">
+            <a:avLst/>
+          </a:prstGeom>
+          <a:ln w="25400">
+            <a:solidFill>
+              <a:srgbClr val="A50A0D"/>
+            </a:solidFill>
+            <a:round/>
+          </a:ln>
+        </p:spPr>
+        <p:style>
+          <a:lnRef idx="1">
+            <a:schemeClr val="accent1"/>
+          </a:lnRef>
+          <a:fillRef idx="0">
+            <a:schemeClr val="accent1"/>
+          </a:fillRef>
+          <a:effectRef idx="0">
+            <a:schemeClr val="accent1"/>
+          </a:effectRef>
+          <a:fontRef idx="minor">
+            <a:schemeClr val="tx1"/>
+          </a:fontRef>
+        </p:style>
+      </p:cxnSp>
+      <p:sp>
+        <p:nvSpPr>
+          <p:cNvPr id="10" name="文本框 9"/>
+          <p:cNvSpPr txBox="1"/>
+          <p:nvPr/>
+        </p:nvSpPr>
+        <p:spPr>
+          <a:xfrm>
+            <a:off x="780415" y="1256030"/>
+            <a:ext cx="10404475" cy="932180"/>
+          </a:xfrm>
+          <a:prstGeom prst="rect">
+            <a:avLst/>
+          </a:prstGeom>
+          <a:noFill/>
+        </p:spPr>
+        <p:txBody>
+          <a:bodyPr wrap="square" rtlCol="0">
+            <a:noAutofit/>
+          </a:bodyPr>
+          <a:lstStyle/>
+          <a:p>
+            <a:pPr>
+              <a:lnSpc>
+                <a:spcPct val="150000"/>
+              </a:lnSpc>
+              <a:spcBef>
+                <a:spcPts val="600"/>
+              </a:spcBef>
+              <a:spcAft>
+                <a:spcPts val="600"/>
+              </a:spcAft>
+            </a:pPr>
+            <a:r>
+              <a:rPr kumimoji="1" lang="zh-CN" altLang="en-US" dirty="0">
+                <a:latin typeface="微软雅黑" panose="020B0503020204020204" pitchFamily="34" charset="-122"/>
+                <a:ea typeface="微软雅黑" panose="020B0503020204020204" pitchFamily="34" charset="-122"/>
+              </a:rPr>
+              <a:t>另外，还实现了一个用于把目录下所有指定格式的</a:t>
+            </a:r>
+            <a:r>
+              <a:rPr kumimoji="1" lang="en-US" altLang="zh-CN" dirty="0">
+                <a:latin typeface="微软雅黑" panose="020B0503020204020204" pitchFamily="34" charset="-122"/>
+                <a:ea typeface="微软雅黑" panose="020B0503020204020204" pitchFamily="34" charset="-122"/>
+              </a:rPr>
+              <a:t>lua</a:t>
+            </a:r>
+            <a:r>
+              <a:rPr kumimoji="1" lang="zh-CN" altLang="en-US" dirty="0">
+                <a:latin typeface="微软雅黑" panose="020B0503020204020204" pitchFamily="34" charset="-122"/>
+                <a:ea typeface="微软雅黑" panose="020B0503020204020204" pitchFamily="34" charset="-122"/>
+              </a:rPr>
+              <a:t>文件中的</a:t>
+            </a:r>
+            <a:r>
+              <a:rPr kumimoji="1" lang="en-US" altLang="zh-CN" dirty="0">
+                <a:latin typeface="微软雅黑" panose="020B0503020204020204" pitchFamily="34" charset="-122"/>
+                <a:ea typeface="微软雅黑" panose="020B0503020204020204" pitchFamily="34" charset="-122"/>
+              </a:rPr>
+              <a:t>table</a:t>
+            </a:r>
+            <a:r>
+              <a:rPr kumimoji="1" lang="zh-CN" altLang="en-US" dirty="0">
+                <a:latin typeface="微软雅黑" panose="020B0503020204020204" pitchFamily="34" charset="-122"/>
+                <a:ea typeface="微软雅黑" panose="020B0503020204020204" pitchFamily="34" charset="-122"/>
+              </a:rPr>
+              <a:t>数据合并到一个以路径为</a:t>
+            </a:r>
+            <a:r>
+              <a:rPr kumimoji="1" lang="en-US" altLang="zh-CN" dirty="0">
+                <a:latin typeface="微软雅黑" panose="020B0503020204020204" pitchFamily="34" charset="-122"/>
+                <a:ea typeface="微软雅黑" panose="020B0503020204020204" pitchFamily="34" charset="-122"/>
+              </a:rPr>
+              <a:t>key</a:t>
+            </a:r>
+            <a:r>
+              <a:rPr kumimoji="1" lang="zh-CN" altLang="en-US" dirty="0">
+                <a:latin typeface="微软雅黑" panose="020B0503020204020204" pitchFamily="34" charset="-122"/>
+                <a:ea typeface="微软雅黑" panose="020B0503020204020204" pitchFamily="34" charset="-122"/>
+              </a:rPr>
+              <a:t>的</a:t>
+            </a:r>
+            <a:r>
+              <a:rPr kumimoji="1" lang="en-US" altLang="zh-CN" dirty="0">
+                <a:latin typeface="微软雅黑" panose="020B0503020204020204" pitchFamily="34" charset="-122"/>
+                <a:ea typeface="微软雅黑" panose="020B0503020204020204" pitchFamily="34" charset="-122"/>
+              </a:rPr>
+              <a:t>table</a:t>
+            </a:r>
+            <a:r>
+              <a:rPr kumimoji="1" lang="zh-CN" altLang="en-US" dirty="0">
+                <a:latin typeface="微软雅黑" panose="020B0503020204020204" pitchFamily="34" charset="-122"/>
+                <a:ea typeface="微软雅黑" panose="020B0503020204020204" pitchFamily="34" charset="-122"/>
+              </a:rPr>
+              <a:t>的工具。</a:t>
+            </a:r>
+            <a:endParaRPr kumimoji="1" lang="zh-CN" altLang="en-US" dirty="0">
+              <a:latin typeface="微软雅黑" panose="020B0503020204020204" pitchFamily="34" charset="-122"/>
+              <a:ea typeface="微软雅黑" panose="020B0503020204020204" pitchFamily="34" charset="-122"/>
+            </a:endParaRPr>
+          </a:p>
+          <a:p>
+            <a:pPr>
+              <a:lnSpc>
+                <a:spcPct val="150000"/>
+              </a:lnSpc>
+              <a:spcBef>
+                <a:spcPts val="600"/>
+              </a:spcBef>
+              <a:spcAft>
+                <a:spcPts val="600"/>
+              </a:spcAft>
+            </a:pPr>
+            <a:endParaRPr kumimoji="1" lang="zh-CN" altLang="en-US" dirty="0">
+              <a:latin typeface="微软雅黑" panose="020B0503020204020204" pitchFamily="34" charset="-122"/>
+              <a:ea typeface="微软雅黑" panose="020B0503020204020204" pitchFamily="34" charset="-122"/>
+            </a:endParaRPr>
+          </a:p>
+          <a:p>
+            <a:pPr>
+              <a:lnSpc>
+                <a:spcPct val="150000"/>
+              </a:lnSpc>
+              <a:spcBef>
+                <a:spcPts val="600"/>
+              </a:spcBef>
+              <a:spcAft>
+                <a:spcPts val="600"/>
+              </a:spcAft>
+            </a:pPr>
+            <a:endParaRPr kumimoji="1" lang="zh-CN" altLang="en-US" dirty="0">
+              <a:latin typeface="微软雅黑" panose="020B0503020204020204" pitchFamily="34" charset="-122"/>
+              <a:ea typeface="微软雅黑" panose="020B0503020204020204" pitchFamily="34" charset="-122"/>
+            </a:endParaRPr>
+          </a:p>
+        </p:txBody>
+      </p:sp>
       <p:pic>
         <p:nvPicPr>
-          <p:cNvPr id="4" name="图形 4"/>
+          <p:cNvPr id="5" name="图形 4"/>
           <p:cNvPicPr>
             <a:picLocks noChangeAspect="1"/>
           </p:cNvPicPr>
           <p:nvPr/>
         </p:nvPicPr>
         <p:blipFill>
-          <a:blip r:embed="rId1" cstate="print">
-            <a:extLst>
-              <a:ext uri="{28A0092B-C50C-407E-A947-70E740481C1C}">
-                <a14:useLocalDpi xmlns:a14="http://schemas.microsoft.com/office/drawing/2010/main" val="0"/>
-              </a:ext>
-              <a:ext uri="{96DAC541-7B7A-43D3-8B79-37D633B846F1}">
-                <asvg:svgBlip xmlns:asvg="http://schemas.microsoft.com/office/drawing/2016/SVG/main" r:embed="rId2"/>
-              </a:ext>
-            </a:extLst>
-          </a:blip>
+          <a:blip/>
           <a:stretch>
             <a:fillRect/>
           </a:stretch>
@@ -8059,6 +8791,108 @@
           </a:prstGeom>
         </p:spPr>
       </p:pic>
+      <p:pic>
+        <p:nvPicPr>
+          <p:cNvPr id="3" name="图片 2"/>
+          <p:cNvPicPr>
+            <a:picLocks noChangeAspect="1"/>
+          </p:cNvPicPr>
+          <p:nvPr/>
+        </p:nvPicPr>
+        <p:blipFill>
+          <a:blip r:embed="rId1"/>
+          <a:stretch>
+            <a:fillRect/>
+          </a:stretch>
+        </p:blipFill>
+        <p:spPr>
+          <a:xfrm>
+            <a:off x="780415" y="2355215"/>
+            <a:ext cx="5815330" cy="3093720"/>
+          </a:xfrm>
+          <a:prstGeom prst="rect">
+            <a:avLst/>
+          </a:prstGeom>
+        </p:spPr>
+      </p:pic>
+      <p:sp>
+        <p:nvSpPr>
+          <p:cNvPr id="4" name="文本框 3"/>
+          <p:cNvSpPr txBox="1"/>
+          <p:nvPr/>
+        </p:nvSpPr>
+        <p:spPr>
+          <a:xfrm>
+            <a:off x="780415" y="5488940"/>
+            <a:ext cx="10404475" cy="932180"/>
+          </a:xfrm>
+          <a:prstGeom prst="rect">
+            <a:avLst/>
+          </a:prstGeom>
+          <a:noFill/>
+        </p:spPr>
+        <p:txBody>
+          <a:bodyPr wrap="square" rtlCol="0">
+            <a:noAutofit/>
+          </a:bodyPr>
+          <a:lstStyle/>
+          <a:p>
+            <a:pPr>
+              <a:lnSpc>
+                <a:spcPct val="150000"/>
+              </a:lnSpc>
+              <a:spcBef>
+                <a:spcPts val="600"/>
+              </a:spcBef>
+              <a:spcAft>
+                <a:spcPts val="600"/>
+              </a:spcAft>
+            </a:pPr>
+            <a:r>
+              <a:rPr kumimoji="1" lang="zh-CN" altLang="en-US" dirty="0">
+                <a:latin typeface="微软雅黑" panose="020B0503020204020204" pitchFamily="34" charset="-122"/>
+                <a:ea typeface="微软雅黑" panose="020B0503020204020204" pitchFamily="34" charset="-122"/>
+              </a:rPr>
+              <a:t>然后调用前文所述</a:t>
+            </a:r>
+            <a:r>
+              <a:rPr kumimoji="1" lang="en-US" altLang="zh-CN" dirty="0">
+                <a:latin typeface="微软雅黑" panose="020B0503020204020204" pitchFamily="34" charset="-122"/>
+                <a:ea typeface="微软雅黑" panose="020B0503020204020204" pitchFamily="34" charset="-122"/>
+              </a:rPr>
+              <a:t>build</a:t>
+            </a:r>
+            <a:r>
+              <a:rPr kumimoji="1" lang="zh-CN" altLang="en-US" dirty="0">
+                <a:latin typeface="微软雅黑" panose="020B0503020204020204" pitchFamily="34" charset="-122"/>
+                <a:ea typeface="微软雅黑" panose="020B0503020204020204" pitchFamily="34" charset="-122"/>
+              </a:rPr>
+              <a:t>方法即可转为文件。</a:t>
+            </a:r>
+            <a:endParaRPr kumimoji="1" lang="zh-CN" altLang="en-US" dirty="0">
+              <a:latin typeface="微软雅黑" panose="020B0503020204020204" pitchFamily="34" charset="-122"/>
+              <a:ea typeface="微软雅黑" panose="020B0503020204020204" pitchFamily="34" charset="-122"/>
+            </a:endParaRPr>
+          </a:p>
+          <a:p>
+            <a:pPr>
+              <a:lnSpc>
+                <a:spcPct val="150000"/>
+              </a:lnSpc>
+              <a:spcBef>
+                <a:spcPts val="600"/>
+              </a:spcBef>
+              <a:spcAft>
+                <a:spcPts val="600"/>
+              </a:spcAft>
+            </a:pPr>
+            <a:endParaRPr kumimoji="1" lang="zh-CN" altLang="en-US" dirty="0">
+              <a:latin typeface="微软雅黑" panose="020B0503020204020204" pitchFamily="34" charset="-122"/>
+              <a:ea typeface="微软雅黑" panose="020B0503020204020204" pitchFamily="34" charset="-122"/>
+            </a:endParaRPr>
+          </a:p>
+        </p:txBody>
+      </p:sp>
     </p:spTree>
   </p:cSld>
   <p:clrMapOvr>
@@ -8084,9 +8918,63 @@
           <a:chExt cx="0" cy="0"/>
         </a:xfrm>
       </p:grpSpPr>
+      <p:sp>
+        <p:nvSpPr>
+          <p:cNvPr id="3" name="标题 5"/>
+          <p:cNvSpPr txBox="1"/>
+          <p:nvPr/>
+        </p:nvSpPr>
+        <p:spPr>
+          <a:xfrm>
+            <a:off x="1524000" y="2284527"/>
+            <a:ext cx="9144000" cy="1551797"/>
+          </a:xfrm>
+          <a:prstGeom prst="rect">
+            <a:avLst/>
+          </a:prstGeom>
+        </p:spPr>
+        <p:txBody>
+          <a:bodyPr vert="horz" lIns="91440" tIns="45720" rIns="91440" bIns="45720" rtlCol="0" anchor="ctr">
+            <a:normAutofit/>
+          </a:bodyPr>
+          <a:lstStyle>
+            <a:lvl1pPr algn="l" defTabSz="914400" rtl="0" eaLnBrk="1" latinLnBrk="0" hangingPunct="1">
+              <a:lnSpc>
+                <a:spcPct val="90000"/>
+              </a:lnSpc>
+              <a:spcBef>
+                <a:spcPct val="0"/>
+              </a:spcBef>
+              <a:buNone/>
+              <a:defRPr sz="4400" kern="1200">
+                <a:solidFill>
+                  <a:schemeClr val="tx1"/>
+                </a:solidFill>
+                <a:latin typeface="+mj-lt"/>
+                <a:ea typeface="+mj-ea"/>
+                <a:cs typeface="+mj-cs"/>
+              </a:defRPr>
+            </a:lvl1pPr>
+          </a:lstStyle>
+          <a:p>
+            <a:pPr algn="ctr"/>
+            <a:r>
+              <a:rPr lang="zh-CN" altLang="en-US" b="1" dirty="0">
+                <a:latin typeface="微软雅黑" panose="020B0503020204020204" pitchFamily="34" charset="-122"/>
+                <a:ea typeface="微软雅黑" panose="020B0503020204020204" pitchFamily="34" charset="-122"/>
+              </a:rPr>
+              <a:t>三、性能测试</a:t>
+            </a:r>
+            <a:endParaRPr lang="zh-CN" altLang="en-US" b="1" dirty="0">
+              <a:latin typeface="微软雅黑" panose="020B0503020204020204" pitchFamily="34" charset="-122"/>
+              <a:ea typeface="微软雅黑" panose="020B0503020204020204" pitchFamily="34" charset="-122"/>
+            </a:endParaRPr>
+          </a:p>
+        </p:txBody>
+      </p:sp>
       <p:pic>
         <p:nvPicPr>
-          <p:cNvPr id="3" name="图形 2"/>
+          <p:cNvPr id="4" name="图形 4"/>
           <p:cNvPicPr>
             <a:picLocks noChangeAspect="1"/>
           </p:cNvPicPr>
@@ -8117,240 +9005,6 @@
           </a:prstGeom>
         </p:spPr>
       </p:pic>
-      <p:sp>
-        <p:nvSpPr>
-          <p:cNvPr id="8" name="文本框 7"/>
-          <p:cNvSpPr txBox="1"/>
-          <p:nvPr/>
-        </p:nvSpPr>
-        <p:spPr>
-          <a:xfrm>
-            <a:off x="416520" y="394263"/>
-            <a:ext cx="4419600" cy="553085"/>
-          </a:xfrm>
-          <a:prstGeom prst="rect">
-            <a:avLst/>
-          </a:prstGeom>
-          <a:noFill/>
-        </p:spPr>
-        <p:txBody>
-          <a:bodyPr wrap="square" rtlCol="0">
-            <a:spAutoFit/>
-          </a:bodyPr>
-          <a:lstStyle/>
-          <a:p>
-            <a:r>
-              <a:rPr kumimoji="1" lang="zh-CN" altLang="en-US" sz="3000" b="1" dirty="0">
-                <a:solidFill>
-                  <a:schemeClr val="tx1">
-                    <a:lumMod val="75000"/>
-                    <a:lumOff val="25000"/>
-                  </a:schemeClr>
-                </a:solidFill>
-                <a:latin typeface="微软雅黑" panose="020B0503020204020204" pitchFamily="34" charset="-122"/>
-                <a:ea typeface="微软雅黑" panose="020B0503020204020204" pitchFamily="34" charset="-122"/>
-              </a:rPr>
-              <a:t>性能测试 </a:t>
-            </a:r>
-            <a:r>
-              <a:rPr kumimoji="1" lang="en-US" altLang="zh-CN" sz="3000" b="1" dirty="0">
-                <a:solidFill>
-                  <a:schemeClr val="tx1">
-                    <a:lumMod val="75000"/>
-                    <a:lumOff val="25000"/>
-                  </a:schemeClr>
-                </a:solidFill>
-                <a:latin typeface="微软雅黑" panose="020B0503020204020204" pitchFamily="34" charset="-122"/>
-                <a:ea typeface="微软雅黑" panose="020B0503020204020204" pitchFamily="34" charset="-122"/>
-              </a:rPr>
-              <a:t>- </a:t>
-            </a:r>
-            <a:r>
-              <a:rPr kumimoji="1" lang="zh-CN" altLang="en-US" sz="3000" b="1" dirty="0">
-                <a:solidFill>
-                  <a:schemeClr val="tx1">
-                    <a:lumMod val="75000"/>
-                    <a:lumOff val="25000"/>
-                  </a:schemeClr>
-                </a:solidFill>
-                <a:latin typeface="微软雅黑" panose="020B0503020204020204" pitchFamily="34" charset="-122"/>
-                <a:ea typeface="微软雅黑" panose="020B0503020204020204" pitchFamily="34" charset="-122"/>
-              </a:rPr>
-              <a:t>内存占用</a:t>
-            </a:r>
-            <a:endParaRPr kumimoji="1" lang="zh-CN" altLang="en-US" sz="3000" b="1" dirty="0">
-              <a:solidFill>
-                <a:schemeClr val="tx1">
-                  <a:lumMod val="75000"/>
-                  <a:lumOff val="25000"/>
-                </a:schemeClr>
-              </a:solidFill>
-              <a:latin typeface="微软雅黑" panose="020B0503020204020204" pitchFamily="34" charset="-122"/>
-              <a:ea typeface="微软雅黑" panose="020B0503020204020204" pitchFamily="34" charset="-122"/>
-            </a:endParaRPr>
-          </a:p>
-        </p:txBody>
-      </p:sp>
-      <p:sp>
-        <p:nvSpPr>
-          <p:cNvPr id="10" name="文本框 9"/>
-          <p:cNvSpPr txBox="1"/>
-          <p:nvPr/>
-        </p:nvSpPr>
-        <p:spPr>
-          <a:xfrm>
-            <a:off x="780579" y="1131934"/>
-            <a:ext cx="10336696" cy="506730"/>
-          </a:xfrm>
-          <a:prstGeom prst="rect">
-            <a:avLst/>
-          </a:prstGeom>
-          <a:noFill/>
-        </p:spPr>
-        <p:txBody>
-          <a:bodyPr wrap="square" rtlCol="0">
-            <a:spAutoFit/>
-          </a:bodyPr>
-          <a:lstStyle/>
-          <a:p>
-            <a:pPr>
-              <a:lnSpc>
-                <a:spcPct val="150000"/>
-              </a:lnSpc>
-              <a:spcBef>
-                <a:spcPts val="600"/>
-              </a:spcBef>
-              <a:spcAft>
-                <a:spcPts val="600"/>
-              </a:spcAft>
-            </a:pPr>
-            <a:r>
-              <a:rPr kumimoji="1" lang="zh-CN" altLang="en-US" dirty="0">
-                <a:latin typeface="微软雅黑" panose="020B0503020204020204" pitchFamily="34" charset="-122"/>
-                <a:ea typeface="微软雅黑" panose="020B0503020204020204" pitchFamily="34" charset="-122"/>
-              </a:rPr>
-              <a:t>对于如下</a:t>
-            </a:r>
-            <a:r>
-              <a:rPr kumimoji="1" lang="en-US" altLang="zh-CN" dirty="0">
-                <a:latin typeface="微软雅黑" panose="020B0503020204020204" pitchFamily="34" charset="-122"/>
-                <a:ea typeface="微软雅黑" panose="020B0503020204020204" pitchFamily="34" charset="-122"/>
-              </a:rPr>
-              <a:t>data.lua</a:t>
-            </a:r>
-            <a:r>
-              <a:rPr kumimoji="1" lang="zh-CN" altLang="en-US" dirty="0">
-                <a:latin typeface="微软雅黑" panose="020B0503020204020204" pitchFamily="34" charset="-122"/>
-                <a:ea typeface="微软雅黑" panose="020B0503020204020204" pitchFamily="34" charset="-122"/>
-              </a:rPr>
-              <a:t>和</a:t>
-            </a:r>
-            <a:r>
-              <a:rPr kumimoji="1" lang="en-US" altLang="zh-CN" dirty="0">
-                <a:latin typeface="微软雅黑" panose="020B0503020204020204" pitchFamily="34" charset="-122"/>
-                <a:ea typeface="微软雅黑" panose="020B0503020204020204" pitchFamily="34" charset="-122"/>
-              </a:rPr>
-              <a:t>huge_data.lua</a:t>
-            </a:r>
-            <a:r>
-              <a:rPr kumimoji="1" lang="zh-CN" altLang="en-US" dirty="0">
-                <a:latin typeface="微软雅黑" panose="020B0503020204020204" pitchFamily="34" charset="-122"/>
-                <a:ea typeface="微软雅黑" panose="020B0503020204020204" pitchFamily="34" charset="-122"/>
-              </a:rPr>
-              <a:t>，构建出文件的大小如下：</a:t>
-            </a:r>
-            <a:endParaRPr kumimoji="1" lang="zh-CN" altLang="en-US" dirty="0">
-              <a:latin typeface="微软雅黑" panose="020B0503020204020204" pitchFamily="34" charset="-122"/>
-              <a:ea typeface="微软雅黑" panose="020B0503020204020204" pitchFamily="34" charset="-122"/>
-            </a:endParaRPr>
-          </a:p>
-        </p:txBody>
-      </p:sp>
-      <p:pic>
-        <p:nvPicPr>
-          <p:cNvPr id="4" name="图片 3"/>
-          <p:cNvPicPr>
-            <a:picLocks noChangeAspect="1"/>
-          </p:cNvPicPr>
-          <p:nvPr/>
-        </p:nvPicPr>
-        <p:blipFill>
-          <a:blip r:embed="rId3"/>
-          <a:stretch>
-            <a:fillRect/>
-          </a:stretch>
-        </p:blipFill>
-        <p:spPr>
-          <a:xfrm>
-            <a:off x="780415" y="1885950"/>
-            <a:ext cx="5705475" cy="1133475"/>
-          </a:xfrm>
-          <a:prstGeom prst="rect">
-            <a:avLst/>
-          </a:prstGeom>
-        </p:spPr>
-      </p:pic>
-      <p:sp>
-        <p:nvSpPr>
-          <p:cNvPr id="2" name="文本框 1"/>
-          <p:cNvSpPr txBox="1"/>
-          <p:nvPr/>
-        </p:nvSpPr>
-        <p:spPr>
-          <a:xfrm>
-            <a:off x="780415" y="3331846"/>
-            <a:ext cx="10336696" cy="458908"/>
-          </a:xfrm>
-          <a:prstGeom prst="rect">
-            <a:avLst/>
-          </a:prstGeom>
-          <a:noFill/>
-        </p:spPr>
-        <p:txBody>
-          <a:bodyPr wrap="square" rtlCol="0">
-            <a:spAutoFit/>
-          </a:bodyPr>
-          <a:lstStyle/>
-          <a:p>
-            <a:pPr>
-              <a:lnSpc>
-                <a:spcPct val="150000"/>
-              </a:lnSpc>
-              <a:spcBef>
-                <a:spcPts val="600"/>
-              </a:spcBef>
-              <a:spcAft>
-                <a:spcPts val="600"/>
-              </a:spcAft>
-            </a:pPr>
-            <a:r>
-              <a:rPr kumimoji="1" lang="zh-CN" altLang="en-US" dirty="0">
-                <a:latin typeface="微软雅黑" panose="020B0503020204020204" pitchFamily="34" charset="-122"/>
-                <a:ea typeface="微软雅黑" panose="020B0503020204020204" pitchFamily="34" charset="-122"/>
-              </a:rPr>
-              <a:t>构建文件所需时间和完整遍历</a:t>
-            </a:r>
-            <a:r>
-              <a:rPr kumimoji="1" lang="en-US" altLang="zh-CN" dirty="0" err="1">
-                <a:latin typeface="微软雅黑" panose="020B0503020204020204" pitchFamily="34" charset="-122"/>
-                <a:ea typeface="微软雅黑" panose="020B0503020204020204" pitchFamily="34" charset="-122"/>
-              </a:rPr>
-              <a:t>sharedata</a:t>
-            </a:r>
-            <a:r>
-              <a:rPr kumimoji="1" lang="zh-CN" altLang="en-US" dirty="0">
-                <a:latin typeface="微软雅黑" panose="020B0503020204020204" pitchFamily="34" charset="-122"/>
-                <a:ea typeface="微软雅黑" panose="020B0503020204020204" pitchFamily="34" charset="-122"/>
-              </a:rPr>
-              <a:t>的时间基本相等（见后文）。</a:t>
-            </a:r>
-            <a:endParaRPr kumimoji="1" lang="zh-CN" altLang="en-US" dirty="0">
-              <a:latin typeface="微软雅黑" panose="020B0503020204020204" pitchFamily="34" charset="-122"/>
-              <a:ea typeface="微软雅黑" panose="020B0503020204020204" pitchFamily="34" charset="-122"/>
-            </a:endParaRPr>
-          </a:p>
-        </p:txBody>
-      </p:sp>
     </p:spTree>
   </p:cSld>
   <p:clrMapOvr>
@@ -8603,8 +9257,8 @@
         </p:nvSpPr>
         <p:spPr>
           <a:xfrm>
-            <a:off x="769784" y="1049384"/>
-            <a:ext cx="10336696" cy="3199765"/>
+            <a:off x="780579" y="1131934"/>
+            <a:ext cx="10336696" cy="506730"/>
           </a:xfrm>
           <a:prstGeom prst="rect">
             <a:avLst/>
@@ -8633,260 +9287,46 @@
                 <a:latin typeface="微软雅黑" panose="020B0503020204020204" pitchFamily="34" charset="-122"/>
                 <a:ea typeface="微软雅黑" panose="020B0503020204020204" pitchFamily="34" charset="-122"/>
               </a:rPr>
-              <a:t>提供了三组程序用于测试内存占用。由于时间限制，没能在实际的服务器</a:t>
-            </a:r>
-            <a:r>
-              <a:rPr kumimoji="1" lang="en-US" altLang="zh-CN" dirty="0">
-                <a:latin typeface="微软雅黑" panose="020B0503020204020204" pitchFamily="34" charset="-122"/>
-                <a:ea typeface="微软雅黑" panose="020B0503020204020204" pitchFamily="34" charset="-122"/>
-              </a:rPr>
-              <a:t>demo</a:t>
-            </a:r>
-            <a:r>
-              <a:rPr kumimoji="1" lang="zh-CN" altLang="en-US" dirty="0">
-                <a:latin typeface="微软雅黑" panose="020B0503020204020204" pitchFamily="34" charset="-122"/>
-                <a:ea typeface="微软雅黑" panose="020B0503020204020204" pitchFamily="34" charset="-122"/>
-              </a:rPr>
-              <a:t>上进行测试。</a:t>
+              <a:t>对于如下</a:t>
+            </a:r>
+            <a:r>
+              <a:rPr kumimoji="1" lang="en-US" altLang="zh-CN" dirty="0">
+                <a:latin typeface="微软雅黑" panose="020B0503020204020204" pitchFamily="34" charset="-122"/>
+                <a:ea typeface="微软雅黑" panose="020B0503020204020204" pitchFamily="34" charset="-122"/>
+              </a:rPr>
+              <a:t>data.lua</a:t>
+            </a:r>
+            <a:r>
+              <a:rPr kumimoji="1" lang="zh-CN" altLang="en-US" dirty="0">
+                <a:latin typeface="微软雅黑" panose="020B0503020204020204" pitchFamily="34" charset="-122"/>
+                <a:ea typeface="微软雅黑" panose="020B0503020204020204" pitchFamily="34" charset="-122"/>
+              </a:rPr>
+              <a:t>和</a:t>
+            </a:r>
+            <a:r>
+              <a:rPr kumimoji="1" lang="en-US" altLang="zh-CN" dirty="0">
+                <a:latin typeface="微软雅黑" panose="020B0503020204020204" pitchFamily="34" charset="-122"/>
+                <a:ea typeface="微软雅黑" panose="020B0503020204020204" pitchFamily="34" charset="-122"/>
+              </a:rPr>
+              <a:t>huge_data.lua</a:t>
+            </a:r>
+            <a:r>
+              <a:rPr kumimoji="1" lang="zh-CN" altLang="en-US" dirty="0">
+                <a:latin typeface="微软雅黑" panose="020B0503020204020204" pitchFamily="34" charset="-122"/>
+                <a:ea typeface="微软雅黑" panose="020B0503020204020204" pitchFamily="34" charset="-122"/>
+              </a:rPr>
+              <a:t>，构建出文件的大小如下：</a:t>
             </a:r>
             <a:endParaRPr kumimoji="1" lang="zh-CN" altLang="en-US" dirty="0">
               <a:latin typeface="微软雅黑" panose="020B0503020204020204" pitchFamily="34" charset="-122"/>
               <a:ea typeface="微软雅黑" panose="020B0503020204020204" pitchFamily="34" charset="-122"/>
             </a:endParaRPr>
           </a:p>
-          <a:p>
-            <a:pPr>
-              <a:lnSpc>
-                <a:spcPct val="150000"/>
-              </a:lnSpc>
-              <a:spcBef>
-                <a:spcPts val="600"/>
-              </a:spcBef>
-              <a:spcAft>
-                <a:spcPts val="600"/>
-              </a:spcAft>
-            </a:pPr>
-            <a:r>
-              <a:rPr kumimoji="1" lang="en-US" altLang="zh-CN" dirty="0">
-                <a:latin typeface="微软雅黑" panose="020B0503020204020204" pitchFamily="34" charset="-122"/>
-                <a:ea typeface="微软雅黑" panose="020B0503020204020204" pitchFamily="34" charset="-122"/>
-                <a:sym typeface="+mn-ea"/>
-              </a:rPr>
-              <a:t>shm_copy</a:t>
-            </a:r>
-            <a:r>
-              <a:rPr kumimoji="1" lang="zh-CN" altLang="en-US" dirty="0">
-                <a:latin typeface="微软雅黑" panose="020B0503020204020204" pitchFamily="34" charset="-122"/>
-                <a:ea typeface="微软雅黑" panose="020B0503020204020204" pitchFamily="34" charset="-122"/>
-                <a:sym typeface="+mn-ea"/>
-              </a:rPr>
-              <a:t>为从</a:t>
-            </a:r>
-            <a:r>
-              <a:rPr kumimoji="1" lang="en-US" altLang="zh-CN" dirty="0">
-                <a:latin typeface="微软雅黑" panose="020B0503020204020204" pitchFamily="34" charset="-122"/>
-                <a:ea typeface="微软雅黑" panose="020B0503020204020204" pitchFamily="34" charset="-122"/>
-                <a:sym typeface="+mn-ea"/>
-              </a:rPr>
-              <a:t>sharedata</a:t>
-            </a:r>
-            <a:r>
-              <a:rPr kumimoji="1" lang="zh-CN" altLang="en-US" dirty="0">
-                <a:latin typeface="微软雅黑" panose="020B0503020204020204" pitchFamily="34" charset="-122"/>
-                <a:ea typeface="微软雅黑" panose="020B0503020204020204" pitchFamily="34" charset="-122"/>
-                <a:sym typeface="+mn-ea"/>
-              </a:rPr>
-              <a:t>构建出</a:t>
-            </a:r>
-            <a:r>
-              <a:rPr kumimoji="1" lang="en-US" altLang="zh-CN" dirty="0">
-                <a:latin typeface="微软雅黑" panose="020B0503020204020204" pitchFamily="34" charset="-122"/>
-                <a:ea typeface="微软雅黑" panose="020B0503020204020204" pitchFamily="34" charset="-122"/>
-                <a:sym typeface="+mn-ea"/>
-              </a:rPr>
-              <a:t>table</a:t>
-            </a:r>
-            <a:r>
-              <a:rPr kumimoji="1" lang="zh-CN" altLang="en-US" dirty="0">
-                <a:latin typeface="微软雅黑" panose="020B0503020204020204" pitchFamily="34" charset="-122"/>
-                <a:ea typeface="微软雅黑" panose="020B0503020204020204" pitchFamily="34" charset="-122"/>
-                <a:sym typeface="+mn-ea"/>
-              </a:rPr>
-              <a:t>然后进行遍历，这样做相当于是在共享</a:t>
-            </a:r>
-            <a:r>
-              <a:rPr kumimoji="1" lang="en-US" altLang="zh-CN" dirty="0">
-                <a:latin typeface="微软雅黑" panose="020B0503020204020204" pitchFamily="34" charset="-122"/>
-                <a:ea typeface="微软雅黑" panose="020B0503020204020204" pitchFamily="34" charset="-122"/>
-                <a:sym typeface="+mn-ea"/>
-              </a:rPr>
-              <a:t>TString</a:t>
-            </a:r>
-            <a:r>
-              <a:rPr kumimoji="1" lang="zh-CN" altLang="en-US" dirty="0">
-                <a:latin typeface="微软雅黑" panose="020B0503020204020204" pitchFamily="34" charset="-122"/>
-                <a:ea typeface="微软雅黑" panose="020B0503020204020204" pitchFamily="34" charset="-122"/>
-                <a:sym typeface="+mn-ea"/>
-              </a:rPr>
-              <a:t>对象，且仍然使用</a:t>
-            </a:r>
-            <a:r>
-              <a:rPr kumimoji="1" lang="en-US" altLang="zh-CN" dirty="0">
-                <a:latin typeface="微软雅黑" panose="020B0503020204020204" pitchFamily="34" charset="-122"/>
-                <a:ea typeface="微软雅黑" panose="020B0503020204020204" pitchFamily="34" charset="-122"/>
-                <a:sym typeface="+mn-ea"/>
-              </a:rPr>
-              <a:t>Lua</a:t>
-            </a:r>
-            <a:r>
-              <a:rPr kumimoji="1" lang="zh-CN" altLang="en-US" dirty="0">
-                <a:latin typeface="微软雅黑" panose="020B0503020204020204" pitchFamily="34" charset="-122"/>
-                <a:ea typeface="微软雅黑" panose="020B0503020204020204" pitchFamily="34" charset="-122"/>
-                <a:sym typeface="+mn-ea"/>
-              </a:rPr>
-              <a:t>原生的</a:t>
-            </a:r>
-            <a:r>
-              <a:rPr kumimoji="1" lang="en-US" altLang="zh-CN" dirty="0">
-                <a:latin typeface="微软雅黑" panose="020B0503020204020204" pitchFamily="34" charset="-122"/>
-                <a:ea typeface="微软雅黑" panose="020B0503020204020204" pitchFamily="34" charset="-122"/>
-                <a:sym typeface="+mn-ea"/>
-              </a:rPr>
-              <a:t>table</a:t>
-            </a:r>
-            <a:r>
-              <a:rPr kumimoji="1" lang="zh-CN" altLang="en-US" dirty="0">
-                <a:latin typeface="微软雅黑" panose="020B0503020204020204" pitchFamily="34" charset="-122"/>
-                <a:ea typeface="微软雅黑" panose="020B0503020204020204" pitchFamily="34" charset="-122"/>
-                <a:sym typeface="+mn-ea"/>
-              </a:rPr>
-              <a:t>进行管理。</a:t>
-            </a:r>
-            <a:endParaRPr kumimoji="1" lang="zh-CN" altLang="en-US" dirty="0">
-              <a:latin typeface="微软雅黑" panose="020B0503020204020204" pitchFamily="34" charset="-122"/>
-              <a:ea typeface="微软雅黑" panose="020B0503020204020204" pitchFamily="34" charset="-122"/>
-            </a:endParaRPr>
-          </a:p>
-          <a:p>
-            <a:pPr>
-              <a:lnSpc>
-                <a:spcPct val="150000"/>
-              </a:lnSpc>
-              <a:spcBef>
-                <a:spcPts val="600"/>
-              </a:spcBef>
-              <a:spcAft>
-                <a:spcPts val="600"/>
-              </a:spcAft>
-            </a:pPr>
-            <a:r>
-              <a:rPr kumimoji="1" lang="en-US" altLang="zh-CN" dirty="0">
-                <a:latin typeface="微软雅黑" panose="020B0503020204020204" pitchFamily="34" charset="-122"/>
-                <a:ea typeface="微软雅黑" panose="020B0503020204020204" pitchFamily="34" charset="-122"/>
-                <a:sym typeface="+mn-ea"/>
-              </a:rPr>
-              <a:t>shm_read</a:t>
-            </a:r>
-            <a:r>
-              <a:rPr kumimoji="1" lang="zh-CN" altLang="en-US" dirty="0">
-                <a:latin typeface="微软雅黑" panose="020B0503020204020204" pitchFamily="34" charset="-122"/>
-                <a:ea typeface="微软雅黑" panose="020B0503020204020204" pitchFamily="34" charset="-122"/>
-                <a:sym typeface="+mn-ea"/>
-              </a:rPr>
-              <a:t>为直接遍历</a:t>
-            </a:r>
-            <a:r>
-              <a:rPr kumimoji="1" lang="en-US" altLang="zh-CN" dirty="0">
-                <a:latin typeface="微软雅黑" panose="020B0503020204020204" pitchFamily="34" charset="-122"/>
-                <a:ea typeface="微软雅黑" panose="020B0503020204020204" pitchFamily="34" charset="-122"/>
-                <a:sym typeface="+mn-ea"/>
-              </a:rPr>
-              <a:t>sharedata</a:t>
-            </a:r>
-            <a:r>
-              <a:rPr kumimoji="1" lang="zh-CN" altLang="en-US" dirty="0">
-                <a:latin typeface="微软雅黑" panose="020B0503020204020204" pitchFamily="34" charset="-122"/>
-                <a:ea typeface="微软雅黑" panose="020B0503020204020204" pitchFamily="34" charset="-122"/>
-                <a:sym typeface="+mn-ea"/>
-              </a:rPr>
-              <a:t>，</a:t>
-            </a:r>
-            <a:endParaRPr kumimoji="1" lang="zh-CN" altLang="en-US" dirty="0">
-              <a:latin typeface="微软雅黑" panose="020B0503020204020204" pitchFamily="34" charset="-122"/>
-              <a:ea typeface="微软雅黑" panose="020B0503020204020204" pitchFamily="34" charset="-122"/>
-            </a:endParaRPr>
-          </a:p>
-          <a:p>
-            <a:pPr>
-              <a:lnSpc>
-                <a:spcPct val="150000"/>
-              </a:lnSpc>
-              <a:spcBef>
-                <a:spcPts val="600"/>
-              </a:spcBef>
-              <a:spcAft>
-                <a:spcPts val="600"/>
-              </a:spcAft>
-            </a:pPr>
-            <a:r>
-              <a:rPr kumimoji="1" lang="en-US" altLang="zh-CN" dirty="0">
-                <a:latin typeface="微软雅黑" panose="020B0503020204020204" pitchFamily="34" charset="-122"/>
-                <a:ea typeface="微软雅黑" panose="020B0503020204020204" pitchFamily="34" charset="-122"/>
-                <a:sym typeface="+mn-ea"/>
-              </a:rPr>
-              <a:t>tb_read</a:t>
-            </a:r>
-            <a:r>
-              <a:rPr kumimoji="1" lang="zh-CN" altLang="en-US" dirty="0">
-                <a:latin typeface="微软雅黑" panose="020B0503020204020204" pitchFamily="34" charset="-122"/>
-                <a:ea typeface="微软雅黑" panose="020B0503020204020204" pitchFamily="34" charset="-122"/>
-                <a:sym typeface="+mn-ea"/>
-              </a:rPr>
-              <a:t>为直接遍历原始</a:t>
-            </a:r>
-            <a:r>
-              <a:rPr kumimoji="1" lang="en-US" altLang="zh-CN" dirty="0">
-                <a:latin typeface="微软雅黑" panose="020B0503020204020204" pitchFamily="34" charset="-122"/>
-                <a:ea typeface="微软雅黑" panose="020B0503020204020204" pitchFamily="34" charset="-122"/>
-                <a:sym typeface="+mn-ea"/>
-              </a:rPr>
-              <a:t>table</a:t>
-            </a:r>
-            <a:endParaRPr kumimoji="1" lang="en-US" altLang="zh-CN" dirty="0">
-              <a:latin typeface="微软雅黑" panose="020B0503020204020204" pitchFamily="34" charset="-122"/>
-              <a:ea typeface="微软雅黑" panose="020B0503020204020204" pitchFamily="34" charset="-122"/>
-              <a:sym typeface="+mn-ea"/>
-            </a:endParaRPr>
-          </a:p>
-          <a:p>
-            <a:pPr>
-              <a:lnSpc>
-                <a:spcPct val="150000"/>
-              </a:lnSpc>
-              <a:spcBef>
-                <a:spcPts val="600"/>
-              </a:spcBef>
-              <a:spcAft>
-                <a:spcPts val="600"/>
-              </a:spcAft>
-            </a:pPr>
-            <a:r>
-              <a:rPr kumimoji="1" lang="zh-CN" altLang="en-US" dirty="0">
-                <a:latin typeface="微软雅黑" panose="020B0503020204020204" pitchFamily="34" charset="-122"/>
-                <a:ea typeface="微软雅黑" panose="020B0503020204020204" pitchFamily="34" charset="-122"/>
-              </a:rPr>
-              <a:t>遍历函数如下：</a:t>
-            </a:r>
-            <a:endParaRPr kumimoji="1" lang="zh-CN" altLang="en-US" dirty="0">
-              <a:latin typeface="微软雅黑" panose="020B0503020204020204" pitchFamily="34" charset="-122"/>
-              <a:ea typeface="微软雅黑" panose="020B0503020204020204" pitchFamily="34" charset="-122"/>
-            </a:endParaRPr>
-          </a:p>
         </p:txBody>
       </p:sp>
       <p:pic>
         <p:nvPicPr>
-          <p:cNvPr id="2" name="图片 1"/>
+          <p:cNvPr id="4" name="图片 3"/>
           <p:cNvPicPr>
             <a:picLocks noChangeAspect="1"/>
           </p:cNvPicPr>
@@ -8900,14 +9340,75 @@
         </p:blipFill>
         <p:spPr>
           <a:xfrm>
-            <a:off x="769620" y="4556760"/>
-            <a:ext cx="5095875" cy="1666875"/>
+            <a:off x="780415" y="1885950"/>
+            <a:ext cx="5705475" cy="1133475"/>
           </a:xfrm>
           <a:prstGeom prst="rect">
             <a:avLst/>
           </a:prstGeom>
         </p:spPr>
       </p:pic>
+      <p:sp>
+        <p:nvSpPr>
+          <p:cNvPr id="2" name="文本框 1"/>
+          <p:cNvSpPr txBox="1"/>
+          <p:nvPr/>
+        </p:nvSpPr>
+        <p:spPr>
+          <a:xfrm>
+            <a:off x="780415" y="3331846"/>
+            <a:ext cx="10336696" cy="458908"/>
+          </a:xfrm>
+          <a:prstGeom prst="rect">
+            <a:avLst/>
+          </a:prstGeom>
+          <a:noFill/>
+        </p:spPr>
+        <p:txBody>
+          <a:bodyPr wrap="square" rtlCol="0">
+            <a:spAutoFit/>
+          </a:bodyPr>
+          <a:lstStyle/>
+          <a:p>
+            <a:pPr>
+              <a:lnSpc>
+                <a:spcPct val="150000"/>
+              </a:lnSpc>
+              <a:spcBef>
+                <a:spcPts val="600"/>
+              </a:spcBef>
+              <a:spcAft>
+                <a:spcPts val="600"/>
+              </a:spcAft>
+            </a:pPr>
+            <a:r>
+              <a:rPr kumimoji="1" lang="zh-CN" altLang="en-US" dirty="0">
+                <a:latin typeface="微软雅黑" panose="020B0503020204020204" pitchFamily="34" charset="-122"/>
+                <a:ea typeface="微软雅黑" panose="020B0503020204020204" pitchFamily="34" charset="-122"/>
+              </a:rPr>
+              <a:t>构建文件所需时间和完整遍历</a:t>
+            </a:r>
+            <a:r>
+              <a:rPr kumimoji="1" lang="en-US" altLang="zh-CN" dirty="0" err="1">
+                <a:latin typeface="微软雅黑" panose="020B0503020204020204" pitchFamily="34" charset="-122"/>
+                <a:ea typeface="微软雅黑" panose="020B0503020204020204" pitchFamily="34" charset="-122"/>
+              </a:rPr>
+              <a:t>sharedata</a:t>
+            </a:r>
+            <a:r>
+              <a:rPr kumimoji="1" lang="zh-CN" altLang="en-US" dirty="0">
+                <a:latin typeface="微软雅黑" panose="020B0503020204020204" pitchFamily="34" charset="-122"/>
+                <a:ea typeface="微软雅黑" panose="020B0503020204020204" pitchFamily="34" charset="-122"/>
+              </a:rPr>
+              <a:t>的时间基本相等（见后文）。</a:t>
+            </a:r>
+            <a:endParaRPr kumimoji="1" lang="zh-CN" altLang="en-US" dirty="0">
+              <a:latin typeface="微软雅黑" panose="020B0503020204020204" pitchFamily="34" charset="-122"/>
+              <a:ea typeface="微软雅黑" panose="020B0503020204020204" pitchFamily="34" charset="-122"/>
+            </a:endParaRPr>
+          </a:p>
+        </p:txBody>
+      </p:sp>
     </p:spTree>
   </p:cSld>
   <p:clrMapOvr>
@@ -9048,8 +9549,8 @@
         </p:nvSpPr>
         <p:spPr>
           <a:xfrm>
-            <a:off x="740410" y="1049655"/>
-            <a:ext cx="5518150" cy="1645285"/>
+            <a:off x="769784" y="1049384"/>
+            <a:ext cx="10336696" cy="3199765"/>
           </a:xfrm>
           <a:prstGeom prst="rect">
             <a:avLst/>
@@ -9074,58 +9575,25 @@
               </a:spcAft>
             </a:pPr>
             <a:r>
-              <a:rPr kumimoji="1" lang="en-US" altLang="zh-CN" dirty="0">
-                <a:latin typeface="微软雅黑" panose="020B0503020204020204" pitchFamily="34" charset="-122"/>
-                <a:ea typeface="微软雅黑" panose="020B0503020204020204" pitchFamily="34" charset="-122"/>
-              </a:rPr>
-              <a:t>shm_copy</a:t>
-            </a:r>
-            <a:r>
-              <a:rPr kumimoji="1" lang="zh-CN" altLang="en-US" dirty="0">
-                <a:latin typeface="微软雅黑" panose="020B0503020204020204" pitchFamily="34" charset="-122"/>
-                <a:ea typeface="微软雅黑" panose="020B0503020204020204" pitchFamily="34" charset="-122"/>
-              </a:rPr>
-              <a:t>为</a:t>
-            </a:r>
-            <a:r>
-              <a:rPr kumimoji="1" lang="zh-CN" altLang="en-US" dirty="0">
-                <a:latin typeface="微软雅黑" panose="020B0503020204020204" pitchFamily="34" charset="-122"/>
-                <a:ea typeface="微软雅黑" panose="020B0503020204020204" pitchFamily="34" charset="-122"/>
-                <a:sym typeface="+mn-ea"/>
-              </a:rPr>
-              <a:t>从</a:t>
-            </a:r>
-            <a:r>
-              <a:rPr kumimoji="1" lang="en-US" altLang="zh-CN" dirty="0">
-                <a:latin typeface="微软雅黑" panose="020B0503020204020204" pitchFamily="34" charset="-122"/>
-                <a:ea typeface="微软雅黑" panose="020B0503020204020204" pitchFamily="34" charset="-122"/>
-                <a:sym typeface="+mn-ea"/>
-              </a:rPr>
-              <a:t>sharedata</a:t>
-            </a:r>
-            <a:r>
-              <a:rPr kumimoji="1" lang="zh-CN" altLang="en-US" dirty="0">
-                <a:latin typeface="微软雅黑" panose="020B0503020204020204" pitchFamily="34" charset="-122"/>
-                <a:ea typeface="微软雅黑" panose="020B0503020204020204" pitchFamily="34" charset="-122"/>
-                <a:sym typeface="+mn-ea"/>
-              </a:rPr>
-              <a:t>构建出</a:t>
-            </a:r>
-            <a:r>
-              <a:rPr kumimoji="1" lang="en-US" altLang="zh-CN" dirty="0">
-                <a:latin typeface="微软雅黑" panose="020B0503020204020204" pitchFamily="34" charset="-122"/>
-                <a:ea typeface="微软雅黑" panose="020B0503020204020204" pitchFamily="34" charset="-122"/>
-                <a:sym typeface="+mn-ea"/>
-              </a:rPr>
-              <a:t>table</a:t>
-            </a:r>
-            <a:r>
-              <a:rPr kumimoji="1" lang="zh-CN" altLang="en-US" dirty="0">
-                <a:latin typeface="微软雅黑" panose="020B0503020204020204" pitchFamily="34" charset="-122"/>
-                <a:ea typeface="微软雅黑" panose="020B0503020204020204" pitchFamily="34" charset="-122"/>
-                <a:sym typeface="+mn-ea"/>
-              </a:rPr>
-              <a:t>然后访问，</a:t>
+              <a:rPr kumimoji="1" lang="zh-CN" altLang="en-US" dirty="0">
+                <a:latin typeface="微软雅黑" panose="020B0503020204020204" pitchFamily="34" charset="-122"/>
+                <a:ea typeface="微软雅黑" panose="020B0503020204020204" pitchFamily="34" charset="-122"/>
+              </a:rPr>
+              <a:t>提供了三组程序用于测试内存占用。由于时间限制，没能在实际的服务器</a:t>
+            </a:r>
+            <a:r>
+              <a:rPr kumimoji="1" lang="en-US" altLang="zh-CN" dirty="0">
+                <a:latin typeface="微软雅黑" panose="020B0503020204020204" pitchFamily="34" charset="-122"/>
+                <a:ea typeface="微软雅黑" panose="020B0503020204020204" pitchFamily="34" charset="-122"/>
+              </a:rPr>
+              <a:t>demo</a:t>
+            </a:r>
+            <a:r>
+              <a:rPr kumimoji="1" lang="zh-CN" altLang="en-US" dirty="0">
+                <a:latin typeface="微软雅黑" panose="020B0503020204020204" pitchFamily="34" charset="-122"/>
+                <a:ea typeface="微软雅黑" panose="020B0503020204020204" pitchFamily="34" charset="-122"/>
+              </a:rPr>
+              <a:t>上进行测试。</a:t>
             </a:r>
             <a:endParaRPr kumimoji="1" lang="zh-CN" altLang="en-US" dirty="0">
               <a:latin typeface="微软雅黑" panose="020B0503020204020204" pitchFamily="34" charset="-122"/>
@@ -9148,20 +9616,23 @@
               <a:rPr kumimoji="1" lang="en-US" altLang="zh-CN" dirty="0">
                 <a:latin typeface="微软雅黑" panose="020B0503020204020204" pitchFamily="34" charset="-122"/>
                 <a:ea typeface="微软雅黑" panose="020B0503020204020204" pitchFamily="34" charset="-122"/>
-              </a:rPr>
-              <a:t>shm_read</a:t>
-            </a:r>
-            <a:r>
-              <a:rPr kumimoji="1" lang="zh-CN" altLang="en-US" dirty="0">
-                <a:latin typeface="微软雅黑" panose="020B0503020204020204" pitchFamily="34" charset="-122"/>
-                <a:ea typeface="微软雅黑" panose="020B0503020204020204" pitchFamily="34" charset="-122"/>
-              </a:rPr>
-              <a:t>为直接访问</a:t>
-            </a:r>
-            <a:r>
-              <a:rPr kumimoji="1" lang="en-US" altLang="zh-CN" dirty="0">
-                <a:latin typeface="微软雅黑" panose="020B0503020204020204" pitchFamily="34" charset="-122"/>
-                <a:ea typeface="微软雅黑" panose="020B0503020204020204" pitchFamily="34" charset="-122"/>
+                <a:sym typeface="+mn-ea"/>
+              </a:rPr>
+              <a:t>shm_copy</a:t>
+            </a:r>
+            <a:r>
+              <a:rPr kumimoji="1" lang="zh-CN" altLang="en-US" dirty="0">
+                <a:latin typeface="微软雅黑" panose="020B0503020204020204" pitchFamily="34" charset="-122"/>
+                <a:ea typeface="微软雅黑" panose="020B0503020204020204" pitchFamily="34" charset="-122"/>
+                <a:sym typeface="+mn-ea"/>
+              </a:rPr>
+              <a:t>为从</a:t>
+            </a:r>
+            <a:r>
+              <a:rPr kumimoji="1" lang="en-US" altLang="zh-CN" dirty="0">
+                <a:latin typeface="微软雅黑" panose="020B0503020204020204" pitchFamily="34" charset="-122"/>
+                <a:ea typeface="微软雅黑" panose="020B0503020204020204" pitchFamily="34" charset="-122"/>
+                <a:sym typeface="+mn-ea"/>
               </a:rPr>
               <a:t>sharedata</a:t>
             </a:r>
@@ -9169,8 +9640,73 @@
               <a:rPr kumimoji="1" lang="zh-CN" altLang="en-US" dirty="0">
                 <a:latin typeface="微软雅黑" panose="020B0503020204020204" pitchFamily="34" charset="-122"/>
                 <a:ea typeface="微软雅黑" panose="020B0503020204020204" pitchFamily="34" charset="-122"/>
-              </a:rPr>
-              <a:t>，</a:t>
+                <a:sym typeface="+mn-ea"/>
+              </a:rPr>
+              <a:t>构建出</a:t>
+            </a:r>
+            <a:r>
+              <a:rPr kumimoji="1" lang="en-US" altLang="zh-CN" dirty="0">
+                <a:latin typeface="微软雅黑" panose="020B0503020204020204" pitchFamily="34" charset="-122"/>
+                <a:ea typeface="微软雅黑" panose="020B0503020204020204" pitchFamily="34" charset="-122"/>
+                <a:sym typeface="+mn-ea"/>
+              </a:rPr>
+              <a:t>table</a:t>
+            </a:r>
+            <a:r>
+              <a:rPr kumimoji="1" lang="zh-CN" altLang="en-US" dirty="0">
+                <a:latin typeface="微软雅黑" panose="020B0503020204020204" pitchFamily="34" charset="-122"/>
+                <a:ea typeface="微软雅黑" panose="020B0503020204020204" pitchFamily="34" charset="-122"/>
+                <a:sym typeface="+mn-ea"/>
+              </a:rPr>
+              <a:t>然后进行遍历，这样做相当于是在共享</a:t>
+            </a:r>
+            <a:r>
+              <a:rPr kumimoji="1" lang="en-US" altLang="zh-CN" dirty="0">
+                <a:latin typeface="微软雅黑" panose="020B0503020204020204" pitchFamily="34" charset="-122"/>
+                <a:ea typeface="微软雅黑" panose="020B0503020204020204" pitchFamily="34" charset="-122"/>
+                <a:sym typeface="+mn-ea"/>
+              </a:rPr>
+              <a:t>TString</a:t>
+            </a:r>
+            <a:r>
+              <a:rPr kumimoji="1" lang="zh-CN" altLang="en-US" dirty="0">
+                <a:latin typeface="微软雅黑" panose="020B0503020204020204" pitchFamily="34" charset="-122"/>
+                <a:ea typeface="微软雅黑" panose="020B0503020204020204" pitchFamily="34" charset="-122"/>
+                <a:sym typeface="+mn-ea"/>
+              </a:rPr>
+              <a:t>对象，且仍然使用</a:t>
+            </a:r>
+            <a:r>
+              <a:rPr kumimoji="1" lang="en-US" altLang="zh-CN" dirty="0">
+                <a:latin typeface="微软雅黑" panose="020B0503020204020204" pitchFamily="34" charset="-122"/>
+                <a:ea typeface="微软雅黑" panose="020B0503020204020204" pitchFamily="34" charset="-122"/>
+                <a:sym typeface="+mn-ea"/>
+              </a:rPr>
+              <a:t>Lua</a:t>
+            </a:r>
+            <a:r>
+              <a:rPr kumimoji="1" lang="zh-CN" altLang="en-US" dirty="0">
+                <a:latin typeface="微软雅黑" panose="020B0503020204020204" pitchFamily="34" charset="-122"/>
+                <a:ea typeface="微软雅黑" panose="020B0503020204020204" pitchFamily="34" charset="-122"/>
+                <a:sym typeface="+mn-ea"/>
+              </a:rPr>
+              <a:t>原生的</a:t>
+            </a:r>
+            <a:r>
+              <a:rPr kumimoji="1" lang="en-US" altLang="zh-CN" dirty="0">
+                <a:latin typeface="微软雅黑" panose="020B0503020204020204" pitchFamily="34" charset="-122"/>
+                <a:ea typeface="微软雅黑" panose="020B0503020204020204" pitchFamily="34" charset="-122"/>
+                <a:sym typeface="+mn-ea"/>
+              </a:rPr>
+              <a:t>table</a:t>
+            </a:r>
+            <a:r>
+              <a:rPr kumimoji="1" lang="zh-CN" altLang="en-US" dirty="0">
+                <a:latin typeface="微软雅黑" panose="020B0503020204020204" pitchFamily="34" charset="-122"/>
+                <a:ea typeface="微软雅黑" panose="020B0503020204020204" pitchFamily="34" charset="-122"/>
+                <a:sym typeface="+mn-ea"/>
+              </a:rPr>
+              <a:t>进行管理。</a:t>
             </a:r>
             <a:endParaRPr kumimoji="1" lang="zh-CN" altLang="en-US" dirty="0">
               <a:latin typeface="微软雅黑" panose="020B0503020204020204" pitchFamily="34" charset="-122"/>
@@ -9193,6 +9729,56 @@
               <a:rPr kumimoji="1" lang="en-US" altLang="zh-CN" dirty="0">
                 <a:latin typeface="微软雅黑" panose="020B0503020204020204" pitchFamily="34" charset="-122"/>
                 <a:ea typeface="微软雅黑" panose="020B0503020204020204" pitchFamily="34" charset="-122"/>
+                <a:sym typeface="+mn-ea"/>
+              </a:rPr>
+              <a:t>shm_read</a:t>
+            </a:r>
+            <a:r>
+              <a:rPr kumimoji="1" lang="zh-CN" altLang="en-US" dirty="0">
+                <a:latin typeface="微软雅黑" panose="020B0503020204020204" pitchFamily="34" charset="-122"/>
+                <a:ea typeface="微软雅黑" panose="020B0503020204020204" pitchFamily="34" charset="-122"/>
+                <a:sym typeface="+mn-ea"/>
+              </a:rPr>
+              <a:t>为直接遍历</a:t>
+            </a:r>
+            <a:r>
+              <a:rPr kumimoji="1" lang="en-US" altLang="zh-CN" dirty="0">
+                <a:latin typeface="微软雅黑" panose="020B0503020204020204" pitchFamily="34" charset="-122"/>
+                <a:ea typeface="微软雅黑" panose="020B0503020204020204" pitchFamily="34" charset="-122"/>
+                <a:sym typeface="+mn-ea"/>
+              </a:rPr>
+              <a:t>sharedata</a:t>
+            </a:r>
+            <a:r>
+              <a:rPr kumimoji="1" lang="zh-CN" altLang="en-US" dirty="0">
+                <a:latin typeface="微软雅黑" panose="020B0503020204020204" pitchFamily="34" charset="-122"/>
+                <a:ea typeface="微软雅黑" panose="020B0503020204020204" pitchFamily="34" charset="-122"/>
+                <a:sym typeface="+mn-ea"/>
+              </a:rPr>
+              <a:t>，</a:t>
+            </a:r>
+            <a:endParaRPr kumimoji="1" lang="zh-CN" altLang="en-US" dirty="0">
+              <a:latin typeface="微软雅黑" panose="020B0503020204020204" pitchFamily="34" charset="-122"/>
+              <a:ea typeface="微软雅黑" panose="020B0503020204020204" pitchFamily="34" charset="-122"/>
+            </a:endParaRPr>
+          </a:p>
+          <a:p>
+            <a:pPr>
+              <a:lnSpc>
+                <a:spcPct val="150000"/>
+              </a:lnSpc>
+              <a:spcBef>
+                <a:spcPts val="600"/>
+              </a:spcBef>
+              <a:spcAft>
+                <a:spcPts val="600"/>
+              </a:spcAft>
+            </a:pPr>
+            <a:r>
+              <a:rPr kumimoji="1" lang="en-US" altLang="zh-CN" dirty="0">
+                <a:latin typeface="微软雅黑" panose="020B0503020204020204" pitchFamily="34" charset="-122"/>
+                <a:ea typeface="微软雅黑" panose="020B0503020204020204" pitchFamily="34" charset="-122"/>
+                <a:sym typeface="+mn-ea"/>
               </a:rPr>
               <a:t>tb_read</a:t>
             </a:r>
@@ -9200,26 +9786,53 @@
               <a:rPr kumimoji="1" lang="zh-CN" altLang="en-US" dirty="0">
                 <a:latin typeface="微软雅黑" panose="020B0503020204020204" pitchFamily="34" charset="-122"/>
                 <a:ea typeface="微软雅黑" panose="020B0503020204020204" pitchFamily="34" charset="-122"/>
-              </a:rPr>
-              <a:t>为直接访问</a:t>
-            </a:r>
-            <a:r>
-              <a:rPr kumimoji="1" lang="en-US" altLang="zh-CN" dirty="0">
-                <a:latin typeface="微软雅黑" panose="020B0503020204020204" pitchFamily="34" charset="-122"/>
-                <a:ea typeface="微软雅黑" panose="020B0503020204020204" pitchFamily="34" charset="-122"/>
+                <a:sym typeface="+mn-ea"/>
+              </a:rPr>
+              <a:t>为直接遍历原始</a:t>
+            </a:r>
+            <a:r>
+              <a:rPr kumimoji="1" lang="en-US" altLang="zh-CN" dirty="0">
+                <a:latin typeface="微软雅黑" panose="020B0503020204020204" pitchFamily="34" charset="-122"/>
+                <a:ea typeface="微软雅黑" panose="020B0503020204020204" pitchFamily="34" charset="-122"/>
+                <a:sym typeface="+mn-ea"/>
               </a:rPr>
               <a:t>table</a:t>
             </a:r>
             <a:endParaRPr kumimoji="1" lang="en-US" altLang="zh-CN" dirty="0">
               <a:latin typeface="微软雅黑" panose="020B0503020204020204" pitchFamily="34" charset="-122"/>
               <a:ea typeface="微软雅黑" panose="020B0503020204020204" pitchFamily="34" charset="-122"/>
+              <a:sym typeface="+mn-ea"/>
+            </a:endParaRPr>
+          </a:p>
+          <a:p>
+            <a:pPr>
+              <a:lnSpc>
+                <a:spcPct val="150000"/>
+              </a:lnSpc>
+              <a:spcBef>
+                <a:spcPts val="600"/>
+              </a:spcBef>
+              <a:spcAft>
+                <a:spcPts val="600"/>
+              </a:spcAft>
+            </a:pPr>
+            <a:r>
+              <a:rPr kumimoji="1" lang="zh-CN" altLang="en-US" dirty="0">
+                <a:latin typeface="微软雅黑" panose="020B0503020204020204" pitchFamily="34" charset="-122"/>
+                <a:ea typeface="微软雅黑" panose="020B0503020204020204" pitchFamily="34" charset="-122"/>
+              </a:rPr>
+              <a:t>遍历函数如下：</a:t>
+            </a:r>
+            <a:endParaRPr kumimoji="1" lang="zh-CN" altLang="en-US" dirty="0">
+              <a:latin typeface="微软雅黑" panose="020B0503020204020204" pitchFamily="34" charset="-122"/>
+              <a:ea typeface="微软雅黑" panose="020B0503020204020204" pitchFamily="34" charset="-122"/>
             </a:endParaRPr>
           </a:p>
         </p:txBody>
       </p:sp>
       <p:pic>
         <p:nvPicPr>
-          <p:cNvPr id="5" name="图片 4"/>
+          <p:cNvPr id="2" name="图片 1"/>
           <p:cNvPicPr>
             <a:picLocks noChangeAspect="1"/>
           </p:cNvPicPr>
@@ -9233,372 +9846,14 @@
         </p:blipFill>
         <p:spPr>
           <a:xfrm>
-            <a:off x="6696075" y="0"/>
-            <a:ext cx="5495925" cy="4295775"/>
+            <a:off x="769620" y="4556760"/>
+            <a:ext cx="5095875" cy="1666875"/>
           </a:xfrm>
           <a:prstGeom prst="rect">
             <a:avLst/>
           </a:prstGeom>
         </p:spPr>
       </p:pic>
-      <p:sp>
-        <p:nvSpPr>
-          <p:cNvPr id="2" name="文本框 1"/>
-          <p:cNvSpPr txBox="1"/>
-          <p:nvPr/>
-        </p:nvSpPr>
-        <p:spPr>
-          <a:xfrm>
-            <a:off x="740410" y="3775710"/>
-            <a:ext cx="10270490" cy="2562225"/>
-          </a:xfrm>
-          <a:prstGeom prst="rect">
-            <a:avLst/>
-          </a:prstGeom>
-          <a:noFill/>
-        </p:spPr>
-        <p:txBody>
-          <a:bodyPr wrap="square" rtlCol="0">
-            <a:noAutofit/>
-          </a:bodyPr>
-          <a:lstStyle/>
-          <a:p>
-            <a:pPr>
-              <a:lnSpc>
-                <a:spcPct val="150000"/>
-              </a:lnSpc>
-              <a:spcBef>
-                <a:spcPts val="600"/>
-              </a:spcBef>
-              <a:spcAft>
-                <a:spcPts val="600"/>
-              </a:spcAft>
-            </a:pPr>
-            <a:r>
-              <a:rPr kumimoji="1" lang="zh-CN" altLang="en-US" dirty="0">
-                <a:latin typeface="微软雅黑" panose="020B0503020204020204" pitchFamily="34" charset="-122"/>
-                <a:ea typeface="微软雅黑" panose="020B0503020204020204" pitchFamily="34" charset="-122"/>
-              </a:rPr>
-              <a:t>上图测试为启动</a:t>
-            </a:r>
-            <a:r>
-              <a:rPr kumimoji="1" lang="en-US" altLang="zh-CN" dirty="0">
-                <a:latin typeface="微软雅黑" panose="020B0503020204020204" pitchFamily="34" charset="-122"/>
-                <a:ea typeface="微软雅黑" panose="020B0503020204020204" pitchFamily="34" charset="-122"/>
-              </a:rPr>
-              <a:t>20</a:t>
-            </a:r>
-            <a:r>
-              <a:rPr kumimoji="1" lang="zh-CN" altLang="en-US" dirty="0">
-                <a:latin typeface="微软雅黑" panose="020B0503020204020204" pitchFamily="34" charset="-122"/>
-                <a:ea typeface="微软雅黑" panose="020B0503020204020204" pitchFamily="34" charset="-122"/>
-              </a:rPr>
-              <a:t>个进程，数据为</a:t>
-            </a:r>
-            <a:r>
-              <a:rPr kumimoji="1" lang="en-US" altLang="zh-CN" dirty="0">
-                <a:latin typeface="微软雅黑" panose="020B0503020204020204" pitchFamily="34" charset="-122"/>
-                <a:ea typeface="微软雅黑" panose="020B0503020204020204" pitchFamily="34" charset="-122"/>
-              </a:rPr>
-              <a:t>data.lua(693KB)</a:t>
-            </a:r>
-            <a:endParaRPr kumimoji="1" lang="en-US" altLang="zh-CN" dirty="0">
-              <a:latin typeface="微软雅黑" panose="020B0503020204020204" pitchFamily="34" charset="-122"/>
-              <a:ea typeface="微软雅黑" panose="020B0503020204020204" pitchFamily="34" charset="-122"/>
-            </a:endParaRPr>
-          </a:p>
-          <a:p>
-            <a:pPr>
-              <a:lnSpc>
-                <a:spcPct val="150000"/>
-              </a:lnSpc>
-              <a:spcBef>
-                <a:spcPts val="600"/>
-              </a:spcBef>
-              <a:spcAft>
-                <a:spcPts val="600"/>
-              </a:spcAft>
-            </a:pPr>
-            <a:r>
-              <a:rPr kumimoji="1" lang="zh-CN" altLang="en-US" dirty="0">
-                <a:latin typeface="微软雅黑" panose="020B0503020204020204" pitchFamily="34" charset="-122"/>
-                <a:ea typeface="微软雅黑" panose="020B0503020204020204" pitchFamily="34" charset="-122"/>
-              </a:rPr>
-              <a:t>对比</a:t>
-            </a:r>
-            <a:r>
-              <a:rPr kumimoji="1" lang="en-US" altLang="zh-CN" dirty="0">
-                <a:latin typeface="微软雅黑" panose="020B0503020204020204" pitchFamily="34" charset="-122"/>
-                <a:ea typeface="微软雅黑" panose="020B0503020204020204" pitchFamily="34" charset="-122"/>
-              </a:rPr>
-              <a:t>shm_read</a:t>
-            </a:r>
-            <a:r>
-              <a:rPr kumimoji="1" lang="zh-CN" altLang="en-US" dirty="0">
-                <a:latin typeface="微软雅黑" panose="020B0503020204020204" pitchFamily="34" charset="-122"/>
-                <a:ea typeface="微软雅黑" panose="020B0503020204020204" pitchFamily="34" charset="-122"/>
-              </a:rPr>
-              <a:t>和</a:t>
-            </a:r>
-            <a:r>
-              <a:rPr kumimoji="1" lang="en-US" altLang="zh-CN" dirty="0">
-                <a:latin typeface="微软雅黑" panose="020B0503020204020204" pitchFamily="34" charset="-122"/>
-                <a:ea typeface="微软雅黑" panose="020B0503020204020204" pitchFamily="34" charset="-122"/>
-              </a:rPr>
-              <a:t>tb_read</a:t>
-            </a:r>
-            <a:r>
-              <a:rPr kumimoji="1" lang="zh-CN" altLang="en-US" dirty="0">
-                <a:latin typeface="微软雅黑" panose="020B0503020204020204" pitchFamily="34" charset="-122"/>
-                <a:ea typeface="微软雅黑" panose="020B0503020204020204" pitchFamily="34" charset="-122"/>
-              </a:rPr>
-              <a:t>，平均</a:t>
-            </a:r>
-            <a:r>
-              <a:rPr kumimoji="1" lang="en-US" altLang="zh-CN" dirty="0">
-                <a:latin typeface="微软雅黑" panose="020B0503020204020204" pitchFamily="34" charset="-122"/>
-                <a:ea typeface="微软雅黑" panose="020B0503020204020204" pitchFamily="34" charset="-122"/>
-              </a:rPr>
-              <a:t>RSS</a:t>
-            </a:r>
-            <a:r>
-              <a:rPr kumimoji="1" lang="zh-CN" altLang="en-US" dirty="0">
-                <a:latin typeface="微软雅黑" panose="020B0503020204020204" pitchFamily="34" charset="-122"/>
-                <a:ea typeface="微软雅黑" panose="020B0503020204020204" pitchFamily="34" charset="-122"/>
-              </a:rPr>
-              <a:t>优势不明显，平均</a:t>
-            </a:r>
-            <a:r>
-              <a:rPr kumimoji="1" lang="en-US" altLang="zh-CN" dirty="0">
-                <a:latin typeface="微软雅黑" panose="020B0503020204020204" pitchFamily="34" charset="-122"/>
-                <a:ea typeface="微软雅黑" panose="020B0503020204020204" pitchFamily="34" charset="-122"/>
-              </a:rPr>
-              <a:t>PSS</a:t>
-            </a:r>
-            <a:r>
-              <a:rPr kumimoji="1" lang="zh-CN" altLang="en-US" dirty="0">
-                <a:latin typeface="微软雅黑" panose="020B0503020204020204" pitchFamily="34" charset="-122"/>
-                <a:ea typeface="微软雅黑" panose="020B0503020204020204" pitchFamily="34" charset="-122"/>
-              </a:rPr>
-              <a:t>则都小很多，仅为原本的</a:t>
-            </a:r>
-            <a:r>
-              <a:rPr kumimoji="1" lang="en-US" altLang="zh-CN" dirty="0">
-                <a:latin typeface="微软雅黑" panose="020B0503020204020204" pitchFamily="34" charset="-122"/>
-                <a:ea typeface="微软雅黑" panose="020B0503020204020204" pitchFamily="34" charset="-122"/>
-              </a:rPr>
-              <a:t>27%</a:t>
-            </a:r>
-            <a:r>
-              <a:rPr kumimoji="1" lang="zh-CN" altLang="en-US" dirty="0">
-                <a:latin typeface="微软雅黑" panose="020B0503020204020204" pitchFamily="34" charset="-122"/>
-                <a:ea typeface="微软雅黑" panose="020B0503020204020204" pitchFamily="34" charset="-122"/>
-              </a:rPr>
-              <a:t>。</a:t>
-            </a:r>
-            <a:endParaRPr kumimoji="1" lang="zh-CN" altLang="en-US" dirty="0">
-              <a:latin typeface="微软雅黑" panose="020B0503020204020204" pitchFamily="34" charset="-122"/>
-              <a:ea typeface="微软雅黑" panose="020B0503020204020204" pitchFamily="34" charset="-122"/>
-            </a:endParaRPr>
-          </a:p>
-          <a:p>
-            <a:pPr>
-              <a:lnSpc>
-                <a:spcPct val="150000"/>
-              </a:lnSpc>
-              <a:spcBef>
-                <a:spcPts val="600"/>
-              </a:spcBef>
-              <a:spcAft>
-                <a:spcPts val="600"/>
-              </a:spcAft>
-            </a:pPr>
-            <a:r>
-              <a:rPr kumimoji="1" lang="zh-CN" altLang="en-US" dirty="0">
-                <a:latin typeface="微软雅黑" panose="020B0503020204020204" pitchFamily="34" charset="-122"/>
-                <a:ea typeface="微软雅黑" panose="020B0503020204020204" pitchFamily="34" charset="-122"/>
-                <a:sym typeface="+mn-ea"/>
-              </a:rPr>
-              <a:t>对比</a:t>
-            </a:r>
-            <a:r>
-              <a:rPr kumimoji="1" lang="en-US" altLang="zh-CN" dirty="0">
-                <a:latin typeface="微软雅黑" panose="020B0503020204020204" pitchFamily="34" charset="-122"/>
-                <a:ea typeface="微软雅黑" panose="020B0503020204020204" pitchFamily="34" charset="-122"/>
-                <a:sym typeface="+mn-ea"/>
-              </a:rPr>
-              <a:t>shm_copy</a:t>
-            </a:r>
-            <a:r>
-              <a:rPr kumimoji="1" lang="zh-CN" altLang="en-US" dirty="0">
-                <a:latin typeface="微软雅黑" panose="020B0503020204020204" pitchFamily="34" charset="-122"/>
-                <a:ea typeface="微软雅黑" panose="020B0503020204020204" pitchFamily="34" charset="-122"/>
-                <a:sym typeface="+mn-ea"/>
-              </a:rPr>
-              <a:t>和</a:t>
-            </a:r>
-            <a:r>
-              <a:rPr kumimoji="1" lang="en-US" altLang="zh-CN" dirty="0">
-                <a:latin typeface="微软雅黑" panose="020B0503020204020204" pitchFamily="34" charset="-122"/>
-                <a:ea typeface="微软雅黑" panose="020B0503020204020204" pitchFamily="34" charset="-122"/>
-                <a:sym typeface="+mn-ea"/>
-              </a:rPr>
-              <a:t>tb_read</a:t>
-            </a:r>
-            <a:r>
-              <a:rPr kumimoji="1" lang="zh-CN" altLang="en-US" dirty="0">
-                <a:latin typeface="微软雅黑" panose="020B0503020204020204" pitchFamily="34" charset="-122"/>
-                <a:ea typeface="微软雅黑" panose="020B0503020204020204" pitchFamily="34" charset="-122"/>
-                <a:sym typeface="+mn-ea"/>
-              </a:rPr>
-              <a:t>，即使是在复制出整个</a:t>
-            </a:r>
-            <a:r>
-              <a:rPr kumimoji="1" lang="en-US" altLang="zh-CN" dirty="0">
-                <a:latin typeface="微软雅黑" panose="020B0503020204020204" pitchFamily="34" charset="-122"/>
-                <a:ea typeface="微软雅黑" panose="020B0503020204020204" pitchFamily="34" charset="-122"/>
-                <a:sym typeface="+mn-ea"/>
-              </a:rPr>
-              <a:t>table</a:t>
-            </a:r>
-            <a:r>
-              <a:rPr kumimoji="1" lang="zh-CN" altLang="en-US" dirty="0">
-                <a:latin typeface="微软雅黑" panose="020B0503020204020204" pitchFamily="34" charset="-122"/>
-                <a:ea typeface="微软雅黑" panose="020B0503020204020204" pitchFamily="34" charset="-122"/>
-                <a:sym typeface="+mn-ea"/>
-              </a:rPr>
-              <a:t>之后，由于共享了数据表中占大多数的</a:t>
-            </a:r>
-            <a:r>
-              <a:rPr kumimoji="1" lang="en-US" altLang="zh-CN" dirty="0">
-                <a:latin typeface="微软雅黑" panose="020B0503020204020204" pitchFamily="34" charset="-122"/>
-                <a:ea typeface="微软雅黑" panose="020B0503020204020204" pitchFamily="34" charset="-122"/>
-                <a:sym typeface="+mn-ea"/>
-              </a:rPr>
-              <a:t>TString</a:t>
-            </a:r>
-            <a:r>
-              <a:rPr kumimoji="1" lang="zh-CN" altLang="en-US" dirty="0">
-                <a:latin typeface="微软雅黑" panose="020B0503020204020204" pitchFamily="34" charset="-122"/>
-                <a:ea typeface="微软雅黑" panose="020B0503020204020204" pitchFamily="34" charset="-122"/>
-                <a:sym typeface="+mn-ea"/>
-              </a:rPr>
-              <a:t>对象，</a:t>
-            </a:r>
-            <a:r>
-              <a:rPr kumimoji="1" lang="en-US" altLang="zh-CN" dirty="0">
-                <a:latin typeface="微软雅黑" panose="020B0503020204020204" pitchFamily="34" charset="-122"/>
-                <a:ea typeface="微软雅黑" panose="020B0503020204020204" pitchFamily="34" charset="-122"/>
-                <a:sym typeface="+mn-ea"/>
-              </a:rPr>
-              <a:t>PSS</a:t>
-            </a:r>
-            <a:r>
-              <a:rPr kumimoji="1" lang="zh-CN" altLang="en-US" dirty="0">
-                <a:latin typeface="微软雅黑" panose="020B0503020204020204" pitchFamily="34" charset="-122"/>
-                <a:ea typeface="微软雅黑" panose="020B0503020204020204" pitchFamily="34" charset="-122"/>
-                <a:sym typeface="+mn-ea"/>
-              </a:rPr>
-              <a:t>仍然较小。</a:t>
-            </a:r>
-            <a:endParaRPr kumimoji="1" lang="zh-CN" altLang="en-US" dirty="0">
-              <a:latin typeface="微软雅黑" panose="020B0503020204020204" pitchFamily="34" charset="-122"/>
-              <a:ea typeface="微软雅黑" panose="020B0503020204020204" pitchFamily="34" charset="-122"/>
-              <a:sym typeface="+mn-ea"/>
-            </a:endParaRPr>
-          </a:p>
-          <a:p>
-            <a:pPr>
-              <a:lnSpc>
-                <a:spcPct val="150000"/>
-              </a:lnSpc>
-              <a:spcBef>
-                <a:spcPts val="600"/>
-              </a:spcBef>
-              <a:spcAft>
-                <a:spcPts val="600"/>
-              </a:spcAft>
-            </a:pPr>
-            <a:r>
-              <a:rPr kumimoji="1" lang="zh-CN" altLang="en-US" dirty="0">
-                <a:latin typeface="微软雅黑" panose="020B0503020204020204" pitchFamily="34" charset="-122"/>
-                <a:ea typeface="微软雅黑" panose="020B0503020204020204" pitchFamily="34" charset="-122"/>
-                <a:sym typeface="+mn-ea"/>
-              </a:rPr>
-              <a:t>对比</a:t>
-            </a:r>
-            <a:r>
-              <a:rPr kumimoji="1" lang="en-US" altLang="zh-CN" dirty="0">
-                <a:latin typeface="微软雅黑" panose="020B0503020204020204" pitchFamily="34" charset="-122"/>
-                <a:ea typeface="微软雅黑" panose="020B0503020204020204" pitchFamily="34" charset="-122"/>
-                <a:sym typeface="+mn-ea"/>
-              </a:rPr>
-              <a:t>shm_copy</a:t>
-            </a:r>
-            <a:r>
-              <a:rPr kumimoji="1" lang="zh-CN" altLang="en-US" dirty="0">
-                <a:latin typeface="微软雅黑" panose="020B0503020204020204" pitchFamily="34" charset="-122"/>
-                <a:ea typeface="微软雅黑" panose="020B0503020204020204" pitchFamily="34" charset="-122"/>
-                <a:sym typeface="+mn-ea"/>
-              </a:rPr>
-              <a:t>和</a:t>
-            </a:r>
-            <a:r>
-              <a:rPr kumimoji="1" lang="en-US" altLang="zh-CN" dirty="0">
-                <a:latin typeface="微软雅黑" panose="020B0503020204020204" pitchFamily="34" charset="-122"/>
-                <a:ea typeface="微软雅黑" panose="020B0503020204020204" pitchFamily="34" charset="-122"/>
-                <a:sym typeface="+mn-ea"/>
-              </a:rPr>
-              <a:t>shm_read</a:t>
-            </a:r>
-            <a:r>
-              <a:rPr kumimoji="1" lang="zh-CN" altLang="en-US" dirty="0">
-                <a:latin typeface="微软雅黑" panose="020B0503020204020204" pitchFamily="34" charset="-122"/>
-                <a:ea typeface="微软雅黑" panose="020B0503020204020204" pitchFamily="34" charset="-122"/>
-                <a:sym typeface="+mn-ea"/>
-              </a:rPr>
-              <a:t>，可以发现</a:t>
-            </a:r>
-            <a:r>
-              <a:rPr kumimoji="1" lang="en-US" altLang="zh-CN" dirty="0">
-                <a:latin typeface="微软雅黑" panose="020B0503020204020204" pitchFamily="34" charset="-122"/>
-                <a:ea typeface="微软雅黑" panose="020B0503020204020204" pitchFamily="34" charset="-122"/>
-                <a:sym typeface="+mn-ea"/>
-              </a:rPr>
-              <a:t>table</a:t>
-            </a:r>
-            <a:r>
-              <a:rPr kumimoji="1" lang="zh-CN" altLang="en-US" dirty="0">
-                <a:latin typeface="微软雅黑" panose="020B0503020204020204" pitchFamily="34" charset="-122"/>
-                <a:ea typeface="微软雅黑" panose="020B0503020204020204" pitchFamily="34" charset="-122"/>
-                <a:sym typeface="+mn-ea"/>
-              </a:rPr>
-              <a:t>自身的结构还是占用了较多内存。</a:t>
-            </a:r>
-            <a:endParaRPr kumimoji="1" lang="zh-CN" altLang="en-US" dirty="0">
-              <a:latin typeface="微软雅黑" panose="020B0503020204020204" pitchFamily="34" charset="-122"/>
-              <a:ea typeface="微软雅黑" panose="020B0503020204020204" pitchFamily="34" charset="-122"/>
-            </a:endParaRPr>
-          </a:p>
-          <a:p>
-            <a:pPr>
-              <a:lnSpc>
-                <a:spcPct val="150000"/>
-              </a:lnSpc>
-              <a:spcBef>
-                <a:spcPts val="600"/>
-              </a:spcBef>
-              <a:spcAft>
-                <a:spcPts val="600"/>
-              </a:spcAft>
-            </a:pPr>
-            <a:endParaRPr kumimoji="1" lang="zh-CN" altLang="en-US" dirty="0">
-              <a:latin typeface="微软雅黑" panose="020B0503020204020204" pitchFamily="34" charset="-122"/>
-              <a:ea typeface="微软雅黑" panose="020B0503020204020204" pitchFamily="34" charset="-122"/>
-            </a:endParaRPr>
-          </a:p>
-        </p:txBody>
-      </p:sp>
     </p:spTree>
   </p:cSld>
   <p:clrMapOvr>
@@ -9657,9 +9912,260 @@
           </a:prstGeom>
         </p:spPr>
       </p:pic>
+      <p:sp>
+        <p:nvSpPr>
+          <p:cNvPr id="8" name="文本框 7"/>
+          <p:cNvSpPr txBox="1"/>
+          <p:nvPr/>
+        </p:nvSpPr>
+        <p:spPr>
+          <a:xfrm>
+            <a:off x="416520" y="394263"/>
+            <a:ext cx="4419600" cy="553085"/>
+          </a:xfrm>
+          <a:prstGeom prst="rect">
+            <a:avLst/>
+          </a:prstGeom>
+          <a:noFill/>
+        </p:spPr>
+        <p:txBody>
+          <a:bodyPr wrap="square" rtlCol="0">
+            <a:spAutoFit/>
+          </a:bodyPr>
+          <a:lstStyle/>
+          <a:p>
+            <a:r>
+              <a:rPr kumimoji="1" lang="zh-CN" altLang="en-US" sz="3000" b="1" dirty="0">
+                <a:solidFill>
+                  <a:schemeClr val="tx1">
+                    <a:lumMod val="75000"/>
+                    <a:lumOff val="25000"/>
+                  </a:schemeClr>
+                </a:solidFill>
+                <a:latin typeface="微软雅黑" panose="020B0503020204020204" pitchFamily="34" charset="-122"/>
+                <a:ea typeface="微软雅黑" panose="020B0503020204020204" pitchFamily="34" charset="-122"/>
+              </a:rPr>
+              <a:t>性能测试 </a:t>
+            </a:r>
+            <a:r>
+              <a:rPr kumimoji="1" lang="en-US" altLang="zh-CN" sz="3000" b="1" dirty="0">
+                <a:solidFill>
+                  <a:schemeClr val="tx1">
+                    <a:lumMod val="75000"/>
+                    <a:lumOff val="25000"/>
+                  </a:schemeClr>
+                </a:solidFill>
+                <a:latin typeface="微软雅黑" panose="020B0503020204020204" pitchFamily="34" charset="-122"/>
+                <a:ea typeface="微软雅黑" panose="020B0503020204020204" pitchFamily="34" charset="-122"/>
+              </a:rPr>
+              <a:t>- </a:t>
+            </a:r>
+            <a:r>
+              <a:rPr kumimoji="1" lang="zh-CN" altLang="en-US" sz="3000" b="1" dirty="0">
+                <a:solidFill>
+                  <a:schemeClr val="tx1">
+                    <a:lumMod val="75000"/>
+                    <a:lumOff val="25000"/>
+                  </a:schemeClr>
+                </a:solidFill>
+                <a:latin typeface="微软雅黑" panose="020B0503020204020204" pitchFamily="34" charset="-122"/>
+                <a:ea typeface="微软雅黑" panose="020B0503020204020204" pitchFamily="34" charset="-122"/>
+              </a:rPr>
+              <a:t>内存占用</a:t>
+            </a:r>
+            <a:endParaRPr kumimoji="1" lang="zh-CN" altLang="en-US" sz="3000" b="1" dirty="0">
+              <a:solidFill>
+                <a:schemeClr val="tx1">
+                  <a:lumMod val="75000"/>
+                  <a:lumOff val="25000"/>
+                </a:schemeClr>
+              </a:solidFill>
+              <a:latin typeface="微软雅黑" panose="020B0503020204020204" pitchFamily="34" charset="-122"/>
+              <a:ea typeface="微软雅黑" panose="020B0503020204020204" pitchFamily="34" charset="-122"/>
+            </a:endParaRPr>
+          </a:p>
+        </p:txBody>
+      </p:sp>
+      <p:sp>
+        <p:nvSpPr>
+          <p:cNvPr id="10" name="文本框 9"/>
+          <p:cNvSpPr txBox="1"/>
+          <p:nvPr/>
+        </p:nvSpPr>
+        <p:spPr>
+          <a:xfrm>
+            <a:off x="740410" y="1049655"/>
+            <a:ext cx="5518150" cy="1645285"/>
+          </a:xfrm>
+          <a:prstGeom prst="rect">
+            <a:avLst/>
+          </a:prstGeom>
+          <a:noFill/>
+        </p:spPr>
+        <p:txBody>
+          <a:bodyPr wrap="square" rtlCol="0">
+            <a:spAutoFit/>
+          </a:bodyPr>
+          <a:lstStyle/>
+          <a:p>
+            <a:pPr>
+              <a:lnSpc>
+                <a:spcPct val="150000"/>
+              </a:lnSpc>
+              <a:spcBef>
+                <a:spcPts val="600"/>
+              </a:spcBef>
+              <a:spcAft>
+                <a:spcPts val="600"/>
+              </a:spcAft>
+            </a:pPr>
+            <a:r>
+              <a:rPr kumimoji="1" lang="en-US" altLang="zh-CN" dirty="0">
+                <a:latin typeface="微软雅黑" panose="020B0503020204020204" pitchFamily="34" charset="-122"/>
+                <a:ea typeface="微软雅黑" panose="020B0503020204020204" pitchFamily="34" charset="-122"/>
+              </a:rPr>
+              <a:t>shm_copy</a:t>
+            </a:r>
+            <a:r>
+              <a:rPr kumimoji="1" lang="zh-CN" altLang="en-US" dirty="0">
+                <a:latin typeface="微软雅黑" panose="020B0503020204020204" pitchFamily="34" charset="-122"/>
+                <a:ea typeface="微软雅黑" panose="020B0503020204020204" pitchFamily="34" charset="-122"/>
+              </a:rPr>
+              <a:t>为</a:t>
+            </a:r>
+            <a:r>
+              <a:rPr kumimoji="1" lang="zh-CN" altLang="en-US" dirty="0">
+                <a:latin typeface="微软雅黑" panose="020B0503020204020204" pitchFamily="34" charset="-122"/>
+                <a:ea typeface="微软雅黑" panose="020B0503020204020204" pitchFamily="34" charset="-122"/>
+                <a:sym typeface="+mn-ea"/>
+              </a:rPr>
+              <a:t>从</a:t>
+            </a:r>
+            <a:r>
+              <a:rPr kumimoji="1" lang="en-US" altLang="zh-CN" dirty="0">
+                <a:latin typeface="微软雅黑" panose="020B0503020204020204" pitchFamily="34" charset="-122"/>
+                <a:ea typeface="微软雅黑" panose="020B0503020204020204" pitchFamily="34" charset="-122"/>
+                <a:sym typeface="+mn-ea"/>
+              </a:rPr>
+              <a:t>sharedata</a:t>
+            </a:r>
+            <a:r>
+              <a:rPr kumimoji="1" lang="zh-CN" altLang="en-US" dirty="0">
+                <a:latin typeface="微软雅黑" panose="020B0503020204020204" pitchFamily="34" charset="-122"/>
+                <a:ea typeface="微软雅黑" panose="020B0503020204020204" pitchFamily="34" charset="-122"/>
+                <a:sym typeface="+mn-ea"/>
+              </a:rPr>
+              <a:t>构建出</a:t>
+            </a:r>
+            <a:r>
+              <a:rPr kumimoji="1" lang="en-US" altLang="zh-CN" dirty="0">
+                <a:latin typeface="微软雅黑" panose="020B0503020204020204" pitchFamily="34" charset="-122"/>
+                <a:ea typeface="微软雅黑" panose="020B0503020204020204" pitchFamily="34" charset="-122"/>
+                <a:sym typeface="+mn-ea"/>
+              </a:rPr>
+              <a:t>table</a:t>
+            </a:r>
+            <a:r>
+              <a:rPr kumimoji="1" lang="zh-CN" altLang="en-US" dirty="0">
+                <a:latin typeface="微软雅黑" panose="020B0503020204020204" pitchFamily="34" charset="-122"/>
+                <a:ea typeface="微软雅黑" panose="020B0503020204020204" pitchFamily="34" charset="-122"/>
+                <a:sym typeface="+mn-ea"/>
+              </a:rPr>
+              <a:t>然后访问，</a:t>
+            </a:r>
+            <a:endParaRPr kumimoji="1" lang="zh-CN" altLang="en-US" dirty="0">
+              <a:latin typeface="微软雅黑" panose="020B0503020204020204" pitchFamily="34" charset="-122"/>
+              <a:ea typeface="微软雅黑" panose="020B0503020204020204" pitchFamily="34" charset="-122"/>
+            </a:endParaRPr>
+          </a:p>
+          <a:p>
+            <a:pPr>
+              <a:lnSpc>
+                <a:spcPct val="150000"/>
+              </a:lnSpc>
+              <a:spcBef>
+                <a:spcPts val="600"/>
+              </a:spcBef>
+              <a:spcAft>
+                <a:spcPts val="600"/>
+              </a:spcAft>
+            </a:pPr>
+            <a:r>
+              <a:rPr kumimoji="1" lang="en-US" altLang="zh-CN" dirty="0">
+                <a:latin typeface="微软雅黑" panose="020B0503020204020204" pitchFamily="34" charset="-122"/>
+                <a:ea typeface="微软雅黑" panose="020B0503020204020204" pitchFamily="34" charset="-122"/>
+              </a:rPr>
+              <a:t>shm_read</a:t>
+            </a:r>
+            <a:r>
+              <a:rPr kumimoji="1" lang="zh-CN" altLang="en-US" dirty="0">
+                <a:latin typeface="微软雅黑" panose="020B0503020204020204" pitchFamily="34" charset="-122"/>
+                <a:ea typeface="微软雅黑" panose="020B0503020204020204" pitchFamily="34" charset="-122"/>
+              </a:rPr>
+              <a:t>为直接访问</a:t>
+            </a:r>
+            <a:r>
+              <a:rPr kumimoji="1" lang="en-US" altLang="zh-CN" dirty="0">
+                <a:latin typeface="微软雅黑" panose="020B0503020204020204" pitchFamily="34" charset="-122"/>
+                <a:ea typeface="微软雅黑" panose="020B0503020204020204" pitchFamily="34" charset="-122"/>
+              </a:rPr>
+              <a:t>sharedata</a:t>
+            </a:r>
+            <a:r>
+              <a:rPr kumimoji="1" lang="zh-CN" altLang="en-US" dirty="0">
+                <a:latin typeface="微软雅黑" panose="020B0503020204020204" pitchFamily="34" charset="-122"/>
+                <a:ea typeface="微软雅黑" panose="020B0503020204020204" pitchFamily="34" charset="-122"/>
+              </a:rPr>
+              <a:t>，</a:t>
+            </a:r>
+            <a:endParaRPr kumimoji="1" lang="zh-CN" altLang="en-US" dirty="0">
+              <a:latin typeface="微软雅黑" panose="020B0503020204020204" pitchFamily="34" charset="-122"/>
+              <a:ea typeface="微软雅黑" panose="020B0503020204020204" pitchFamily="34" charset="-122"/>
+            </a:endParaRPr>
+          </a:p>
+          <a:p>
+            <a:pPr>
+              <a:lnSpc>
+                <a:spcPct val="150000"/>
+              </a:lnSpc>
+              <a:spcBef>
+                <a:spcPts val="600"/>
+              </a:spcBef>
+              <a:spcAft>
+                <a:spcPts val="600"/>
+              </a:spcAft>
+            </a:pPr>
+            <a:r>
+              <a:rPr kumimoji="1" lang="en-US" altLang="zh-CN" dirty="0">
+                <a:latin typeface="微软雅黑" panose="020B0503020204020204" pitchFamily="34" charset="-122"/>
+                <a:ea typeface="微软雅黑" panose="020B0503020204020204" pitchFamily="34" charset="-122"/>
+              </a:rPr>
+              <a:t>tb_read</a:t>
+            </a:r>
+            <a:r>
+              <a:rPr kumimoji="1" lang="zh-CN" altLang="en-US" dirty="0">
+                <a:latin typeface="微软雅黑" panose="020B0503020204020204" pitchFamily="34" charset="-122"/>
+                <a:ea typeface="微软雅黑" panose="020B0503020204020204" pitchFamily="34" charset="-122"/>
+              </a:rPr>
+              <a:t>为直接访问</a:t>
+            </a:r>
+            <a:r>
+              <a:rPr kumimoji="1" lang="en-US" altLang="zh-CN" dirty="0">
+                <a:latin typeface="微软雅黑" panose="020B0503020204020204" pitchFamily="34" charset="-122"/>
+                <a:ea typeface="微软雅黑" panose="020B0503020204020204" pitchFamily="34" charset="-122"/>
+              </a:rPr>
+              <a:t>table</a:t>
+            </a:r>
+            <a:endParaRPr kumimoji="1" lang="en-US" altLang="zh-CN" dirty="0">
+              <a:latin typeface="微软雅黑" panose="020B0503020204020204" pitchFamily="34" charset="-122"/>
+              <a:ea typeface="微软雅黑" panose="020B0503020204020204" pitchFamily="34" charset="-122"/>
+            </a:endParaRPr>
+          </a:p>
+        </p:txBody>
+      </p:sp>
       <p:pic>
         <p:nvPicPr>
-          <p:cNvPr id="2" name="图片 1"/>
+          <p:cNvPr id="5" name="图片 4"/>
           <p:cNvPicPr>
             <a:picLocks noChangeAspect="1"/>
           </p:cNvPicPr>
@@ -9673,8 +10179,8 @@
         </p:blipFill>
         <p:spPr>
           <a:xfrm>
-            <a:off x="6086475" y="0"/>
-            <a:ext cx="6105525" cy="4286250"/>
+            <a:off x="6696075" y="0"/>
+            <a:ext cx="5495925" cy="4295775"/>
           </a:xfrm>
           <a:prstGeom prst="rect">
             <a:avLst/>
@@ -9683,14 +10189,14 @@
       </p:pic>
       <p:sp>
         <p:nvSpPr>
-          <p:cNvPr id="8" name="文本框 7"/>
+          <p:cNvPr id="2" name="文本框 1"/>
           <p:cNvSpPr txBox="1"/>
           <p:nvPr/>
         </p:nvSpPr>
         <p:spPr>
           <a:xfrm>
-            <a:off x="416520" y="394263"/>
-            <a:ext cx="4419600" cy="553085"/>
+            <a:off x="740410" y="3775710"/>
+            <a:ext cx="10270490" cy="2562225"/>
           </a:xfrm>
           <a:prstGeom prst="rect">
             <a:avLst/>
@@ -9699,81 +10205,7 @@
         </p:spPr>
         <p:txBody>
           <a:bodyPr wrap="square" rtlCol="0">
-            <a:spAutoFit/>
-          </a:bodyPr>
-          <a:lstStyle/>
-          <a:p>
-            <a:r>
-              <a:rPr kumimoji="1" lang="zh-CN" altLang="en-US" sz="3000" b="1" dirty="0">
-                <a:solidFill>
-                  <a:schemeClr val="tx1">
-                    <a:lumMod val="75000"/>
-                    <a:lumOff val="25000"/>
-                  </a:schemeClr>
-                </a:solidFill>
-                <a:latin typeface="微软雅黑" panose="020B0503020204020204" pitchFamily="34" charset="-122"/>
-                <a:ea typeface="微软雅黑" panose="020B0503020204020204" pitchFamily="34" charset="-122"/>
-              </a:rPr>
-              <a:t>性能测试 </a:t>
-            </a:r>
-            <a:r>
-              <a:rPr kumimoji="1" lang="en-US" altLang="zh-CN" sz="3000" b="1" dirty="0">
-                <a:solidFill>
-                  <a:schemeClr val="tx1">
-                    <a:lumMod val="75000"/>
-                    <a:lumOff val="25000"/>
-                  </a:schemeClr>
-                </a:solidFill>
-                <a:latin typeface="微软雅黑" panose="020B0503020204020204" pitchFamily="34" charset="-122"/>
-                <a:ea typeface="微软雅黑" panose="020B0503020204020204" pitchFamily="34" charset="-122"/>
-              </a:rPr>
-              <a:t>- </a:t>
-            </a:r>
-            <a:r>
-              <a:rPr kumimoji="1" lang="zh-CN" altLang="en-US" sz="3000" b="1" dirty="0">
-                <a:solidFill>
-                  <a:schemeClr val="tx1">
-                    <a:lumMod val="75000"/>
-                    <a:lumOff val="25000"/>
-                  </a:schemeClr>
-                </a:solidFill>
-                <a:latin typeface="微软雅黑" panose="020B0503020204020204" pitchFamily="34" charset="-122"/>
-                <a:ea typeface="微软雅黑" panose="020B0503020204020204" pitchFamily="34" charset="-122"/>
-              </a:rPr>
-              <a:t>内存占用</a:t>
-            </a:r>
-            <a:endParaRPr kumimoji="1" lang="zh-CN" altLang="en-US" sz="3000" b="1" dirty="0">
-              <a:solidFill>
-                <a:schemeClr val="tx1">
-                  <a:lumMod val="75000"/>
-                  <a:lumOff val="25000"/>
-                </a:schemeClr>
-              </a:solidFill>
-              <a:latin typeface="微软雅黑" panose="020B0503020204020204" pitchFamily="34" charset="-122"/>
-              <a:ea typeface="微软雅黑" panose="020B0503020204020204" pitchFamily="34" charset="-122"/>
-            </a:endParaRPr>
-          </a:p>
-        </p:txBody>
-      </p:sp>
-      <p:sp>
-        <p:nvSpPr>
-          <p:cNvPr id="10" name="文本框 9"/>
-          <p:cNvSpPr txBox="1"/>
-          <p:nvPr/>
-        </p:nvSpPr>
-        <p:spPr>
-          <a:xfrm>
-            <a:off x="779944" y="1049384"/>
-            <a:ext cx="10336696" cy="1645285"/>
-          </a:xfrm>
-          <a:prstGeom prst="rect">
-            <a:avLst/>
-          </a:prstGeom>
-          <a:noFill/>
-        </p:spPr>
-        <p:txBody>
-          <a:bodyPr wrap="square" rtlCol="0">
-            <a:spAutoFit/>
+            <a:noAutofit/>
           </a:bodyPr>
           <a:lstStyle/>
           <a:p>
@@ -9789,48 +10221,34 @@
               </a:spcAft>
             </a:pPr>
             <a:r>
-              <a:rPr kumimoji="1" lang="en-US" altLang="zh-CN" dirty="0">
-                <a:latin typeface="微软雅黑" panose="020B0503020204020204" pitchFamily="34" charset="-122"/>
-                <a:ea typeface="微软雅黑" panose="020B0503020204020204" pitchFamily="34" charset="-122"/>
-              </a:rPr>
-              <a:t>shm_copy</a:t>
-            </a:r>
-            <a:r>
-              <a:rPr kumimoji="1" lang="zh-CN" altLang="en-US" dirty="0">
-                <a:latin typeface="微软雅黑" panose="020B0503020204020204" pitchFamily="34" charset="-122"/>
-                <a:ea typeface="微软雅黑" panose="020B0503020204020204" pitchFamily="34" charset="-122"/>
-              </a:rPr>
-              <a:t>为从</a:t>
-            </a:r>
-            <a:r>
-              <a:rPr kumimoji="1" lang="en-US" altLang="zh-CN" dirty="0">
-                <a:latin typeface="微软雅黑" panose="020B0503020204020204" pitchFamily="34" charset="-122"/>
-                <a:ea typeface="微软雅黑" panose="020B0503020204020204" pitchFamily="34" charset="-122"/>
-              </a:rPr>
-              <a:t>sharedata</a:t>
-            </a:r>
-            <a:r>
-              <a:rPr kumimoji="1" lang="zh-CN" altLang="en-US" dirty="0">
-                <a:latin typeface="微软雅黑" panose="020B0503020204020204" pitchFamily="34" charset="-122"/>
-                <a:ea typeface="微软雅黑" panose="020B0503020204020204" pitchFamily="34" charset="-122"/>
-              </a:rPr>
-              <a:t>构建出</a:t>
-            </a:r>
-            <a:r>
-              <a:rPr kumimoji="1" lang="en-US" altLang="zh-CN" dirty="0">
-                <a:latin typeface="微软雅黑" panose="020B0503020204020204" pitchFamily="34" charset="-122"/>
-                <a:ea typeface="微软雅黑" panose="020B0503020204020204" pitchFamily="34" charset="-122"/>
-              </a:rPr>
-              <a:t>table</a:t>
-            </a:r>
-            <a:r>
-              <a:rPr kumimoji="1" lang="zh-CN" altLang="en-US" dirty="0">
-                <a:latin typeface="微软雅黑" panose="020B0503020204020204" pitchFamily="34" charset="-122"/>
-                <a:ea typeface="微软雅黑" panose="020B0503020204020204" pitchFamily="34" charset="-122"/>
-              </a:rPr>
-              <a:t>然后访问，</a:t>
-            </a:r>
-            <a:endParaRPr kumimoji="1" lang="zh-CN" altLang="en-US" dirty="0">
+              <a:rPr kumimoji="1" lang="zh-CN" altLang="en-US" dirty="0">
+                <a:latin typeface="微软雅黑" panose="020B0503020204020204" pitchFamily="34" charset="-122"/>
+                <a:ea typeface="微软雅黑" panose="020B0503020204020204" pitchFamily="34" charset="-122"/>
+              </a:rPr>
+              <a:t>上图测试为启动</a:t>
+            </a:r>
+            <a:r>
+              <a:rPr kumimoji="1" lang="en-US" altLang="zh-CN" dirty="0">
+                <a:latin typeface="微软雅黑" panose="020B0503020204020204" pitchFamily="34" charset="-122"/>
+                <a:ea typeface="微软雅黑" panose="020B0503020204020204" pitchFamily="34" charset="-122"/>
+              </a:rPr>
+              <a:t>20</a:t>
+            </a:r>
+            <a:r>
+              <a:rPr kumimoji="1" lang="zh-CN" altLang="en-US" dirty="0">
+                <a:latin typeface="微软雅黑" panose="020B0503020204020204" pitchFamily="34" charset="-122"/>
+                <a:ea typeface="微软雅黑" panose="020B0503020204020204" pitchFamily="34" charset="-122"/>
+              </a:rPr>
+              <a:t>个进程，数据为</a:t>
+            </a:r>
+            <a:r>
+              <a:rPr kumimoji="1" lang="en-US" altLang="zh-CN" dirty="0">
+                <a:latin typeface="微软雅黑" panose="020B0503020204020204" pitchFamily="34" charset="-122"/>
+                <a:ea typeface="微软雅黑" panose="020B0503020204020204" pitchFamily="34" charset="-122"/>
+              </a:rPr>
+              <a:t>data.lua(693KB)</a:t>
+            </a:r>
+            <a:endParaRPr kumimoji="1" lang="en-US" altLang="zh-CN" dirty="0">
               <a:latin typeface="微软雅黑" panose="020B0503020204020204" pitchFamily="34" charset="-122"/>
               <a:ea typeface="微软雅黑" panose="020B0503020204020204" pitchFamily="34" charset="-122"/>
             </a:endParaRPr>
@@ -9848,6 +10266,13 @@
               </a:spcAft>
             </a:pPr>
             <a:r>
+              <a:rPr kumimoji="1" lang="zh-CN" altLang="en-US" dirty="0">
+                <a:latin typeface="微软雅黑" panose="020B0503020204020204" pitchFamily="34" charset="-122"/>
+                <a:ea typeface="微软雅黑" panose="020B0503020204020204" pitchFamily="34" charset="-122"/>
+              </a:rPr>
+              <a:t>对比</a:t>
+            </a:r>
+            <a:r>
               <a:rPr kumimoji="1" lang="en-US" altLang="zh-CN" dirty="0">
                 <a:latin typeface="微软雅黑" panose="020B0503020204020204" pitchFamily="34" charset="-122"/>
                 <a:ea typeface="微软雅黑" panose="020B0503020204020204" pitchFamily="34" charset="-122"/>
@@ -9859,21 +10284,63 @@
                 <a:latin typeface="微软雅黑" panose="020B0503020204020204" pitchFamily="34" charset="-122"/>
                 <a:ea typeface="微软雅黑" panose="020B0503020204020204" pitchFamily="34" charset="-122"/>
               </a:rPr>
-              <a:t>为直接访问</a:t>
-            </a:r>
-            <a:r>
-              <a:rPr kumimoji="1" lang="en-US" altLang="zh-CN" dirty="0">
-                <a:latin typeface="微软雅黑" panose="020B0503020204020204" pitchFamily="34" charset="-122"/>
-                <a:ea typeface="微软雅黑" panose="020B0503020204020204" pitchFamily="34" charset="-122"/>
-              </a:rPr>
-              <a:t>sharedata</a:t>
-            </a:r>
-            <a:r>
-              <a:rPr kumimoji="1" lang="zh-CN" altLang="en-US" dirty="0">
-                <a:latin typeface="微软雅黑" panose="020B0503020204020204" pitchFamily="34" charset="-122"/>
-                <a:ea typeface="微软雅黑" panose="020B0503020204020204" pitchFamily="34" charset="-122"/>
-              </a:rPr>
-              <a:t>，</a:t>
+              <a:t>和</a:t>
+            </a:r>
+            <a:r>
+              <a:rPr kumimoji="1" lang="en-US" altLang="zh-CN" dirty="0">
+                <a:latin typeface="微软雅黑" panose="020B0503020204020204" pitchFamily="34" charset="-122"/>
+                <a:ea typeface="微软雅黑" panose="020B0503020204020204" pitchFamily="34" charset="-122"/>
+              </a:rPr>
+              <a:t>tb_read</a:t>
+            </a:r>
+            <a:r>
+              <a:rPr kumimoji="1" lang="zh-CN" altLang="en-US" dirty="0">
+                <a:latin typeface="微软雅黑" panose="020B0503020204020204" pitchFamily="34" charset="-122"/>
+                <a:ea typeface="微软雅黑" panose="020B0503020204020204" pitchFamily="34" charset="-122"/>
+              </a:rPr>
+              <a:t>，平均</a:t>
+            </a:r>
+            <a:r>
+              <a:rPr kumimoji="1" lang="en-US" altLang="zh-CN" dirty="0">
+                <a:latin typeface="微软雅黑" panose="020B0503020204020204" pitchFamily="34" charset="-122"/>
+                <a:ea typeface="微软雅黑" panose="020B0503020204020204" pitchFamily="34" charset="-122"/>
+              </a:rPr>
+              <a:t>RSS</a:t>
+            </a:r>
+            <a:r>
+              <a:rPr kumimoji="1" lang="zh-CN" altLang="en-US" dirty="0">
+                <a:latin typeface="微软雅黑" panose="020B0503020204020204" pitchFamily="34" charset="-122"/>
+                <a:ea typeface="微软雅黑" panose="020B0503020204020204" pitchFamily="34" charset="-122"/>
+              </a:rPr>
+              <a:t>优势不明显，平均</a:t>
+            </a:r>
+            <a:r>
+              <a:rPr kumimoji="1" lang="en-US" altLang="zh-CN" dirty="0">
+                <a:latin typeface="微软雅黑" panose="020B0503020204020204" pitchFamily="34" charset="-122"/>
+                <a:ea typeface="微软雅黑" panose="020B0503020204020204" pitchFamily="34" charset="-122"/>
+              </a:rPr>
+              <a:t>PSS</a:t>
+            </a:r>
+            <a:r>
+              <a:rPr kumimoji="1" lang="zh-CN" altLang="en-US" dirty="0">
+                <a:latin typeface="微软雅黑" panose="020B0503020204020204" pitchFamily="34" charset="-122"/>
+                <a:ea typeface="微软雅黑" panose="020B0503020204020204" pitchFamily="34" charset="-122"/>
+              </a:rPr>
+              <a:t>则都小很多，仅为原本的</a:t>
+            </a:r>
+            <a:r>
+              <a:rPr kumimoji="1" lang="en-US" altLang="zh-CN" dirty="0">
+                <a:latin typeface="微软雅黑" panose="020B0503020204020204" pitchFamily="34" charset="-122"/>
+                <a:ea typeface="微软雅黑" panose="020B0503020204020204" pitchFamily="34" charset="-122"/>
+              </a:rPr>
+              <a:t>27%</a:t>
+            </a:r>
+            <a:r>
+              <a:rPr kumimoji="1" lang="zh-CN" altLang="en-US" dirty="0">
+                <a:latin typeface="微软雅黑" panose="020B0503020204020204" pitchFamily="34" charset="-122"/>
+                <a:ea typeface="微软雅黑" panose="020B0503020204020204" pitchFamily="34" charset="-122"/>
+              </a:rPr>
+              <a:t>。</a:t>
             </a:r>
             <a:endParaRPr kumimoji="1" lang="zh-CN" altLang="en-US" dirty="0">
               <a:latin typeface="微软雅黑" panose="020B0503020204020204" pitchFamily="34" charset="-122"/>
@@ -9893,9 +10360,34 @@
               </a:spcAft>
             </a:pPr>
             <a:r>
-              <a:rPr kumimoji="1" lang="en-US" altLang="zh-CN" dirty="0">
-                <a:latin typeface="微软雅黑" panose="020B0503020204020204" pitchFamily="34" charset="-122"/>
-                <a:ea typeface="微软雅黑" panose="020B0503020204020204" pitchFamily="34" charset="-122"/>
+              <a:rPr kumimoji="1" lang="zh-CN" altLang="en-US" dirty="0">
+                <a:latin typeface="微软雅黑" panose="020B0503020204020204" pitchFamily="34" charset="-122"/>
+                <a:ea typeface="微软雅黑" panose="020B0503020204020204" pitchFamily="34" charset="-122"/>
+                <a:sym typeface="+mn-ea"/>
+              </a:rPr>
+              <a:t>对比</a:t>
+            </a:r>
+            <a:r>
+              <a:rPr kumimoji="1" lang="en-US" altLang="zh-CN" dirty="0">
+                <a:latin typeface="微软雅黑" panose="020B0503020204020204" pitchFamily="34" charset="-122"/>
+                <a:ea typeface="微软雅黑" panose="020B0503020204020204" pitchFamily="34" charset="-122"/>
+                <a:sym typeface="+mn-ea"/>
+              </a:rPr>
+              <a:t>shm_copy</a:t>
+            </a:r>
+            <a:r>
+              <a:rPr kumimoji="1" lang="zh-CN" altLang="en-US" dirty="0">
+                <a:latin typeface="微软雅黑" panose="020B0503020204020204" pitchFamily="34" charset="-122"/>
+                <a:ea typeface="微软雅黑" panose="020B0503020204020204" pitchFamily="34" charset="-122"/>
+                <a:sym typeface="+mn-ea"/>
+              </a:rPr>
+              <a:t>和</a:t>
+            </a:r>
+            <a:r>
+              <a:rPr kumimoji="1" lang="en-US" altLang="zh-CN" dirty="0">
+                <a:latin typeface="微软雅黑" panose="020B0503020204020204" pitchFamily="34" charset="-122"/>
+                <a:ea typeface="微软雅黑" panose="020B0503020204020204" pitchFamily="34" charset="-122"/>
+                <a:sym typeface="+mn-ea"/>
               </a:rPr>
               <a:t>tb_read</a:t>
             </a:r>
@@ -9903,44 +10395,64 @@
               <a:rPr kumimoji="1" lang="zh-CN" altLang="en-US" dirty="0">
                 <a:latin typeface="微软雅黑" panose="020B0503020204020204" pitchFamily="34" charset="-122"/>
                 <a:ea typeface="微软雅黑" panose="020B0503020204020204" pitchFamily="34" charset="-122"/>
-              </a:rPr>
-              <a:t>为直接访问</a:t>
-            </a:r>
-            <a:r>
-              <a:rPr kumimoji="1" lang="en-US" altLang="zh-CN" dirty="0">
-                <a:latin typeface="微软雅黑" panose="020B0503020204020204" pitchFamily="34" charset="-122"/>
-                <a:ea typeface="微软雅黑" panose="020B0503020204020204" pitchFamily="34" charset="-122"/>
+                <a:sym typeface="+mn-ea"/>
+              </a:rPr>
+              <a:t>，即使是在复制出整个</a:t>
+            </a:r>
+            <a:r>
+              <a:rPr kumimoji="1" lang="en-US" altLang="zh-CN" dirty="0">
+                <a:latin typeface="微软雅黑" panose="020B0503020204020204" pitchFamily="34" charset="-122"/>
+                <a:ea typeface="微软雅黑" panose="020B0503020204020204" pitchFamily="34" charset="-122"/>
+                <a:sym typeface="+mn-ea"/>
               </a:rPr>
               <a:t>table</a:t>
             </a:r>
-            <a:endParaRPr kumimoji="1" lang="en-US" altLang="zh-CN" dirty="0">
+            <a:r>
+              <a:rPr kumimoji="1" lang="zh-CN" altLang="en-US" dirty="0">
+                <a:latin typeface="微软雅黑" panose="020B0503020204020204" pitchFamily="34" charset="-122"/>
+                <a:ea typeface="微软雅黑" panose="020B0503020204020204" pitchFamily="34" charset="-122"/>
+                <a:sym typeface="+mn-ea"/>
+              </a:rPr>
+              <a:t>之后，由于共享了数据表中占大多数的</a:t>
+            </a:r>
+            <a:r>
+              <a:rPr kumimoji="1" lang="en-US" altLang="zh-CN" dirty="0">
+                <a:latin typeface="微软雅黑" panose="020B0503020204020204" pitchFamily="34" charset="-122"/>
+                <a:ea typeface="微软雅黑" panose="020B0503020204020204" pitchFamily="34" charset="-122"/>
+                <a:sym typeface="+mn-ea"/>
+              </a:rPr>
+              <a:t>TString</a:t>
+            </a:r>
+            <a:r>
+              <a:rPr kumimoji="1" lang="zh-CN" altLang="en-US" dirty="0">
+                <a:latin typeface="微软雅黑" panose="020B0503020204020204" pitchFamily="34" charset="-122"/>
+                <a:ea typeface="微软雅黑" panose="020B0503020204020204" pitchFamily="34" charset="-122"/>
+                <a:sym typeface="+mn-ea"/>
+              </a:rPr>
+              <a:t>对象，</a:t>
+            </a:r>
+            <a:r>
+              <a:rPr kumimoji="1" lang="en-US" altLang="zh-CN" dirty="0">
+                <a:latin typeface="微软雅黑" panose="020B0503020204020204" pitchFamily="34" charset="-122"/>
+                <a:ea typeface="微软雅黑" panose="020B0503020204020204" pitchFamily="34" charset="-122"/>
+                <a:sym typeface="+mn-ea"/>
+              </a:rPr>
+              <a:t>PSS</a:t>
+            </a:r>
+            <a:r>
+              <a:rPr kumimoji="1" lang="zh-CN" altLang="en-US" dirty="0">
+                <a:latin typeface="微软雅黑" panose="020B0503020204020204" pitchFamily="34" charset="-122"/>
+                <a:ea typeface="微软雅黑" panose="020B0503020204020204" pitchFamily="34" charset="-122"/>
+                <a:sym typeface="+mn-ea"/>
+              </a:rPr>
+              <a:t>仍然较小。</a:t>
+            </a:r>
+            <a:endParaRPr kumimoji="1" lang="zh-CN" altLang="en-US" dirty="0">
               <a:latin typeface="微软雅黑" panose="020B0503020204020204" pitchFamily="34" charset="-122"/>
               <a:ea typeface="微软雅黑" panose="020B0503020204020204" pitchFamily="34" charset="-122"/>
+              <a:sym typeface="+mn-ea"/>
             </a:endParaRPr>
           </a:p>
-        </p:txBody>
-      </p:sp>
-      <p:sp>
-        <p:nvSpPr>
-          <p:cNvPr id="5" name="文本框 4"/>
-          <p:cNvSpPr txBox="1"/>
-          <p:nvPr/>
-        </p:nvSpPr>
-        <p:spPr>
-          <a:xfrm>
-            <a:off x="780579" y="4368529"/>
-            <a:ext cx="10336696" cy="1645285"/>
-          </a:xfrm>
-          <a:prstGeom prst="rect">
-            <a:avLst/>
-          </a:prstGeom>
-          <a:noFill/>
-        </p:spPr>
-        <p:txBody>
-          <a:bodyPr wrap="square" rtlCol="0">
-            <a:spAutoFit/>
-          </a:bodyPr>
-          <a:lstStyle/>
           <a:p>
             <a:pPr>
               <a:lnSpc>
@@ -9957,95 +10469,57 @@
               <a:rPr kumimoji="1" lang="zh-CN" altLang="en-US" dirty="0">
                 <a:latin typeface="微软雅黑" panose="020B0503020204020204" pitchFamily="34" charset="-122"/>
                 <a:ea typeface="微软雅黑" panose="020B0503020204020204" pitchFamily="34" charset="-122"/>
-              </a:rPr>
-              <a:t>上图测试为启动</a:t>
-            </a:r>
-            <a:r>
-              <a:rPr kumimoji="1" lang="en-US" altLang="zh-CN" dirty="0">
-                <a:latin typeface="微软雅黑" panose="020B0503020204020204" pitchFamily="34" charset="-122"/>
-                <a:ea typeface="微软雅黑" panose="020B0503020204020204" pitchFamily="34" charset="-122"/>
-              </a:rPr>
-              <a:t>20</a:t>
-            </a:r>
-            <a:r>
-              <a:rPr kumimoji="1" lang="zh-CN" altLang="en-US" dirty="0">
-                <a:latin typeface="微软雅黑" panose="020B0503020204020204" pitchFamily="34" charset="-122"/>
-                <a:ea typeface="微软雅黑" panose="020B0503020204020204" pitchFamily="34" charset="-122"/>
-              </a:rPr>
-              <a:t>个进程，数据为</a:t>
-            </a:r>
-            <a:r>
-              <a:rPr kumimoji="1" lang="en-US" altLang="zh-CN" dirty="0">
-                <a:latin typeface="微软雅黑" panose="020B0503020204020204" pitchFamily="34" charset="-122"/>
-                <a:ea typeface="微软雅黑" panose="020B0503020204020204" pitchFamily="34" charset="-122"/>
-              </a:rPr>
-              <a:t>huge_data.lua(2027KB)</a:t>
-            </a:r>
-            <a:endParaRPr kumimoji="1" lang="en-US" altLang="zh-CN" dirty="0">
-              <a:latin typeface="微软雅黑" panose="020B0503020204020204" pitchFamily="34" charset="-122"/>
-              <a:ea typeface="微软雅黑" panose="020B0503020204020204" pitchFamily="34" charset="-122"/>
-            </a:endParaRPr>
-          </a:p>
-          <a:p>
-            <a:pPr>
-              <a:lnSpc>
-                <a:spcPct val="150000"/>
-              </a:lnSpc>
-              <a:spcBef>
-                <a:spcPts val="600"/>
-              </a:spcBef>
-              <a:spcAft>
-                <a:spcPts val="600"/>
-              </a:spcAft>
-            </a:pPr>
-            <a:r>
-              <a:rPr kumimoji="1" lang="zh-CN" altLang="en-US" dirty="0">
-                <a:latin typeface="微软雅黑" panose="020B0503020204020204" pitchFamily="34" charset="-122"/>
-                <a:ea typeface="微软雅黑" panose="020B0503020204020204" pitchFamily="34" charset="-122"/>
-              </a:rPr>
-              <a:t>可以看到，在使用更大的数据表之后，</a:t>
-            </a:r>
-            <a:r>
-              <a:rPr kumimoji="1" lang="en-US" altLang="zh-CN" dirty="0">
-                <a:latin typeface="微软雅黑" panose="020B0503020204020204" pitchFamily="34" charset="-122"/>
-                <a:ea typeface="微软雅黑" panose="020B0503020204020204" pitchFamily="34" charset="-122"/>
-              </a:rPr>
-              <a:t>shm</a:t>
-            </a:r>
-            <a:r>
-              <a:rPr kumimoji="1" lang="zh-CN" altLang="en-US" dirty="0">
-                <a:latin typeface="微软雅黑" panose="020B0503020204020204" pitchFamily="34" charset="-122"/>
-                <a:ea typeface="微软雅黑" panose="020B0503020204020204" pitchFamily="34" charset="-122"/>
-              </a:rPr>
-              <a:t>的内存占用优势明显了很多，平均</a:t>
-            </a:r>
-            <a:r>
-              <a:rPr kumimoji="1" lang="en-US" altLang="zh-CN" dirty="0">
-                <a:latin typeface="微软雅黑" panose="020B0503020204020204" pitchFamily="34" charset="-122"/>
-                <a:ea typeface="微软雅黑" panose="020B0503020204020204" pitchFamily="34" charset="-122"/>
-              </a:rPr>
-              <a:t>PSS</a:t>
-            </a:r>
-            <a:r>
-              <a:rPr kumimoji="1" lang="zh-CN" altLang="en-US" dirty="0">
-                <a:latin typeface="微软雅黑" panose="020B0503020204020204" pitchFamily="34" charset="-122"/>
-                <a:ea typeface="微软雅黑" panose="020B0503020204020204" pitchFamily="34" charset="-122"/>
-              </a:rPr>
-              <a:t>仅为原本的</a:t>
-            </a:r>
-            <a:r>
-              <a:rPr kumimoji="1" lang="en-US" altLang="zh-CN" dirty="0">
-                <a:latin typeface="微软雅黑" panose="020B0503020204020204" pitchFamily="34" charset="-122"/>
-                <a:ea typeface="微软雅黑" panose="020B0503020204020204" pitchFamily="34" charset="-122"/>
-              </a:rPr>
-              <a:t>11.1%</a:t>
-            </a:r>
-            <a:r>
-              <a:rPr kumimoji="1" lang="zh-CN" altLang="en-US" dirty="0">
-                <a:latin typeface="微软雅黑" panose="020B0503020204020204" pitchFamily="34" charset="-122"/>
-                <a:ea typeface="微软雅黑" panose="020B0503020204020204" pitchFamily="34" charset="-122"/>
-              </a:rPr>
-              <a:t>。</a:t>
+                <a:sym typeface="+mn-ea"/>
+              </a:rPr>
+              <a:t>对比</a:t>
+            </a:r>
+            <a:r>
+              <a:rPr kumimoji="1" lang="en-US" altLang="zh-CN" dirty="0">
+                <a:latin typeface="微软雅黑" panose="020B0503020204020204" pitchFamily="34" charset="-122"/>
+                <a:ea typeface="微软雅黑" panose="020B0503020204020204" pitchFamily="34" charset="-122"/>
+                <a:sym typeface="+mn-ea"/>
+              </a:rPr>
+              <a:t>shm_copy</a:t>
+            </a:r>
+            <a:r>
+              <a:rPr kumimoji="1" lang="zh-CN" altLang="en-US" dirty="0">
+                <a:latin typeface="微软雅黑" panose="020B0503020204020204" pitchFamily="34" charset="-122"/>
+                <a:ea typeface="微软雅黑" panose="020B0503020204020204" pitchFamily="34" charset="-122"/>
+                <a:sym typeface="+mn-ea"/>
+              </a:rPr>
+              <a:t>和</a:t>
+            </a:r>
+            <a:r>
+              <a:rPr kumimoji="1" lang="en-US" altLang="zh-CN" dirty="0">
+                <a:latin typeface="微软雅黑" panose="020B0503020204020204" pitchFamily="34" charset="-122"/>
+                <a:ea typeface="微软雅黑" panose="020B0503020204020204" pitchFamily="34" charset="-122"/>
+                <a:sym typeface="+mn-ea"/>
+              </a:rPr>
+              <a:t>shm_read</a:t>
+            </a:r>
+            <a:r>
+              <a:rPr kumimoji="1" lang="zh-CN" altLang="en-US" dirty="0">
+                <a:latin typeface="微软雅黑" panose="020B0503020204020204" pitchFamily="34" charset="-122"/>
+                <a:ea typeface="微软雅黑" panose="020B0503020204020204" pitchFamily="34" charset="-122"/>
+                <a:sym typeface="+mn-ea"/>
+              </a:rPr>
+              <a:t>，可以发现</a:t>
+            </a:r>
+            <a:r>
+              <a:rPr kumimoji="1" lang="en-US" altLang="zh-CN" dirty="0">
+                <a:latin typeface="微软雅黑" panose="020B0503020204020204" pitchFamily="34" charset="-122"/>
+                <a:ea typeface="微软雅黑" panose="020B0503020204020204" pitchFamily="34" charset="-122"/>
+                <a:sym typeface="+mn-ea"/>
+              </a:rPr>
+              <a:t>table</a:t>
+            </a:r>
+            <a:r>
+              <a:rPr kumimoji="1" lang="zh-CN" altLang="en-US" dirty="0">
+                <a:latin typeface="微软雅黑" panose="020B0503020204020204" pitchFamily="34" charset="-122"/>
+                <a:ea typeface="微软雅黑" panose="020B0503020204020204" pitchFamily="34" charset="-122"/>
+                <a:sym typeface="+mn-ea"/>
+              </a:rPr>
+              <a:t>自身的结构还是占用了较多内存。</a:t>
             </a:r>
             <a:endParaRPr kumimoji="1" lang="zh-CN" altLang="en-US" dirty="0">
               <a:latin typeface="微软雅黑" panose="020B0503020204020204" pitchFamily="34" charset="-122"/>
@@ -10129,368 +10603,9 @@
           </a:prstGeom>
         </p:spPr>
       </p:pic>
-      <p:sp>
-        <p:nvSpPr>
-          <p:cNvPr id="8" name="文本框 7"/>
-          <p:cNvSpPr txBox="1"/>
-          <p:nvPr/>
-        </p:nvSpPr>
-        <p:spPr>
-          <a:xfrm>
-            <a:off x="416520" y="394263"/>
-            <a:ext cx="4419600" cy="553085"/>
-          </a:xfrm>
-          <a:prstGeom prst="rect">
-            <a:avLst/>
-          </a:prstGeom>
-          <a:noFill/>
-        </p:spPr>
-        <p:txBody>
-          <a:bodyPr wrap="square" rtlCol="0">
-            <a:spAutoFit/>
-          </a:bodyPr>
-          <a:lstStyle/>
-          <a:p>
-            <a:r>
-              <a:rPr kumimoji="1" lang="zh-CN" altLang="en-US" sz="3000" b="1" dirty="0">
-                <a:solidFill>
-                  <a:schemeClr val="tx1">
-                    <a:lumMod val="75000"/>
-                    <a:lumOff val="25000"/>
-                  </a:schemeClr>
-                </a:solidFill>
-                <a:latin typeface="微软雅黑" panose="020B0503020204020204" pitchFamily="34" charset="-122"/>
-                <a:ea typeface="微软雅黑" panose="020B0503020204020204" pitchFamily="34" charset="-122"/>
-              </a:rPr>
-              <a:t>性能测试 </a:t>
-            </a:r>
-            <a:r>
-              <a:rPr kumimoji="1" lang="en-US" altLang="zh-CN" sz="3000" b="1" dirty="0">
-                <a:solidFill>
-                  <a:schemeClr val="tx1">
-                    <a:lumMod val="75000"/>
-                    <a:lumOff val="25000"/>
-                  </a:schemeClr>
-                </a:solidFill>
-                <a:latin typeface="微软雅黑" panose="020B0503020204020204" pitchFamily="34" charset="-122"/>
-                <a:ea typeface="微软雅黑" panose="020B0503020204020204" pitchFamily="34" charset="-122"/>
-              </a:rPr>
-              <a:t>- </a:t>
-            </a:r>
-            <a:r>
-              <a:rPr kumimoji="1" lang="zh-CN" altLang="en-US" sz="3000" b="1" dirty="0">
-                <a:solidFill>
-                  <a:schemeClr val="tx1">
-                    <a:lumMod val="75000"/>
-                    <a:lumOff val="25000"/>
-                  </a:schemeClr>
-                </a:solidFill>
-                <a:latin typeface="微软雅黑" panose="020B0503020204020204" pitchFamily="34" charset="-122"/>
-                <a:ea typeface="微软雅黑" panose="020B0503020204020204" pitchFamily="34" charset="-122"/>
-              </a:rPr>
-              <a:t>内存占用</a:t>
-            </a:r>
-            <a:endParaRPr kumimoji="1" lang="zh-CN" altLang="en-US" sz="3000" b="1" dirty="0">
-              <a:solidFill>
-                <a:schemeClr val="tx1">
-                  <a:lumMod val="75000"/>
-                  <a:lumOff val="25000"/>
-                </a:schemeClr>
-              </a:solidFill>
-              <a:latin typeface="微软雅黑" panose="020B0503020204020204" pitchFamily="34" charset="-122"/>
-              <a:ea typeface="微软雅黑" panose="020B0503020204020204" pitchFamily="34" charset="-122"/>
-            </a:endParaRPr>
-          </a:p>
-        </p:txBody>
-      </p:sp>
-      <p:sp>
-        <p:nvSpPr>
-          <p:cNvPr id="10" name="文本框 9"/>
-          <p:cNvSpPr txBox="1"/>
-          <p:nvPr/>
-        </p:nvSpPr>
-        <p:spPr>
-          <a:xfrm>
-            <a:off x="927264" y="1049384"/>
-            <a:ext cx="10336696" cy="1645285"/>
-          </a:xfrm>
-          <a:prstGeom prst="rect">
-            <a:avLst/>
-          </a:prstGeom>
-          <a:noFill/>
-        </p:spPr>
-        <p:txBody>
-          <a:bodyPr wrap="square" rtlCol="0">
-            <a:spAutoFit/>
-          </a:bodyPr>
-          <a:lstStyle/>
-          <a:p>
-            <a:pPr>
-              <a:lnSpc>
-                <a:spcPct val="150000"/>
-              </a:lnSpc>
-              <a:spcBef>
-                <a:spcPts val="600"/>
-              </a:spcBef>
-              <a:spcAft>
-                <a:spcPts val="600"/>
-              </a:spcAft>
-            </a:pPr>
-            <a:r>
-              <a:rPr kumimoji="1" lang="en-US" altLang="zh-CN" dirty="0">
-                <a:latin typeface="微软雅黑" panose="020B0503020204020204" pitchFamily="34" charset="-122"/>
-                <a:ea typeface="微软雅黑" panose="020B0503020204020204" pitchFamily="34" charset="-122"/>
-              </a:rPr>
-              <a:t>shm_copy</a:t>
-            </a:r>
-            <a:r>
-              <a:rPr kumimoji="1" lang="zh-CN" altLang="en-US" dirty="0">
-                <a:latin typeface="微软雅黑" panose="020B0503020204020204" pitchFamily="34" charset="-122"/>
-                <a:ea typeface="微软雅黑" panose="020B0503020204020204" pitchFamily="34" charset="-122"/>
-              </a:rPr>
-              <a:t>为从</a:t>
-            </a:r>
-            <a:r>
-              <a:rPr kumimoji="1" lang="en-US" altLang="zh-CN" dirty="0">
-                <a:latin typeface="微软雅黑" panose="020B0503020204020204" pitchFamily="34" charset="-122"/>
-                <a:ea typeface="微软雅黑" panose="020B0503020204020204" pitchFamily="34" charset="-122"/>
-              </a:rPr>
-              <a:t>sharedata</a:t>
-            </a:r>
-            <a:r>
-              <a:rPr kumimoji="1" lang="zh-CN" altLang="en-US" dirty="0">
-                <a:latin typeface="微软雅黑" panose="020B0503020204020204" pitchFamily="34" charset="-122"/>
-                <a:ea typeface="微软雅黑" panose="020B0503020204020204" pitchFamily="34" charset="-122"/>
-              </a:rPr>
-              <a:t>构建出</a:t>
-            </a:r>
-            <a:r>
-              <a:rPr kumimoji="1" lang="en-US" altLang="zh-CN" dirty="0">
-                <a:latin typeface="微软雅黑" panose="020B0503020204020204" pitchFamily="34" charset="-122"/>
-                <a:ea typeface="微软雅黑" panose="020B0503020204020204" pitchFamily="34" charset="-122"/>
-              </a:rPr>
-              <a:t>table</a:t>
-            </a:r>
-            <a:r>
-              <a:rPr kumimoji="1" lang="zh-CN" altLang="en-US" dirty="0">
-                <a:latin typeface="微软雅黑" panose="020B0503020204020204" pitchFamily="34" charset="-122"/>
-                <a:ea typeface="微软雅黑" panose="020B0503020204020204" pitchFamily="34" charset="-122"/>
-              </a:rPr>
-              <a:t>然后访问，</a:t>
-            </a:r>
-            <a:endParaRPr kumimoji="1" lang="zh-CN" altLang="en-US" dirty="0">
-              <a:latin typeface="微软雅黑" panose="020B0503020204020204" pitchFamily="34" charset="-122"/>
-              <a:ea typeface="微软雅黑" panose="020B0503020204020204" pitchFamily="34" charset="-122"/>
-            </a:endParaRPr>
-          </a:p>
-          <a:p>
-            <a:pPr>
-              <a:lnSpc>
-                <a:spcPct val="150000"/>
-              </a:lnSpc>
-              <a:spcBef>
-                <a:spcPts val="600"/>
-              </a:spcBef>
-              <a:spcAft>
-                <a:spcPts val="600"/>
-              </a:spcAft>
-            </a:pPr>
-            <a:r>
-              <a:rPr kumimoji="1" lang="en-US" altLang="zh-CN" dirty="0">
-                <a:latin typeface="微软雅黑" panose="020B0503020204020204" pitchFamily="34" charset="-122"/>
-                <a:ea typeface="微软雅黑" panose="020B0503020204020204" pitchFamily="34" charset="-122"/>
-              </a:rPr>
-              <a:t>shm_read</a:t>
-            </a:r>
-            <a:r>
-              <a:rPr kumimoji="1" lang="zh-CN" altLang="en-US" dirty="0">
-                <a:latin typeface="微软雅黑" panose="020B0503020204020204" pitchFamily="34" charset="-122"/>
-                <a:ea typeface="微软雅黑" panose="020B0503020204020204" pitchFamily="34" charset="-122"/>
-              </a:rPr>
-              <a:t>为直接访问</a:t>
-            </a:r>
-            <a:r>
-              <a:rPr kumimoji="1" lang="en-US" altLang="zh-CN" dirty="0">
-                <a:latin typeface="微软雅黑" panose="020B0503020204020204" pitchFamily="34" charset="-122"/>
-                <a:ea typeface="微软雅黑" panose="020B0503020204020204" pitchFamily="34" charset="-122"/>
-              </a:rPr>
-              <a:t>sharedata</a:t>
-            </a:r>
-            <a:r>
-              <a:rPr kumimoji="1" lang="zh-CN" altLang="en-US" dirty="0">
-                <a:latin typeface="微软雅黑" panose="020B0503020204020204" pitchFamily="34" charset="-122"/>
-                <a:ea typeface="微软雅黑" panose="020B0503020204020204" pitchFamily="34" charset="-122"/>
-              </a:rPr>
-              <a:t>，</a:t>
-            </a:r>
-            <a:endParaRPr kumimoji="1" lang="zh-CN" altLang="en-US" dirty="0">
-              <a:latin typeface="微软雅黑" panose="020B0503020204020204" pitchFamily="34" charset="-122"/>
-              <a:ea typeface="微软雅黑" panose="020B0503020204020204" pitchFamily="34" charset="-122"/>
-            </a:endParaRPr>
-          </a:p>
-          <a:p>
-            <a:pPr>
-              <a:lnSpc>
-                <a:spcPct val="150000"/>
-              </a:lnSpc>
-              <a:spcBef>
-                <a:spcPts val="600"/>
-              </a:spcBef>
-              <a:spcAft>
-                <a:spcPts val="600"/>
-              </a:spcAft>
-            </a:pPr>
-            <a:r>
-              <a:rPr kumimoji="1" lang="en-US" altLang="zh-CN" dirty="0">
-                <a:latin typeface="微软雅黑" panose="020B0503020204020204" pitchFamily="34" charset="-122"/>
-                <a:ea typeface="微软雅黑" panose="020B0503020204020204" pitchFamily="34" charset="-122"/>
-              </a:rPr>
-              <a:t>tb_read</a:t>
-            </a:r>
-            <a:r>
-              <a:rPr kumimoji="1" lang="zh-CN" altLang="en-US" dirty="0">
-                <a:latin typeface="微软雅黑" panose="020B0503020204020204" pitchFamily="34" charset="-122"/>
-                <a:ea typeface="微软雅黑" panose="020B0503020204020204" pitchFamily="34" charset="-122"/>
-              </a:rPr>
-              <a:t>为直接访问</a:t>
-            </a:r>
-            <a:r>
-              <a:rPr kumimoji="1" lang="en-US" altLang="zh-CN" dirty="0">
-                <a:latin typeface="微软雅黑" panose="020B0503020204020204" pitchFamily="34" charset="-122"/>
-                <a:ea typeface="微软雅黑" panose="020B0503020204020204" pitchFamily="34" charset="-122"/>
-              </a:rPr>
-              <a:t>table</a:t>
-            </a:r>
-            <a:endParaRPr kumimoji="1" lang="en-US" altLang="zh-CN" dirty="0">
-              <a:latin typeface="微软雅黑" panose="020B0503020204020204" pitchFamily="34" charset="-122"/>
-              <a:ea typeface="微软雅黑" panose="020B0503020204020204" pitchFamily="34" charset="-122"/>
-            </a:endParaRPr>
-          </a:p>
-        </p:txBody>
-      </p:sp>
-      <p:sp>
-        <p:nvSpPr>
-          <p:cNvPr id="5" name="文本框 4"/>
-          <p:cNvSpPr txBox="1"/>
-          <p:nvPr/>
-        </p:nvSpPr>
-        <p:spPr>
-          <a:xfrm>
-            <a:off x="927899" y="4368529"/>
-            <a:ext cx="10336696" cy="1076325"/>
-          </a:xfrm>
-          <a:prstGeom prst="rect">
-            <a:avLst/>
-          </a:prstGeom>
-          <a:noFill/>
-        </p:spPr>
-        <p:txBody>
-          <a:bodyPr wrap="square" rtlCol="0">
-            <a:spAutoFit/>
-          </a:bodyPr>
-          <a:lstStyle/>
-          <a:p>
-            <a:pPr>
-              <a:lnSpc>
-                <a:spcPct val="150000"/>
-              </a:lnSpc>
-              <a:spcBef>
-                <a:spcPts val="600"/>
-              </a:spcBef>
-              <a:spcAft>
-                <a:spcPts val="600"/>
-              </a:spcAft>
-            </a:pPr>
-            <a:r>
-              <a:rPr kumimoji="1" lang="zh-CN" altLang="en-US" dirty="0">
-                <a:latin typeface="微软雅黑" panose="020B0503020204020204" pitchFamily="34" charset="-122"/>
-                <a:ea typeface="微软雅黑" panose="020B0503020204020204" pitchFamily="34" charset="-122"/>
-              </a:rPr>
-              <a:t>上图测试为启动</a:t>
-            </a:r>
-            <a:r>
-              <a:rPr kumimoji="1" lang="en-US" altLang="zh-CN" dirty="0">
-                <a:latin typeface="微软雅黑" panose="020B0503020204020204" pitchFamily="34" charset="-122"/>
-                <a:ea typeface="微软雅黑" panose="020B0503020204020204" pitchFamily="34" charset="-122"/>
-              </a:rPr>
-              <a:t>3</a:t>
-            </a:r>
-            <a:r>
-              <a:rPr kumimoji="1" lang="zh-CN" altLang="en-US" dirty="0">
-                <a:latin typeface="微软雅黑" panose="020B0503020204020204" pitchFamily="34" charset="-122"/>
-                <a:ea typeface="微软雅黑" panose="020B0503020204020204" pitchFamily="34" charset="-122"/>
-              </a:rPr>
-              <a:t>个进程，数据为</a:t>
-            </a:r>
-            <a:r>
-              <a:rPr kumimoji="1" lang="en-US" altLang="zh-CN" dirty="0">
-                <a:latin typeface="微软雅黑" panose="020B0503020204020204" pitchFamily="34" charset="-122"/>
-                <a:ea typeface="微软雅黑" panose="020B0503020204020204" pitchFamily="34" charset="-122"/>
-              </a:rPr>
-              <a:t>huge_data.lua(2027KB)</a:t>
-            </a:r>
-            <a:endParaRPr kumimoji="1" lang="en-US" altLang="zh-CN" dirty="0">
-              <a:latin typeface="微软雅黑" panose="020B0503020204020204" pitchFamily="34" charset="-122"/>
-              <a:ea typeface="微软雅黑" panose="020B0503020204020204" pitchFamily="34" charset="-122"/>
-            </a:endParaRPr>
-          </a:p>
-          <a:p>
-            <a:pPr>
-              <a:lnSpc>
-                <a:spcPct val="150000"/>
-              </a:lnSpc>
-              <a:spcBef>
-                <a:spcPts val="600"/>
-              </a:spcBef>
-              <a:spcAft>
-                <a:spcPts val="600"/>
-              </a:spcAft>
-            </a:pPr>
-            <a:r>
-              <a:rPr kumimoji="1" lang="zh-CN" altLang="en-US" dirty="0">
-                <a:latin typeface="微软雅黑" panose="020B0503020204020204" pitchFamily="34" charset="-122"/>
-                <a:ea typeface="微软雅黑" panose="020B0503020204020204" pitchFamily="34" charset="-122"/>
-              </a:rPr>
-              <a:t>即使是只启动</a:t>
-            </a:r>
-            <a:r>
-              <a:rPr kumimoji="1" lang="en-US" altLang="zh-CN" dirty="0">
-                <a:latin typeface="微软雅黑" panose="020B0503020204020204" pitchFamily="34" charset="-122"/>
-                <a:ea typeface="微软雅黑" panose="020B0503020204020204" pitchFamily="34" charset="-122"/>
-              </a:rPr>
-              <a:t>3</a:t>
-            </a:r>
-            <a:r>
-              <a:rPr kumimoji="1" lang="zh-CN" altLang="en-US" dirty="0">
-                <a:latin typeface="微软雅黑" panose="020B0503020204020204" pitchFamily="34" charset="-122"/>
-                <a:ea typeface="微软雅黑" panose="020B0503020204020204" pitchFamily="34" charset="-122"/>
-              </a:rPr>
-              <a:t>个进程，在面对较大的数据表时优势仍然明显</a:t>
-            </a:r>
-            <a:r>
-              <a:rPr kumimoji="1" lang="en-US" altLang="zh-CN" dirty="0">
-                <a:latin typeface="微软雅黑" panose="020B0503020204020204" pitchFamily="34" charset="-122"/>
-                <a:ea typeface="微软雅黑" panose="020B0503020204020204" pitchFamily="34" charset="-122"/>
-              </a:rPr>
-              <a:t>(37.5%)</a:t>
-            </a:r>
-            <a:r>
-              <a:rPr kumimoji="1" lang="zh-CN" altLang="en-US" dirty="0">
-                <a:latin typeface="微软雅黑" panose="020B0503020204020204" pitchFamily="34" charset="-122"/>
-                <a:ea typeface="微软雅黑" panose="020B0503020204020204" pitchFamily="34" charset="-122"/>
-              </a:rPr>
-              <a:t>。</a:t>
-            </a:r>
-            <a:endParaRPr kumimoji="1" lang="zh-CN" altLang="en-US" dirty="0">
-              <a:latin typeface="微软雅黑" panose="020B0503020204020204" pitchFamily="34" charset="-122"/>
-              <a:ea typeface="微软雅黑" panose="020B0503020204020204" pitchFamily="34" charset="-122"/>
-            </a:endParaRPr>
-          </a:p>
-        </p:txBody>
-      </p:sp>
       <p:pic>
         <p:nvPicPr>
-          <p:cNvPr id="6" name="图片 5"/>
+          <p:cNvPr id="2" name="图片 1"/>
           <p:cNvPicPr>
             <a:picLocks noChangeAspect="1"/>
           </p:cNvPicPr>
@@ -10504,14 +10619,404 @@
         </p:blipFill>
         <p:spPr>
           <a:xfrm>
-            <a:off x="6696075" y="0"/>
-            <a:ext cx="5495925" cy="4276725"/>
+            <a:off x="6086475" y="0"/>
+            <a:ext cx="6105525" cy="4286250"/>
           </a:xfrm>
           <a:prstGeom prst="rect">
             <a:avLst/>
           </a:prstGeom>
         </p:spPr>
       </p:pic>
+      <p:sp>
+        <p:nvSpPr>
+          <p:cNvPr id="8" name="文本框 7"/>
+          <p:cNvSpPr txBox="1"/>
+          <p:nvPr/>
+        </p:nvSpPr>
+        <p:spPr>
+          <a:xfrm>
+            <a:off x="416520" y="394263"/>
+            <a:ext cx="4419600" cy="553085"/>
+          </a:xfrm>
+          <a:prstGeom prst="rect">
+            <a:avLst/>
+          </a:prstGeom>
+          <a:noFill/>
+        </p:spPr>
+        <p:txBody>
+          <a:bodyPr wrap="square" rtlCol="0">
+            <a:spAutoFit/>
+          </a:bodyPr>
+          <a:lstStyle/>
+          <a:p>
+            <a:r>
+              <a:rPr kumimoji="1" lang="zh-CN" altLang="en-US" sz="3000" b="1" dirty="0">
+                <a:solidFill>
+                  <a:schemeClr val="tx1">
+                    <a:lumMod val="75000"/>
+                    <a:lumOff val="25000"/>
+                  </a:schemeClr>
+                </a:solidFill>
+                <a:latin typeface="微软雅黑" panose="020B0503020204020204" pitchFamily="34" charset="-122"/>
+                <a:ea typeface="微软雅黑" panose="020B0503020204020204" pitchFamily="34" charset="-122"/>
+              </a:rPr>
+              <a:t>性能测试 </a:t>
+            </a:r>
+            <a:r>
+              <a:rPr kumimoji="1" lang="en-US" altLang="zh-CN" sz="3000" b="1" dirty="0">
+                <a:solidFill>
+                  <a:schemeClr val="tx1">
+                    <a:lumMod val="75000"/>
+                    <a:lumOff val="25000"/>
+                  </a:schemeClr>
+                </a:solidFill>
+                <a:latin typeface="微软雅黑" panose="020B0503020204020204" pitchFamily="34" charset="-122"/>
+                <a:ea typeface="微软雅黑" panose="020B0503020204020204" pitchFamily="34" charset="-122"/>
+              </a:rPr>
+              <a:t>- </a:t>
+            </a:r>
+            <a:r>
+              <a:rPr kumimoji="1" lang="zh-CN" altLang="en-US" sz="3000" b="1" dirty="0">
+                <a:solidFill>
+                  <a:schemeClr val="tx1">
+                    <a:lumMod val="75000"/>
+                    <a:lumOff val="25000"/>
+                  </a:schemeClr>
+                </a:solidFill>
+                <a:latin typeface="微软雅黑" panose="020B0503020204020204" pitchFamily="34" charset="-122"/>
+                <a:ea typeface="微软雅黑" panose="020B0503020204020204" pitchFamily="34" charset="-122"/>
+              </a:rPr>
+              <a:t>内存占用</a:t>
+            </a:r>
+            <a:endParaRPr kumimoji="1" lang="zh-CN" altLang="en-US" sz="3000" b="1" dirty="0">
+              <a:solidFill>
+                <a:schemeClr val="tx1">
+                  <a:lumMod val="75000"/>
+                  <a:lumOff val="25000"/>
+                </a:schemeClr>
+              </a:solidFill>
+              <a:latin typeface="微软雅黑" panose="020B0503020204020204" pitchFamily="34" charset="-122"/>
+              <a:ea typeface="微软雅黑" panose="020B0503020204020204" pitchFamily="34" charset="-122"/>
+            </a:endParaRPr>
+          </a:p>
+        </p:txBody>
+      </p:sp>
+      <p:sp>
+        <p:nvSpPr>
+          <p:cNvPr id="10" name="文本框 9"/>
+          <p:cNvSpPr txBox="1"/>
+          <p:nvPr/>
+        </p:nvSpPr>
+        <p:spPr>
+          <a:xfrm>
+            <a:off x="779944" y="1049384"/>
+            <a:ext cx="10336696" cy="1645285"/>
+          </a:xfrm>
+          <a:prstGeom prst="rect">
+            <a:avLst/>
+          </a:prstGeom>
+          <a:noFill/>
+        </p:spPr>
+        <p:txBody>
+          <a:bodyPr wrap="square" rtlCol="0">
+            <a:spAutoFit/>
+          </a:bodyPr>
+          <a:lstStyle/>
+          <a:p>
+            <a:pPr>
+              <a:lnSpc>
+                <a:spcPct val="150000"/>
+              </a:lnSpc>
+              <a:spcBef>
+                <a:spcPts val="600"/>
+              </a:spcBef>
+              <a:spcAft>
+                <a:spcPts val="600"/>
+              </a:spcAft>
+            </a:pPr>
+            <a:r>
+              <a:rPr kumimoji="1" lang="en-US" altLang="zh-CN" dirty="0">
+                <a:latin typeface="微软雅黑" panose="020B0503020204020204" pitchFamily="34" charset="-122"/>
+                <a:ea typeface="微软雅黑" panose="020B0503020204020204" pitchFamily="34" charset="-122"/>
+              </a:rPr>
+              <a:t>shm_copy</a:t>
+            </a:r>
+            <a:r>
+              <a:rPr kumimoji="1" lang="zh-CN" altLang="en-US" dirty="0">
+                <a:latin typeface="微软雅黑" panose="020B0503020204020204" pitchFamily="34" charset="-122"/>
+                <a:ea typeface="微软雅黑" panose="020B0503020204020204" pitchFamily="34" charset="-122"/>
+              </a:rPr>
+              <a:t>为从</a:t>
+            </a:r>
+            <a:r>
+              <a:rPr kumimoji="1" lang="en-US" altLang="zh-CN" dirty="0">
+                <a:latin typeface="微软雅黑" panose="020B0503020204020204" pitchFamily="34" charset="-122"/>
+                <a:ea typeface="微软雅黑" panose="020B0503020204020204" pitchFamily="34" charset="-122"/>
+              </a:rPr>
+              <a:t>sharedata</a:t>
+            </a:r>
+            <a:r>
+              <a:rPr kumimoji="1" lang="zh-CN" altLang="en-US" dirty="0">
+                <a:latin typeface="微软雅黑" panose="020B0503020204020204" pitchFamily="34" charset="-122"/>
+                <a:ea typeface="微软雅黑" panose="020B0503020204020204" pitchFamily="34" charset="-122"/>
+              </a:rPr>
+              <a:t>构建出</a:t>
+            </a:r>
+            <a:r>
+              <a:rPr kumimoji="1" lang="en-US" altLang="zh-CN" dirty="0">
+                <a:latin typeface="微软雅黑" panose="020B0503020204020204" pitchFamily="34" charset="-122"/>
+                <a:ea typeface="微软雅黑" panose="020B0503020204020204" pitchFamily="34" charset="-122"/>
+              </a:rPr>
+              <a:t>table</a:t>
+            </a:r>
+            <a:r>
+              <a:rPr kumimoji="1" lang="zh-CN" altLang="en-US" dirty="0">
+                <a:latin typeface="微软雅黑" panose="020B0503020204020204" pitchFamily="34" charset="-122"/>
+                <a:ea typeface="微软雅黑" panose="020B0503020204020204" pitchFamily="34" charset="-122"/>
+              </a:rPr>
+              <a:t>然后访问，</a:t>
+            </a:r>
+            <a:endParaRPr kumimoji="1" lang="zh-CN" altLang="en-US" dirty="0">
+              <a:latin typeface="微软雅黑" panose="020B0503020204020204" pitchFamily="34" charset="-122"/>
+              <a:ea typeface="微软雅黑" panose="020B0503020204020204" pitchFamily="34" charset="-122"/>
+            </a:endParaRPr>
+          </a:p>
+          <a:p>
+            <a:pPr>
+              <a:lnSpc>
+                <a:spcPct val="150000"/>
+              </a:lnSpc>
+              <a:spcBef>
+                <a:spcPts val="600"/>
+              </a:spcBef>
+              <a:spcAft>
+                <a:spcPts val="600"/>
+              </a:spcAft>
+            </a:pPr>
+            <a:r>
+              <a:rPr kumimoji="1" lang="en-US" altLang="zh-CN" dirty="0">
+                <a:latin typeface="微软雅黑" panose="020B0503020204020204" pitchFamily="34" charset="-122"/>
+                <a:ea typeface="微软雅黑" panose="020B0503020204020204" pitchFamily="34" charset="-122"/>
+              </a:rPr>
+              <a:t>shm_read</a:t>
+            </a:r>
+            <a:r>
+              <a:rPr kumimoji="1" lang="zh-CN" altLang="en-US" dirty="0">
+                <a:latin typeface="微软雅黑" panose="020B0503020204020204" pitchFamily="34" charset="-122"/>
+                <a:ea typeface="微软雅黑" panose="020B0503020204020204" pitchFamily="34" charset="-122"/>
+              </a:rPr>
+              <a:t>为直接访问</a:t>
+            </a:r>
+            <a:r>
+              <a:rPr kumimoji="1" lang="en-US" altLang="zh-CN" dirty="0">
+                <a:latin typeface="微软雅黑" panose="020B0503020204020204" pitchFamily="34" charset="-122"/>
+                <a:ea typeface="微软雅黑" panose="020B0503020204020204" pitchFamily="34" charset="-122"/>
+              </a:rPr>
+              <a:t>sharedata</a:t>
+            </a:r>
+            <a:r>
+              <a:rPr kumimoji="1" lang="zh-CN" altLang="en-US" dirty="0">
+                <a:latin typeface="微软雅黑" panose="020B0503020204020204" pitchFamily="34" charset="-122"/>
+                <a:ea typeface="微软雅黑" panose="020B0503020204020204" pitchFamily="34" charset="-122"/>
+              </a:rPr>
+              <a:t>，</a:t>
+            </a:r>
+            <a:endParaRPr kumimoji="1" lang="zh-CN" altLang="en-US" dirty="0">
+              <a:latin typeface="微软雅黑" panose="020B0503020204020204" pitchFamily="34" charset="-122"/>
+              <a:ea typeface="微软雅黑" panose="020B0503020204020204" pitchFamily="34" charset="-122"/>
+            </a:endParaRPr>
+          </a:p>
+          <a:p>
+            <a:pPr>
+              <a:lnSpc>
+                <a:spcPct val="150000"/>
+              </a:lnSpc>
+              <a:spcBef>
+                <a:spcPts val="600"/>
+              </a:spcBef>
+              <a:spcAft>
+                <a:spcPts val="600"/>
+              </a:spcAft>
+            </a:pPr>
+            <a:r>
+              <a:rPr kumimoji="1" lang="en-US" altLang="zh-CN" dirty="0">
+                <a:latin typeface="微软雅黑" panose="020B0503020204020204" pitchFamily="34" charset="-122"/>
+                <a:ea typeface="微软雅黑" panose="020B0503020204020204" pitchFamily="34" charset="-122"/>
+              </a:rPr>
+              <a:t>tb_read</a:t>
+            </a:r>
+            <a:r>
+              <a:rPr kumimoji="1" lang="zh-CN" altLang="en-US" dirty="0">
+                <a:latin typeface="微软雅黑" panose="020B0503020204020204" pitchFamily="34" charset="-122"/>
+                <a:ea typeface="微软雅黑" panose="020B0503020204020204" pitchFamily="34" charset="-122"/>
+              </a:rPr>
+              <a:t>为直接访问</a:t>
+            </a:r>
+            <a:r>
+              <a:rPr kumimoji="1" lang="en-US" altLang="zh-CN" dirty="0">
+                <a:latin typeface="微软雅黑" panose="020B0503020204020204" pitchFamily="34" charset="-122"/>
+                <a:ea typeface="微软雅黑" panose="020B0503020204020204" pitchFamily="34" charset="-122"/>
+              </a:rPr>
+              <a:t>table</a:t>
+            </a:r>
+            <a:endParaRPr kumimoji="1" lang="en-US" altLang="zh-CN" dirty="0">
+              <a:latin typeface="微软雅黑" panose="020B0503020204020204" pitchFamily="34" charset="-122"/>
+              <a:ea typeface="微软雅黑" panose="020B0503020204020204" pitchFamily="34" charset="-122"/>
+            </a:endParaRPr>
+          </a:p>
+        </p:txBody>
+      </p:sp>
+      <p:sp>
+        <p:nvSpPr>
+          <p:cNvPr id="5" name="文本框 4"/>
+          <p:cNvSpPr txBox="1"/>
+          <p:nvPr/>
+        </p:nvSpPr>
+        <p:spPr>
+          <a:xfrm>
+            <a:off x="780579" y="4368529"/>
+            <a:ext cx="10336696" cy="1645285"/>
+          </a:xfrm>
+          <a:prstGeom prst="rect">
+            <a:avLst/>
+          </a:prstGeom>
+          <a:noFill/>
+        </p:spPr>
+        <p:txBody>
+          <a:bodyPr wrap="square" rtlCol="0">
+            <a:spAutoFit/>
+          </a:bodyPr>
+          <a:lstStyle/>
+          <a:p>
+            <a:pPr>
+              <a:lnSpc>
+                <a:spcPct val="150000"/>
+              </a:lnSpc>
+              <a:spcBef>
+                <a:spcPts val="600"/>
+              </a:spcBef>
+              <a:spcAft>
+                <a:spcPts val="600"/>
+              </a:spcAft>
+            </a:pPr>
+            <a:r>
+              <a:rPr kumimoji="1" lang="zh-CN" altLang="en-US" dirty="0">
+                <a:latin typeface="微软雅黑" panose="020B0503020204020204" pitchFamily="34" charset="-122"/>
+                <a:ea typeface="微软雅黑" panose="020B0503020204020204" pitchFamily="34" charset="-122"/>
+              </a:rPr>
+              <a:t>上图测试为启动</a:t>
+            </a:r>
+            <a:r>
+              <a:rPr kumimoji="1" lang="en-US" altLang="zh-CN" dirty="0">
+                <a:latin typeface="微软雅黑" panose="020B0503020204020204" pitchFamily="34" charset="-122"/>
+                <a:ea typeface="微软雅黑" panose="020B0503020204020204" pitchFamily="34" charset="-122"/>
+              </a:rPr>
+              <a:t>20</a:t>
+            </a:r>
+            <a:r>
+              <a:rPr kumimoji="1" lang="zh-CN" altLang="en-US" dirty="0">
+                <a:latin typeface="微软雅黑" panose="020B0503020204020204" pitchFamily="34" charset="-122"/>
+                <a:ea typeface="微软雅黑" panose="020B0503020204020204" pitchFamily="34" charset="-122"/>
+              </a:rPr>
+              <a:t>个进程，数据为</a:t>
+            </a:r>
+            <a:r>
+              <a:rPr kumimoji="1" lang="en-US" altLang="zh-CN" dirty="0">
+                <a:latin typeface="微软雅黑" panose="020B0503020204020204" pitchFamily="34" charset="-122"/>
+                <a:ea typeface="微软雅黑" panose="020B0503020204020204" pitchFamily="34" charset="-122"/>
+              </a:rPr>
+              <a:t>huge_data.lua(2027KB)</a:t>
+            </a:r>
+            <a:endParaRPr kumimoji="1" lang="en-US" altLang="zh-CN" dirty="0">
+              <a:latin typeface="微软雅黑" panose="020B0503020204020204" pitchFamily="34" charset="-122"/>
+              <a:ea typeface="微软雅黑" panose="020B0503020204020204" pitchFamily="34" charset="-122"/>
+            </a:endParaRPr>
+          </a:p>
+          <a:p>
+            <a:pPr>
+              <a:lnSpc>
+                <a:spcPct val="150000"/>
+              </a:lnSpc>
+              <a:spcBef>
+                <a:spcPts val="600"/>
+              </a:spcBef>
+              <a:spcAft>
+                <a:spcPts val="600"/>
+              </a:spcAft>
+            </a:pPr>
+            <a:r>
+              <a:rPr kumimoji="1" lang="zh-CN" altLang="en-US" dirty="0">
+                <a:latin typeface="微软雅黑" panose="020B0503020204020204" pitchFamily="34" charset="-122"/>
+                <a:ea typeface="微软雅黑" panose="020B0503020204020204" pitchFamily="34" charset="-122"/>
+              </a:rPr>
+              <a:t>可以看到，在使用更大的数据表之后，</a:t>
+            </a:r>
+            <a:r>
+              <a:rPr kumimoji="1" lang="en-US" altLang="zh-CN" dirty="0">
+                <a:latin typeface="微软雅黑" panose="020B0503020204020204" pitchFamily="34" charset="-122"/>
+                <a:ea typeface="微软雅黑" panose="020B0503020204020204" pitchFamily="34" charset="-122"/>
+              </a:rPr>
+              <a:t>shm</a:t>
+            </a:r>
+            <a:r>
+              <a:rPr kumimoji="1" lang="zh-CN" altLang="en-US" dirty="0">
+                <a:latin typeface="微软雅黑" panose="020B0503020204020204" pitchFamily="34" charset="-122"/>
+                <a:ea typeface="微软雅黑" panose="020B0503020204020204" pitchFamily="34" charset="-122"/>
+              </a:rPr>
+              <a:t>的内存占用优势明显了很多，平均</a:t>
+            </a:r>
+            <a:r>
+              <a:rPr kumimoji="1" lang="en-US" altLang="zh-CN" dirty="0">
+                <a:latin typeface="微软雅黑" panose="020B0503020204020204" pitchFamily="34" charset="-122"/>
+                <a:ea typeface="微软雅黑" panose="020B0503020204020204" pitchFamily="34" charset="-122"/>
+              </a:rPr>
+              <a:t>PSS</a:t>
+            </a:r>
+            <a:r>
+              <a:rPr kumimoji="1" lang="zh-CN" altLang="en-US" dirty="0">
+                <a:latin typeface="微软雅黑" panose="020B0503020204020204" pitchFamily="34" charset="-122"/>
+                <a:ea typeface="微软雅黑" panose="020B0503020204020204" pitchFamily="34" charset="-122"/>
+              </a:rPr>
+              <a:t>仅为原本的</a:t>
+            </a:r>
+            <a:r>
+              <a:rPr kumimoji="1" lang="en-US" altLang="zh-CN" dirty="0">
+                <a:latin typeface="微软雅黑" panose="020B0503020204020204" pitchFamily="34" charset="-122"/>
+                <a:ea typeface="微软雅黑" panose="020B0503020204020204" pitchFamily="34" charset="-122"/>
+              </a:rPr>
+              <a:t>11.1%</a:t>
+            </a:r>
+            <a:r>
+              <a:rPr kumimoji="1" lang="zh-CN" altLang="en-US" dirty="0">
+                <a:latin typeface="微软雅黑" panose="020B0503020204020204" pitchFamily="34" charset="-122"/>
+                <a:ea typeface="微软雅黑" panose="020B0503020204020204" pitchFamily="34" charset="-122"/>
+              </a:rPr>
+              <a:t>。</a:t>
+            </a:r>
+            <a:endParaRPr kumimoji="1" lang="zh-CN" altLang="en-US" dirty="0">
+              <a:latin typeface="微软雅黑" panose="020B0503020204020204" pitchFamily="34" charset="-122"/>
+              <a:ea typeface="微软雅黑" panose="020B0503020204020204" pitchFamily="34" charset="-122"/>
+            </a:endParaRPr>
+          </a:p>
+          <a:p>
+            <a:pPr>
+              <a:lnSpc>
+                <a:spcPct val="150000"/>
+              </a:lnSpc>
+              <a:spcBef>
+                <a:spcPts val="600"/>
+              </a:spcBef>
+              <a:spcAft>
+                <a:spcPts val="600"/>
+              </a:spcAft>
+            </a:pPr>
+            <a:endParaRPr kumimoji="1" lang="zh-CN" altLang="en-US" dirty="0">
+              <a:latin typeface="微软雅黑" panose="020B0503020204020204" pitchFamily="34" charset="-122"/>
+              <a:ea typeface="微软雅黑" panose="020B0503020204020204" pitchFamily="34" charset="-122"/>
+            </a:endParaRPr>
+          </a:p>
+        </p:txBody>
+      </p:sp>
     </p:spTree>
   </p:cSld>
   <p:clrMapOvr>
@@ -10629,7 +11134,7 @@
                 <a:latin typeface="微软雅黑" panose="020B0503020204020204" pitchFamily="34" charset="-122"/>
                 <a:ea typeface="微软雅黑" panose="020B0503020204020204" pitchFamily="34" charset="-122"/>
               </a:rPr>
-              <a:t>访问速度</a:t>
+              <a:t>内存占用</a:t>
             </a:r>
             <a:endParaRPr kumimoji="1" lang="zh-CN" altLang="en-US" sz="3000" b="1" dirty="0">
               <a:solidFill>
@@ -10652,8 +11157,8 @@
         </p:nvSpPr>
         <p:spPr>
           <a:xfrm>
-            <a:off x="780415" y="1132205"/>
-            <a:ext cx="10980420" cy="1076325"/>
+            <a:off x="927264" y="1049384"/>
+            <a:ext cx="10336696" cy="1645285"/>
           </a:xfrm>
           <a:prstGeom prst="rect">
             <a:avLst/>
@@ -10678,53 +11183,46 @@
               </a:spcAft>
             </a:pPr>
             <a:r>
-              <a:rPr kumimoji="1" lang="zh-CN" altLang="en-US" dirty="0">
-                <a:latin typeface="微软雅黑" panose="020B0503020204020204" pitchFamily="34" charset="-122"/>
-                <a:ea typeface="微软雅黑" panose="020B0503020204020204" pitchFamily="34" charset="-122"/>
-              </a:rPr>
-              <a:t>测试方式为对于相同</a:t>
-            </a:r>
-            <a:r>
-              <a:rPr kumimoji="1" lang="en-US" altLang="zh-CN" dirty="0">
-                <a:latin typeface="微软雅黑" panose="020B0503020204020204" pitchFamily="34" charset="-122"/>
-                <a:ea typeface="微软雅黑" panose="020B0503020204020204" pitchFamily="34" charset="-122"/>
-              </a:rPr>
-              <a:t>table(data.lua</a:t>
-            </a:r>
-            <a:r>
-              <a:rPr kumimoji="1" lang="zh-CN" altLang="en-US" dirty="0">
-                <a:latin typeface="微软雅黑" panose="020B0503020204020204" pitchFamily="34" charset="-122"/>
-                <a:ea typeface="微软雅黑" panose="020B0503020204020204" pitchFamily="34" charset="-122"/>
-              </a:rPr>
-              <a:t>和构建出的</a:t>
-            </a:r>
-            <a:r>
-              <a:rPr kumimoji="1" lang="en-US" altLang="zh-CN" dirty="0">
-                <a:latin typeface="微软雅黑" panose="020B0503020204020204" pitchFamily="34" charset="-122"/>
-                <a:ea typeface="微软雅黑" panose="020B0503020204020204" pitchFamily="34" charset="-122"/>
-              </a:rPr>
-              <a:t>data.bin)</a:t>
-            </a:r>
-            <a:r>
-              <a:rPr kumimoji="1" lang="zh-CN" altLang="en-US" dirty="0">
-                <a:latin typeface="微软雅黑" panose="020B0503020204020204" pitchFamily="34" charset="-122"/>
-                <a:ea typeface="微软雅黑" panose="020B0503020204020204" pitchFamily="34" charset="-122"/>
-              </a:rPr>
-              <a:t>，遍历</a:t>
-            </a:r>
-            <a:r>
-              <a:rPr kumimoji="1" lang="en-US" altLang="zh-CN" dirty="0">
-                <a:latin typeface="微软雅黑" panose="020B0503020204020204" pitchFamily="34" charset="-122"/>
-                <a:ea typeface="微软雅黑" panose="020B0503020204020204" pitchFamily="34" charset="-122"/>
-              </a:rPr>
-              <a:t>10000</a:t>
-            </a:r>
-            <a:r>
-              <a:rPr kumimoji="1" lang="zh-CN" altLang="en-US" dirty="0">
-                <a:latin typeface="微软雅黑" panose="020B0503020204020204" pitchFamily="34" charset="-122"/>
-                <a:ea typeface="微软雅黑" panose="020B0503020204020204" pitchFamily="34" charset="-122"/>
-              </a:rPr>
-              <a:t>次取平均时间</a:t>
+              <a:rPr kumimoji="1" lang="en-US" altLang="zh-CN" dirty="0">
+                <a:latin typeface="微软雅黑" panose="020B0503020204020204" pitchFamily="34" charset="-122"/>
+                <a:ea typeface="微软雅黑" panose="020B0503020204020204" pitchFamily="34" charset="-122"/>
+              </a:rPr>
+              <a:t>shm_copy</a:t>
+            </a:r>
+            <a:r>
+              <a:rPr kumimoji="1" lang="zh-CN" altLang="en-US" dirty="0">
+                <a:latin typeface="微软雅黑" panose="020B0503020204020204" pitchFamily="34" charset="-122"/>
+                <a:ea typeface="微软雅黑" panose="020B0503020204020204" pitchFamily="34" charset="-122"/>
+              </a:rPr>
+              <a:t>为从</a:t>
+            </a:r>
+            <a:r>
+              <a:rPr kumimoji="1" lang="en-US" altLang="zh-CN" dirty="0">
+                <a:latin typeface="微软雅黑" panose="020B0503020204020204" pitchFamily="34" charset="-122"/>
+                <a:ea typeface="微软雅黑" panose="020B0503020204020204" pitchFamily="34" charset="-122"/>
+              </a:rPr>
+              <a:t>sharedata</a:t>
+            </a:r>
+            <a:r>
+              <a:rPr kumimoji="1" lang="zh-CN" altLang="en-US" dirty="0">
+                <a:latin typeface="微软雅黑" panose="020B0503020204020204" pitchFamily="34" charset="-122"/>
+                <a:ea typeface="微软雅黑" panose="020B0503020204020204" pitchFamily="34" charset="-122"/>
+              </a:rPr>
+              <a:t>构建出</a:t>
+            </a:r>
+            <a:r>
+              <a:rPr kumimoji="1" lang="en-US" altLang="zh-CN" dirty="0">
+                <a:latin typeface="微软雅黑" panose="020B0503020204020204" pitchFamily="34" charset="-122"/>
+                <a:ea typeface="微软雅黑" panose="020B0503020204020204" pitchFamily="34" charset="-122"/>
+              </a:rPr>
+              <a:t>table</a:t>
+            </a:r>
+            <a:r>
+              <a:rPr kumimoji="1" lang="zh-CN" altLang="en-US" dirty="0">
+                <a:latin typeface="微软雅黑" panose="020B0503020204020204" pitchFamily="34" charset="-122"/>
+                <a:ea typeface="微软雅黑" panose="020B0503020204020204" pitchFamily="34" charset="-122"/>
+              </a:rPr>
+              <a:t>然后访问，</a:t>
             </a:r>
             <a:endParaRPr kumimoji="1" lang="zh-CN" altLang="en-US" dirty="0">
               <a:latin typeface="微软雅黑" panose="020B0503020204020204" pitchFamily="34" charset="-122"/>
@@ -10744,11 +11242,18 @@
               </a:spcAft>
             </a:pPr>
             <a:r>
-              <a:rPr kumimoji="1" lang="zh-CN" altLang="en-US" dirty="0">
-                <a:latin typeface="微软雅黑" panose="020B0503020204020204" pitchFamily="34" charset="-122"/>
-                <a:ea typeface="微软雅黑" panose="020B0503020204020204" pitchFamily="34" charset="-122"/>
-              </a:rPr>
-              <a:t>下图从上至下分别为</a:t>
+              <a:rPr kumimoji="1" lang="en-US" altLang="zh-CN" dirty="0">
+                <a:latin typeface="微软雅黑" panose="020B0503020204020204" pitchFamily="34" charset="-122"/>
+                <a:ea typeface="微软雅黑" panose="020B0503020204020204" pitchFamily="34" charset="-122"/>
+              </a:rPr>
+              <a:t>shm_read</a:t>
+            </a:r>
+            <a:r>
+              <a:rPr kumimoji="1" lang="zh-CN" altLang="en-US" dirty="0">
+                <a:latin typeface="微软雅黑" panose="020B0503020204020204" pitchFamily="34" charset="-122"/>
+                <a:ea typeface="微软雅黑" panose="020B0503020204020204" pitchFamily="34" charset="-122"/>
+              </a:rPr>
+              <a:t>为直接访问</a:t>
             </a:r>
             <a:r>
               <a:rPr kumimoji="1" lang="en-US" altLang="zh-CN" dirty="0">
@@ -10762,102 +11267,13 @@
                 <a:latin typeface="微软雅黑" panose="020B0503020204020204" pitchFamily="34" charset="-122"/>
                 <a:ea typeface="微软雅黑" panose="020B0503020204020204" pitchFamily="34" charset="-122"/>
               </a:rPr>
-              <a:t>遍历，普通</a:t>
-            </a:r>
-            <a:r>
-              <a:rPr kumimoji="1" lang="en-US" altLang="zh-CN" dirty="0">
-                <a:latin typeface="微软雅黑" panose="020B0503020204020204" pitchFamily="34" charset="-122"/>
-                <a:ea typeface="微软雅黑" panose="020B0503020204020204" pitchFamily="34" charset="-122"/>
-              </a:rPr>
-              <a:t>table</a:t>
-            </a:r>
-            <a:r>
-              <a:rPr kumimoji="1" lang="zh-CN" altLang="en-US" dirty="0">
-                <a:latin typeface="微软雅黑" panose="020B0503020204020204" pitchFamily="34" charset="-122"/>
-                <a:ea typeface="微软雅黑" panose="020B0503020204020204" pitchFamily="34" charset="-122"/>
-              </a:rPr>
-              <a:t>遍历，</a:t>
-            </a:r>
-            <a:r>
-              <a:rPr kumimoji="1" lang="en-US" altLang="zh-CN" dirty="0">
-                <a:latin typeface="微软雅黑" panose="020B0503020204020204" pitchFamily="34" charset="-122"/>
-                <a:ea typeface="微软雅黑" panose="020B0503020204020204" pitchFamily="34" charset="-122"/>
-              </a:rPr>
-              <a:t>sharedata</a:t>
-            </a:r>
-            <a:r>
-              <a:rPr kumimoji="1" lang="zh-CN" altLang="en-US" dirty="0">
-                <a:latin typeface="微软雅黑" panose="020B0503020204020204" pitchFamily="34" charset="-122"/>
-                <a:ea typeface="微软雅黑" panose="020B0503020204020204" pitchFamily="34" charset="-122"/>
-              </a:rPr>
-              <a:t>构建出的普通</a:t>
-            </a:r>
-            <a:r>
-              <a:rPr kumimoji="1" lang="en-US" altLang="zh-CN" dirty="0">
-                <a:latin typeface="微软雅黑" panose="020B0503020204020204" pitchFamily="34" charset="-122"/>
-                <a:ea typeface="微软雅黑" panose="020B0503020204020204" pitchFamily="34" charset="-122"/>
-              </a:rPr>
-              <a:t>table</a:t>
-            </a:r>
-            <a:r>
-              <a:rPr kumimoji="1" lang="zh-CN" altLang="en-US" dirty="0">
-                <a:latin typeface="微软雅黑" panose="020B0503020204020204" pitchFamily="34" charset="-122"/>
-                <a:ea typeface="微软雅黑" panose="020B0503020204020204" pitchFamily="34" charset="-122"/>
-              </a:rPr>
-              <a:t>遍历所需时间</a:t>
-            </a:r>
-            <a:r>
-              <a:rPr kumimoji="1" lang="en-US" altLang="zh-CN" dirty="0">
-                <a:latin typeface="微软雅黑" panose="020B0503020204020204" pitchFamily="34" charset="-122"/>
-                <a:ea typeface="微软雅黑" panose="020B0503020204020204" pitchFamily="34" charset="-122"/>
-                <a:sym typeface="+mn-ea"/>
-              </a:rPr>
-              <a:t>(</a:t>
-            </a:r>
-            <a:r>
-              <a:rPr kumimoji="1" lang="zh-CN" altLang="en-US" dirty="0">
-                <a:latin typeface="微软雅黑" panose="020B0503020204020204" pitchFamily="34" charset="-122"/>
-                <a:ea typeface="微软雅黑" panose="020B0503020204020204" pitchFamily="34" charset="-122"/>
-                <a:sym typeface="+mn-ea"/>
-              </a:rPr>
-              <a:t>单位：</a:t>
-            </a:r>
-            <a:r>
-              <a:rPr kumimoji="1" lang="en-US" altLang="zh-CN" dirty="0">
-                <a:latin typeface="微软雅黑" panose="020B0503020204020204" pitchFamily="34" charset="-122"/>
-                <a:ea typeface="微软雅黑" panose="020B0503020204020204" pitchFamily="34" charset="-122"/>
-                <a:sym typeface="+mn-ea"/>
-              </a:rPr>
-              <a:t>s)</a:t>
+              <a:t>，</a:t>
             </a:r>
             <a:endParaRPr kumimoji="1" lang="zh-CN" altLang="en-US" dirty="0">
               <a:latin typeface="微软雅黑" panose="020B0503020204020204" pitchFamily="34" charset="-122"/>
               <a:ea typeface="微软雅黑" panose="020B0503020204020204" pitchFamily="34" charset="-122"/>
             </a:endParaRPr>
           </a:p>
-        </p:txBody>
-      </p:sp>
-      <p:sp>
-        <p:nvSpPr>
-          <p:cNvPr id="4" name="文本框 3"/>
-          <p:cNvSpPr txBox="1"/>
-          <p:nvPr/>
-        </p:nvSpPr>
-        <p:spPr>
-          <a:xfrm>
-            <a:off x="780579" y="4134214"/>
-            <a:ext cx="10336696" cy="3046095"/>
-          </a:xfrm>
-          <a:prstGeom prst="rect">
-            <a:avLst/>
-          </a:prstGeom>
-          <a:noFill/>
-        </p:spPr>
-        <p:txBody>
-          <a:bodyPr wrap="square" rtlCol="0">
-            <a:spAutoFit/>
-          </a:bodyPr>
-          <a:lstStyle/>
           <a:p>
             <a:pPr>
               <a:lnSpc>
@@ -10871,52 +11287,54 @@
               </a:spcAft>
             </a:pPr>
             <a:r>
-              <a:rPr kumimoji="1" lang="zh-CN" altLang="en-US" dirty="0">
-                <a:latin typeface="微软雅黑" panose="020B0503020204020204" pitchFamily="34" charset="-122"/>
-                <a:ea typeface="微软雅黑" panose="020B0503020204020204" pitchFamily="34" charset="-122"/>
-              </a:rPr>
-              <a:t>访问速度约为</a:t>
-            </a:r>
-            <a:r>
-              <a:rPr kumimoji="1" lang="en-US" altLang="zh-CN" dirty="0">
-                <a:latin typeface="微软雅黑" panose="020B0503020204020204" pitchFamily="34" charset="-122"/>
-                <a:ea typeface="微软雅黑" panose="020B0503020204020204" pitchFamily="34" charset="-122"/>
-              </a:rPr>
-              <a:t>1.315</a:t>
-            </a:r>
-            <a:r>
-              <a:rPr kumimoji="1" lang="zh-CN" altLang="en-US" dirty="0">
-                <a:latin typeface="微软雅黑" panose="020B0503020204020204" pitchFamily="34" charset="-122"/>
-                <a:ea typeface="微软雅黑" panose="020B0503020204020204" pitchFamily="34" charset="-122"/>
-              </a:rPr>
-              <a:t>：</a:t>
-            </a:r>
-            <a:r>
-              <a:rPr kumimoji="1" lang="en-US" altLang="zh-CN" dirty="0">
-                <a:latin typeface="微软雅黑" panose="020B0503020204020204" pitchFamily="34" charset="-122"/>
-                <a:ea typeface="微软雅黑" panose="020B0503020204020204" pitchFamily="34" charset="-122"/>
-              </a:rPr>
-              <a:t>1</a:t>
-            </a:r>
-            <a:r>
-              <a:rPr kumimoji="1" lang="zh-CN" altLang="en-US" dirty="0">
-                <a:latin typeface="微软雅黑" panose="020B0503020204020204" pitchFamily="34" charset="-122"/>
-                <a:ea typeface="微软雅黑" panose="020B0503020204020204" pitchFamily="34" charset="-122"/>
-              </a:rPr>
-              <a:t>：</a:t>
-            </a:r>
-            <a:r>
-              <a:rPr kumimoji="1" lang="en-US" altLang="zh-CN" dirty="0">
-                <a:latin typeface="微软雅黑" panose="020B0503020204020204" pitchFamily="34" charset="-122"/>
-                <a:ea typeface="微软雅黑" panose="020B0503020204020204" pitchFamily="34" charset="-122"/>
-              </a:rPr>
-              <a:t>0.9576</a:t>
+              <a:rPr kumimoji="1" lang="en-US" altLang="zh-CN" dirty="0">
+                <a:latin typeface="微软雅黑" panose="020B0503020204020204" pitchFamily="34" charset="-122"/>
+                <a:ea typeface="微软雅黑" panose="020B0503020204020204" pitchFamily="34" charset="-122"/>
+              </a:rPr>
+              <a:t>tb_read</a:t>
+            </a:r>
+            <a:r>
+              <a:rPr kumimoji="1" lang="zh-CN" altLang="en-US" dirty="0">
+                <a:latin typeface="微软雅黑" panose="020B0503020204020204" pitchFamily="34" charset="-122"/>
+                <a:ea typeface="微软雅黑" panose="020B0503020204020204" pitchFamily="34" charset="-122"/>
+              </a:rPr>
+              <a:t>为直接访问</a:t>
+            </a:r>
+            <a:r>
+              <a:rPr kumimoji="1" lang="en-US" altLang="zh-CN" dirty="0">
+                <a:latin typeface="微软雅黑" panose="020B0503020204020204" pitchFamily="34" charset="-122"/>
+                <a:ea typeface="微软雅黑" panose="020B0503020204020204" pitchFamily="34" charset="-122"/>
+              </a:rPr>
+              <a:t>table</a:t>
             </a:r>
             <a:endParaRPr kumimoji="1" lang="en-US" altLang="zh-CN" dirty="0">
               <a:latin typeface="微软雅黑" panose="020B0503020204020204" pitchFamily="34" charset="-122"/>
               <a:ea typeface="微软雅黑" panose="020B0503020204020204" pitchFamily="34" charset="-122"/>
             </a:endParaRPr>
           </a:p>
+        </p:txBody>
+      </p:sp>
+      <p:sp>
+        <p:nvSpPr>
+          <p:cNvPr id="5" name="文本框 4"/>
+          <p:cNvSpPr txBox="1"/>
+          <p:nvPr/>
+        </p:nvSpPr>
+        <p:spPr>
+          <a:xfrm>
+            <a:off x="927899" y="4368529"/>
+            <a:ext cx="10336696" cy="1076325"/>
+          </a:xfrm>
+          <a:prstGeom prst="rect">
+            <a:avLst/>
+          </a:prstGeom>
+          <a:noFill/>
+        </p:spPr>
+        <p:txBody>
+          <a:bodyPr wrap="square" rtlCol="0">
+            <a:spAutoFit/>
+          </a:bodyPr>
+          <a:lstStyle/>
           <a:p>
             <a:pPr>
               <a:lnSpc>
@@ -10934,65 +11352,30 @@
                 <a:latin typeface="微软雅黑" panose="020B0503020204020204" pitchFamily="34" charset="-122"/>
                 <a:ea typeface="微软雅黑" panose="020B0503020204020204" pitchFamily="34" charset="-122"/>
               </a:rPr>
-              <a:t>可以看到，</a:t>
-            </a:r>
-            <a:r>
-              <a:rPr kumimoji="1" lang="en-US" altLang="zh-CN" dirty="0">
-                <a:latin typeface="微软雅黑" panose="020B0503020204020204" pitchFamily="34" charset="-122"/>
-                <a:ea typeface="微软雅黑" panose="020B0503020204020204" pitchFamily="34" charset="-122"/>
-              </a:rPr>
-              <a:t>sharedata</a:t>
-            </a:r>
-            <a:r>
-              <a:rPr kumimoji="1" lang="zh-CN" altLang="en-US" dirty="0">
-                <a:latin typeface="微软雅黑" panose="020B0503020204020204" pitchFamily="34" charset="-122"/>
-                <a:ea typeface="微软雅黑" panose="020B0503020204020204" pitchFamily="34" charset="-122"/>
-              </a:rPr>
-              <a:t>的访问速度明显比原生</a:t>
-            </a:r>
-            <a:r>
-              <a:rPr kumimoji="1" lang="en-US" altLang="zh-CN" dirty="0">
-                <a:latin typeface="微软雅黑" panose="020B0503020204020204" pitchFamily="34" charset="-122"/>
-                <a:ea typeface="微软雅黑" panose="020B0503020204020204" pitchFamily="34" charset="-122"/>
-              </a:rPr>
-              <a:t>table</a:t>
-            </a:r>
-            <a:r>
-              <a:rPr kumimoji="1" lang="zh-CN" altLang="en-US" dirty="0">
-                <a:latin typeface="微软雅黑" panose="020B0503020204020204" pitchFamily="34" charset="-122"/>
-                <a:ea typeface="微软雅黑" panose="020B0503020204020204" pitchFamily="34" charset="-122"/>
-              </a:rPr>
-              <a:t>要慢；但是使用从</a:t>
-            </a:r>
-            <a:r>
-              <a:rPr kumimoji="1" lang="en-US" altLang="zh-CN" dirty="0">
-                <a:latin typeface="微软雅黑" panose="020B0503020204020204" pitchFamily="34" charset="-122"/>
-                <a:ea typeface="微软雅黑" panose="020B0503020204020204" pitchFamily="34" charset="-122"/>
-              </a:rPr>
-              <a:t>sharedata</a:t>
-            </a:r>
-            <a:r>
-              <a:rPr kumimoji="1" lang="zh-CN" altLang="en-US" dirty="0">
-                <a:latin typeface="微软雅黑" panose="020B0503020204020204" pitchFamily="34" charset="-122"/>
-                <a:ea typeface="微软雅黑" panose="020B0503020204020204" pitchFamily="34" charset="-122"/>
-              </a:rPr>
-              <a:t>构建新</a:t>
-            </a:r>
-            <a:r>
-              <a:rPr kumimoji="1" lang="en-US" altLang="zh-CN" dirty="0">
-                <a:latin typeface="微软雅黑" panose="020B0503020204020204" pitchFamily="34" charset="-122"/>
-                <a:ea typeface="微软雅黑" panose="020B0503020204020204" pitchFamily="34" charset="-122"/>
-              </a:rPr>
-              <a:t>table</a:t>
-            </a:r>
-            <a:r>
-              <a:rPr kumimoji="1" lang="zh-CN" altLang="en-US" dirty="0">
-                <a:latin typeface="微软雅黑" panose="020B0503020204020204" pitchFamily="34" charset="-122"/>
-                <a:ea typeface="微软雅黑" panose="020B0503020204020204" pitchFamily="34" charset="-122"/>
-              </a:rPr>
-              <a:t>的方式，则可以牺牲一些内存占用，换取同样的性能。</a:t>
-            </a:r>
-            <a:endParaRPr kumimoji="1" lang="zh-CN" altLang="en-US" dirty="0">
+              <a:t>上图测试为启动</a:t>
+            </a:r>
+            <a:r>
+              <a:rPr kumimoji="1" lang="en-US" altLang="zh-CN" dirty="0">
+                <a:latin typeface="微软雅黑" panose="020B0503020204020204" pitchFamily="34" charset="-122"/>
+                <a:ea typeface="微软雅黑" panose="020B0503020204020204" pitchFamily="34" charset="-122"/>
+              </a:rPr>
+              <a:t>3</a:t>
+            </a:r>
+            <a:r>
+              <a:rPr kumimoji="1" lang="zh-CN" altLang="en-US" dirty="0">
+                <a:latin typeface="微软雅黑" panose="020B0503020204020204" pitchFamily="34" charset="-122"/>
+                <a:ea typeface="微软雅黑" panose="020B0503020204020204" pitchFamily="34" charset="-122"/>
+              </a:rPr>
+              <a:t>个进程，数据为</a:t>
+            </a:r>
+            <a:r>
+              <a:rPr kumimoji="1" lang="en-US" altLang="zh-CN" dirty="0">
+                <a:latin typeface="微软雅黑" panose="020B0503020204020204" pitchFamily="34" charset="-122"/>
+                <a:ea typeface="微软雅黑" panose="020B0503020204020204" pitchFamily="34" charset="-122"/>
+              </a:rPr>
+              <a:t>huge_data.lua(2027KB)</a:t>
+            </a:r>
+            <a:endParaRPr kumimoji="1" lang="en-US" altLang="zh-CN" dirty="0">
               <a:latin typeface="微软雅黑" panose="020B0503020204020204" pitchFamily="34" charset="-122"/>
               <a:ea typeface="微软雅黑" panose="020B0503020204020204" pitchFamily="34" charset="-122"/>
             </a:endParaRPr>
@@ -11014,109 +11397,36 @@
                 <a:latin typeface="微软雅黑" panose="020B0503020204020204" pitchFamily="34" charset="-122"/>
                 <a:ea typeface="微软雅黑" panose="020B0503020204020204" pitchFamily="34" charset="-122"/>
               </a:rPr>
-              <a:t>这里</a:t>
-            </a:r>
-            <a:r>
-              <a:rPr kumimoji="1" lang="en-US" altLang="zh-CN" dirty="0">
-                <a:latin typeface="微软雅黑" panose="020B0503020204020204" pitchFamily="34" charset="-122"/>
-                <a:ea typeface="微软雅黑" panose="020B0503020204020204" pitchFamily="34" charset="-122"/>
-              </a:rPr>
-              <a:t>sharedata</a:t>
-            </a:r>
-            <a:r>
-              <a:rPr kumimoji="1" lang="zh-CN" altLang="en-US" dirty="0">
-                <a:latin typeface="微软雅黑" panose="020B0503020204020204" pitchFamily="34" charset="-122"/>
-                <a:ea typeface="微软雅黑" panose="020B0503020204020204" pitchFamily="34" charset="-122"/>
-              </a:rPr>
-              <a:t>构建出</a:t>
-            </a:r>
-            <a:r>
-              <a:rPr kumimoji="1" lang="en-US" altLang="zh-CN" dirty="0">
-                <a:latin typeface="微软雅黑" panose="020B0503020204020204" pitchFamily="34" charset="-122"/>
-                <a:ea typeface="微软雅黑" panose="020B0503020204020204" pitchFamily="34" charset="-122"/>
-              </a:rPr>
-              <a:t>table</a:t>
-            </a:r>
-            <a:r>
-              <a:rPr kumimoji="1" lang="zh-CN" altLang="en-US" dirty="0">
-                <a:latin typeface="微软雅黑" panose="020B0503020204020204" pitchFamily="34" charset="-122"/>
-                <a:ea typeface="微软雅黑" panose="020B0503020204020204" pitchFamily="34" charset="-122"/>
-              </a:rPr>
-              <a:t>遍历快于普通</a:t>
-            </a:r>
-            <a:r>
-              <a:rPr kumimoji="1" lang="en-US" altLang="zh-CN" dirty="0">
-                <a:latin typeface="微软雅黑" panose="020B0503020204020204" pitchFamily="34" charset="-122"/>
-                <a:ea typeface="微软雅黑" panose="020B0503020204020204" pitchFamily="34" charset="-122"/>
-              </a:rPr>
-              <a:t>table</a:t>
-            </a:r>
-            <a:r>
-              <a:rPr kumimoji="1" lang="zh-CN" altLang="en-US" dirty="0">
-                <a:latin typeface="微软雅黑" panose="020B0503020204020204" pitchFamily="34" charset="-122"/>
-                <a:ea typeface="微软雅黑" panose="020B0503020204020204" pitchFamily="34" charset="-122"/>
-              </a:rPr>
-              <a:t>，是因为此时的</a:t>
-            </a:r>
-            <a:r>
-              <a:rPr kumimoji="1" lang="en-US" altLang="zh-CN" dirty="0">
-                <a:latin typeface="微软雅黑" panose="020B0503020204020204" pitchFamily="34" charset="-122"/>
-                <a:ea typeface="微软雅黑" panose="020B0503020204020204" pitchFamily="34" charset="-122"/>
-              </a:rPr>
-              <a:t>string</a:t>
-            </a:r>
-            <a:r>
-              <a:rPr kumimoji="1" lang="zh-CN" altLang="en-US" dirty="0">
-                <a:latin typeface="微软雅黑" panose="020B0503020204020204" pitchFamily="34" charset="-122"/>
-                <a:ea typeface="微软雅黑" panose="020B0503020204020204" pitchFamily="34" charset="-122"/>
-              </a:rPr>
-              <a:t>对象都不在</a:t>
-            </a:r>
-            <a:r>
-              <a:rPr kumimoji="1" lang="en-US" altLang="zh-CN" dirty="0">
-                <a:latin typeface="微软雅黑" panose="020B0503020204020204" pitchFamily="34" charset="-122"/>
-                <a:ea typeface="微软雅黑" panose="020B0503020204020204" pitchFamily="34" charset="-122"/>
-              </a:rPr>
-              <a:t>allgc</a:t>
-            </a:r>
-            <a:r>
-              <a:rPr kumimoji="1" lang="zh-CN" altLang="en-US" dirty="0">
-                <a:latin typeface="微软雅黑" panose="020B0503020204020204" pitchFamily="34" charset="-122"/>
-                <a:ea typeface="微软雅黑" panose="020B0503020204020204" pitchFamily="34" charset="-122"/>
-              </a:rPr>
-              <a:t>链表上，会减少</a:t>
-            </a:r>
-            <a:r>
-              <a:rPr kumimoji="1" lang="en-US" altLang="zh-CN" dirty="0">
-                <a:latin typeface="微软雅黑" panose="020B0503020204020204" pitchFamily="34" charset="-122"/>
-                <a:ea typeface="微软雅黑" panose="020B0503020204020204" pitchFamily="34" charset="-122"/>
-              </a:rPr>
-              <a:t>gc</a:t>
-            </a:r>
-            <a:r>
-              <a:rPr kumimoji="1" lang="zh-CN" altLang="en-US" dirty="0">
-                <a:latin typeface="微软雅黑" panose="020B0503020204020204" pitchFamily="34" charset="-122"/>
-                <a:ea typeface="微软雅黑" panose="020B0503020204020204" pitchFamily="34" charset="-122"/>
-              </a:rPr>
-              <a:t>操作所用时间。</a:t>
-            </a:r>
-            <a:endParaRPr kumimoji="1" lang="zh-CN" altLang="en-US" dirty="0">
-              <a:latin typeface="微软雅黑" panose="020B0503020204020204" pitchFamily="34" charset="-122"/>
-              <a:ea typeface="微软雅黑" panose="020B0503020204020204" pitchFamily="34" charset="-122"/>
-            </a:endParaRPr>
-          </a:p>
-          <a:p>
-            <a:pPr>
-              <a:lnSpc>
-                <a:spcPct val="150000"/>
-              </a:lnSpc>
-              <a:spcBef>
-                <a:spcPts val="600"/>
-              </a:spcBef>
-              <a:spcAft>
-                <a:spcPts val="600"/>
-              </a:spcAft>
-            </a:pPr>
+              <a:t>即使是只启动</a:t>
+            </a:r>
+            <a:r>
+              <a:rPr kumimoji="1" lang="en-US" altLang="zh-CN" dirty="0">
+                <a:latin typeface="微软雅黑" panose="020B0503020204020204" pitchFamily="34" charset="-122"/>
+                <a:ea typeface="微软雅黑" panose="020B0503020204020204" pitchFamily="34" charset="-122"/>
+              </a:rPr>
+              <a:t>3</a:t>
+            </a:r>
+            <a:r>
+              <a:rPr kumimoji="1" lang="zh-CN" altLang="en-US" dirty="0">
+                <a:latin typeface="微软雅黑" panose="020B0503020204020204" pitchFamily="34" charset="-122"/>
+                <a:ea typeface="微软雅黑" panose="020B0503020204020204" pitchFamily="34" charset="-122"/>
+              </a:rPr>
+              <a:t>个进程，在面对较大的数据表时优势仍然明显</a:t>
+            </a:r>
+            <a:r>
+              <a:rPr kumimoji="1" lang="en-US" altLang="zh-CN" dirty="0">
+                <a:latin typeface="微软雅黑" panose="020B0503020204020204" pitchFamily="34" charset="-122"/>
+                <a:ea typeface="微软雅黑" panose="020B0503020204020204" pitchFamily="34" charset="-122"/>
+              </a:rPr>
+              <a:t>(37.5%)</a:t>
+            </a:r>
+            <a:r>
+              <a:rPr kumimoji="1" lang="zh-CN" altLang="en-US" dirty="0">
+                <a:latin typeface="微软雅黑" panose="020B0503020204020204" pitchFamily="34" charset="-122"/>
+                <a:ea typeface="微软雅黑" panose="020B0503020204020204" pitchFamily="34" charset="-122"/>
+              </a:rPr>
+              <a:t>。</a:t>
+            </a:r>
             <a:endParaRPr kumimoji="1" lang="zh-CN" altLang="en-US" dirty="0">
               <a:latin typeface="微软雅黑" panose="020B0503020204020204" pitchFamily="34" charset="-122"/>
               <a:ea typeface="微软雅黑" panose="020B0503020204020204" pitchFamily="34" charset="-122"/>
@@ -11140,8 +11450,8 @@
         </p:blipFill>
         <p:spPr>
           <a:xfrm>
-            <a:off x="863600" y="2512695"/>
-            <a:ext cx="3364230" cy="1485265"/>
+            <a:off x="6696075" y="0"/>
+            <a:ext cx="5495925" cy="4276725"/>
           </a:xfrm>
           <a:prstGeom prst="rect">
             <a:avLst/>
@@ -11157,118 +11467,6 @@
 </file>
 
 <file path=ppt/slides/slide25.xml><?xml version="1.0" encoding="utf-8"?>
-<p:sld xmlns:a="http://schemas.openxmlformats.org/drawingml/2006/main" xmlns:r="http://schemas.openxmlformats.org/officeDocument/2006/relationships" xmlns:p="http://schemas.openxmlformats.org/presentationml/2006/main">
-  <p:cSld>
-    <p:spTree>
-      <p:nvGrpSpPr>
-        <p:cNvPr id="1" name=""/>
-        <p:cNvGrpSpPr/>
-        <p:nvPr/>
-      </p:nvGrpSpPr>
-      <p:grpSpPr>
-        <a:xfrm>
-          <a:off x="0" y="0"/>
-          <a:ext cx="0" cy="0"/>
-          <a:chOff x="0" y="0"/>
-          <a:chExt cx="0" cy="0"/>
-        </a:xfrm>
-      </p:grpSpPr>
-      <p:sp>
-        <p:nvSpPr>
-          <p:cNvPr id="3" name="标题 5"/>
-          <p:cNvSpPr txBox="1"/>
-          <p:nvPr/>
-        </p:nvSpPr>
-        <p:spPr>
-          <a:xfrm>
-            <a:off x="1524000" y="2284527"/>
-            <a:ext cx="9144000" cy="1551797"/>
-          </a:xfrm>
-          <a:prstGeom prst="rect">
-            <a:avLst/>
-          </a:prstGeom>
-        </p:spPr>
-        <p:txBody>
-          <a:bodyPr vert="horz" lIns="91440" tIns="45720" rIns="91440" bIns="45720" rtlCol="0" anchor="ctr">
-            <a:normAutofit/>
-          </a:bodyPr>
-          <a:lstStyle>
-            <a:lvl1pPr algn="l" defTabSz="914400" rtl="0" eaLnBrk="1" latinLnBrk="0" hangingPunct="1">
-              <a:lnSpc>
-                <a:spcPct val="90000"/>
-              </a:lnSpc>
-              <a:spcBef>
-                <a:spcPct val="0"/>
-              </a:spcBef>
-              <a:buNone/>
-              <a:defRPr sz="4400" kern="1200">
-                <a:solidFill>
-                  <a:schemeClr val="tx1"/>
-                </a:solidFill>
-                <a:latin typeface="+mj-lt"/>
-                <a:ea typeface="+mj-ea"/>
-                <a:cs typeface="+mj-cs"/>
-              </a:defRPr>
-            </a:lvl1pPr>
-          </a:lstStyle>
-          <a:p>
-            <a:pPr algn="ctr"/>
-            <a:r>
-              <a:rPr lang="zh-CN" altLang="en-US" b="1" dirty="0">
-                <a:latin typeface="微软雅黑" panose="020B0503020204020204" pitchFamily="34" charset="-122"/>
-                <a:ea typeface="微软雅黑" panose="020B0503020204020204" pitchFamily="34" charset="-122"/>
-              </a:rPr>
-              <a:t>四、总结</a:t>
-            </a:r>
-            <a:endParaRPr lang="zh-CN" altLang="en-US" b="1" dirty="0">
-              <a:latin typeface="微软雅黑" panose="020B0503020204020204" pitchFamily="34" charset="-122"/>
-              <a:ea typeface="微软雅黑" panose="020B0503020204020204" pitchFamily="34" charset="-122"/>
-            </a:endParaRPr>
-          </a:p>
-        </p:txBody>
-      </p:sp>
-      <p:pic>
-        <p:nvPicPr>
-          <p:cNvPr id="4" name="图形 4"/>
-          <p:cNvPicPr>
-            <a:picLocks noChangeAspect="1"/>
-          </p:cNvPicPr>
-          <p:nvPr/>
-        </p:nvPicPr>
-        <p:blipFill>
-          <a:blip r:embed="rId1" cstate="print">
-            <a:extLst>
-              <a:ext uri="{28A0092B-C50C-407E-A947-70E740481C1C}">
-                <a14:useLocalDpi xmlns:a14="http://schemas.microsoft.com/office/drawing/2010/main" val="0"/>
-              </a:ext>
-              <a:ext uri="{96DAC541-7B7A-43D3-8B79-37D633B846F1}">
-                <asvg:svgBlip xmlns:asvg="http://schemas.microsoft.com/office/drawing/2016/SVG/main" r:embed="rId2"/>
-              </a:ext>
-            </a:extLst>
-          </a:blip>
-          <a:stretch>
-            <a:fillRect/>
-          </a:stretch>
-        </p:blipFill>
-        <p:spPr>
-          <a:xfrm>
-            <a:off x="10939463" y="6430128"/>
-            <a:ext cx="763381" cy="139201"/>
-          </a:xfrm>
-          <a:prstGeom prst="rect">
-            <a:avLst/>
-          </a:prstGeom>
-        </p:spPr>
-      </p:pic>
-    </p:spTree>
-  </p:cSld>
-  <p:clrMapOvr>
-    <a:masterClrMapping/>
-  </p:clrMapOvr>
-</p:sld>
-</file>
-
-<file path=ppt/slides/slide26.xml><?xml version="1.0" encoding="utf-8"?>
 <p:sld xmlns:a="http://schemas.openxmlformats.org/drawingml/2006/main" xmlns:r="http://schemas.openxmlformats.org/officeDocument/2006/relationships" xmlns:p="http://schemas.openxmlformats.org/presentationml/2006/main">
   <p:cSld>
     <p:spTree>
@@ -11351,7 +11549,33 @@
                 <a:latin typeface="微软雅黑" panose="020B0503020204020204" pitchFamily="34" charset="-122"/>
                 <a:ea typeface="微软雅黑" panose="020B0503020204020204" pitchFamily="34" charset="-122"/>
               </a:rPr>
-              <a:t>总结</a:t>
+              <a:t>性能测试 </a:t>
+            </a:r>
+            <a:r>
+              <a:rPr kumimoji="1" lang="en-US" altLang="zh-CN" sz="3000" b="1" dirty="0">
+                <a:solidFill>
+                  <a:schemeClr val="tx1">
+                    <a:lumMod val="75000"/>
+                    <a:lumOff val="25000"/>
+                  </a:schemeClr>
+                </a:solidFill>
+                <a:latin typeface="微软雅黑" panose="020B0503020204020204" pitchFamily="34" charset="-122"/>
+                <a:ea typeface="微软雅黑" panose="020B0503020204020204" pitchFamily="34" charset="-122"/>
+              </a:rPr>
+              <a:t>- </a:t>
+            </a:r>
+            <a:r>
+              <a:rPr kumimoji="1" lang="zh-CN" altLang="en-US" sz="3000" b="1" dirty="0">
+                <a:solidFill>
+                  <a:schemeClr val="tx1">
+                    <a:lumMod val="75000"/>
+                    <a:lumOff val="25000"/>
+                  </a:schemeClr>
+                </a:solidFill>
+                <a:latin typeface="微软雅黑" panose="020B0503020204020204" pitchFamily="34" charset="-122"/>
+                <a:ea typeface="微软雅黑" panose="020B0503020204020204" pitchFamily="34" charset="-122"/>
+              </a:rPr>
+              <a:t>访问速度</a:t>
             </a:r>
             <a:endParaRPr kumimoji="1" lang="zh-CN" altLang="en-US" sz="3000" b="1" dirty="0">
               <a:solidFill>
@@ -11375,7 +11599,7 @@
         <p:spPr>
           <a:xfrm>
             <a:off x="780415" y="1132205"/>
-            <a:ext cx="10980420" cy="2582566"/>
+            <a:ext cx="10980420" cy="1076325"/>
           </a:xfrm>
           <a:prstGeom prst="rect">
             <a:avLst/>
@@ -11404,37 +11628,51 @@
                 <a:latin typeface="微软雅黑" panose="020B0503020204020204" pitchFamily="34" charset="-122"/>
                 <a:ea typeface="微软雅黑" panose="020B0503020204020204" pitchFamily="34" charset="-122"/>
               </a:rPr>
-              <a:t>本项目能够将</a:t>
-            </a:r>
-            <a:r>
-              <a:rPr kumimoji="1" lang="en-US" altLang="zh-CN" dirty="0">
-                <a:latin typeface="微软雅黑" panose="020B0503020204020204" pitchFamily="34" charset="-122"/>
-                <a:ea typeface="微软雅黑" panose="020B0503020204020204" pitchFamily="34" charset="-122"/>
-              </a:rPr>
-              <a:t>Lua table</a:t>
-            </a:r>
-            <a:r>
-              <a:rPr kumimoji="1" lang="zh-CN" altLang="en-US" dirty="0">
-                <a:latin typeface="微软雅黑" panose="020B0503020204020204" pitchFamily="34" charset="-122"/>
-                <a:ea typeface="微软雅黑" panose="020B0503020204020204" pitchFamily="34" charset="-122"/>
-              </a:rPr>
-              <a:t>转化为只读数据结构，并在多进程的</a:t>
-            </a:r>
-            <a:r>
-              <a:rPr kumimoji="1" lang="en-US" altLang="zh-CN" dirty="0">
-                <a:latin typeface="微软雅黑" panose="020B0503020204020204" pitchFamily="34" charset="-122"/>
-                <a:ea typeface="微软雅黑" panose="020B0503020204020204" pitchFamily="34" charset="-122"/>
-              </a:rPr>
-              <a:t>Lua</a:t>
-            </a:r>
-            <a:r>
-              <a:rPr kumimoji="1" lang="zh-CN" altLang="en-US" dirty="0">
-                <a:latin typeface="微软雅黑" panose="020B0503020204020204" pitchFamily="34" charset="-122"/>
-                <a:ea typeface="微软雅黑" panose="020B0503020204020204" pitchFamily="34" charset="-122"/>
-              </a:rPr>
-              <a:t>虚拟机间共享。</a:t>
-            </a:r>
-            <a:endParaRPr kumimoji="1" lang="en-US" altLang="zh-CN" dirty="0">
+              <a:t>测试方式为对于相同</a:t>
+            </a:r>
+            <a:r>
+              <a:rPr kumimoji="1" lang="en-US" altLang="zh-CN" dirty="0">
+                <a:latin typeface="微软雅黑" panose="020B0503020204020204" pitchFamily="34" charset="-122"/>
+                <a:ea typeface="微软雅黑" panose="020B0503020204020204" pitchFamily="34" charset="-122"/>
+              </a:rPr>
+              <a:t>table(data.lua</a:t>
+            </a:r>
+            <a:r>
+              <a:rPr kumimoji="1" lang="zh-CN" altLang="en-US" dirty="0">
+                <a:latin typeface="微软雅黑" panose="020B0503020204020204" pitchFamily="34" charset="-122"/>
+                <a:ea typeface="微软雅黑" panose="020B0503020204020204" pitchFamily="34" charset="-122"/>
+              </a:rPr>
+              <a:t>和构建出的</a:t>
+            </a:r>
+            <a:r>
+              <a:rPr kumimoji="1" lang="en-US" altLang="zh-CN" dirty="0">
+                <a:latin typeface="微软雅黑" panose="020B0503020204020204" pitchFamily="34" charset="-122"/>
+                <a:ea typeface="微软雅黑" panose="020B0503020204020204" pitchFamily="34" charset="-122"/>
+              </a:rPr>
+              <a:t>data.bin)</a:t>
+            </a:r>
+            <a:r>
+              <a:rPr kumimoji="1" lang="zh-CN" altLang="en-US" dirty="0">
+                <a:latin typeface="微软雅黑" panose="020B0503020204020204" pitchFamily="34" charset="-122"/>
+                <a:ea typeface="微软雅黑" panose="020B0503020204020204" pitchFamily="34" charset="-122"/>
+              </a:rPr>
+              <a:t>，遍历</a:t>
+            </a:r>
+            <a:r>
+              <a:rPr kumimoji="1" lang="en-US" altLang="zh-CN" dirty="0">
+                <a:latin typeface="微软雅黑" panose="020B0503020204020204" pitchFamily="34" charset="-122"/>
+                <a:ea typeface="微软雅黑" panose="020B0503020204020204" pitchFamily="34" charset="-122"/>
+              </a:rPr>
+              <a:t>10000</a:t>
+            </a:r>
+            <a:r>
+              <a:rPr kumimoji="1" lang="zh-CN" altLang="en-US" dirty="0">
+                <a:latin typeface="微软雅黑" panose="020B0503020204020204" pitchFamily="34" charset="-122"/>
+                <a:ea typeface="微软雅黑" panose="020B0503020204020204" pitchFamily="34" charset="-122"/>
+              </a:rPr>
+              <a:t>次取平均时间</a:t>
+            </a:r>
+            <a:endParaRPr kumimoji="1" lang="zh-CN" altLang="en-US" dirty="0">
               <a:latin typeface="微软雅黑" panose="020B0503020204020204" pitchFamily="34" charset="-122"/>
               <a:ea typeface="微软雅黑" panose="020B0503020204020204" pitchFamily="34" charset="-122"/>
             </a:endParaRPr>
@@ -11456,13 +11694,116 @@
                 <a:latin typeface="微软雅黑" panose="020B0503020204020204" pitchFamily="34" charset="-122"/>
                 <a:ea typeface="微软雅黑" panose="020B0503020204020204" pitchFamily="34" charset="-122"/>
               </a:rPr>
-              <a:t>多进程下能够极大减少内存占用。</a:t>
-            </a:r>
-            <a:endParaRPr kumimoji="1" lang="en-US" altLang="zh-CN" dirty="0">
+              <a:t>下图从上至下分别为</a:t>
+            </a:r>
+            <a:r>
+              <a:rPr kumimoji="1" lang="en-US" altLang="zh-CN" dirty="0">
+                <a:latin typeface="微软雅黑" panose="020B0503020204020204" pitchFamily="34" charset="-122"/>
+                <a:ea typeface="微软雅黑" panose="020B0503020204020204" pitchFamily="34" charset="-122"/>
+              </a:rPr>
+              <a:t>sharedata</a:t>
+            </a:r>
+            <a:r>
+              <a:rPr kumimoji="1" lang="zh-CN" altLang="en-US" dirty="0">
+                <a:latin typeface="微软雅黑" panose="020B0503020204020204" pitchFamily="34" charset="-122"/>
+                <a:ea typeface="微软雅黑" panose="020B0503020204020204" pitchFamily="34" charset="-122"/>
+              </a:rPr>
+              <a:t>遍历，普通</a:t>
+            </a:r>
+            <a:r>
+              <a:rPr kumimoji="1" lang="en-US" altLang="zh-CN" dirty="0">
+                <a:latin typeface="微软雅黑" panose="020B0503020204020204" pitchFamily="34" charset="-122"/>
+                <a:ea typeface="微软雅黑" panose="020B0503020204020204" pitchFamily="34" charset="-122"/>
+              </a:rPr>
+              <a:t>table</a:t>
+            </a:r>
+            <a:r>
+              <a:rPr kumimoji="1" lang="zh-CN" altLang="en-US" dirty="0">
+                <a:latin typeface="微软雅黑" panose="020B0503020204020204" pitchFamily="34" charset="-122"/>
+                <a:ea typeface="微软雅黑" panose="020B0503020204020204" pitchFamily="34" charset="-122"/>
+              </a:rPr>
+              <a:t>遍历，</a:t>
+            </a:r>
+            <a:r>
+              <a:rPr kumimoji="1" lang="en-US" altLang="zh-CN" dirty="0">
+                <a:latin typeface="微软雅黑" panose="020B0503020204020204" pitchFamily="34" charset="-122"/>
+                <a:ea typeface="微软雅黑" panose="020B0503020204020204" pitchFamily="34" charset="-122"/>
+              </a:rPr>
+              <a:t>sharedata</a:t>
+            </a:r>
+            <a:r>
+              <a:rPr kumimoji="1" lang="zh-CN" altLang="en-US" dirty="0">
+                <a:latin typeface="微软雅黑" panose="020B0503020204020204" pitchFamily="34" charset="-122"/>
+                <a:ea typeface="微软雅黑" panose="020B0503020204020204" pitchFamily="34" charset="-122"/>
+              </a:rPr>
+              <a:t>构建出的普通</a:t>
+            </a:r>
+            <a:r>
+              <a:rPr kumimoji="1" lang="en-US" altLang="zh-CN" dirty="0">
+                <a:latin typeface="微软雅黑" panose="020B0503020204020204" pitchFamily="34" charset="-122"/>
+                <a:ea typeface="微软雅黑" panose="020B0503020204020204" pitchFamily="34" charset="-122"/>
+              </a:rPr>
+              <a:t>table</a:t>
+            </a:r>
+            <a:r>
+              <a:rPr kumimoji="1" lang="zh-CN" altLang="en-US" dirty="0">
+                <a:latin typeface="微软雅黑" panose="020B0503020204020204" pitchFamily="34" charset="-122"/>
+                <a:ea typeface="微软雅黑" panose="020B0503020204020204" pitchFamily="34" charset="-122"/>
+              </a:rPr>
+              <a:t>遍历所需时间</a:t>
+            </a:r>
+            <a:r>
+              <a:rPr kumimoji="1" lang="en-US" altLang="zh-CN" dirty="0">
+                <a:latin typeface="微软雅黑" panose="020B0503020204020204" pitchFamily="34" charset="-122"/>
+                <a:ea typeface="微软雅黑" panose="020B0503020204020204" pitchFamily="34" charset="-122"/>
+                <a:sym typeface="+mn-ea"/>
+              </a:rPr>
+              <a:t>(</a:t>
+            </a:r>
+            <a:r>
+              <a:rPr kumimoji="1" lang="zh-CN" altLang="en-US" dirty="0">
+                <a:latin typeface="微软雅黑" panose="020B0503020204020204" pitchFamily="34" charset="-122"/>
+                <a:ea typeface="微软雅黑" panose="020B0503020204020204" pitchFamily="34" charset="-122"/>
+                <a:sym typeface="+mn-ea"/>
+              </a:rPr>
+              <a:t>单位：</a:t>
+            </a:r>
+            <a:r>
+              <a:rPr kumimoji="1" lang="en-US" altLang="zh-CN" dirty="0">
+                <a:latin typeface="微软雅黑" panose="020B0503020204020204" pitchFamily="34" charset="-122"/>
+                <a:ea typeface="微软雅黑" panose="020B0503020204020204" pitchFamily="34" charset="-122"/>
+                <a:sym typeface="+mn-ea"/>
+              </a:rPr>
+              <a:t>s)</a:t>
+            </a:r>
+            <a:endParaRPr kumimoji="1" lang="zh-CN" altLang="en-US" dirty="0">
               <a:latin typeface="微软雅黑" panose="020B0503020204020204" pitchFamily="34" charset="-122"/>
               <a:ea typeface="微软雅黑" panose="020B0503020204020204" pitchFamily="34" charset="-122"/>
             </a:endParaRPr>
           </a:p>
+        </p:txBody>
+      </p:sp>
+      <p:sp>
+        <p:nvSpPr>
+          <p:cNvPr id="4" name="文本框 3"/>
+          <p:cNvSpPr txBox="1"/>
+          <p:nvPr/>
+        </p:nvSpPr>
+        <p:spPr>
+          <a:xfrm>
+            <a:off x="780579" y="4134214"/>
+            <a:ext cx="10336696" cy="3046095"/>
+          </a:xfrm>
+          <a:prstGeom prst="rect">
+            <a:avLst/>
+          </a:prstGeom>
+          <a:noFill/>
+        </p:spPr>
+        <p:txBody>
+          <a:bodyPr wrap="square" rtlCol="0">
+            <a:spAutoFit/>
+          </a:bodyPr>
+          <a:lstStyle/>
           <a:p>
             <a:pPr>
               <a:lnSpc>
@@ -11480,21 +11821,80 @@
                 <a:latin typeface="微软雅黑" panose="020B0503020204020204" pitchFamily="34" charset="-122"/>
                 <a:ea typeface="微软雅黑" panose="020B0503020204020204" pitchFamily="34" charset="-122"/>
               </a:rPr>
-              <a:t>访问速度上比</a:t>
-            </a:r>
-            <a:r>
-              <a:rPr kumimoji="1" lang="en-US" altLang="zh-CN" dirty="0">
-                <a:latin typeface="微软雅黑" panose="020B0503020204020204" pitchFamily="34" charset="-122"/>
-                <a:ea typeface="微软雅黑" panose="020B0503020204020204" pitchFamily="34" charset="-122"/>
-              </a:rPr>
-              <a:t>Lua</a:t>
-            </a:r>
-            <a:r>
-              <a:rPr kumimoji="1" lang="zh-CN" altLang="en-US" dirty="0">
-                <a:latin typeface="微软雅黑" panose="020B0503020204020204" pitchFamily="34" charset="-122"/>
-                <a:ea typeface="微软雅黑" panose="020B0503020204020204" pitchFamily="34" charset="-122"/>
-              </a:rPr>
-              <a:t>原生</a:t>
+              <a:t>访问速度约为</a:t>
+            </a:r>
+            <a:r>
+              <a:rPr kumimoji="1" lang="en-US" altLang="zh-CN" dirty="0">
+                <a:latin typeface="微软雅黑" panose="020B0503020204020204" pitchFamily="34" charset="-122"/>
+                <a:ea typeface="微软雅黑" panose="020B0503020204020204" pitchFamily="34" charset="-122"/>
+              </a:rPr>
+              <a:t>1.315</a:t>
+            </a:r>
+            <a:r>
+              <a:rPr kumimoji="1" lang="zh-CN" altLang="en-US" dirty="0">
+                <a:latin typeface="微软雅黑" panose="020B0503020204020204" pitchFamily="34" charset="-122"/>
+                <a:ea typeface="微软雅黑" panose="020B0503020204020204" pitchFamily="34" charset="-122"/>
+              </a:rPr>
+              <a:t>：</a:t>
+            </a:r>
+            <a:r>
+              <a:rPr kumimoji="1" lang="en-US" altLang="zh-CN" dirty="0">
+                <a:latin typeface="微软雅黑" panose="020B0503020204020204" pitchFamily="34" charset="-122"/>
+                <a:ea typeface="微软雅黑" panose="020B0503020204020204" pitchFamily="34" charset="-122"/>
+              </a:rPr>
+              <a:t>1</a:t>
+            </a:r>
+            <a:r>
+              <a:rPr kumimoji="1" lang="zh-CN" altLang="en-US" dirty="0">
+                <a:latin typeface="微软雅黑" panose="020B0503020204020204" pitchFamily="34" charset="-122"/>
+                <a:ea typeface="微软雅黑" panose="020B0503020204020204" pitchFamily="34" charset="-122"/>
+              </a:rPr>
+              <a:t>：</a:t>
+            </a:r>
+            <a:r>
+              <a:rPr kumimoji="1" lang="en-US" altLang="zh-CN" dirty="0">
+                <a:latin typeface="微软雅黑" panose="020B0503020204020204" pitchFamily="34" charset="-122"/>
+                <a:ea typeface="微软雅黑" panose="020B0503020204020204" pitchFamily="34" charset="-122"/>
+              </a:rPr>
+              <a:t>0.9576</a:t>
+            </a:r>
+            <a:endParaRPr kumimoji="1" lang="en-US" altLang="zh-CN" dirty="0">
+              <a:latin typeface="微软雅黑" panose="020B0503020204020204" pitchFamily="34" charset="-122"/>
+              <a:ea typeface="微软雅黑" panose="020B0503020204020204" pitchFamily="34" charset="-122"/>
+            </a:endParaRPr>
+          </a:p>
+          <a:p>
+            <a:pPr>
+              <a:lnSpc>
+                <a:spcPct val="150000"/>
+              </a:lnSpc>
+              <a:spcBef>
+                <a:spcPts val="600"/>
+              </a:spcBef>
+              <a:spcAft>
+                <a:spcPts val="600"/>
+              </a:spcAft>
+            </a:pPr>
+            <a:r>
+              <a:rPr kumimoji="1" lang="zh-CN" altLang="en-US" dirty="0">
+                <a:latin typeface="微软雅黑" panose="020B0503020204020204" pitchFamily="34" charset="-122"/>
+                <a:ea typeface="微软雅黑" panose="020B0503020204020204" pitchFamily="34" charset="-122"/>
+              </a:rPr>
+              <a:t>可以看到，</a:t>
+            </a:r>
+            <a:r>
+              <a:rPr kumimoji="1" lang="en-US" altLang="zh-CN" dirty="0">
+                <a:latin typeface="微软雅黑" panose="020B0503020204020204" pitchFamily="34" charset="-122"/>
+                <a:ea typeface="微软雅黑" panose="020B0503020204020204" pitchFamily="34" charset="-122"/>
+              </a:rPr>
+              <a:t>sharedata</a:t>
+            </a:r>
+            <a:r>
+              <a:rPr kumimoji="1" lang="zh-CN" altLang="en-US" dirty="0">
+                <a:latin typeface="微软雅黑" panose="020B0503020204020204" pitchFamily="34" charset="-122"/>
+                <a:ea typeface="微软雅黑" panose="020B0503020204020204" pitchFamily="34" charset="-122"/>
+              </a:rPr>
+              <a:t>的访问速度明显比原生</a:t>
             </a:r>
             <a:r>
               <a:rPr kumimoji="1" lang="en-US" altLang="zh-CN" dirty="0">
@@ -11508,7 +11908,101 @@
                 <a:latin typeface="微软雅黑" panose="020B0503020204020204" pitchFamily="34" charset="-122"/>
                 <a:ea typeface="微软雅黑" panose="020B0503020204020204" pitchFamily="34" charset="-122"/>
               </a:rPr>
-              <a:t>要慢，但可以通过只共享</a:t>
+              <a:t>要慢；但是使用从</a:t>
+            </a:r>
+            <a:r>
+              <a:rPr kumimoji="1" lang="en-US" altLang="zh-CN" dirty="0">
+                <a:latin typeface="微软雅黑" panose="020B0503020204020204" pitchFamily="34" charset="-122"/>
+                <a:ea typeface="微软雅黑" panose="020B0503020204020204" pitchFamily="34" charset="-122"/>
+              </a:rPr>
+              <a:t>sharedata</a:t>
+            </a:r>
+            <a:r>
+              <a:rPr kumimoji="1" lang="zh-CN" altLang="en-US" dirty="0">
+                <a:latin typeface="微软雅黑" panose="020B0503020204020204" pitchFamily="34" charset="-122"/>
+                <a:ea typeface="微软雅黑" panose="020B0503020204020204" pitchFamily="34" charset="-122"/>
+              </a:rPr>
+              <a:t>构建新</a:t>
+            </a:r>
+            <a:r>
+              <a:rPr kumimoji="1" lang="en-US" altLang="zh-CN" dirty="0">
+                <a:latin typeface="微软雅黑" panose="020B0503020204020204" pitchFamily="34" charset="-122"/>
+                <a:ea typeface="微软雅黑" panose="020B0503020204020204" pitchFamily="34" charset="-122"/>
+              </a:rPr>
+              <a:t>table</a:t>
+            </a:r>
+            <a:r>
+              <a:rPr kumimoji="1" lang="zh-CN" altLang="en-US" dirty="0">
+                <a:latin typeface="微软雅黑" panose="020B0503020204020204" pitchFamily="34" charset="-122"/>
+                <a:ea typeface="微软雅黑" panose="020B0503020204020204" pitchFamily="34" charset="-122"/>
+              </a:rPr>
+              <a:t>的方式，则可以牺牲一些内存占用，换取同样的性能。</a:t>
+            </a:r>
+            <a:endParaRPr kumimoji="1" lang="zh-CN" altLang="en-US" dirty="0">
+              <a:latin typeface="微软雅黑" panose="020B0503020204020204" pitchFamily="34" charset="-122"/>
+              <a:ea typeface="微软雅黑" panose="020B0503020204020204" pitchFamily="34" charset="-122"/>
+            </a:endParaRPr>
+          </a:p>
+          <a:p>
+            <a:pPr>
+              <a:lnSpc>
+                <a:spcPct val="150000"/>
+              </a:lnSpc>
+              <a:spcBef>
+                <a:spcPts val="600"/>
+              </a:spcBef>
+              <a:spcAft>
+                <a:spcPts val="600"/>
+              </a:spcAft>
+            </a:pPr>
+            <a:r>
+              <a:rPr kumimoji="1" lang="zh-CN" altLang="en-US" dirty="0">
+                <a:latin typeface="微软雅黑" panose="020B0503020204020204" pitchFamily="34" charset="-122"/>
+                <a:ea typeface="微软雅黑" panose="020B0503020204020204" pitchFamily="34" charset="-122"/>
+              </a:rPr>
+              <a:t>这里</a:t>
+            </a:r>
+            <a:r>
+              <a:rPr kumimoji="1" lang="en-US" altLang="zh-CN" dirty="0">
+                <a:latin typeface="微软雅黑" panose="020B0503020204020204" pitchFamily="34" charset="-122"/>
+                <a:ea typeface="微软雅黑" panose="020B0503020204020204" pitchFamily="34" charset="-122"/>
+              </a:rPr>
+              <a:t>sharedata</a:t>
+            </a:r>
+            <a:r>
+              <a:rPr kumimoji="1" lang="zh-CN" altLang="en-US" dirty="0">
+                <a:latin typeface="微软雅黑" panose="020B0503020204020204" pitchFamily="34" charset="-122"/>
+                <a:ea typeface="微软雅黑" panose="020B0503020204020204" pitchFamily="34" charset="-122"/>
+              </a:rPr>
+              <a:t>构建出</a:t>
+            </a:r>
+            <a:r>
+              <a:rPr kumimoji="1" lang="en-US" altLang="zh-CN" dirty="0">
+                <a:latin typeface="微软雅黑" panose="020B0503020204020204" pitchFamily="34" charset="-122"/>
+                <a:ea typeface="微软雅黑" panose="020B0503020204020204" pitchFamily="34" charset="-122"/>
+              </a:rPr>
+              <a:t>table</a:t>
+            </a:r>
+            <a:r>
+              <a:rPr kumimoji="1" lang="zh-CN" altLang="en-US" dirty="0">
+                <a:latin typeface="微软雅黑" panose="020B0503020204020204" pitchFamily="34" charset="-122"/>
+                <a:ea typeface="微软雅黑" panose="020B0503020204020204" pitchFamily="34" charset="-122"/>
+              </a:rPr>
+              <a:t>遍历快于普通</a:t>
+            </a:r>
+            <a:r>
+              <a:rPr kumimoji="1" lang="en-US" altLang="zh-CN" dirty="0">
+                <a:latin typeface="微软雅黑" panose="020B0503020204020204" pitchFamily="34" charset="-122"/>
+                <a:ea typeface="微软雅黑" panose="020B0503020204020204" pitchFamily="34" charset="-122"/>
+              </a:rPr>
+              <a:t>table</a:t>
+            </a:r>
+            <a:r>
+              <a:rPr kumimoji="1" lang="zh-CN" altLang="en-US" dirty="0">
+                <a:latin typeface="微软雅黑" panose="020B0503020204020204" pitchFamily="34" charset="-122"/>
+                <a:ea typeface="微软雅黑" panose="020B0503020204020204" pitchFamily="34" charset="-122"/>
+              </a:rPr>
+              <a:t>，是因为此时的</a:t>
             </a:r>
             <a:r>
               <a:rPr kumimoji="1" lang="en-US" altLang="zh-CN" dirty="0">
@@ -11522,37 +12016,37 @@
                 <a:latin typeface="微软雅黑" panose="020B0503020204020204" pitchFamily="34" charset="-122"/>
                 <a:ea typeface="微软雅黑" panose="020B0503020204020204" pitchFamily="34" charset="-122"/>
               </a:rPr>
-              <a:t>的方式，以增大内存占用</a:t>
-            </a:r>
-            <a:r>
-              <a:rPr kumimoji="1" lang="en-US" altLang="zh-CN" dirty="0">
-                <a:latin typeface="微软雅黑" panose="020B0503020204020204" pitchFamily="34" charset="-122"/>
-                <a:ea typeface="微软雅黑" panose="020B0503020204020204" pitchFamily="34" charset="-122"/>
-              </a:rPr>
-              <a:t>(</a:t>
-            </a:r>
-            <a:r>
-              <a:rPr kumimoji="1" lang="zh-CN" altLang="en-US" dirty="0">
-                <a:latin typeface="微软雅黑" panose="020B0503020204020204" pitchFamily="34" charset="-122"/>
-                <a:ea typeface="微软雅黑" panose="020B0503020204020204" pitchFamily="34" charset="-122"/>
-              </a:rPr>
-              <a:t>但仍然远小于直接读取</a:t>
-            </a:r>
-            <a:r>
-              <a:rPr kumimoji="1" lang="en-US" altLang="zh-CN" dirty="0">
-                <a:latin typeface="微软雅黑" panose="020B0503020204020204" pitchFamily="34" charset="-122"/>
-                <a:ea typeface="微软雅黑" panose="020B0503020204020204" pitchFamily="34" charset="-122"/>
-              </a:rPr>
-              <a:t>table)</a:t>
-            </a:r>
-            <a:r>
-              <a:rPr kumimoji="1" lang="zh-CN" altLang="en-US" dirty="0">
-                <a:latin typeface="微软雅黑" panose="020B0503020204020204" pitchFamily="34" charset="-122"/>
-                <a:ea typeface="微软雅黑" panose="020B0503020204020204" pitchFamily="34" charset="-122"/>
-              </a:rPr>
-              <a:t>为代价得到相同的访问速度。</a:t>
-            </a:r>
-            <a:endParaRPr kumimoji="1" lang="en-US" altLang="zh-CN" dirty="0">
+              <a:t>对象都不在</a:t>
+            </a:r>
+            <a:r>
+              <a:rPr kumimoji="1" lang="en-US" altLang="zh-CN" dirty="0">
+                <a:latin typeface="微软雅黑" panose="020B0503020204020204" pitchFamily="34" charset="-122"/>
+                <a:ea typeface="微软雅黑" panose="020B0503020204020204" pitchFamily="34" charset="-122"/>
+              </a:rPr>
+              <a:t>allgc</a:t>
+            </a:r>
+            <a:r>
+              <a:rPr kumimoji="1" lang="zh-CN" altLang="en-US" dirty="0">
+                <a:latin typeface="微软雅黑" panose="020B0503020204020204" pitchFamily="34" charset="-122"/>
+                <a:ea typeface="微软雅黑" panose="020B0503020204020204" pitchFamily="34" charset="-122"/>
+              </a:rPr>
+              <a:t>链表上，会减少</a:t>
+            </a:r>
+            <a:r>
+              <a:rPr kumimoji="1" lang="en-US" altLang="zh-CN" dirty="0">
+                <a:latin typeface="微软雅黑" panose="020B0503020204020204" pitchFamily="34" charset="-122"/>
+                <a:ea typeface="微软雅黑" panose="020B0503020204020204" pitchFamily="34" charset="-122"/>
+              </a:rPr>
+              <a:t>gc</a:t>
+            </a:r>
+            <a:r>
+              <a:rPr kumimoji="1" lang="zh-CN" altLang="en-US" dirty="0">
+                <a:latin typeface="微软雅黑" panose="020B0503020204020204" pitchFamily="34" charset="-122"/>
+                <a:ea typeface="微软雅黑" panose="020B0503020204020204" pitchFamily="34" charset="-122"/>
+              </a:rPr>
+              <a:t>操作所用时间。</a:t>
+            </a:r>
+            <a:endParaRPr kumimoji="1" lang="zh-CN" altLang="en-US" dirty="0">
               <a:latin typeface="微软雅黑" panose="020B0503020204020204" pitchFamily="34" charset="-122"/>
               <a:ea typeface="微软雅黑" panose="020B0503020204020204" pitchFamily="34" charset="-122"/>
             </a:endParaRPr>
@@ -11576,6 +12070,142 @@
           </a:p>
         </p:txBody>
       </p:sp>
+      <p:pic>
+        <p:nvPicPr>
+          <p:cNvPr id="6" name="图片 5"/>
+          <p:cNvPicPr>
+            <a:picLocks noChangeAspect="1"/>
+          </p:cNvPicPr>
+          <p:nvPr/>
+        </p:nvPicPr>
+        <p:blipFill>
+          <a:blip r:embed="rId3"/>
+          <a:stretch>
+            <a:fillRect/>
+          </a:stretch>
+        </p:blipFill>
+        <p:spPr>
+          <a:xfrm>
+            <a:off x="863600" y="2512695"/>
+            <a:ext cx="3364230" cy="1485265"/>
+          </a:xfrm>
+          <a:prstGeom prst="rect">
+            <a:avLst/>
+          </a:prstGeom>
+        </p:spPr>
+      </p:pic>
+    </p:spTree>
+  </p:cSld>
+  <p:clrMapOvr>
+    <a:masterClrMapping/>
+  </p:clrMapOvr>
+</p:sld>
+</file>
+
+<file path=ppt/slides/slide26.xml><?xml version="1.0" encoding="utf-8"?>
+<p:sld xmlns:a="http://schemas.openxmlformats.org/drawingml/2006/main" xmlns:r="http://schemas.openxmlformats.org/officeDocument/2006/relationships" xmlns:p="http://schemas.openxmlformats.org/presentationml/2006/main">
+  <p:cSld>
+    <p:spTree>
+      <p:nvGrpSpPr>
+        <p:cNvPr id="1" name=""/>
+        <p:cNvGrpSpPr/>
+        <p:nvPr/>
+      </p:nvGrpSpPr>
+      <p:grpSpPr>
+        <a:xfrm>
+          <a:off x="0" y="0"/>
+          <a:ext cx="0" cy="0"/>
+          <a:chOff x="0" y="0"/>
+          <a:chExt cx="0" cy="0"/>
+        </a:xfrm>
+      </p:grpSpPr>
+      <p:sp>
+        <p:nvSpPr>
+          <p:cNvPr id="3" name="标题 5"/>
+          <p:cNvSpPr txBox="1"/>
+          <p:nvPr/>
+        </p:nvSpPr>
+        <p:spPr>
+          <a:xfrm>
+            <a:off x="1524000" y="2284527"/>
+            <a:ext cx="9144000" cy="1551797"/>
+          </a:xfrm>
+          <a:prstGeom prst="rect">
+            <a:avLst/>
+          </a:prstGeom>
+        </p:spPr>
+        <p:txBody>
+          <a:bodyPr vert="horz" lIns="91440" tIns="45720" rIns="91440" bIns="45720" rtlCol="0" anchor="ctr">
+            <a:normAutofit/>
+          </a:bodyPr>
+          <a:lstStyle>
+            <a:lvl1pPr algn="l" defTabSz="914400" rtl="0" eaLnBrk="1" latinLnBrk="0" hangingPunct="1">
+              <a:lnSpc>
+                <a:spcPct val="90000"/>
+              </a:lnSpc>
+              <a:spcBef>
+                <a:spcPct val="0"/>
+              </a:spcBef>
+              <a:buNone/>
+              <a:defRPr sz="4400" kern="1200">
+                <a:solidFill>
+                  <a:schemeClr val="tx1"/>
+                </a:solidFill>
+                <a:latin typeface="+mj-lt"/>
+                <a:ea typeface="+mj-ea"/>
+                <a:cs typeface="+mj-cs"/>
+              </a:defRPr>
+            </a:lvl1pPr>
+          </a:lstStyle>
+          <a:p>
+            <a:pPr algn="ctr"/>
+            <a:r>
+              <a:rPr lang="zh-CN" altLang="en-US" b="1" dirty="0">
+                <a:latin typeface="微软雅黑" panose="020B0503020204020204" pitchFamily="34" charset="-122"/>
+                <a:ea typeface="微软雅黑" panose="020B0503020204020204" pitchFamily="34" charset="-122"/>
+              </a:rPr>
+              <a:t>四、总结</a:t>
+            </a:r>
+            <a:endParaRPr lang="zh-CN" altLang="en-US" b="1" dirty="0">
+              <a:latin typeface="微软雅黑" panose="020B0503020204020204" pitchFamily="34" charset="-122"/>
+              <a:ea typeface="微软雅黑" panose="020B0503020204020204" pitchFamily="34" charset="-122"/>
+            </a:endParaRPr>
+          </a:p>
+        </p:txBody>
+      </p:sp>
+      <p:pic>
+        <p:nvPicPr>
+          <p:cNvPr id="4" name="图形 4"/>
+          <p:cNvPicPr>
+            <a:picLocks noChangeAspect="1"/>
+          </p:cNvPicPr>
+          <p:nvPr/>
+        </p:nvPicPr>
+        <p:blipFill>
+          <a:blip r:embed="rId1" cstate="print">
+            <a:extLst>
+              <a:ext uri="{28A0092B-C50C-407E-A947-70E740481C1C}">
+                <a14:useLocalDpi xmlns:a14="http://schemas.microsoft.com/office/drawing/2010/main" val="0"/>
+              </a:ext>
+              <a:ext uri="{96DAC541-7B7A-43D3-8B79-37D633B846F1}">
+                <asvg:svgBlip xmlns:asvg="http://schemas.microsoft.com/office/drawing/2016/SVG/main" r:embed="rId2"/>
+              </a:ext>
+            </a:extLst>
+          </a:blip>
+          <a:stretch>
+            <a:fillRect/>
+          </a:stretch>
+        </p:blipFill>
+        <p:spPr>
+          <a:xfrm>
+            <a:off x="10939463" y="6430128"/>
+            <a:ext cx="763381" cy="139201"/>
+          </a:xfrm>
+          <a:prstGeom prst="rect">
+            <a:avLst/>
+          </a:prstGeom>
+        </p:spPr>
+      </p:pic>
     </p:spTree>
   </p:cSld>
   <p:clrMapOvr>
@@ -11667,33 +12297,7 @@
                 <a:latin typeface="微软雅黑" panose="020B0503020204020204" pitchFamily="34" charset="-122"/>
                 <a:ea typeface="微软雅黑" panose="020B0503020204020204" pitchFamily="34" charset="-122"/>
               </a:rPr>
-              <a:t>总结 </a:t>
-            </a:r>
-            <a:r>
-              <a:rPr kumimoji="1" lang="en-US" altLang="zh-CN" sz="3000" b="1" dirty="0">
-                <a:solidFill>
-                  <a:schemeClr val="tx1">
-                    <a:lumMod val="75000"/>
-                    <a:lumOff val="25000"/>
-                  </a:schemeClr>
-                </a:solidFill>
-                <a:latin typeface="微软雅黑" panose="020B0503020204020204" pitchFamily="34" charset="-122"/>
-                <a:ea typeface="微软雅黑" panose="020B0503020204020204" pitchFamily="34" charset="-122"/>
-              </a:rPr>
-              <a:t>– </a:t>
-            </a:r>
-            <a:r>
-              <a:rPr kumimoji="1" lang="zh-CN" altLang="en-US" sz="3000" b="1" dirty="0">
-                <a:solidFill>
-                  <a:schemeClr val="tx1">
-                    <a:lumMod val="75000"/>
-                    <a:lumOff val="25000"/>
-                  </a:schemeClr>
-                </a:solidFill>
-                <a:latin typeface="微软雅黑" panose="020B0503020204020204" pitchFamily="34" charset="-122"/>
-                <a:ea typeface="微软雅黑" panose="020B0503020204020204" pitchFamily="34" charset="-122"/>
-              </a:rPr>
-              <a:t>可改进的点</a:t>
+              <a:t>总结</a:t>
             </a:r>
             <a:endParaRPr kumimoji="1" lang="zh-CN" altLang="en-US" sz="3000" b="1" dirty="0">
               <a:solidFill>
@@ -11746,7 +12350,35 @@
                 <a:latin typeface="微软雅黑" panose="020B0503020204020204" pitchFamily="34" charset="-122"/>
                 <a:ea typeface="微软雅黑" panose="020B0503020204020204" pitchFamily="34" charset="-122"/>
               </a:rPr>
-              <a:t>由于时间限制，还有一些想法未能实现。</a:t>
+              <a:t>本项目能够将</a:t>
+            </a:r>
+            <a:r>
+              <a:rPr kumimoji="1" lang="en-US" altLang="zh-CN" dirty="0">
+                <a:latin typeface="微软雅黑" panose="020B0503020204020204" pitchFamily="34" charset="-122"/>
+                <a:ea typeface="微软雅黑" panose="020B0503020204020204" pitchFamily="34" charset="-122"/>
+              </a:rPr>
+              <a:t>Lua table</a:t>
+            </a:r>
+            <a:r>
+              <a:rPr kumimoji="1" lang="zh-CN" altLang="en-US" dirty="0">
+                <a:latin typeface="微软雅黑" panose="020B0503020204020204" pitchFamily="34" charset="-122"/>
+                <a:ea typeface="微软雅黑" panose="020B0503020204020204" pitchFamily="34" charset="-122"/>
+              </a:rPr>
+              <a:t>转化为只读数据结构，并在多进程的</a:t>
+            </a:r>
+            <a:r>
+              <a:rPr kumimoji="1" lang="en-US" altLang="zh-CN" dirty="0">
+                <a:latin typeface="微软雅黑" panose="020B0503020204020204" pitchFamily="34" charset="-122"/>
+                <a:ea typeface="微软雅黑" panose="020B0503020204020204" pitchFamily="34" charset="-122"/>
+              </a:rPr>
+              <a:t>Lua</a:t>
+            </a:r>
+            <a:r>
+              <a:rPr kumimoji="1" lang="zh-CN" altLang="en-US" dirty="0">
+                <a:latin typeface="微软雅黑" panose="020B0503020204020204" pitchFamily="34" charset="-122"/>
+                <a:ea typeface="微软雅黑" panose="020B0503020204020204" pitchFamily="34" charset="-122"/>
+              </a:rPr>
+              <a:t>虚拟机间共享。</a:t>
             </a:r>
             <a:endParaRPr kumimoji="1" lang="en-US" altLang="zh-CN" dirty="0">
               <a:latin typeface="微软雅黑" panose="020B0503020204020204" pitchFamily="34" charset="-122"/>
@@ -11770,49 +12402,7 @@
                 <a:latin typeface="微软雅黑" panose="020B0503020204020204" pitchFamily="34" charset="-122"/>
                 <a:ea typeface="微软雅黑" panose="020B0503020204020204" pitchFamily="34" charset="-122"/>
               </a:rPr>
-              <a:t>例如，在上述只共享</a:t>
-            </a:r>
-            <a:r>
-              <a:rPr kumimoji="1" lang="en-US" altLang="zh-CN" dirty="0">
-                <a:latin typeface="微软雅黑" panose="020B0503020204020204" pitchFamily="34" charset="-122"/>
-                <a:ea typeface="微软雅黑" panose="020B0503020204020204" pitchFamily="34" charset="-122"/>
-              </a:rPr>
-              <a:t>string</a:t>
-            </a:r>
-            <a:r>
-              <a:rPr kumimoji="1" lang="zh-CN" altLang="en-US" dirty="0">
-                <a:latin typeface="微软雅黑" panose="020B0503020204020204" pitchFamily="34" charset="-122"/>
-                <a:ea typeface="微软雅黑" panose="020B0503020204020204" pitchFamily="34" charset="-122"/>
-              </a:rPr>
-              <a:t>的方案上更进一步，改为共享</a:t>
-            </a:r>
-            <a:r>
-              <a:rPr kumimoji="1" lang="en-US" altLang="zh-CN" dirty="0">
-                <a:latin typeface="微软雅黑" panose="020B0503020204020204" pitchFamily="34" charset="-122"/>
-                <a:ea typeface="微软雅黑" panose="020B0503020204020204" pitchFamily="34" charset="-122"/>
-              </a:rPr>
-              <a:t>Lua</a:t>
-            </a:r>
-            <a:r>
-              <a:rPr kumimoji="1" lang="zh-CN" altLang="en-US" dirty="0">
-                <a:latin typeface="微软雅黑" panose="020B0503020204020204" pitchFamily="34" charset="-122"/>
-                <a:ea typeface="微软雅黑" panose="020B0503020204020204" pitchFamily="34" charset="-122"/>
-              </a:rPr>
-              <a:t>的</a:t>
-            </a:r>
-            <a:r>
-              <a:rPr kumimoji="1" lang="en-US" altLang="zh-CN" dirty="0" err="1">
-                <a:latin typeface="微软雅黑" panose="020B0503020204020204" pitchFamily="34" charset="-122"/>
-                <a:ea typeface="微软雅黑" panose="020B0503020204020204" pitchFamily="34" charset="-122"/>
-              </a:rPr>
-              <a:t>stringtable</a:t>
-            </a:r>
-            <a:r>
-              <a:rPr kumimoji="1" lang="zh-CN" altLang="en-US">
-                <a:latin typeface="微软雅黑" panose="020B0503020204020204" pitchFamily="34" charset="-122"/>
-                <a:ea typeface="微软雅黑" panose="020B0503020204020204" pitchFamily="34" charset="-122"/>
-              </a:rPr>
-              <a:t>；</a:t>
+              <a:t>多进程下能够极大减少内存占用。</a:t>
             </a:r>
             <a:endParaRPr kumimoji="1" lang="en-US" altLang="zh-CN" dirty="0">
               <a:latin typeface="微软雅黑" panose="020B0503020204020204" pitchFamily="34" charset="-122"/>
@@ -11836,56 +12426,77 @@
                 <a:latin typeface="微软雅黑" panose="020B0503020204020204" pitchFamily="34" charset="-122"/>
                 <a:ea typeface="微软雅黑" panose="020B0503020204020204" pitchFamily="34" charset="-122"/>
               </a:rPr>
-              <a:t>或者把</a:t>
-            </a:r>
-            <a:r>
-              <a:rPr kumimoji="1" lang="en-US" altLang="zh-CN" dirty="0" err="1">
-                <a:latin typeface="微软雅黑" panose="020B0503020204020204" pitchFamily="34" charset="-122"/>
-                <a:ea typeface="微软雅黑" panose="020B0503020204020204" pitchFamily="34" charset="-122"/>
-              </a:rPr>
-              <a:t>sharedata</a:t>
-            </a:r>
-            <a:r>
-              <a:rPr kumimoji="1" lang="zh-CN" altLang="en-US" dirty="0">
-                <a:latin typeface="微软雅黑" panose="020B0503020204020204" pitchFamily="34" charset="-122"/>
-                <a:ea typeface="微软雅黑" panose="020B0503020204020204" pitchFamily="34" charset="-122"/>
-              </a:rPr>
-              <a:t>本身也放入共享内存中，从而避免重复访问产生多个指向相同位置的</a:t>
-            </a:r>
-            <a:r>
-              <a:rPr kumimoji="1" lang="en-US" altLang="zh-CN" dirty="0" err="1">
-                <a:latin typeface="微软雅黑" panose="020B0503020204020204" pitchFamily="34" charset="-122"/>
-                <a:ea typeface="微软雅黑" panose="020B0503020204020204" pitchFamily="34" charset="-122"/>
-              </a:rPr>
-              <a:t>sharedata</a:t>
-            </a:r>
-            <a:r>
-              <a:rPr kumimoji="1" lang="zh-CN" altLang="en-US" dirty="0">
-                <a:latin typeface="微软雅黑" panose="020B0503020204020204" pitchFamily="34" charset="-122"/>
-                <a:ea typeface="微软雅黑" panose="020B0503020204020204" pitchFamily="34" charset="-122"/>
-              </a:rPr>
-              <a:t>，同时也就不必由</a:t>
-            </a:r>
-            <a:r>
-              <a:rPr kumimoji="1" lang="en-US" altLang="zh-CN" dirty="0">
-                <a:latin typeface="微软雅黑" panose="020B0503020204020204" pitchFamily="34" charset="-122"/>
-                <a:ea typeface="微软雅黑" panose="020B0503020204020204" pitchFamily="34" charset="-122"/>
-              </a:rPr>
-              <a:t>Lua </a:t>
-            </a:r>
-            <a:r>
-              <a:rPr kumimoji="1" lang="en-US" altLang="zh-CN" dirty="0" err="1">
-                <a:latin typeface="微软雅黑" panose="020B0503020204020204" pitchFamily="34" charset="-122"/>
-                <a:ea typeface="微软雅黑" panose="020B0503020204020204" pitchFamily="34" charset="-122"/>
-              </a:rPr>
-              <a:t>gc</a:t>
-            </a:r>
-            <a:r>
-              <a:rPr kumimoji="1" lang="zh-CN" altLang="en-US" dirty="0">
-                <a:latin typeface="微软雅黑" panose="020B0503020204020204" pitchFamily="34" charset="-122"/>
-                <a:ea typeface="微软雅黑" panose="020B0503020204020204" pitchFamily="34" charset="-122"/>
-              </a:rPr>
-              <a:t>管理；</a:t>
+              <a:t>访问速度上比</a:t>
+            </a:r>
+            <a:r>
+              <a:rPr kumimoji="1" lang="en-US" altLang="zh-CN" dirty="0">
+                <a:latin typeface="微软雅黑" panose="020B0503020204020204" pitchFamily="34" charset="-122"/>
+                <a:ea typeface="微软雅黑" panose="020B0503020204020204" pitchFamily="34" charset="-122"/>
+              </a:rPr>
+              <a:t>Lua</a:t>
+            </a:r>
+            <a:r>
+              <a:rPr kumimoji="1" lang="zh-CN" altLang="en-US" dirty="0">
+                <a:latin typeface="微软雅黑" panose="020B0503020204020204" pitchFamily="34" charset="-122"/>
+                <a:ea typeface="微软雅黑" panose="020B0503020204020204" pitchFamily="34" charset="-122"/>
+              </a:rPr>
+              <a:t>原生</a:t>
+            </a:r>
+            <a:r>
+              <a:rPr kumimoji="1" lang="en-US" altLang="zh-CN" dirty="0">
+                <a:latin typeface="微软雅黑" panose="020B0503020204020204" pitchFamily="34" charset="-122"/>
+                <a:ea typeface="微软雅黑" panose="020B0503020204020204" pitchFamily="34" charset="-122"/>
+              </a:rPr>
+              <a:t>table</a:t>
+            </a:r>
+            <a:r>
+              <a:rPr kumimoji="1" lang="zh-CN" altLang="en-US" dirty="0">
+                <a:latin typeface="微软雅黑" panose="020B0503020204020204" pitchFamily="34" charset="-122"/>
+                <a:ea typeface="微软雅黑" panose="020B0503020204020204" pitchFamily="34" charset="-122"/>
+              </a:rPr>
+              <a:t>要慢，但可以通过只共享</a:t>
+            </a:r>
+            <a:r>
+              <a:rPr kumimoji="1" lang="en-US" altLang="zh-CN" dirty="0">
+                <a:latin typeface="微软雅黑" panose="020B0503020204020204" pitchFamily="34" charset="-122"/>
+                <a:ea typeface="微软雅黑" panose="020B0503020204020204" pitchFamily="34" charset="-122"/>
+              </a:rPr>
+              <a:t>string</a:t>
+            </a:r>
+            <a:r>
+              <a:rPr kumimoji="1" lang="zh-CN" altLang="en-US" dirty="0">
+                <a:latin typeface="微软雅黑" panose="020B0503020204020204" pitchFamily="34" charset="-122"/>
+                <a:ea typeface="微软雅黑" panose="020B0503020204020204" pitchFamily="34" charset="-122"/>
+              </a:rPr>
+              <a:t>的方式，以增大内存占用</a:t>
+            </a:r>
+            <a:r>
+              <a:rPr kumimoji="1" lang="en-US" altLang="zh-CN" dirty="0">
+                <a:latin typeface="微软雅黑" panose="020B0503020204020204" pitchFamily="34" charset="-122"/>
+                <a:ea typeface="微软雅黑" panose="020B0503020204020204" pitchFamily="34" charset="-122"/>
+              </a:rPr>
+              <a:t>(</a:t>
+            </a:r>
+            <a:r>
+              <a:rPr kumimoji="1" lang="zh-CN" altLang="en-US" dirty="0">
+                <a:latin typeface="微软雅黑" panose="020B0503020204020204" pitchFamily="34" charset="-122"/>
+                <a:ea typeface="微软雅黑" panose="020B0503020204020204" pitchFamily="34" charset="-122"/>
+              </a:rPr>
+              <a:t>但仍然远小于直接读取</a:t>
+            </a:r>
+            <a:r>
+              <a:rPr kumimoji="1" lang="en-US" altLang="zh-CN" dirty="0">
+                <a:latin typeface="微软雅黑" panose="020B0503020204020204" pitchFamily="34" charset="-122"/>
+                <a:ea typeface="微软雅黑" panose="020B0503020204020204" pitchFamily="34" charset="-122"/>
+              </a:rPr>
+              <a:t>table)</a:t>
+            </a:r>
+            <a:r>
+              <a:rPr kumimoji="1" lang="zh-CN" altLang="en-US" dirty="0">
+                <a:latin typeface="微软雅黑" panose="020B0503020204020204" pitchFamily="34" charset="-122"/>
+                <a:ea typeface="微软雅黑" panose="020B0503020204020204" pitchFamily="34" charset="-122"/>
+              </a:rPr>
+              <a:t>为代价得到相同的访问速度。</a:t>
             </a:r>
             <a:endParaRPr kumimoji="1" lang="en-US" altLang="zh-CN" dirty="0">
               <a:latin typeface="微软雅黑" panose="020B0503020204020204" pitchFamily="34" charset="-122"/>
@@ -11904,34 +12515,6 @@
                 <a:spcPts val="600"/>
               </a:spcAft>
             </a:pPr>
-            <a:r>
-              <a:rPr kumimoji="1" lang="en-US" altLang="zh-CN" dirty="0">
-                <a:latin typeface="微软雅黑" panose="020B0503020204020204" pitchFamily="34" charset="-122"/>
-                <a:ea typeface="微软雅黑" panose="020B0503020204020204" pitchFamily="34" charset="-122"/>
-              </a:rPr>
-              <a:t>accessor</a:t>
-            </a:r>
-            <a:r>
-              <a:rPr kumimoji="1" lang="zh-CN" altLang="en-US" dirty="0">
-                <a:latin typeface="微软雅黑" panose="020B0503020204020204" pitchFamily="34" charset="-122"/>
-                <a:ea typeface="微软雅黑" panose="020B0503020204020204" pitchFamily="34" charset="-122"/>
-              </a:rPr>
-              <a:t>本身目前只会在</a:t>
-            </a:r>
-            <a:r>
-              <a:rPr kumimoji="1" lang="en-US" altLang="zh-CN" dirty="0" err="1">
-                <a:latin typeface="微软雅黑" panose="020B0503020204020204" pitchFamily="34" charset="-122"/>
-                <a:ea typeface="微软雅黑" panose="020B0503020204020204" pitchFamily="34" charset="-122"/>
-              </a:rPr>
-              <a:t>lua_close</a:t>
-            </a:r>
-            <a:r>
-              <a:rPr kumimoji="1" lang="zh-CN" altLang="en-US" dirty="0">
-                <a:latin typeface="微软雅黑" panose="020B0503020204020204" pitchFamily="34" charset="-122"/>
-                <a:ea typeface="微软雅黑" panose="020B0503020204020204" pitchFamily="34" charset="-122"/>
-              </a:rPr>
-              <a:t>时释放，对标记算法稍作修改也可以做到让它在无引用时释放。</a:t>
-            </a:r>
             <a:endParaRPr kumimoji="1" lang="zh-CN" altLang="en-US" dirty="0">
               <a:latin typeface="微软雅黑" panose="020B0503020204020204" pitchFamily="34" charset="-122"/>
               <a:ea typeface="微软雅黑" panose="020B0503020204020204" pitchFamily="34" charset="-122"/>
@@ -11948,6 +12531,369 @@
 </file>
 
 <file path=ppt/slides/slide28.xml><?xml version="1.0" encoding="utf-8"?>
+<p:sld xmlns:a="http://schemas.openxmlformats.org/drawingml/2006/main" xmlns:r="http://schemas.openxmlformats.org/officeDocument/2006/relationships" xmlns:p="http://schemas.openxmlformats.org/presentationml/2006/main">
+  <p:cSld>
+    <p:spTree>
+      <p:nvGrpSpPr>
+        <p:cNvPr id="1" name=""/>
+        <p:cNvGrpSpPr/>
+        <p:nvPr/>
+      </p:nvGrpSpPr>
+      <p:grpSpPr>
+        <a:xfrm>
+          <a:off x="0" y="0"/>
+          <a:ext cx="0" cy="0"/>
+          <a:chOff x="0" y="0"/>
+          <a:chExt cx="0" cy="0"/>
+        </a:xfrm>
+      </p:grpSpPr>
+      <p:pic>
+        <p:nvPicPr>
+          <p:cNvPr id="3" name="图形 2"/>
+          <p:cNvPicPr>
+            <a:picLocks noChangeAspect="1"/>
+          </p:cNvPicPr>
+          <p:nvPr/>
+        </p:nvPicPr>
+        <p:blipFill>
+          <a:blip r:embed="rId1" cstate="print">
+            <a:extLst>
+              <a:ext uri="{28A0092B-C50C-407E-A947-70E740481C1C}">
+                <a14:useLocalDpi xmlns:a14="http://schemas.microsoft.com/office/drawing/2010/main" val="0"/>
+              </a:ext>
+              <a:ext uri="{96DAC541-7B7A-43D3-8B79-37D633B846F1}">
+                <asvg:svgBlip xmlns:asvg="http://schemas.microsoft.com/office/drawing/2016/SVG/main" r:embed="rId2"/>
+              </a:ext>
+            </a:extLst>
+          </a:blip>
+          <a:stretch>
+            <a:fillRect/>
+          </a:stretch>
+        </p:blipFill>
+        <p:spPr>
+          <a:xfrm>
+            <a:off x="10939463" y="6430128"/>
+            <a:ext cx="763381" cy="139201"/>
+          </a:xfrm>
+          <a:prstGeom prst="rect">
+            <a:avLst/>
+          </a:prstGeom>
+        </p:spPr>
+      </p:pic>
+      <p:sp>
+        <p:nvSpPr>
+          <p:cNvPr id="8" name="文本框 7"/>
+          <p:cNvSpPr txBox="1"/>
+          <p:nvPr/>
+        </p:nvSpPr>
+        <p:spPr>
+          <a:xfrm>
+            <a:off x="416520" y="394263"/>
+            <a:ext cx="4419600" cy="553085"/>
+          </a:xfrm>
+          <a:prstGeom prst="rect">
+            <a:avLst/>
+          </a:prstGeom>
+          <a:noFill/>
+        </p:spPr>
+        <p:txBody>
+          <a:bodyPr wrap="square" rtlCol="0">
+            <a:spAutoFit/>
+          </a:bodyPr>
+          <a:lstStyle/>
+          <a:p>
+            <a:r>
+              <a:rPr kumimoji="1" lang="zh-CN" altLang="en-US" sz="3000" b="1" dirty="0">
+                <a:solidFill>
+                  <a:schemeClr val="tx1">
+                    <a:lumMod val="75000"/>
+                    <a:lumOff val="25000"/>
+                  </a:schemeClr>
+                </a:solidFill>
+                <a:latin typeface="微软雅黑" panose="020B0503020204020204" pitchFamily="34" charset="-122"/>
+                <a:ea typeface="微软雅黑" panose="020B0503020204020204" pitchFamily="34" charset="-122"/>
+              </a:rPr>
+              <a:t>总结 </a:t>
+            </a:r>
+            <a:r>
+              <a:rPr kumimoji="1" lang="en-US" altLang="zh-CN" sz="3000" b="1" dirty="0">
+                <a:solidFill>
+                  <a:schemeClr val="tx1">
+                    <a:lumMod val="75000"/>
+                    <a:lumOff val="25000"/>
+                  </a:schemeClr>
+                </a:solidFill>
+                <a:latin typeface="微软雅黑" panose="020B0503020204020204" pitchFamily="34" charset="-122"/>
+                <a:ea typeface="微软雅黑" panose="020B0503020204020204" pitchFamily="34" charset="-122"/>
+              </a:rPr>
+              <a:t>– </a:t>
+            </a:r>
+            <a:r>
+              <a:rPr kumimoji="1" lang="zh-CN" altLang="en-US" sz="3000" b="1" dirty="0">
+                <a:solidFill>
+                  <a:schemeClr val="tx1">
+                    <a:lumMod val="75000"/>
+                    <a:lumOff val="25000"/>
+                  </a:schemeClr>
+                </a:solidFill>
+                <a:latin typeface="微软雅黑" panose="020B0503020204020204" pitchFamily="34" charset="-122"/>
+                <a:ea typeface="微软雅黑" panose="020B0503020204020204" pitchFamily="34" charset="-122"/>
+              </a:rPr>
+              <a:t>可改进的点</a:t>
+            </a:r>
+            <a:endParaRPr kumimoji="1" lang="zh-CN" altLang="en-US" sz="3000" b="1" dirty="0">
+              <a:solidFill>
+                <a:schemeClr val="tx1">
+                  <a:lumMod val="75000"/>
+                  <a:lumOff val="25000"/>
+                </a:schemeClr>
+              </a:solidFill>
+              <a:latin typeface="微软雅黑" panose="020B0503020204020204" pitchFamily="34" charset="-122"/>
+              <a:ea typeface="微软雅黑" panose="020B0503020204020204" pitchFamily="34" charset="-122"/>
+            </a:endParaRPr>
+          </a:p>
+        </p:txBody>
+      </p:sp>
+      <p:sp>
+        <p:nvSpPr>
+          <p:cNvPr id="10" name="文本框 9"/>
+          <p:cNvSpPr txBox="1"/>
+          <p:nvPr/>
+        </p:nvSpPr>
+        <p:spPr>
+          <a:xfrm>
+            <a:off x="780415" y="1132205"/>
+            <a:ext cx="10980420" cy="2582566"/>
+          </a:xfrm>
+          <a:prstGeom prst="rect">
+            <a:avLst/>
+          </a:prstGeom>
+          <a:noFill/>
+        </p:spPr>
+        <p:txBody>
+          <a:bodyPr wrap="square" rtlCol="0">
+            <a:spAutoFit/>
+          </a:bodyPr>
+          <a:lstStyle/>
+          <a:p>
+            <a:pPr>
+              <a:lnSpc>
+                <a:spcPct val="150000"/>
+              </a:lnSpc>
+              <a:spcBef>
+                <a:spcPts val="600"/>
+              </a:spcBef>
+              <a:spcAft>
+                <a:spcPts val="600"/>
+              </a:spcAft>
+            </a:pPr>
+            <a:r>
+              <a:rPr kumimoji="1" lang="zh-CN" altLang="en-US" dirty="0">
+                <a:latin typeface="微软雅黑" panose="020B0503020204020204" pitchFamily="34" charset="-122"/>
+                <a:ea typeface="微软雅黑" panose="020B0503020204020204" pitchFamily="34" charset="-122"/>
+              </a:rPr>
+              <a:t>由于时间限制，还有一些想法未能实现。</a:t>
+            </a:r>
+            <a:endParaRPr kumimoji="1" lang="en-US" altLang="zh-CN" dirty="0">
+              <a:latin typeface="微软雅黑" panose="020B0503020204020204" pitchFamily="34" charset="-122"/>
+              <a:ea typeface="微软雅黑" panose="020B0503020204020204" pitchFamily="34" charset="-122"/>
+            </a:endParaRPr>
+          </a:p>
+          <a:p>
+            <a:pPr>
+              <a:lnSpc>
+                <a:spcPct val="150000"/>
+              </a:lnSpc>
+              <a:spcBef>
+                <a:spcPts val="600"/>
+              </a:spcBef>
+              <a:spcAft>
+                <a:spcPts val="600"/>
+              </a:spcAft>
+            </a:pPr>
+            <a:r>
+              <a:rPr kumimoji="1" lang="zh-CN" altLang="en-US" dirty="0">
+                <a:latin typeface="微软雅黑" panose="020B0503020204020204" pitchFamily="34" charset="-122"/>
+                <a:ea typeface="微软雅黑" panose="020B0503020204020204" pitchFamily="34" charset="-122"/>
+              </a:rPr>
+              <a:t>例如，在上述只共享</a:t>
+            </a:r>
+            <a:r>
+              <a:rPr kumimoji="1" lang="en-US" altLang="zh-CN" dirty="0">
+                <a:latin typeface="微软雅黑" panose="020B0503020204020204" pitchFamily="34" charset="-122"/>
+                <a:ea typeface="微软雅黑" panose="020B0503020204020204" pitchFamily="34" charset="-122"/>
+              </a:rPr>
+              <a:t>string</a:t>
+            </a:r>
+            <a:r>
+              <a:rPr kumimoji="1" lang="zh-CN" altLang="en-US" dirty="0">
+                <a:latin typeface="微软雅黑" panose="020B0503020204020204" pitchFamily="34" charset="-122"/>
+                <a:ea typeface="微软雅黑" panose="020B0503020204020204" pitchFamily="34" charset="-122"/>
+              </a:rPr>
+              <a:t>的方案上更进一步，改为共享</a:t>
+            </a:r>
+            <a:r>
+              <a:rPr kumimoji="1" lang="en-US" altLang="zh-CN" dirty="0">
+                <a:latin typeface="微软雅黑" panose="020B0503020204020204" pitchFamily="34" charset="-122"/>
+                <a:ea typeface="微软雅黑" panose="020B0503020204020204" pitchFamily="34" charset="-122"/>
+              </a:rPr>
+              <a:t>Lua</a:t>
+            </a:r>
+            <a:r>
+              <a:rPr kumimoji="1" lang="zh-CN" altLang="en-US" dirty="0">
+                <a:latin typeface="微软雅黑" panose="020B0503020204020204" pitchFamily="34" charset="-122"/>
+                <a:ea typeface="微软雅黑" panose="020B0503020204020204" pitchFamily="34" charset="-122"/>
+              </a:rPr>
+              <a:t>的</a:t>
+            </a:r>
+            <a:r>
+              <a:rPr kumimoji="1" lang="en-US" altLang="zh-CN" dirty="0" err="1">
+                <a:latin typeface="微软雅黑" panose="020B0503020204020204" pitchFamily="34" charset="-122"/>
+                <a:ea typeface="微软雅黑" panose="020B0503020204020204" pitchFamily="34" charset="-122"/>
+              </a:rPr>
+              <a:t>stringtable</a:t>
+            </a:r>
+            <a:r>
+              <a:rPr kumimoji="1" lang="zh-CN" altLang="en-US">
+                <a:latin typeface="微软雅黑" panose="020B0503020204020204" pitchFamily="34" charset="-122"/>
+                <a:ea typeface="微软雅黑" panose="020B0503020204020204" pitchFamily="34" charset="-122"/>
+              </a:rPr>
+              <a:t>；</a:t>
+            </a:r>
+            <a:endParaRPr kumimoji="1" lang="en-US" altLang="zh-CN" dirty="0">
+              <a:latin typeface="微软雅黑" panose="020B0503020204020204" pitchFamily="34" charset="-122"/>
+              <a:ea typeface="微软雅黑" panose="020B0503020204020204" pitchFamily="34" charset="-122"/>
+            </a:endParaRPr>
+          </a:p>
+          <a:p>
+            <a:pPr>
+              <a:lnSpc>
+                <a:spcPct val="150000"/>
+              </a:lnSpc>
+              <a:spcBef>
+                <a:spcPts val="600"/>
+              </a:spcBef>
+              <a:spcAft>
+                <a:spcPts val="600"/>
+              </a:spcAft>
+            </a:pPr>
+            <a:r>
+              <a:rPr kumimoji="1" lang="zh-CN" altLang="en-US" dirty="0">
+                <a:latin typeface="微软雅黑" panose="020B0503020204020204" pitchFamily="34" charset="-122"/>
+                <a:ea typeface="微软雅黑" panose="020B0503020204020204" pitchFamily="34" charset="-122"/>
+              </a:rPr>
+              <a:t>或者把</a:t>
+            </a:r>
+            <a:r>
+              <a:rPr kumimoji="1" lang="en-US" altLang="zh-CN" dirty="0" err="1">
+                <a:latin typeface="微软雅黑" panose="020B0503020204020204" pitchFamily="34" charset="-122"/>
+                <a:ea typeface="微软雅黑" panose="020B0503020204020204" pitchFamily="34" charset="-122"/>
+              </a:rPr>
+              <a:t>sharedata</a:t>
+            </a:r>
+            <a:r>
+              <a:rPr kumimoji="1" lang="zh-CN" altLang="en-US" dirty="0">
+                <a:latin typeface="微软雅黑" panose="020B0503020204020204" pitchFamily="34" charset="-122"/>
+                <a:ea typeface="微软雅黑" panose="020B0503020204020204" pitchFamily="34" charset="-122"/>
+              </a:rPr>
+              <a:t>本身也放入共享内存中，从而避免重复访问产生多个指向相同位置的</a:t>
+            </a:r>
+            <a:r>
+              <a:rPr kumimoji="1" lang="en-US" altLang="zh-CN" dirty="0" err="1">
+                <a:latin typeface="微软雅黑" panose="020B0503020204020204" pitchFamily="34" charset="-122"/>
+                <a:ea typeface="微软雅黑" panose="020B0503020204020204" pitchFamily="34" charset="-122"/>
+              </a:rPr>
+              <a:t>sharedata</a:t>
+            </a:r>
+            <a:r>
+              <a:rPr kumimoji="1" lang="zh-CN" altLang="en-US" dirty="0">
+                <a:latin typeface="微软雅黑" panose="020B0503020204020204" pitchFamily="34" charset="-122"/>
+                <a:ea typeface="微软雅黑" panose="020B0503020204020204" pitchFamily="34" charset="-122"/>
+              </a:rPr>
+              <a:t>，同时也就不必由</a:t>
+            </a:r>
+            <a:r>
+              <a:rPr kumimoji="1" lang="en-US" altLang="zh-CN" dirty="0">
+                <a:latin typeface="微软雅黑" panose="020B0503020204020204" pitchFamily="34" charset="-122"/>
+                <a:ea typeface="微软雅黑" panose="020B0503020204020204" pitchFamily="34" charset="-122"/>
+              </a:rPr>
+              <a:t>Lua </a:t>
+            </a:r>
+            <a:r>
+              <a:rPr kumimoji="1" lang="en-US" altLang="zh-CN" dirty="0" err="1">
+                <a:latin typeface="微软雅黑" panose="020B0503020204020204" pitchFamily="34" charset="-122"/>
+                <a:ea typeface="微软雅黑" panose="020B0503020204020204" pitchFamily="34" charset="-122"/>
+              </a:rPr>
+              <a:t>gc</a:t>
+            </a:r>
+            <a:r>
+              <a:rPr kumimoji="1" lang="zh-CN" altLang="en-US" dirty="0">
+                <a:latin typeface="微软雅黑" panose="020B0503020204020204" pitchFamily="34" charset="-122"/>
+                <a:ea typeface="微软雅黑" panose="020B0503020204020204" pitchFamily="34" charset="-122"/>
+              </a:rPr>
+              <a:t>管理；</a:t>
+            </a:r>
+            <a:endParaRPr kumimoji="1" lang="en-US" altLang="zh-CN" dirty="0">
+              <a:latin typeface="微软雅黑" panose="020B0503020204020204" pitchFamily="34" charset="-122"/>
+              <a:ea typeface="微软雅黑" panose="020B0503020204020204" pitchFamily="34" charset="-122"/>
+            </a:endParaRPr>
+          </a:p>
+          <a:p>
+            <a:pPr>
+              <a:lnSpc>
+                <a:spcPct val="150000"/>
+              </a:lnSpc>
+              <a:spcBef>
+                <a:spcPts val="600"/>
+              </a:spcBef>
+              <a:spcAft>
+                <a:spcPts val="600"/>
+              </a:spcAft>
+            </a:pPr>
+            <a:r>
+              <a:rPr kumimoji="1" lang="en-US" altLang="zh-CN" dirty="0">
+                <a:latin typeface="微软雅黑" panose="020B0503020204020204" pitchFamily="34" charset="-122"/>
+                <a:ea typeface="微软雅黑" panose="020B0503020204020204" pitchFamily="34" charset="-122"/>
+              </a:rPr>
+              <a:t>accessor</a:t>
+            </a:r>
+            <a:r>
+              <a:rPr kumimoji="1" lang="zh-CN" altLang="en-US" dirty="0">
+                <a:latin typeface="微软雅黑" panose="020B0503020204020204" pitchFamily="34" charset="-122"/>
+                <a:ea typeface="微软雅黑" panose="020B0503020204020204" pitchFamily="34" charset="-122"/>
+              </a:rPr>
+              <a:t>本身目前只会在</a:t>
+            </a:r>
+            <a:r>
+              <a:rPr kumimoji="1" lang="en-US" altLang="zh-CN" dirty="0" err="1">
+                <a:latin typeface="微软雅黑" panose="020B0503020204020204" pitchFamily="34" charset="-122"/>
+                <a:ea typeface="微软雅黑" panose="020B0503020204020204" pitchFamily="34" charset="-122"/>
+              </a:rPr>
+              <a:t>lua_close</a:t>
+            </a:r>
+            <a:r>
+              <a:rPr kumimoji="1" lang="zh-CN" altLang="en-US" dirty="0">
+                <a:latin typeface="微软雅黑" panose="020B0503020204020204" pitchFamily="34" charset="-122"/>
+                <a:ea typeface="微软雅黑" panose="020B0503020204020204" pitchFamily="34" charset="-122"/>
+              </a:rPr>
+              <a:t>时释放，对标记算法稍作修改也可以做到让它在无引用时释放。</a:t>
+            </a:r>
+            <a:endParaRPr kumimoji="1" lang="zh-CN" altLang="en-US" dirty="0">
+              <a:latin typeface="微软雅黑" panose="020B0503020204020204" pitchFamily="34" charset="-122"/>
+              <a:ea typeface="微软雅黑" panose="020B0503020204020204" pitchFamily="34" charset="-122"/>
+            </a:endParaRPr>
+          </a:p>
+        </p:txBody>
+      </p:sp>
+    </p:spTree>
+  </p:cSld>
+  <p:clrMapOvr>
+    <a:masterClrMapping/>
+  </p:clrMapOvr>
+</p:sld>
+</file>
+
+<file path=ppt/slides/slide29.xml><?xml version="1.0" encoding="utf-8"?>
 <p:sld xmlns:a="http://schemas.openxmlformats.org/drawingml/2006/main" xmlns:r="http://schemas.openxmlformats.org/officeDocument/2006/relationships" xmlns:p="http://schemas.openxmlformats.org/presentationml/2006/main">
   <p:cSld>
     <p:bg>
@@ -13801,7 +14747,7 @@
         <p:spPr>
           <a:xfrm>
             <a:off x="780415" y="1256030"/>
-            <a:ext cx="3736975" cy="2895600"/>
+            <a:ext cx="3736975" cy="4568190"/>
           </a:xfrm>
           <a:prstGeom prst="rect">
             <a:avLst/>
@@ -13830,6 +14776,111 @@
                 <a:ea typeface="微软雅黑" panose="020B0503020204020204" pitchFamily="34" charset="-122"/>
               </a:rPr>
               <a:t>如右图。</a:t>
+            </a:r>
+            <a:endParaRPr kumimoji="1" lang="zh-CN" altLang="en-US" dirty="0">
+              <a:latin typeface="微软雅黑" panose="020B0503020204020204" pitchFamily="34" charset="-122"/>
+              <a:ea typeface="微软雅黑" panose="020B0503020204020204" pitchFamily="34" charset="-122"/>
+            </a:endParaRPr>
+          </a:p>
+          <a:p>
+            <a:pPr>
+              <a:lnSpc>
+                <a:spcPct val="150000"/>
+              </a:lnSpc>
+              <a:spcBef>
+                <a:spcPts val="600"/>
+              </a:spcBef>
+              <a:spcAft>
+                <a:spcPts val="600"/>
+              </a:spcAft>
+            </a:pPr>
+            <a:r>
+              <a:rPr kumimoji="1" lang="zh-CN" altLang="en-US" dirty="0">
+                <a:latin typeface="微软雅黑" panose="020B0503020204020204" pitchFamily="34" charset="-122"/>
+                <a:ea typeface="微软雅黑" panose="020B0503020204020204" pitchFamily="34" charset="-122"/>
+                <a:sym typeface="+mn-ea"/>
+              </a:rPr>
+              <a:t>数据并不存储在节点</a:t>
+            </a:r>
+            <a:r>
+              <a:rPr kumimoji="1" lang="en-US" altLang="zh-CN" dirty="0">
+                <a:latin typeface="微软雅黑" panose="020B0503020204020204" pitchFamily="34" charset="-122"/>
+                <a:ea typeface="微软雅黑" panose="020B0503020204020204" pitchFamily="34" charset="-122"/>
+                <a:sym typeface="+mn-ea"/>
+              </a:rPr>
+              <a:t>/</a:t>
+            </a:r>
+            <a:r>
+              <a:rPr kumimoji="1" lang="zh-CN" altLang="en-US" dirty="0">
+                <a:latin typeface="微软雅黑" panose="020B0503020204020204" pitchFamily="34" charset="-122"/>
+                <a:ea typeface="微软雅黑" panose="020B0503020204020204" pitchFamily="34" charset="-122"/>
+                <a:sym typeface="+mn-ea"/>
+              </a:rPr>
+              <a:t>边结构体中；有一段专门存放数据的区域</a:t>
+            </a:r>
+            <a:r>
+              <a:rPr kumimoji="1" lang="en-US" altLang="zh-CN" dirty="0">
+                <a:latin typeface="微软雅黑" panose="020B0503020204020204" pitchFamily="34" charset="-122"/>
+                <a:ea typeface="微软雅黑" panose="020B0503020204020204" pitchFamily="34" charset="-122"/>
+                <a:sym typeface="+mn-ea"/>
+              </a:rPr>
+              <a:t>sData</a:t>
+            </a:r>
+            <a:r>
+              <a:rPr kumimoji="1" lang="zh-CN" altLang="en-US" dirty="0">
+                <a:latin typeface="微软雅黑" panose="020B0503020204020204" pitchFamily="34" charset="-122"/>
+                <a:ea typeface="微软雅黑" panose="020B0503020204020204" pitchFamily="34" charset="-122"/>
+                <a:sym typeface="+mn-ea"/>
+              </a:rPr>
+              <a:t>，结构体只记录自身数据位置相对这个区域起始位置的偏移量</a:t>
+            </a:r>
+            <a:r>
+              <a:rPr kumimoji="1" lang="en-US" altLang="zh-CN" dirty="0">
+                <a:latin typeface="微软雅黑" panose="020B0503020204020204" pitchFamily="34" charset="-122"/>
+                <a:ea typeface="微软雅黑" panose="020B0503020204020204" pitchFamily="34" charset="-122"/>
+                <a:sym typeface="+mn-ea"/>
+              </a:rPr>
+              <a:t>(vpos)</a:t>
+            </a:r>
+            <a:r>
+              <a:rPr kumimoji="1" lang="zh-CN" altLang="en-US" dirty="0">
+                <a:latin typeface="微软雅黑" panose="020B0503020204020204" pitchFamily="34" charset="-122"/>
+                <a:ea typeface="微软雅黑" panose="020B0503020204020204" pitchFamily="34" charset="-122"/>
+                <a:sym typeface="+mn-ea"/>
+              </a:rPr>
+              <a:t>和存储的数据类型。</a:t>
+            </a:r>
+            <a:endParaRPr kumimoji="1" lang="zh-CN" altLang="en-US" dirty="0">
+              <a:latin typeface="微软雅黑" panose="020B0503020204020204" pitchFamily="34" charset="-122"/>
+              <a:ea typeface="微软雅黑" panose="020B0503020204020204" pitchFamily="34" charset="-122"/>
+              <a:sym typeface="+mn-ea"/>
+            </a:endParaRPr>
+          </a:p>
+          <a:p>
+            <a:pPr>
+              <a:lnSpc>
+                <a:spcPct val="150000"/>
+              </a:lnSpc>
+              <a:spcBef>
+                <a:spcPts val="600"/>
+              </a:spcBef>
+              <a:spcAft>
+                <a:spcPts val="600"/>
+              </a:spcAft>
+            </a:pPr>
+            <a:r>
+              <a:rPr kumimoji="1" lang="zh-CN" altLang="en-US" dirty="0">
+                <a:latin typeface="微软雅黑" panose="020B0503020204020204" pitchFamily="34" charset="-122"/>
+                <a:ea typeface="微软雅黑" panose="020B0503020204020204" pitchFamily="34" charset="-122"/>
+              </a:rPr>
+              <a:t>通过数据类型可以获取数据</a:t>
+            </a:r>
+            <a:r>
+              <a:rPr kumimoji="1" lang="zh-CN" altLang="en-US" dirty="0">
+                <a:latin typeface="微软雅黑" panose="020B0503020204020204" pitchFamily="34" charset="-122"/>
+                <a:ea typeface="微软雅黑" panose="020B0503020204020204" pitchFamily="34" charset="-122"/>
+              </a:rPr>
+              <a:t>所占字节数。</a:t>
             </a:r>
             <a:endParaRPr kumimoji="1" lang="zh-CN" altLang="en-US" dirty="0">
               <a:latin typeface="微软雅黑" panose="020B0503020204020204" pitchFamily="34" charset="-122"/>
@@ -14637,7 +15688,23 @@
                 <a:ea typeface="微软雅黑" panose="020B0503020204020204" pitchFamily="34" charset="-122"/>
                 <a:sym typeface="+mn-ea"/>
               </a:rPr>
-              <a:t>桶数都设置为出边数量。</a:t>
+              <a:t>桶数都设置为出边数量（负载因子为</a:t>
+            </a:r>
+            <a:r>
+              <a:rPr kumimoji="1" lang="en-US" altLang="zh-CN" dirty="0">
+                <a:latin typeface="微软雅黑" panose="020B0503020204020204" pitchFamily="34" charset="-122"/>
+                <a:ea typeface="微软雅黑" panose="020B0503020204020204" pitchFamily="34" charset="-122"/>
+                <a:sym typeface="+mn-ea"/>
+              </a:rPr>
+              <a:t>1</a:t>
+            </a:r>
+            <a:r>
+              <a:rPr kumimoji="1" lang="zh-CN" altLang="en-US" dirty="0">
+                <a:latin typeface="微软雅黑" panose="020B0503020204020204" pitchFamily="34" charset="-122"/>
+                <a:ea typeface="微软雅黑" panose="020B0503020204020204" pitchFamily="34" charset="-122"/>
+                <a:sym typeface="+mn-ea"/>
+              </a:rPr>
+              <a:t>）。</a:t>
             </a:r>
             <a:endParaRPr kumimoji="1" lang="zh-CN" altLang="en-US" dirty="0">
               <a:latin typeface="微软雅黑" panose="020B0503020204020204" pitchFamily="34" charset="-122"/>
@@ -15137,7 +16204,7 @@
                 <a:latin typeface="微软雅黑" panose="020B0503020204020204" pitchFamily="34" charset="-122"/>
                 <a:ea typeface="微软雅黑" panose="020B0503020204020204" pitchFamily="34" charset="-122"/>
               </a:rPr>
-              <a:t>hdata</a:t>
+              <a:t>headh</a:t>
             </a:r>
             <a:r>
               <a:rPr kumimoji="1" lang="zh-CN" altLang="en-US" dirty="0">
@@ -15332,7 +16399,7 @@
         <p:spPr>
           <a:xfrm>
             <a:off x="6591935" y="5634355"/>
-            <a:ext cx="1372870" cy="615315"/>
+            <a:ext cx="537210" cy="615315"/>
           </a:xfrm>
           <a:prstGeom prst="rect">
             <a:avLst/>
@@ -15452,7 +16519,7 @@
                 <a:latin typeface="微软雅黑" panose="020B0503020204020204" pitchFamily="34" charset="-122"/>
                 <a:ea typeface="微软雅黑" panose="020B0503020204020204" pitchFamily="34" charset="-122"/>
               </a:rPr>
-              <a:t>hdata</a:t>
+              <a:t>headh</a:t>
             </a:r>
             <a:endParaRPr kumimoji="1" lang="en-US" dirty="0">
               <a:latin typeface="微软雅黑" panose="020B0503020204020204" pitchFamily="34" charset="-122"/>
